--- a/static/ppts/G6_Sci_T2_Mixtures.pptx
+++ b/static/ppts/G6_Sci_T2_Mixtures.pptx
@@ -9,11 +9,9 @@
     <p:sldId id="257" r:id="rId3"/>
     <p:sldId id="258" r:id="rId4"/>
     <p:sldId id="259" r:id="rId5"/>
-    <p:sldId id="260" r:id="rId6"/>
-    <p:sldId id="261" r:id="rId7"/>
   </p:sldIdLst>
   <p:notesMasterIdLst>
-    <p:notesMasterId r:id="rId8"/>
+    <p:notesMasterId r:id="rId6"/>
   </p:notesMasterIdLst>
   <p:sldSz cx="9144000" cy="5143500"/>
   <p:notesSz cx="5143500" cy="9144000"/>
@@ -813,182 +811,6 @@
 </p:notes>
 </file>
 
-<file path=ppt/notesSlides/notesSlide5.xml><?xml version="1.0" encoding="utf-8"?>
-<p:notes xmlns:a="http://schemas.openxmlformats.org/drawingml/2006/main" xmlns:r="http://schemas.openxmlformats.org/officeDocument/2006/relationships" xmlns:p="http://schemas.openxmlformats.org/presentationml/2006/main">
-  <p:cSld>
-    <p:spTree>
-      <p:nvGrpSpPr>
-        <p:cNvPr id="1" name=""/>
-        <p:cNvGrpSpPr/>
-        <p:nvPr/>
-      </p:nvGrpSpPr>
-      <p:grpSpPr>
-        <a:xfrm>
-          <a:off x="0" y="0"/>
-          <a:ext cx="0" cy="0"/>
-          <a:chOff x="0" y="0"/>
-          <a:chExt cx="0" cy="0"/>
-        </a:xfrm>
-      </p:grpSpPr>
-      <p:sp>
-        <p:nvSpPr>
-          <p:cNvPr id="2" name="Slide Image Placeholder 1"/>
-          <p:cNvSpPr>
-            <a:spLocks noGrp="1" noRot="1" noChangeAspect="1"/>
-          </p:cNvSpPr>
-          <p:nvPr>
-            <p:ph type="sldImg"/>
-          </p:nvPr>
-        </p:nvSpPr>
-        <p:spPr/>
-      </p:sp>
-      <p:sp>
-        <p:nvSpPr>
-          <p:cNvPr id="3" name="Notes Placeholder 2"/>
-          <p:cNvSpPr>
-            <a:spLocks noGrp="1"/>
-          </p:cNvSpPr>
-          <p:nvPr>
-            <p:ph type="body" idx="1"/>
-          </p:nvPr>
-        </p:nvSpPr>
-        <p:spPr/>
-        <p:txBody>
-          <a:bodyPr/>
-          <a:lstStyle/>
-          <a:p>
-            <a:r>
-              <a:rPr lang="en-US" dirty="0"/>
-              <a:t/>
-            </a:r>
-            <a:endParaRPr lang="en-US" dirty="0"/>
-          </a:p>
-        </p:txBody>
-      </p:sp>
-      <p:sp>
-        <p:nvSpPr>
-          <p:cNvPr id="4" name="Slide Number Placeholder 3"/>
-          <p:cNvSpPr>
-            <a:spLocks noGrp="1"/>
-          </p:cNvSpPr>
-          <p:nvPr>
-            <p:ph type="sldNum" sz="quarter" idx="10"/>
-          </p:nvPr>
-        </p:nvSpPr>
-        <p:spPr/>
-        <p:txBody>
-          <a:bodyPr/>
-          <a:lstStyle/>
-          <a:p>
-            <a:fld id="{F7021451-1387-4CA6-816F-3879F97B5CBC}" type="slidenum">
-              <a:rPr lang="en-US"/>
-              <a:t>5</a:t>
-            </a:fld>
-            <a:endParaRPr lang="en-US"/>
-          </a:p>
-        </p:txBody>
-      </p:sp>
-    </p:spTree>
-    <p:extLst>
-      <p:ext uri="{BB962C8B-B14F-4D97-AF65-F5344CB8AC3E}">
-        <p14:creationId xmlns:p14="http://schemas.microsoft.com/office/powerpoint/2010/main" val="1024086991"/>
-      </p:ext>
-    </p:extLst>
-  </p:cSld>
-  <p:clrMapOvr>
-    <a:masterClrMapping/>
-  </p:clrMapOvr>
-</p:notes>
-</file>
-
-<file path=ppt/notesSlides/notesSlide6.xml><?xml version="1.0" encoding="utf-8"?>
-<p:notes xmlns:a="http://schemas.openxmlformats.org/drawingml/2006/main" xmlns:r="http://schemas.openxmlformats.org/officeDocument/2006/relationships" xmlns:p="http://schemas.openxmlformats.org/presentationml/2006/main">
-  <p:cSld>
-    <p:spTree>
-      <p:nvGrpSpPr>
-        <p:cNvPr id="1" name=""/>
-        <p:cNvGrpSpPr/>
-        <p:nvPr/>
-      </p:nvGrpSpPr>
-      <p:grpSpPr>
-        <a:xfrm>
-          <a:off x="0" y="0"/>
-          <a:ext cx="0" cy="0"/>
-          <a:chOff x="0" y="0"/>
-          <a:chExt cx="0" cy="0"/>
-        </a:xfrm>
-      </p:grpSpPr>
-      <p:sp>
-        <p:nvSpPr>
-          <p:cNvPr id="2" name="Slide Image Placeholder 1"/>
-          <p:cNvSpPr>
-            <a:spLocks noGrp="1" noRot="1" noChangeAspect="1"/>
-          </p:cNvSpPr>
-          <p:nvPr>
-            <p:ph type="sldImg"/>
-          </p:nvPr>
-        </p:nvSpPr>
-        <p:spPr/>
-      </p:sp>
-      <p:sp>
-        <p:nvSpPr>
-          <p:cNvPr id="3" name="Notes Placeholder 2"/>
-          <p:cNvSpPr>
-            <a:spLocks noGrp="1"/>
-          </p:cNvSpPr>
-          <p:nvPr>
-            <p:ph type="body" idx="1"/>
-          </p:nvPr>
-        </p:nvSpPr>
-        <p:spPr/>
-        <p:txBody>
-          <a:bodyPr/>
-          <a:lstStyle/>
-          <a:p>
-            <a:r>
-              <a:rPr lang="en-US" dirty="0"/>
-              <a:t/>
-            </a:r>
-            <a:endParaRPr lang="en-US" dirty="0"/>
-          </a:p>
-        </p:txBody>
-      </p:sp>
-      <p:sp>
-        <p:nvSpPr>
-          <p:cNvPr id="4" name="Slide Number Placeholder 3"/>
-          <p:cNvSpPr>
-            <a:spLocks noGrp="1"/>
-          </p:cNvSpPr>
-          <p:nvPr>
-            <p:ph type="sldNum" sz="quarter" idx="10"/>
-          </p:nvPr>
-        </p:nvSpPr>
-        <p:spPr/>
-        <p:txBody>
-          <a:bodyPr/>
-          <a:lstStyle/>
-          <a:p>
-            <a:fld id="{F7021451-1387-4CA6-816F-3879F97B5CBC}" type="slidenum">
-              <a:rPr lang="en-US"/>
-              <a:t>6</a:t>
-            </a:fld>
-            <a:endParaRPr lang="en-US"/>
-          </a:p>
-        </p:txBody>
-      </p:sp>
-    </p:spTree>
-    <p:extLst>
-      <p:ext uri="{BB962C8B-B14F-4D97-AF65-F5344CB8AC3E}">
-        <p14:creationId xmlns:p14="http://schemas.microsoft.com/office/powerpoint/2010/main" val="1024086991"/>
-      </p:ext>
-    </p:extLst>
-  </p:cSld>
-  <p:clrMapOvr>
-    <a:masterClrMapping/>
-  </p:clrMapOvr>
-</p:notes>
-</file>
-
 <file path=ppt/slideLayouts/slideLayout1.xml><?xml version="1.0" encoding="utf-8"?>
 <p:sldLayout xmlns:a="http://schemas.openxmlformats.org/drawingml/2006/main" xmlns:r="http://schemas.openxmlformats.org/officeDocument/2006/relationships" xmlns:p="http://schemas.openxmlformats.org/presentationml/2006/main" preserve="1">
   <p:cSld name="DEFAULT">
@@ -1302,7 +1124,7 @@
     <p:bg>
       <p:bgPr>
         <a:solidFill>
-          <a:srgbClr val="7C3AED"/>
+          <a:srgbClr val="1B2A4A"/>
         </a:solidFill>
       </p:bgPr>
     </p:bg>
@@ -1322,14 +1144,34 @@
       </p:grpSpPr>
       <p:sp>
         <p:nvSpPr>
-          <p:cNvPr id="2" name="Text 0"/>
-          <p:cNvSpPr/>
-          <p:nvPr/>
-        </p:nvSpPr>
-        <p:spPr>
-          <a:xfrm>
-            <a:off x="731520" y="1371600"/>
-            <a:ext cx="7680960" cy="1371600"/>
+          <p:cNvPr id="2" name="Shape 0"/>
+          <p:cNvSpPr/>
+          <p:nvPr/>
+        </p:nvSpPr>
+        <p:spPr>
+          <a:xfrm>
+            <a:off x="0" y="0"/>
+            <a:ext cx="109728" cy="5143500"/>
+          </a:xfrm>
+          <a:prstGeom prst="rect">
+            <a:avLst/>
+          </a:prstGeom>
+          <a:solidFill>
+            <a:srgbClr val="2A9D8F"/>
+          </a:solidFill>
+          <a:ln/>
+        </p:spPr>
+      </p:sp>
+      <p:sp>
+        <p:nvSpPr>
+          <p:cNvPr id="3" name="Text 1"/>
+          <p:cNvSpPr/>
+          <p:nvPr/>
+        </p:nvSpPr>
+        <p:spPr>
+          <a:xfrm>
+            <a:off x="731520" y="1280160"/>
+            <a:ext cx="7772400" cy="1371600"/>
           </a:xfrm>
           <a:prstGeom prst="rect">
             <a:avLst/>
@@ -1345,30 +1187,69 @@
               <a:buNone/>
             </a:pPr>
             <a:r>
-              <a:rPr lang="en-US" sz="4000" b="1" dirty="0">
+              <a:rPr lang="en-US" sz="3600" b="1" dirty="0">
                 <a:solidFill>
                   <a:srgbClr val="FFFFFF"/>
+                </a:solidFill>
+                <a:latin typeface="Georgia" pitchFamily="34" charset="0"/>
+                <a:ea typeface="Georgia" pitchFamily="34" charset="-122"/>
+                <a:cs typeface="Georgia" pitchFamily="34" charset="-120"/>
+              </a:rPr>
+              <a:t>Mixtures &amp; Solutions</a:t>
+            </a:r>
+            <a:endParaRPr lang="en-US" sz="3600" dirty="0"/>
+          </a:p>
+        </p:txBody>
+      </p:sp>
+      <p:sp>
+        <p:nvSpPr>
+          <p:cNvPr id="4" name="Text 2"/>
+          <p:cNvSpPr/>
+          <p:nvPr/>
+        </p:nvSpPr>
+        <p:spPr>
+          <a:xfrm>
+            <a:off x="731520" y="2743200"/>
+            <a:ext cx="7772400" cy="548640"/>
+          </a:xfrm>
+          <a:prstGeom prst="rect">
+            <a:avLst/>
+          </a:prstGeom>
+          <a:noFill/>
+          <a:ln/>
+        </p:spPr>
+        <p:txBody>
+          <a:bodyPr wrap="square" rtlCol="0" anchor="ctr"/>
+          <a:lstStyle/>
+          <a:p>
+            <a:pPr indent="0" marL="0">
+              <a:buNone/>
+            </a:pPr>
+            <a:r>
+              <a:rPr lang="en-US" sz="1600" dirty="0">
+                <a:solidFill>
+                  <a:srgbClr val="9B9690"/>
                 </a:solidFill>
                 <a:latin typeface="Calibri" pitchFamily="34" charset="0"/>
                 <a:ea typeface="Calibri" pitchFamily="34" charset="-122"/>
                 <a:cs typeface="Calibri" pitchFamily="34" charset="-120"/>
               </a:rPr>
-              <a:t>Mixtures &amp; Solutions</a:t>
-            </a:r>
-            <a:endParaRPr lang="en-US" sz="4000" dirty="0"/>
-          </a:p>
-        </p:txBody>
-      </p:sp>
-      <p:sp>
-        <p:nvSpPr>
-          <p:cNvPr id="3" name="Text 1"/>
-          <p:cNvSpPr/>
-          <p:nvPr/>
-        </p:nvSpPr>
-        <p:spPr>
-          <a:xfrm>
-            <a:off x="731520" y="2926080"/>
-            <a:ext cx="7680960" cy="548640"/>
+              <a:t>G6 Science · Chemistry</a:t>
+            </a:r>
+            <a:endParaRPr lang="en-US" sz="1600" dirty="0"/>
+          </a:p>
+        </p:txBody>
+      </p:sp>
+      <p:sp>
+        <p:nvSpPr>
+          <p:cNvPr id="5" name="Text 3"/>
+          <p:cNvSpPr/>
+          <p:nvPr/>
+        </p:nvSpPr>
+        <p:spPr>
+          <a:xfrm>
+            <a:off x="731520" y="4389120"/>
+            <a:ext cx="7772400" cy="457200"/>
           </a:xfrm>
           <a:prstGeom prst="rect">
             <a:avLst/>
@@ -1384,17 +1265,17 @@
               <a:buNone/>
             </a:pPr>
             <a:r>
-              <a:rPr lang="en-US" sz="1600" i="1" dirty="0">
-                <a:solidFill>
-                  <a:srgbClr val="FFFFFF"/>
+              <a:rPr lang="en-US" sz="1000" dirty="0">
+                <a:solidFill>
+                  <a:srgbClr val="6B6660"/>
                 </a:solidFill>
                 <a:latin typeface="Calibri" pitchFamily="34" charset="0"/>
                 <a:ea typeface="Calibri" pitchFamily="34" charset="-122"/>
                 <a:cs typeface="Calibri" pitchFamily="34" charset="-120"/>
               </a:rPr>
-              <a:t>Grade 6 Science · Mr Zocchi</a:t>
-            </a:r>
-            <a:endParaRPr lang="en-US" sz="1600" dirty="0"/>
+              <a:t>Mr Zocchi · mrzocchi.com</a:t>
+            </a:r>
+            <a:endParaRPr lang="en-US" sz="1000" dirty="0"/>
           </a:p>
         </p:txBody>
       </p:sp>
@@ -1409,6 +1290,13 @@
 <file path=ppt/slides/slide2.xml><?xml version="1.0" encoding="utf-8"?>
 <p:sld xmlns:a="http://schemas.openxmlformats.org/drawingml/2006/main" xmlns:r="http://schemas.openxmlformats.org/officeDocument/2006/relationships" xmlns:p="http://schemas.openxmlformats.org/presentationml/2006/main">
   <p:cSld name="Slide 2">
+    <p:bg>
+      <p:bgPr>
+        <a:solidFill>
+          <a:srgbClr val="FFFFFF"/>
+        </a:solidFill>
+      </p:bgPr>
+    </p:bg>
     <p:spTree>
       <p:nvGrpSpPr>
         <p:cNvPr id="1" name=""/>
@@ -1432,13 +1320,13 @@
         <p:spPr>
           <a:xfrm>
             <a:off x="0" y="0"/>
-            <a:ext cx="9144000" cy="548640"/>
-          </a:xfrm>
-          <a:prstGeom prst="rect">
-            <a:avLst/>
-          </a:prstGeom>
-          <a:solidFill>
-            <a:srgbClr val="7C3AED"/>
+            <a:ext cx="9144000" cy="54864"/>
+          </a:xfrm>
+          <a:prstGeom prst="rect">
+            <a:avLst/>
+          </a:prstGeom>
+          <a:solidFill>
+            <a:srgbClr val="2A9D8F"/>
           </a:solidFill>
           <a:ln/>
         </p:spPr>
@@ -1451,8 +1339,8 @@
         </p:nvSpPr>
         <p:spPr>
           <a:xfrm>
-            <a:off x="457200" y="45720"/>
-            <a:ext cx="8229600" cy="457200"/>
+            <a:off x="548640" y="274320"/>
+            <a:ext cx="8046720" cy="640080"/>
           </a:xfrm>
           <a:prstGeom prst="rect">
             <a:avLst/>
@@ -1461,125 +1349,186 @@
           <a:ln/>
         </p:spPr>
         <p:txBody>
-          <a:bodyPr wrap="square" rtlCol="0" anchor="ctr"/>
+          <a:bodyPr wrap="square" lIns="0" tIns="0" rIns="0" bIns="0" rtlCol="0" anchor="ctr"/>
           <a:lstStyle/>
           <a:p>
             <a:pPr indent="0" marL="0">
               <a:buNone/>
             </a:pPr>
             <a:r>
-              <a:rPr lang="en-US" sz="1800" b="1" dirty="0">
-                <a:solidFill>
-                  <a:srgbClr val="FFFFFF"/>
+              <a:rPr lang="en-US" sz="2600" b="1" dirty="0">
+                <a:solidFill>
+                  <a:srgbClr val="1B2A4A"/>
+                </a:solidFill>
+                <a:latin typeface="Georgia" pitchFamily="34" charset="0"/>
+                <a:ea typeface="Georgia" pitchFamily="34" charset="-122"/>
+                <a:cs typeface="Georgia" pitchFamily="34" charset="-120"/>
+              </a:rPr>
+              <a:t>What is a Mixture?</a:t>
+            </a:r>
+            <a:endParaRPr lang="en-US" sz="2600" dirty="0"/>
+          </a:p>
+        </p:txBody>
+      </p:sp>
+      <p:sp>
+        <p:nvSpPr>
+          <p:cNvPr id="4" name="Text 2"/>
+          <p:cNvSpPr/>
+          <p:nvPr/>
+        </p:nvSpPr>
+        <p:spPr>
+          <a:xfrm>
+            <a:off x="548640" y="1097280"/>
+            <a:ext cx="8046720" cy="3474720"/>
+          </a:xfrm>
+          <a:prstGeom prst="rect">
+            <a:avLst/>
+          </a:prstGeom>
+          <a:noFill/>
+          <a:ln/>
+        </p:spPr>
+        <p:txBody>
+          <a:bodyPr wrap="square" rtlCol="0" anchor="t"/>
+          <a:lstStyle/>
+          <a:p>
+            <a:pPr marL="342900" indent="-342900">
+              <a:spcAft>
+                <a:spcPts val="800"/>
+              </a:spcAft>
+              <a:buSzPct val="100000"/>
+              <a:buChar char="•"/>
+            </a:pPr>
+            <a:r>
+              <a:rPr lang="en-US" sz="1500" dirty="0">
+                <a:solidFill>
+                  <a:srgbClr val="3D3A36"/>
                 </a:solidFill>
                 <a:latin typeface="Calibri" pitchFamily="34" charset="0"/>
                 <a:ea typeface="Calibri" pitchFamily="34" charset="-122"/>
                 <a:cs typeface="Calibri" pitchFamily="34" charset="-120"/>
               </a:rPr>
-              <a:t>Pure substances vs mixtures</a:t>
-            </a:r>
-            <a:endParaRPr lang="en-US" sz="1800" dirty="0"/>
-          </a:p>
-        </p:txBody>
-      </p:sp>
-      <p:sp>
-        <p:nvSpPr>
-          <p:cNvPr id="4" name="Text 2"/>
-          <p:cNvSpPr/>
-          <p:nvPr/>
-        </p:nvSpPr>
-        <p:spPr>
-          <a:xfrm>
-            <a:off x="731520" y="1097280"/>
-            <a:ext cx="7680960" cy="3200400"/>
-          </a:xfrm>
-          <a:prstGeom prst="rect">
-            <a:avLst/>
-          </a:prstGeom>
-          <a:noFill/>
-          <a:ln/>
-        </p:spPr>
-        <p:txBody>
-          <a:bodyPr wrap="square" rtlCol="0" anchor="ctr"/>
-          <a:lstStyle/>
-          <a:p>
-            <a:pPr indent="0" marL="0">
-              <a:buNone/>
-            </a:pPr>
-            <a:r>
-              <a:rPr lang="en-US" sz="1600" dirty="0">
-                <a:solidFill>
-                  <a:srgbClr val="363636"/>
+              <a:t>Two or more substances combined but NOT chemically joined</a:t>
+            </a:r>
+            <a:endParaRPr lang="en-US" sz="1500" dirty="0"/>
+          </a:p>
+          <a:p>
+            <a:pPr marL="342900" indent="-342900">
+              <a:spcAft>
+                <a:spcPts val="800"/>
+              </a:spcAft>
+              <a:buSzPct val="100000"/>
+              <a:buChar char="•"/>
+            </a:pPr>
+            <a:r>
+              <a:rPr lang="en-US" sz="1500" dirty="0">
+                <a:solidFill>
+                  <a:srgbClr val="3D3A36"/>
                 </a:solidFill>
                 <a:latin typeface="Calibri" pitchFamily="34" charset="0"/>
                 <a:ea typeface="Calibri" pitchFamily="34" charset="-122"/>
                 <a:cs typeface="Calibri" pitchFamily="34" charset="-120"/>
               </a:rPr>
-              <a:t>Content for: Pure substances vs mixtures</a:t>
-            </a:r>
-            <a:endParaRPr lang="en-US" sz="1600" dirty="0"/>
-          </a:p>
-          <a:p>
-            <a:pPr indent="0" marL="0">
-              <a:buNone/>
-            </a:pPr>
-            <a:endParaRPr lang="en-US" sz="1600" dirty="0"/>
-          </a:p>
-          <a:p>
-            <a:pPr indent="0" marL="0">
-              <a:buNone/>
-            </a:pPr>
-            <a:r>
-              <a:rPr lang="en-US" sz="1600" dirty="0">
-                <a:solidFill>
-                  <a:srgbClr val="363636"/>
+              <a:t>Each substance keeps its own properties</a:t>
+            </a:r>
+            <a:endParaRPr lang="en-US" sz="1500" dirty="0"/>
+          </a:p>
+          <a:p>
+            <a:pPr marL="342900" indent="-342900">
+              <a:spcAft>
+                <a:spcPts val="800"/>
+              </a:spcAft>
+              <a:buSzPct val="100000"/>
+              <a:buChar char="•"/>
+            </a:pPr>
+            <a:r>
+              <a:rPr lang="en-US" sz="1500" dirty="0">
+                <a:solidFill>
+                  <a:srgbClr val="3D3A36"/>
                 </a:solidFill>
                 <a:latin typeface="Calibri" pitchFamily="34" charset="0"/>
                 <a:ea typeface="Calibri" pitchFamily="34" charset="-122"/>
                 <a:cs typeface="Calibri" pitchFamily="34" charset="-120"/>
               </a:rPr>
-              <a:t>Key points will be covered in class.</a:t>
-            </a:r>
-            <a:endParaRPr lang="en-US" sz="1600" dirty="0"/>
-          </a:p>
-        </p:txBody>
-      </p:sp>
-      <p:sp>
-        <p:nvSpPr>
-          <p:cNvPr id="5" name="Text 3"/>
-          <p:cNvSpPr/>
-          <p:nvPr/>
-        </p:nvSpPr>
-        <p:spPr>
-          <a:xfrm>
-            <a:off x="7772400" y="4663440"/>
-            <a:ext cx="1097280" cy="365760"/>
-          </a:xfrm>
-          <a:prstGeom prst="rect">
-            <a:avLst/>
-          </a:prstGeom>
-          <a:noFill/>
-          <a:ln/>
-        </p:spPr>
-        <p:txBody>
-          <a:bodyPr wrap="square" rtlCol="0" anchor="ctr"/>
-          <a:lstStyle/>
-          <a:p>
-            <a:pPr algn="r" indent="0" marL="0">
-              <a:buNone/>
-            </a:pPr>
-            <a:r>
-              <a:rPr lang="en-US" sz="1000" dirty="0">
-                <a:solidFill>
-                  <a:srgbClr val="999999"/>
+              <a:t>Can be separated by physical methods (filtering, evaporating)</a:t>
+            </a:r>
+            <a:endParaRPr lang="en-US" sz="1500" dirty="0"/>
+          </a:p>
+          <a:p>
+            <a:pPr marL="342900" indent="-342900">
+              <a:spcAft>
+                <a:spcPts val="800"/>
+              </a:spcAft>
+              <a:buSzPct val="100000"/>
+              <a:buChar char="•"/>
+            </a:pPr>
+            <a:r>
+              <a:rPr lang="en-US" sz="1500" dirty="0">
+                <a:solidFill>
+                  <a:srgbClr val="3D3A36"/>
                 </a:solidFill>
                 <a:latin typeface="Calibri" pitchFamily="34" charset="0"/>
                 <a:ea typeface="Calibri" pitchFamily="34" charset="-122"/>
                 <a:cs typeface="Calibri" pitchFamily="34" charset="-120"/>
               </a:rPr>
-              <a:t>2 / 6</a:t>
-            </a:r>
-            <a:endParaRPr lang="en-US" sz="1000" dirty="0"/>
+              <a:t>Examples: salt water, air, sand and iron filings</a:t>
+            </a:r>
+            <a:endParaRPr lang="en-US" sz="1500" dirty="0"/>
+          </a:p>
+        </p:txBody>
+      </p:sp>
+      <p:sp>
+        <p:nvSpPr>
+          <p:cNvPr id="5" name="Shape 3"/>
+          <p:cNvSpPr/>
+          <p:nvPr/>
+        </p:nvSpPr>
+        <p:spPr>
+          <a:xfrm>
+            <a:off x="548640" y="4754880"/>
+            <a:ext cx="8046720" cy="9144"/>
+          </a:xfrm>
+          <a:prstGeom prst="rect">
+            <a:avLst/>
+          </a:prstGeom>
+          <a:solidFill>
+            <a:srgbClr val="F3F1EE"/>
+          </a:solidFill>
+          <a:ln/>
+        </p:spPr>
+      </p:sp>
+      <p:sp>
+        <p:nvSpPr>
+          <p:cNvPr id="6" name="Text 4"/>
+          <p:cNvSpPr/>
+          <p:nvPr/>
+        </p:nvSpPr>
+        <p:spPr>
+          <a:xfrm>
+            <a:off x="548640" y="4800600"/>
+            <a:ext cx="3657600" cy="274320"/>
+          </a:xfrm>
+          <a:prstGeom prst="rect">
+            <a:avLst/>
+          </a:prstGeom>
+          <a:noFill/>
+          <a:ln/>
+        </p:spPr>
+        <p:txBody>
+          <a:bodyPr wrap="square" rtlCol="0" anchor="ctr"/>
+          <a:lstStyle/>
+          <a:p>
+            <a:pPr indent="0" marL="0">
+              <a:buNone/>
+            </a:pPr>
+            <a:r>
+              <a:rPr lang="en-US" sz="800" dirty="0">
+                <a:solidFill>
+                  <a:srgbClr val="9B9690"/>
+                </a:solidFill>
+              </a:rPr>
+              <a:t>mrzocchi.com</a:t>
+            </a:r>
+            <a:endParaRPr lang="en-US" sz="800" dirty="0"/>
           </a:p>
         </p:txBody>
       </p:sp>
@@ -1594,6 +1543,13 @@
 <file path=ppt/slides/slide3.xml><?xml version="1.0" encoding="utf-8"?>
 <p:sld xmlns:a="http://schemas.openxmlformats.org/drawingml/2006/main" xmlns:r="http://schemas.openxmlformats.org/officeDocument/2006/relationships" xmlns:p="http://schemas.openxmlformats.org/presentationml/2006/main">
   <p:cSld name="Slide 3">
+    <p:bg>
+      <p:bgPr>
+        <a:solidFill>
+          <a:srgbClr val="FAF8F5"/>
+        </a:solidFill>
+      </p:bgPr>
+    </p:bg>
     <p:spTree>
       <p:nvGrpSpPr>
         <p:cNvPr id="1" name=""/>
@@ -1617,13 +1573,13 @@
         <p:spPr>
           <a:xfrm>
             <a:off x="0" y="0"/>
-            <a:ext cx="9144000" cy="548640"/>
-          </a:xfrm>
-          <a:prstGeom prst="rect">
-            <a:avLst/>
-          </a:prstGeom>
-          <a:solidFill>
-            <a:srgbClr val="7C3AED"/>
+            <a:ext cx="9144000" cy="54864"/>
+          </a:xfrm>
+          <a:prstGeom prst="rect">
+            <a:avLst/>
+          </a:prstGeom>
+          <a:solidFill>
+            <a:srgbClr val="2A9D8F"/>
           </a:solidFill>
           <a:ln/>
         </p:spPr>
@@ -1636,8 +1592,94 @@
         </p:nvSpPr>
         <p:spPr>
           <a:xfrm>
-            <a:off x="457200" y="45720"/>
-            <a:ext cx="8229600" cy="457200"/>
+            <a:off x="548640" y="274320"/>
+            <a:ext cx="8046720" cy="640080"/>
+          </a:xfrm>
+          <a:prstGeom prst="rect">
+            <a:avLst/>
+          </a:prstGeom>
+          <a:noFill/>
+          <a:ln/>
+        </p:spPr>
+        <p:txBody>
+          <a:bodyPr wrap="square" lIns="0" tIns="0" rIns="0" bIns="0" rtlCol="0" anchor="ctr"/>
+          <a:lstStyle/>
+          <a:p>
+            <a:pPr indent="0" marL="0">
+              <a:buNone/>
+            </a:pPr>
+            <a:r>
+              <a:rPr lang="en-US" sz="2600" b="1" dirty="0">
+                <a:solidFill>
+                  <a:srgbClr val="1B2A4A"/>
+                </a:solidFill>
+                <a:latin typeface="Georgia" pitchFamily="34" charset="0"/>
+                <a:ea typeface="Georgia" pitchFamily="34" charset="-122"/>
+                <a:cs typeface="Georgia" pitchFamily="34" charset="-120"/>
+              </a:rPr>
+              <a:t>Key Terms</a:t>
+            </a:r>
+            <a:endParaRPr lang="en-US" sz="2600" dirty="0"/>
+          </a:p>
+        </p:txBody>
+      </p:sp>
+      <p:sp>
+        <p:nvSpPr>
+          <p:cNvPr id="4" name="Shape 2"/>
+          <p:cNvSpPr/>
+          <p:nvPr/>
+        </p:nvSpPr>
+        <p:spPr>
+          <a:xfrm>
+            <a:off x="548640" y="1097280"/>
+            <a:ext cx="3749040" cy="594360"/>
+          </a:xfrm>
+          <a:prstGeom prst="rect">
+            <a:avLst/>
+          </a:prstGeom>
+          <a:solidFill>
+            <a:srgbClr val="FFFFFF"/>
+          </a:solidFill>
+          <a:ln/>
+          <a:effectLst>
+            <a:outerShdw sx="100000" sy="100000" kx="0" ky="0" algn="bl" rotWithShape="0" blurRad="50800" dist="25400" dir="8100000">
+              <a:srgbClr val="000000">
+                <a:alpha val="10000"/>
+              </a:srgbClr>
+            </a:outerShdw>
+          </a:effectLst>
+        </p:spPr>
+      </p:sp>
+      <p:sp>
+        <p:nvSpPr>
+          <p:cNvPr id="5" name="Shape 3"/>
+          <p:cNvSpPr/>
+          <p:nvPr/>
+        </p:nvSpPr>
+        <p:spPr>
+          <a:xfrm>
+            <a:off x="548640" y="1097280"/>
+            <a:ext cx="54864" cy="594360"/>
+          </a:xfrm>
+          <a:prstGeom prst="rect">
+            <a:avLst/>
+          </a:prstGeom>
+          <a:solidFill>
+            <a:srgbClr val="2A9D8F"/>
+          </a:solidFill>
+          <a:ln/>
+        </p:spPr>
+      </p:sp>
+      <p:sp>
+        <p:nvSpPr>
+          <p:cNvPr id="6" name="Text 4"/>
+          <p:cNvSpPr/>
+          <p:nvPr/>
+        </p:nvSpPr>
+        <p:spPr>
+          <a:xfrm>
+            <a:off x="685800" y="1143000"/>
+            <a:ext cx="3520440" cy="502920"/>
           </a:xfrm>
           <a:prstGeom prst="rect">
             <a:avLst/>
@@ -1653,30 +1695,88 @@
               <a:buNone/>
             </a:pPr>
             <a:r>
-              <a:rPr lang="en-US" sz="1800" b="1" dirty="0">
-                <a:solidFill>
-                  <a:srgbClr val="FFFFFF"/>
-                </a:solidFill>
-                <a:latin typeface="Calibri" pitchFamily="34" charset="0"/>
-                <a:ea typeface="Calibri" pitchFamily="34" charset="-122"/>
-                <a:cs typeface="Calibri" pitchFamily="34" charset="-120"/>
-              </a:rPr>
-              <a:t>Solutions: solute &amp; solvent</a:t>
-            </a:r>
-            <a:endParaRPr lang="en-US" sz="1800" dirty="0"/>
-          </a:p>
-        </p:txBody>
-      </p:sp>
-      <p:sp>
-        <p:nvSpPr>
-          <p:cNvPr id="4" name="Text 2"/>
-          <p:cNvSpPr/>
-          <p:nvPr/>
-        </p:nvSpPr>
-        <p:spPr>
-          <a:xfrm>
-            <a:off x="731520" y="1097280"/>
-            <a:ext cx="7680960" cy="3200400"/>
+              <a:rPr lang="en-US" sz="1200" b="1" dirty="0">
+                <a:solidFill>
+                  <a:srgbClr val="1B2A4A"/>
+                </a:solidFill>
+              </a:rPr>
+              <a:t>Mixture</a:t>
+            </a:r>
+            <a:endParaRPr lang="en-US" sz="1200" dirty="0"/>
+          </a:p>
+          <a:p>
+            <a:pPr indent="0" marL="0">
+              <a:buNone/>
+            </a:pPr>
+            <a:r>
+              <a:rPr lang="en-US" sz="1000" dirty="0">
+                <a:solidFill>
+                  <a:srgbClr val="6B6660"/>
+                </a:solidFill>
+              </a:rPr>
+              <a:t>Two+ substances not chemically bonded</a:t>
+            </a:r>
+            <a:endParaRPr lang="en-US" sz="1200" dirty="0"/>
+          </a:p>
+        </p:txBody>
+      </p:sp>
+      <p:sp>
+        <p:nvSpPr>
+          <p:cNvPr id="7" name="Shape 5"/>
+          <p:cNvSpPr/>
+          <p:nvPr/>
+        </p:nvSpPr>
+        <p:spPr>
+          <a:xfrm>
+            <a:off x="4480560" y="1097280"/>
+            <a:ext cx="3749040" cy="594360"/>
+          </a:xfrm>
+          <a:prstGeom prst="rect">
+            <a:avLst/>
+          </a:prstGeom>
+          <a:solidFill>
+            <a:srgbClr val="FFFFFF"/>
+          </a:solidFill>
+          <a:ln/>
+          <a:effectLst>
+            <a:outerShdw sx="100000" sy="100000" kx="0" ky="0" algn="bl" rotWithShape="0" blurRad="50800" dist="25400" dir="8100000">
+              <a:srgbClr val="000000">
+                <a:alpha val="10000"/>
+              </a:srgbClr>
+            </a:outerShdw>
+          </a:effectLst>
+        </p:spPr>
+      </p:sp>
+      <p:sp>
+        <p:nvSpPr>
+          <p:cNvPr id="8" name="Shape 6"/>
+          <p:cNvSpPr/>
+          <p:nvPr/>
+        </p:nvSpPr>
+        <p:spPr>
+          <a:xfrm>
+            <a:off x="4480560" y="1097280"/>
+            <a:ext cx="54864" cy="594360"/>
+          </a:xfrm>
+          <a:prstGeom prst="rect">
+            <a:avLst/>
+          </a:prstGeom>
+          <a:solidFill>
+            <a:srgbClr val="2A9D8F"/>
+          </a:solidFill>
+          <a:ln/>
+        </p:spPr>
+      </p:sp>
+      <p:sp>
+        <p:nvSpPr>
+          <p:cNvPr id="9" name="Text 7"/>
+          <p:cNvSpPr/>
+          <p:nvPr/>
+        </p:nvSpPr>
+        <p:spPr>
+          <a:xfrm>
+            <a:off x="4617720" y="1143000"/>
+            <a:ext cx="3520440" cy="502920"/>
           </a:xfrm>
           <a:prstGeom prst="rect">
             <a:avLst/>
@@ -1692,53 +1792,185 @@
               <a:buNone/>
             </a:pPr>
             <a:r>
-              <a:rPr lang="en-US" sz="1600" dirty="0">
-                <a:solidFill>
-                  <a:srgbClr val="363636"/>
-                </a:solidFill>
-                <a:latin typeface="Calibri" pitchFamily="34" charset="0"/>
-                <a:ea typeface="Calibri" pitchFamily="34" charset="-122"/>
-                <a:cs typeface="Calibri" pitchFamily="34" charset="-120"/>
-              </a:rPr>
-              <a:t>Content for: Solutions: solute &amp; solvent</a:t>
-            </a:r>
-            <a:endParaRPr lang="en-US" sz="1600" dirty="0"/>
+              <a:rPr lang="en-US" sz="1200" b="1" dirty="0">
+                <a:solidFill>
+                  <a:srgbClr val="1B2A4A"/>
+                </a:solidFill>
+              </a:rPr>
+              <a:t>Solution</a:t>
+            </a:r>
+            <a:endParaRPr lang="en-US" sz="1200" dirty="0"/>
           </a:p>
           <a:p>
             <a:pPr indent="0" marL="0">
               <a:buNone/>
             </a:pPr>
-            <a:endParaRPr lang="en-US" sz="1600" dirty="0"/>
-          </a:p>
+            <a:r>
+              <a:rPr lang="en-US" sz="1000" dirty="0">
+                <a:solidFill>
+                  <a:srgbClr val="6B6660"/>
+                </a:solidFill>
+              </a:rPr>
+              <a:t>A mixture where a solid dissolves in a liquid</a:t>
+            </a:r>
+            <a:endParaRPr lang="en-US" sz="1200" dirty="0"/>
+          </a:p>
+        </p:txBody>
+      </p:sp>
+      <p:sp>
+        <p:nvSpPr>
+          <p:cNvPr id="10" name="Shape 8"/>
+          <p:cNvSpPr/>
+          <p:nvPr/>
+        </p:nvSpPr>
+        <p:spPr>
+          <a:xfrm>
+            <a:off x="548640" y="1828800"/>
+            <a:ext cx="3749040" cy="594360"/>
+          </a:xfrm>
+          <a:prstGeom prst="rect">
+            <a:avLst/>
+          </a:prstGeom>
+          <a:solidFill>
+            <a:srgbClr val="FFFFFF"/>
+          </a:solidFill>
+          <a:ln/>
+          <a:effectLst>
+            <a:outerShdw sx="100000" sy="100000" kx="0" ky="0" algn="bl" rotWithShape="0" blurRad="50800" dist="25400" dir="8100000">
+              <a:srgbClr val="000000">
+                <a:alpha val="10000"/>
+              </a:srgbClr>
+            </a:outerShdw>
+          </a:effectLst>
+        </p:spPr>
+      </p:sp>
+      <p:sp>
+        <p:nvSpPr>
+          <p:cNvPr id="11" name="Shape 9"/>
+          <p:cNvSpPr/>
+          <p:nvPr/>
+        </p:nvSpPr>
+        <p:spPr>
+          <a:xfrm>
+            <a:off x="548640" y="1828800"/>
+            <a:ext cx="54864" cy="594360"/>
+          </a:xfrm>
+          <a:prstGeom prst="rect">
+            <a:avLst/>
+          </a:prstGeom>
+          <a:solidFill>
+            <a:srgbClr val="2A9D8F"/>
+          </a:solidFill>
+          <a:ln/>
+        </p:spPr>
+      </p:sp>
+      <p:sp>
+        <p:nvSpPr>
+          <p:cNvPr id="12" name="Text 10"/>
+          <p:cNvSpPr/>
+          <p:nvPr/>
+        </p:nvSpPr>
+        <p:spPr>
+          <a:xfrm>
+            <a:off x="685800" y="1874520"/>
+            <a:ext cx="3520440" cy="502920"/>
+          </a:xfrm>
+          <a:prstGeom prst="rect">
+            <a:avLst/>
+          </a:prstGeom>
+          <a:noFill/>
+          <a:ln/>
+        </p:spPr>
+        <p:txBody>
+          <a:bodyPr wrap="square" rtlCol="0" anchor="ctr"/>
+          <a:lstStyle/>
           <a:p>
             <a:pPr indent="0" marL="0">
               <a:buNone/>
             </a:pPr>
             <a:r>
-              <a:rPr lang="en-US" sz="1600" dirty="0">
-                <a:solidFill>
-                  <a:srgbClr val="363636"/>
-                </a:solidFill>
-                <a:latin typeface="Calibri" pitchFamily="34" charset="0"/>
-                <a:ea typeface="Calibri" pitchFamily="34" charset="-122"/>
-                <a:cs typeface="Calibri" pitchFamily="34" charset="-120"/>
-              </a:rPr>
-              <a:t>Key points will be covered in class.</a:t>
-            </a:r>
-            <a:endParaRPr lang="en-US" sz="1600" dirty="0"/>
-          </a:p>
-        </p:txBody>
-      </p:sp>
-      <p:sp>
-        <p:nvSpPr>
-          <p:cNvPr id="5" name="Text 3"/>
-          <p:cNvSpPr/>
-          <p:nvPr/>
-        </p:nvSpPr>
-        <p:spPr>
-          <a:xfrm>
-            <a:off x="7772400" y="4663440"/>
-            <a:ext cx="1097280" cy="365760"/>
+              <a:rPr lang="en-US" sz="1200" b="1" dirty="0">
+                <a:solidFill>
+                  <a:srgbClr val="1B2A4A"/>
+                </a:solidFill>
+              </a:rPr>
+              <a:t>Solute</a:t>
+            </a:r>
+            <a:endParaRPr lang="en-US" sz="1200" dirty="0"/>
+          </a:p>
+          <a:p>
+            <a:pPr indent="0" marL="0">
+              <a:buNone/>
+            </a:pPr>
+            <a:r>
+              <a:rPr lang="en-US" sz="1000" dirty="0">
+                <a:solidFill>
+                  <a:srgbClr val="6B6660"/>
+                </a:solidFill>
+              </a:rPr>
+              <a:t>The substance that dissolves (e.g., salt)</a:t>
+            </a:r>
+            <a:endParaRPr lang="en-US" sz="1200" dirty="0"/>
+          </a:p>
+        </p:txBody>
+      </p:sp>
+      <p:sp>
+        <p:nvSpPr>
+          <p:cNvPr id="13" name="Shape 11"/>
+          <p:cNvSpPr/>
+          <p:nvPr/>
+        </p:nvSpPr>
+        <p:spPr>
+          <a:xfrm>
+            <a:off x="4480560" y="1828800"/>
+            <a:ext cx="3749040" cy="594360"/>
+          </a:xfrm>
+          <a:prstGeom prst="rect">
+            <a:avLst/>
+          </a:prstGeom>
+          <a:solidFill>
+            <a:srgbClr val="FFFFFF"/>
+          </a:solidFill>
+          <a:ln/>
+          <a:effectLst>
+            <a:outerShdw sx="100000" sy="100000" kx="0" ky="0" algn="bl" rotWithShape="0" blurRad="50800" dist="25400" dir="8100000">
+              <a:srgbClr val="000000">
+                <a:alpha val="10000"/>
+              </a:srgbClr>
+            </a:outerShdw>
+          </a:effectLst>
+        </p:spPr>
+      </p:sp>
+      <p:sp>
+        <p:nvSpPr>
+          <p:cNvPr id="14" name="Shape 12"/>
+          <p:cNvSpPr/>
+          <p:nvPr/>
+        </p:nvSpPr>
+        <p:spPr>
+          <a:xfrm>
+            <a:off x="4480560" y="1828800"/>
+            <a:ext cx="54864" cy="594360"/>
+          </a:xfrm>
+          <a:prstGeom prst="rect">
+            <a:avLst/>
+          </a:prstGeom>
+          <a:solidFill>
+            <a:srgbClr val="2A9D8F"/>
+          </a:solidFill>
+          <a:ln/>
+        </p:spPr>
+      </p:sp>
+      <p:sp>
+        <p:nvSpPr>
+          <p:cNvPr id="15" name="Text 13"/>
+          <p:cNvSpPr/>
+          <p:nvPr/>
+        </p:nvSpPr>
+        <p:spPr>
+          <a:xfrm>
+            <a:off x="4617720" y="1874520"/>
+            <a:ext cx="3520440" cy="502920"/>
           </a:xfrm>
           <a:prstGeom prst="rect">
             <a:avLst/>
@@ -1750,21 +1982,456 @@
           <a:bodyPr wrap="square" rtlCol="0" anchor="ctr"/>
           <a:lstStyle/>
           <a:p>
-            <a:pPr algn="r" indent="0" marL="0">
+            <a:pPr indent="0" marL="0">
               <a:buNone/>
             </a:pPr>
             <a:r>
+              <a:rPr lang="en-US" sz="1200" b="1" dirty="0">
+                <a:solidFill>
+                  <a:srgbClr val="1B2A4A"/>
+                </a:solidFill>
+              </a:rPr>
+              <a:t>Solvent</a:t>
+            </a:r>
+            <a:endParaRPr lang="en-US" sz="1200" dirty="0"/>
+          </a:p>
+          <a:p>
+            <a:pPr indent="0" marL="0">
+              <a:buNone/>
+            </a:pPr>
+            <a:r>
               <a:rPr lang="en-US" sz="1000" dirty="0">
                 <a:solidFill>
-                  <a:srgbClr val="999999"/>
-                </a:solidFill>
-                <a:latin typeface="Calibri" pitchFamily="34" charset="0"/>
-                <a:ea typeface="Calibri" pitchFamily="34" charset="-122"/>
-                <a:cs typeface="Calibri" pitchFamily="34" charset="-120"/>
-              </a:rPr>
-              <a:t>3 / 6</a:t>
-            </a:r>
-            <a:endParaRPr lang="en-US" sz="1000" dirty="0"/>
+                  <a:srgbClr val="6B6660"/>
+                </a:solidFill>
+              </a:rPr>
+              <a:t>The liquid that does the dissolving (e.g., water)</a:t>
+            </a:r>
+            <a:endParaRPr lang="en-US" sz="1200" dirty="0"/>
+          </a:p>
+        </p:txBody>
+      </p:sp>
+      <p:sp>
+        <p:nvSpPr>
+          <p:cNvPr id="16" name="Shape 14"/>
+          <p:cNvSpPr/>
+          <p:nvPr/>
+        </p:nvSpPr>
+        <p:spPr>
+          <a:xfrm>
+            <a:off x="548640" y="2560320"/>
+            <a:ext cx="3749040" cy="594360"/>
+          </a:xfrm>
+          <a:prstGeom prst="rect">
+            <a:avLst/>
+          </a:prstGeom>
+          <a:solidFill>
+            <a:srgbClr val="FFFFFF"/>
+          </a:solidFill>
+          <a:ln/>
+          <a:effectLst>
+            <a:outerShdw sx="100000" sy="100000" kx="0" ky="0" algn="bl" rotWithShape="0" blurRad="50800" dist="25400" dir="8100000">
+              <a:srgbClr val="000000">
+                <a:alpha val="10000"/>
+              </a:srgbClr>
+            </a:outerShdw>
+          </a:effectLst>
+        </p:spPr>
+      </p:sp>
+      <p:sp>
+        <p:nvSpPr>
+          <p:cNvPr id="17" name="Shape 15"/>
+          <p:cNvSpPr/>
+          <p:nvPr/>
+        </p:nvSpPr>
+        <p:spPr>
+          <a:xfrm>
+            <a:off x="548640" y="2560320"/>
+            <a:ext cx="54864" cy="594360"/>
+          </a:xfrm>
+          <a:prstGeom prst="rect">
+            <a:avLst/>
+          </a:prstGeom>
+          <a:solidFill>
+            <a:srgbClr val="2A9D8F"/>
+          </a:solidFill>
+          <a:ln/>
+        </p:spPr>
+      </p:sp>
+      <p:sp>
+        <p:nvSpPr>
+          <p:cNvPr id="18" name="Text 16"/>
+          <p:cNvSpPr/>
+          <p:nvPr/>
+        </p:nvSpPr>
+        <p:spPr>
+          <a:xfrm>
+            <a:off x="685800" y="2606040"/>
+            <a:ext cx="3520440" cy="502920"/>
+          </a:xfrm>
+          <a:prstGeom prst="rect">
+            <a:avLst/>
+          </a:prstGeom>
+          <a:noFill/>
+          <a:ln/>
+        </p:spPr>
+        <p:txBody>
+          <a:bodyPr wrap="square" rtlCol="0" anchor="ctr"/>
+          <a:lstStyle/>
+          <a:p>
+            <a:pPr indent="0" marL="0">
+              <a:buNone/>
+            </a:pPr>
+            <a:r>
+              <a:rPr lang="en-US" sz="1200" b="1" dirty="0">
+                <a:solidFill>
+                  <a:srgbClr val="1B2A4A"/>
+                </a:solidFill>
+              </a:rPr>
+              <a:t>Soluble</a:t>
+            </a:r>
+            <a:endParaRPr lang="en-US" sz="1200" dirty="0"/>
+          </a:p>
+          <a:p>
+            <a:pPr indent="0" marL="0">
+              <a:buNone/>
+            </a:pPr>
+            <a:r>
+              <a:rPr lang="en-US" sz="1000" dirty="0">
+                <a:solidFill>
+                  <a:srgbClr val="6B6660"/>
+                </a:solidFill>
+              </a:rPr>
+              <a:t>Able to dissolve in a liquid</a:t>
+            </a:r>
+            <a:endParaRPr lang="en-US" sz="1200" dirty="0"/>
+          </a:p>
+        </p:txBody>
+      </p:sp>
+      <p:sp>
+        <p:nvSpPr>
+          <p:cNvPr id="19" name="Shape 17"/>
+          <p:cNvSpPr/>
+          <p:nvPr/>
+        </p:nvSpPr>
+        <p:spPr>
+          <a:xfrm>
+            <a:off x="4480560" y="2560320"/>
+            <a:ext cx="3749040" cy="594360"/>
+          </a:xfrm>
+          <a:prstGeom prst="rect">
+            <a:avLst/>
+          </a:prstGeom>
+          <a:solidFill>
+            <a:srgbClr val="FFFFFF"/>
+          </a:solidFill>
+          <a:ln/>
+          <a:effectLst>
+            <a:outerShdw sx="100000" sy="100000" kx="0" ky="0" algn="bl" rotWithShape="0" blurRad="50800" dist="25400" dir="8100000">
+              <a:srgbClr val="000000">
+                <a:alpha val="10000"/>
+              </a:srgbClr>
+            </a:outerShdw>
+          </a:effectLst>
+        </p:spPr>
+      </p:sp>
+      <p:sp>
+        <p:nvSpPr>
+          <p:cNvPr id="20" name="Shape 18"/>
+          <p:cNvSpPr/>
+          <p:nvPr/>
+        </p:nvSpPr>
+        <p:spPr>
+          <a:xfrm>
+            <a:off x="4480560" y="2560320"/>
+            <a:ext cx="54864" cy="594360"/>
+          </a:xfrm>
+          <a:prstGeom prst="rect">
+            <a:avLst/>
+          </a:prstGeom>
+          <a:solidFill>
+            <a:srgbClr val="2A9D8F"/>
+          </a:solidFill>
+          <a:ln/>
+        </p:spPr>
+      </p:sp>
+      <p:sp>
+        <p:nvSpPr>
+          <p:cNvPr id="21" name="Text 19"/>
+          <p:cNvSpPr/>
+          <p:nvPr/>
+        </p:nvSpPr>
+        <p:spPr>
+          <a:xfrm>
+            <a:off x="4617720" y="2606040"/>
+            <a:ext cx="3520440" cy="502920"/>
+          </a:xfrm>
+          <a:prstGeom prst="rect">
+            <a:avLst/>
+          </a:prstGeom>
+          <a:noFill/>
+          <a:ln/>
+        </p:spPr>
+        <p:txBody>
+          <a:bodyPr wrap="square" rtlCol="0" anchor="ctr"/>
+          <a:lstStyle/>
+          <a:p>
+            <a:pPr indent="0" marL="0">
+              <a:buNone/>
+            </a:pPr>
+            <a:r>
+              <a:rPr lang="en-US" sz="1200" b="1" dirty="0">
+                <a:solidFill>
+                  <a:srgbClr val="1B2A4A"/>
+                </a:solidFill>
+              </a:rPr>
+              <a:t>Insoluble</a:t>
+            </a:r>
+            <a:endParaRPr lang="en-US" sz="1200" dirty="0"/>
+          </a:p>
+          <a:p>
+            <a:pPr indent="0" marL="0">
+              <a:buNone/>
+            </a:pPr>
+            <a:r>
+              <a:rPr lang="en-US" sz="1000" dirty="0">
+                <a:solidFill>
+                  <a:srgbClr val="6B6660"/>
+                </a:solidFill>
+              </a:rPr>
+              <a:t>Cannot dissolve (e.g., sand in water)</a:t>
+            </a:r>
+            <a:endParaRPr lang="en-US" sz="1200" dirty="0"/>
+          </a:p>
+        </p:txBody>
+      </p:sp>
+      <p:sp>
+        <p:nvSpPr>
+          <p:cNvPr id="22" name="Shape 20"/>
+          <p:cNvSpPr/>
+          <p:nvPr/>
+        </p:nvSpPr>
+        <p:spPr>
+          <a:xfrm>
+            <a:off x="548640" y="3291840"/>
+            <a:ext cx="3749040" cy="594360"/>
+          </a:xfrm>
+          <a:prstGeom prst="rect">
+            <a:avLst/>
+          </a:prstGeom>
+          <a:solidFill>
+            <a:srgbClr val="FFFFFF"/>
+          </a:solidFill>
+          <a:ln/>
+          <a:effectLst>
+            <a:outerShdw sx="100000" sy="100000" kx="0" ky="0" algn="bl" rotWithShape="0" blurRad="50800" dist="25400" dir="8100000">
+              <a:srgbClr val="000000">
+                <a:alpha val="10000"/>
+              </a:srgbClr>
+            </a:outerShdw>
+          </a:effectLst>
+        </p:spPr>
+      </p:sp>
+      <p:sp>
+        <p:nvSpPr>
+          <p:cNvPr id="23" name="Shape 21"/>
+          <p:cNvSpPr/>
+          <p:nvPr/>
+        </p:nvSpPr>
+        <p:spPr>
+          <a:xfrm>
+            <a:off x="548640" y="3291840"/>
+            <a:ext cx="54864" cy="594360"/>
+          </a:xfrm>
+          <a:prstGeom prst="rect">
+            <a:avLst/>
+          </a:prstGeom>
+          <a:solidFill>
+            <a:srgbClr val="2A9D8F"/>
+          </a:solidFill>
+          <a:ln/>
+        </p:spPr>
+      </p:sp>
+      <p:sp>
+        <p:nvSpPr>
+          <p:cNvPr id="24" name="Text 22"/>
+          <p:cNvSpPr/>
+          <p:nvPr/>
+        </p:nvSpPr>
+        <p:spPr>
+          <a:xfrm>
+            <a:off x="685800" y="3337560"/>
+            <a:ext cx="3520440" cy="502920"/>
+          </a:xfrm>
+          <a:prstGeom prst="rect">
+            <a:avLst/>
+          </a:prstGeom>
+          <a:noFill/>
+          <a:ln/>
+        </p:spPr>
+        <p:txBody>
+          <a:bodyPr wrap="square" rtlCol="0" anchor="ctr"/>
+          <a:lstStyle/>
+          <a:p>
+            <a:pPr indent="0" marL="0">
+              <a:buNone/>
+            </a:pPr>
+            <a:r>
+              <a:rPr lang="en-US" sz="1200" b="1" dirty="0">
+                <a:solidFill>
+                  <a:srgbClr val="1B2A4A"/>
+                </a:solidFill>
+              </a:rPr>
+              <a:t>Saturated</a:t>
+            </a:r>
+            <a:endParaRPr lang="en-US" sz="1200" dirty="0"/>
+          </a:p>
+          <a:p>
+            <a:pPr indent="0" marL="0">
+              <a:buNone/>
+            </a:pPr>
+            <a:r>
+              <a:rPr lang="en-US" sz="1000" dirty="0">
+                <a:solidFill>
+                  <a:srgbClr val="6B6660"/>
+                </a:solidFill>
+              </a:rPr>
+              <a:t>No more solute can dissolve at that temperature</a:t>
+            </a:r>
+            <a:endParaRPr lang="en-US" sz="1200" dirty="0"/>
+          </a:p>
+        </p:txBody>
+      </p:sp>
+      <p:sp>
+        <p:nvSpPr>
+          <p:cNvPr id="25" name="Shape 23"/>
+          <p:cNvSpPr/>
+          <p:nvPr/>
+        </p:nvSpPr>
+        <p:spPr>
+          <a:xfrm>
+            <a:off x="4480560" y="3291840"/>
+            <a:ext cx="3749040" cy="594360"/>
+          </a:xfrm>
+          <a:prstGeom prst="rect">
+            <a:avLst/>
+          </a:prstGeom>
+          <a:solidFill>
+            <a:srgbClr val="FFFFFF"/>
+          </a:solidFill>
+          <a:ln/>
+          <a:effectLst>
+            <a:outerShdw sx="100000" sy="100000" kx="0" ky="0" algn="bl" rotWithShape="0" blurRad="50800" dist="25400" dir="8100000">
+              <a:srgbClr val="000000">
+                <a:alpha val="10000"/>
+              </a:srgbClr>
+            </a:outerShdw>
+          </a:effectLst>
+        </p:spPr>
+      </p:sp>
+      <p:sp>
+        <p:nvSpPr>
+          <p:cNvPr id="26" name="Shape 24"/>
+          <p:cNvSpPr/>
+          <p:nvPr/>
+        </p:nvSpPr>
+        <p:spPr>
+          <a:xfrm>
+            <a:off x="4480560" y="3291840"/>
+            <a:ext cx="54864" cy="594360"/>
+          </a:xfrm>
+          <a:prstGeom prst="rect">
+            <a:avLst/>
+          </a:prstGeom>
+          <a:solidFill>
+            <a:srgbClr val="2A9D8F"/>
+          </a:solidFill>
+          <a:ln/>
+        </p:spPr>
+      </p:sp>
+      <p:sp>
+        <p:nvSpPr>
+          <p:cNvPr id="27" name="Text 25"/>
+          <p:cNvSpPr/>
+          <p:nvPr/>
+        </p:nvSpPr>
+        <p:spPr>
+          <a:xfrm>
+            <a:off x="4617720" y="3337560"/>
+            <a:ext cx="3520440" cy="502920"/>
+          </a:xfrm>
+          <a:prstGeom prst="rect">
+            <a:avLst/>
+          </a:prstGeom>
+          <a:noFill/>
+          <a:ln/>
+        </p:spPr>
+        <p:txBody>
+          <a:bodyPr wrap="square" rtlCol="0" anchor="ctr"/>
+          <a:lstStyle/>
+          <a:p>
+            <a:pPr indent="0" marL="0">
+              <a:buNone/>
+            </a:pPr>
+            <a:r>
+              <a:rPr lang="en-US" sz="1200" b="1" dirty="0">
+                <a:solidFill>
+                  <a:srgbClr val="1B2A4A"/>
+                </a:solidFill>
+              </a:rPr>
+              <a:t>Dissolving</a:t>
+            </a:r>
+            <a:endParaRPr lang="en-US" sz="1200" dirty="0"/>
+          </a:p>
+          <a:p>
+            <a:pPr indent="0" marL="0">
+              <a:buNone/>
+            </a:pPr>
+            <a:r>
+              <a:rPr lang="en-US" sz="1000" dirty="0">
+                <a:solidFill>
+                  <a:srgbClr val="6B6660"/>
+                </a:solidFill>
+              </a:rPr>
+              <a:t>Solute particles mix evenly between solvent particles</a:t>
+            </a:r>
+            <a:endParaRPr lang="en-US" sz="1200" dirty="0"/>
+          </a:p>
+        </p:txBody>
+      </p:sp>
+      <p:sp>
+        <p:nvSpPr>
+          <p:cNvPr id="28" name="Text 26"/>
+          <p:cNvSpPr/>
+          <p:nvPr/>
+        </p:nvSpPr>
+        <p:spPr>
+          <a:xfrm>
+            <a:off x="548640" y="4800600"/>
+            <a:ext cx="3657600" cy="274320"/>
+          </a:xfrm>
+          <a:prstGeom prst="rect">
+            <a:avLst/>
+          </a:prstGeom>
+          <a:noFill/>
+          <a:ln/>
+        </p:spPr>
+        <p:txBody>
+          <a:bodyPr wrap="square" rtlCol="0" anchor="ctr"/>
+          <a:lstStyle/>
+          <a:p>
+            <a:pPr indent="0" marL="0">
+              <a:buNone/>
+            </a:pPr>
+            <a:r>
+              <a:rPr lang="en-US" sz="800" dirty="0">
+                <a:solidFill>
+                  <a:srgbClr val="9B9690"/>
+                </a:solidFill>
+              </a:rPr>
+              <a:t>mrzocchi.com</a:t>
+            </a:r>
+            <a:endParaRPr lang="en-US" sz="800" dirty="0"/>
           </a:p>
         </p:txBody>
       </p:sp>
@@ -1779,6 +2446,13 @@
 <file path=ppt/slides/slide4.xml><?xml version="1.0" encoding="utf-8"?>
 <p:sld xmlns:a="http://schemas.openxmlformats.org/drawingml/2006/main" xmlns:r="http://schemas.openxmlformats.org/officeDocument/2006/relationships" xmlns:p="http://schemas.openxmlformats.org/presentationml/2006/main">
   <p:cSld name="Slide 4">
+    <p:bg>
+      <p:bgPr>
+        <a:solidFill>
+          <a:srgbClr val="1B2A4A"/>
+        </a:solidFill>
+      </p:bgPr>
+    </p:bg>
     <p:spTree>
       <p:nvGrpSpPr>
         <p:cNvPr id="1" name=""/>
@@ -1802,13 +2476,13 @@
         <p:spPr>
           <a:xfrm>
             <a:off x="0" y="0"/>
-            <a:ext cx="9144000" cy="548640"/>
-          </a:xfrm>
-          <a:prstGeom prst="rect">
-            <a:avLst/>
-          </a:prstGeom>
-          <a:solidFill>
-            <a:srgbClr val="7C3AED"/>
+            <a:ext cx="9144000" cy="54864"/>
+          </a:xfrm>
+          <a:prstGeom prst="rect">
+            <a:avLst/>
+          </a:prstGeom>
+          <a:solidFill>
+            <a:srgbClr val="2A9D8F"/>
           </a:solidFill>
           <a:ln/>
         </p:spPr>
@@ -1821,8 +2495,8 @@
         </p:nvSpPr>
         <p:spPr>
           <a:xfrm>
-            <a:off x="457200" y="45720"/>
-            <a:ext cx="8229600" cy="457200"/>
+            <a:off x="548640" y="457200"/>
+            <a:ext cx="8046720" cy="640080"/>
           </a:xfrm>
           <a:prstGeom prst="rect">
             <a:avLst/>
@@ -1838,176 +2512,136 @@
               <a:buNone/>
             </a:pPr>
             <a:r>
-              <a:rPr lang="en-US" sz="1800" b="1" dirty="0">
+              <a:rPr lang="en-US" sz="2800" b="1" dirty="0">
                 <a:solidFill>
                   <a:srgbClr val="FFFFFF"/>
+                </a:solidFill>
+                <a:latin typeface="Georgia" pitchFamily="34" charset="0"/>
+                <a:ea typeface="Georgia" pitchFamily="34" charset="-122"/>
+                <a:cs typeface="Georgia" pitchFamily="34" charset="-120"/>
+              </a:rPr>
+              <a:t>Key Takeaways</a:t>
+            </a:r>
+            <a:endParaRPr lang="en-US" sz="2800" dirty="0"/>
+          </a:p>
+        </p:txBody>
+      </p:sp>
+      <p:sp>
+        <p:nvSpPr>
+          <p:cNvPr id="4" name="Text 2"/>
+          <p:cNvSpPr/>
+          <p:nvPr/>
+        </p:nvSpPr>
+        <p:spPr>
+          <a:xfrm>
+            <a:off x="731520" y="1371600"/>
+            <a:ext cx="7680960" cy="3200400"/>
+          </a:xfrm>
+          <a:prstGeom prst="rect">
+            <a:avLst/>
+          </a:prstGeom>
+          <a:noFill/>
+          <a:ln/>
+        </p:spPr>
+        <p:txBody>
+          <a:bodyPr wrap="square" rtlCol="0" anchor="t"/>
+          <a:lstStyle/>
+          <a:p>
+            <a:pPr marL="342900" indent="-342900">
+              <a:spcAft>
+                <a:spcPts val="1000"/>
+              </a:spcAft>
+              <a:buSzPct val="100000"/>
+              <a:buChar char="•"/>
+            </a:pPr>
+            <a:r>
+              <a:rPr lang="en-US" sz="1600" dirty="0">
+                <a:solidFill>
+                  <a:srgbClr val="CADCFC"/>
                 </a:solidFill>
                 <a:latin typeface="Calibri" pitchFamily="34" charset="0"/>
                 <a:ea typeface="Calibri" pitchFamily="34" charset="-122"/>
                 <a:cs typeface="Calibri" pitchFamily="34" charset="-120"/>
               </a:rPr>
-              <a:t>Saturated solutions</a:t>
-            </a:r>
-            <a:endParaRPr lang="en-US" sz="1800" dirty="0"/>
-          </a:p>
-        </p:txBody>
-      </p:sp>
-      <p:sp>
-        <p:nvSpPr>
-          <p:cNvPr id="4" name="Text 2"/>
-          <p:cNvSpPr/>
-          <p:nvPr/>
-        </p:nvSpPr>
-        <p:spPr>
-          <a:xfrm>
-            <a:off x="731520" y="1097280"/>
-            <a:ext cx="7680960" cy="3200400"/>
-          </a:xfrm>
-          <a:prstGeom prst="rect">
-            <a:avLst/>
-          </a:prstGeom>
-          <a:noFill/>
-          <a:ln/>
-        </p:spPr>
-        <p:txBody>
-          <a:bodyPr wrap="square" rtlCol="0" anchor="ctr"/>
-          <a:lstStyle/>
-          <a:p>
-            <a:pPr indent="0" marL="0">
-              <a:buNone/>
+              <a:t>Mixtures are NOT chemically bonded — can be separated physically</a:t>
+            </a:r>
+            <a:endParaRPr lang="en-US" sz="1600" dirty="0"/>
+          </a:p>
+          <a:p>
+            <a:pPr marL="342900" indent="-342900">
+              <a:spcAft>
+                <a:spcPts val="1000"/>
+              </a:spcAft>
+              <a:buSzPct val="100000"/>
+              <a:buChar char="•"/>
             </a:pPr>
             <a:r>
               <a:rPr lang="en-US" sz="1600" dirty="0">
                 <a:solidFill>
-                  <a:srgbClr val="363636"/>
+                  <a:srgbClr val="CADCFC"/>
                 </a:solidFill>
                 <a:latin typeface="Calibri" pitchFamily="34" charset="0"/>
                 <a:ea typeface="Calibri" pitchFamily="34" charset="-122"/>
                 <a:cs typeface="Calibri" pitchFamily="34" charset="-120"/>
               </a:rPr>
-              <a:t>Content for: Saturated solutions</a:t>
+              <a:t>Solution = solute + solvent</a:t>
             </a:r>
             <a:endParaRPr lang="en-US" sz="1600" dirty="0"/>
           </a:p>
           <a:p>
-            <a:pPr indent="0" marL="0">
-              <a:buNone/>
-            </a:pPr>
-            <a:endParaRPr lang="en-US" sz="1600" dirty="0"/>
-          </a:p>
-          <a:p>
-            <a:pPr indent="0" marL="0">
-              <a:buNone/>
+            <a:pPr marL="342900" indent="-342900">
+              <a:spcAft>
+                <a:spcPts val="1000"/>
+              </a:spcAft>
+              <a:buSzPct val="100000"/>
+              <a:buChar char="•"/>
             </a:pPr>
             <a:r>
               <a:rPr lang="en-US" sz="1600" dirty="0">
                 <a:solidFill>
-                  <a:srgbClr val="363636"/>
+                  <a:srgbClr val="CADCFC"/>
                 </a:solidFill>
                 <a:latin typeface="Calibri" pitchFamily="34" charset="0"/>
                 <a:ea typeface="Calibri" pitchFamily="34" charset="-122"/>
                 <a:cs typeface="Calibri" pitchFamily="34" charset="-120"/>
               </a:rPr>
-              <a:t>Key points will be covered in class.</a:t>
+              <a:t>Soluble substances dissolve; insoluble substances don't</a:t>
             </a:r>
             <a:endParaRPr lang="en-US" sz="1600" dirty="0"/>
           </a:p>
-        </p:txBody>
-      </p:sp>
-      <p:sp>
-        <p:nvSpPr>
-          <p:cNvPr id="5" name="Text 3"/>
-          <p:cNvSpPr/>
-          <p:nvPr/>
-        </p:nvSpPr>
-        <p:spPr>
-          <a:xfrm>
-            <a:off x="7772400" y="4663440"/>
-            <a:ext cx="1097280" cy="365760"/>
-          </a:xfrm>
-          <a:prstGeom prst="rect">
-            <a:avLst/>
-          </a:prstGeom>
-          <a:noFill/>
-          <a:ln/>
-        </p:spPr>
-        <p:txBody>
-          <a:bodyPr wrap="square" rtlCol="0" anchor="ctr"/>
-          <a:lstStyle/>
-          <a:p>
-            <a:pPr algn="r" indent="0" marL="0">
-              <a:buNone/>
-            </a:pPr>
-            <a:r>
-              <a:rPr lang="en-US" sz="1000" dirty="0">
-                <a:solidFill>
-                  <a:srgbClr val="999999"/>
+          <a:p>
+            <a:pPr marL="342900" indent="-342900">
+              <a:spcAft>
+                <a:spcPts val="1000"/>
+              </a:spcAft>
+              <a:buSzPct val="100000"/>
+              <a:buChar char="•"/>
+            </a:pPr>
+            <a:r>
+              <a:rPr lang="en-US" sz="1600" dirty="0">
+                <a:solidFill>
+                  <a:srgbClr val="CADCFC"/>
                 </a:solidFill>
                 <a:latin typeface="Calibri" pitchFamily="34" charset="0"/>
                 <a:ea typeface="Calibri" pitchFamily="34" charset="-122"/>
                 <a:cs typeface="Calibri" pitchFamily="34" charset="-120"/>
               </a:rPr>
-              <a:t>4 / 6</a:t>
-            </a:r>
-            <a:endParaRPr lang="en-US" sz="1000" dirty="0"/>
-          </a:p>
-        </p:txBody>
-      </p:sp>
-    </p:spTree>
-  </p:cSld>
-  <p:clrMapOvr>
-    <a:masterClrMapping/>
-  </p:clrMapOvr>
-</p:sld>
-</file>
-
-<file path=ppt/slides/slide5.xml><?xml version="1.0" encoding="utf-8"?>
-<p:sld xmlns:a="http://schemas.openxmlformats.org/drawingml/2006/main" xmlns:r="http://schemas.openxmlformats.org/officeDocument/2006/relationships" xmlns:p="http://schemas.openxmlformats.org/presentationml/2006/main">
-  <p:cSld name="Slide 5">
-    <p:spTree>
-      <p:nvGrpSpPr>
-        <p:cNvPr id="1" name=""/>
-        <p:cNvGrpSpPr/>
-        <p:nvPr/>
-      </p:nvGrpSpPr>
-      <p:grpSpPr>
-        <a:xfrm>
-          <a:off x="0" y="0"/>
-          <a:ext cx="0" cy="0"/>
-          <a:chOff x="0" y="0"/>
-          <a:chExt cx="0" cy="0"/>
-        </a:xfrm>
-      </p:grpSpPr>
-      <p:sp>
-        <p:nvSpPr>
-          <p:cNvPr id="2" name="Shape 0"/>
-          <p:cNvSpPr/>
-          <p:nvPr/>
-        </p:nvSpPr>
-        <p:spPr>
-          <a:xfrm>
-            <a:off x="0" y="0"/>
-            <a:ext cx="9144000" cy="548640"/>
-          </a:xfrm>
-          <a:prstGeom prst="rect">
-            <a:avLst/>
-          </a:prstGeom>
-          <a:solidFill>
-            <a:srgbClr val="7C3AED"/>
-          </a:solidFill>
-          <a:ln/>
-        </p:spPr>
-      </p:sp>
-      <p:sp>
-        <p:nvSpPr>
-          <p:cNvPr id="3" name="Text 1"/>
-          <p:cNvSpPr/>
-          <p:nvPr/>
-        </p:nvSpPr>
-        <p:spPr>
-          <a:xfrm>
-            <a:off x="457200" y="45720"/>
-            <a:ext cx="8229600" cy="457200"/>
+              <a:t>Heating usually helps more solute dissolve</a:t>
+            </a:r>
+            <a:endParaRPr lang="en-US" sz="1600" dirty="0"/>
+          </a:p>
+        </p:txBody>
+      </p:sp>
+      <p:sp>
+        <p:nvSpPr>
+          <p:cNvPr id="5" name="Text 3"/>
+          <p:cNvSpPr/>
+          <p:nvPr/>
+        </p:nvSpPr>
+        <p:spPr>
+          <a:xfrm>
+            <a:off x="548640" y="4572000"/>
+            <a:ext cx="3657600" cy="274320"/>
           </a:xfrm>
           <a:prstGeom prst="rect">
             <a:avLst/>
@@ -2023,301 +2657,12 @@
               <a:buNone/>
             </a:pPr>
             <a:r>
-              <a:rPr lang="en-US" sz="1800" b="1" dirty="0">
-                <a:solidFill>
-                  <a:srgbClr val="FFFFFF"/>
-                </a:solidFill>
-                <a:latin typeface="Calibri" pitchFamily="34" charset="0"/>
-                <a:ea typeface="Calibri" pitchFamily="34" charset="-122"/>
-                <a:cs typeface="Calibri" pitchFamily="34" charset="-120"/>
-              </a:rPr>
-              <a:t>Suspensions &amp; colloids</a:t>
-            </a:r>
-            <a:endParaRPr lang="en-US" sz="1800" dirty="0"/>
-          </a:p>
-        </p:txBody>
-      </p:sp>
-      <p:sp>
-        <p:nvSpPr>
-          <p:cNvPr id="4" name="Text 2"/>
-          <p:cNvSpPr/>
-          <p:nvPr/>
-        </p:nvSpPr>
-        <p:spPr>
-          <a:xfrm>
-            <a:off x="731520" y="1097280"/>
-            <a:ext cx="7680960" cy="3200400"/>
-          </a:xfrm>
-          <a:prstGeom prst="rect">
-            <a:avLst/>
-          </a:prstGeom>
-          <a:noFill/>
-          <a:ln/>
-        </p:spPr>
-        <p:txBody>
-          <a:bodyPr wrap="square" rtlCol="0" anchor="ctr"/>
-          <a:lstStyle/>
-          <a:p>
-            <a:pPr indent="0" marL="0">
-              <a:buNone/>
-            </a:pPr>
-            <a:r>
-              <a:rPr lang="en-US" sz="1600" dirty="0">
-                <a:solidFill>
-                  <a:srgbClr val="363636"/>
-                </a:solidFill>
-                <a:latin typeface="Calibri" pitchFamily="34" charset="0"/>
-                <a:ea typeface="Calibri" pitchFamily="34" charset="-122"/>
-                <a:cs typeface="Calibri" pitchFamily="34" charset="-120"/>
-              </a:rPr>
-              <a:t>Content for: Suspensions &amp; colloids</a:t>
-            </a:r>
-            <a:endParaRPr lang="en-US" sz="1600" dirty="0"/>
-          </a:p>
-          <a:p>
-            <a:pPr indent="0" marL="0">
-              <a:buNone/>
-            </a:pPr>
-            <a:endParaRPr lang="en-US" sz="1600" dirty="0"/>
-          </a:p>
-          <a:p>
-            <a:pPr indent="0" marL="0">
-              <a:buNone/>
-            </a:pPr>
-            <a:r>
-              <a:rPr lang="en-US" sz="1600" dirty="0">
-                <a:solidFill>
-                  <a:srgbClr val="363636"/>
-                </a:solidFill>
-                <a:latin typeface="Calibri" pitchFamily="34" charset="0"/>
-                <a:ea typeface="Calibri" pitchFamily="34" charset="-122"/>
-                <a:cs typeface="Calibri" pitchFamily="34" charset="-120"/>
-              </a:rPr>
-              <a:t>Key points will be covered in class.</a:t>
-            </a:r>
-            <a:endParaRPr lang="en-US" sz="1600" dirty="0"/>
-          </a:p>
-        </p:txBody>
-      </p:sp>
-      <p:sp>
-        <p:nvSpPr>
-          <p:cNvPr id="5" name="Text 3"/>
-          <p:cNvSpPr/>
-          <p:nvPr/>
-        </p:nvSpPr>
-        <p:spPr>
-          <a:xfrm>
-            <a:off x="7772400" y="4663440"/>
-            <a:ext cx="1097280" cy="365760"/>
-          </a:xfrm>
-          <a:prstGeom prst="rect">
-            <a:avLst/>
-          </a:prstGeom>
-          <a:noFill/>
-          <a:ln/>
-        </p:spPr>
-        <p:txBody>
-          <a:bodyPr wrap="square" rtlCol="0" anchor="ctr"/>
-          <a:lstStyle/>
-          <a:p>
-            <a:pPr algn="r" indent="0" marL="0">
-              <a:buNone/>
-            </a:pPr>
-            <a:r>
               <a:rPr lang="en-US" sz="1000" dirty="0">
                 <a:solidFill>
-                  <a:srgbClr val="999999"/>
-                </a:solidFill>
-                <a:latin typeface="Calibri" pitchFamily="34" charset="0"/>
-                <a:ea typeface="Calibri" pitchFamily="34" charset="-122"/>
-                <a:cs typeface="Calibri" pitchFamily="34" charset="-120"/>
-              </a:rPr>
-              <a:t>5 / 6</a:t>
-            </a:r>
-            <a:endParaRPr lang="en-US" sz="1000" dirty="0"/>
-          </a:p>
-        </p:txBody>
-      </p:sp>
-    </p:spTree>
-  </p:cSld>
-  <p:clrMapOvr>
-    <a:masterClrMapping/>
-  </p:clrMapOvr>
-</p:sld>
-</file>
-
-<file path=ppt/slides/slide6.xml><?xml version="1.0" encoding="utf-8"?>
-<p:sld xmlns:a="http://schemas.openxmlformats.org/drawingml/2006/main" xmlns:r="http://schemas.openxmlformats.org/officeDocument/2006/relationships" xmlns:p="http://schemas.openxmlformats.org/presentationml/2006/main">
-  <p:cSld name="Slide 6">
-    <p:spTree>
-      <p:nvGrpSpPr>
-        <p:cNvPr id="1" name=""/>
-        <p:cNvGrpSpPr/>
-        <p:nvPr/>
-      </p:nvGrpSpPr>
-      <p:grpSpPr>
-        <a:xfrm>
-          <a:off x="0" y="0"/>
-          <a:ext cx="0" cy="0"/>
-          <a:chOff x="0" y="0"/>
-          <a:chExt cx="0" cy="0"/>
-        </a:xfrm>
-      </p:grpSpPr>
-      <p:sp>
-        <p:nvSpPr>
-          <p:cNvPr id="2" name="Shape 0"/>
-          <p:cNvSpPr/>
-          <p:nvPr/>
-        </p:nvSpPr>
-        <p:spPr>
-          <a:xfrm>
-            <a:off x="0" y="0"/>
-            <a:ext cx="9144000" cy="548640"/>
-          </a:xfrm>
-          <a:prstGeom prst="rect">
-            <a:avLst/>
-          </a:prstGeom>
-          <a:solidFill>
-            <a:srgbClr val="7C3AED"/>
-          </a:solidFill>
-          <a:ln/>
-        </p:spPr>
-      </p:sp>
-      <p:sp>
-        <p:nvSpPr>
-          <p:cNvPr id="3" name="Text 1"/>
-          <p:cNvSpPr/>
-          <p:nvPr/>
-        </p:nvSpPr>
-        <p:spPr>
-          <a:xfrm>
-            <a:off x="457200" y="45720"/>
-            <a:ext cx="8229600" cy="457200"/>
-          </a:xfrm>
-          <a:prstGeom prst="rect">
-            <a:avLst/>
-          </a:prstGeom>
-          <a:noFill/>
-          <a:ln/>
-        </p:spPr>
-        <p:txBody>
-          <a:bodyPr wrap="square" rtlCol="0" anchor="ctr"/>
-          <a:lstStyle/>
-          <a:p>
-            <a:pPr indent="0" marL="0">
-              <a:buNone/>
-            </a:pPr>
-            <a:r>
-              <a:rPr lang="en-US" sz="1800" b="1" dirty="0">
-                <a:solidFill>
-                  <a:srgbClr val="FFFFFF"/>
-                </a:solidFill>
-                <a:latin typeface="Calibri" pitchFamily="34" charset="0"/>
-                <a:ea typeface="Calibri" pitchFamily="34" charset="-122"/>
-                <a:cs typeface="Calibri" pitchFamily="34" charset="-120"/>
-              </a:rPr>
-              <a:t>Everyday examples</a:t>
-            </a:r>
-            <a:endParaRPr lang="en-US" sz="1800" dirty="0"/>
-          </a:p>
-        </p:txBody>
-      </p:sp>
-      <p:sp>
-        <p:nvSpPr>
-          <p:cNvPr id="4" name="Text 2"/>
-          <p:cNvSpPr/>
-          <p:nvPr/>
-        </p:nvSpPr>
-        <p:spPr>
-          <a:xfrm>
-            <a:off x="731520" y="1097280"/>
-            <a:ext cx="7680960" cy="3200400"/>
-          </a:xfrm>
-          <a:prstGeom prst="rect">
-            <a:avLst/>
-          </a:prstGeom>
-          <a:noFill/>
-          <a:ln/>
-        </p:spPr>
-        <p:txBody>
-          <a:bodyPr wrap="square" rtlCol="0" anchor="ctr"/>
-          <a:lstStyle/>
-          <a:p>
-            <a:pPr indent="0" marL="0">
-              <a:buNone/>
-            </a:pPr>
-            <a:r>
-              <a:rPr lang="en-US" sz="1600" dirty="0">
-                <a:solidFill>
-                  <a:srgbClr val="363636"/>
-                </a:solidFill>
-                <a:latin typeface="Calibri" pitchFamily="34" charset="0"/>
-                <a:ea typeface="Calibri" pitchFamily="34" charset="-122"/>
-                <a:cs typeface="Calibri" pitchFamily="34" charset="-120"/>
-              </a:rPr>
-              <a:t>Content for: Everyday examples</a:t>
-            </a:r>
-            <a:endParaRPr lang="en-US" sz="1600" dirty="0"/>
-          </a:p>
-          <a:p>
-            <a:pPr indent="0" marL="0">
-              <a:buNone/>
-            </a:pPr>
-            <a:endParaRPr lang="en-US" sz="1600" dirty="0"/>
-          </a:p>
-          <a:p>
-            <a:pPr indent="0" marL="0">
-              <a:buNone/>
-            </a:pPr>
-            <a:r>
-              <a:rPr lang="en-US" sz="1600" dirty="0">
-                <a:solidFill>
-                  <a:srgbClr val="363636"/>
-                </a:solidFill>
-                <a:latin typeface="Calibri" pitchFamily="34" charset="0"/>
-                <a:ea typeface="Calibri" pitchFamily="34" charset="-122"/>
-                <a:cs typeface="Calibri" pitchFamily="34" charset="-120"/>
-              </a:rPr>
-              <a:t>Key points will be covered in class.</a:t>
-            </a:r>
-            <a:endParaRPr lang="en-US" sz="1600" dirty="0"/>
-          </a:p>
-        </p:txBody>
-      </p:sp>
-      <p:sp>
-        <p:nvSpPr>
-          <p:cNvPr id="5" name="Text 3"/>
-          <p:cNvSpPr/>
-          <p:nvPr/>
-        </p:nvSpPr>
-        <p:spPr>
-          <a:xfrm>
-            <a:off x="7772400" y="4663440"/>
-            <a:ext cx="1097280" cy="365760"/>
-          </a:xfrm>
-          <a:prstGeom prst="rect">
-            <a:avLst/>
-          </a:prstGeom>
-          <a:noFill/>
-          <a:ln/>
-        </p:spPr>
-        <p:txBody>
-          <a:bodyPr wrap="square" rtlCol="0" anchor="ctr"/>
-          <a:lstStyle/>
-          <a:p>
-            <a:pPr algn="r" indent="0" marL="0">
-              <a:buNone/>
-            </a:pPr>
-            <a:r>
-              <a:rPr lang="en-US" sz="1000" dirty="0">
-                <a:solidFill>
-                  <a:srgbClr val="999999"/>
-                </a:solidFill>
-                <a:latin typeface="Calibri" pitchFamily="34" charset="0"/>
-                <a:ea typeface="Calibri" pitchFamily="34" charset="-122"/>
-                <a:cs typeface="Calibri" pitchFamily="34" charset="-120"/>
-              </a:rPr>
-              <a:t>6 / 6</a:t>
+                  <a:srgbClr val="6B6660"/>
+                </a:solidFill>
+              </a:rPr>
+              <a:t>mrzocchi.com</a:t>
             </a:r>
             <a:endParaRPr lang="en-US" sz="1000" dirty="0"/>
           </a:p>

--- a/static/ppts/G6_Sci_T2_Mixtures.pptx
+++ b/static/ppts/G6_Sci_T2_Mixtures.pptx
@@ -9,9 +9,10 @@
     <p:sldId id="257" r:id="rId3"/>
     <p:sldId id="258" r:id="rId4"/>
     <p:sldId id="259" r:id="rId5"/>
+    <p:sldId id="260" r:id="rId6"/>
   </p:sldIdLst>
   <p:notesMasterIdLst>
-    <p:notesMasterId r:id="rId6"/>
+    <p:notesMasterId r:id="rId7"/>
   </p:notesMasterIdLst>
   <p:sldSz cx="9144000" cy="5143500"/>
   <p:notesSz cx="5143500" cy="9144000"/>
@@ -811,6 +812,94 @@
 </p:notes>
 </file>
 
+<file path=ppt/notesSlides/notesSlide5.xml><?xml version="1.0" encoding="utf-8"?>
+<p:notes xmlns:a="http://schemas.openxmlformats.org/drawingml/2006/main" xmlns:r="http://schemas.openxmlformats.org/officeDocument/2006/relationships" xmlns:p="http://schemas.openxmlformats.org/presentationml/2006/main">
+  <p:cSld>
+    <p:spTree>
+      <p:nvGrpSpPr>
+        <p:cNvPr id="1" name=""/>
+        <p:cNvGrpSpPr/>
+        <p:nvPr/>
+      </p:nvGrpSpPr>
+      <p:grpSpPr>
+        <a:xfrm>
+          <a:off x="0" y="0"/>
+          <a:ext cx="0" cy="0"/>
+          <a:chOff x="0" y="0"/>
+          <a:chExt cx="0" cy="0"/>
+        </a:xfrm>
+      </p:grpSpPr>
+      <p:sp>
+        <p:nvSpPr>
+          <p:cNvPr id="2" name="Slide Image Placeholder 1"/>
+          <p:cNvSpPr>
+            <a:spLocks noGrp="1" noRot="1" noChangeAspect="1"/>
+          </p:cNvSpPr>
+          <p:nvPr>
+            <p:ph type="sldImg"/>
+          </p:nvPr>
+        </p:nvSpPr>
+        <p:spPr/>
+      </p:sp>
+      <p:sp>
+        <p:nvSpPr>
+          <p:cNvPr id="3" name="Notes Placeholder 2"/>
+          <p:cNvSpPr>
+            <a:spLocks noGrp="1"/>
+          </p:cNvSpPr>
+          <p:nvPr>
+            <p:ph type="body" idx="1"/>
+          </p:nvPr>
+        </p:nvSpPr>
+        <p:spPr/>
+        <p:txBody>
+          <a:bodyPr/>
+          <a:lstStyle/>
+          <a:p>
+            <a:r>
+              <a:rPr lang="en-US" dirty="0"/>
+              <a:t/>
+            </a:r>
+            <a:endParaRPr lang="en-US" dirty="0"/>
+          </a:p>
+        </p:txBody>
+      </p:sp>
+      <p:sp>
+        <p:nvSpPr>
+          <p:cNvPr id="4" name="Slide Number Placeholder 3"/>
+          <p:cNvSpPr>
+            <a:spLocks noGrp="1"/>
+          </p:cNvSpPr>
+          <p:nvPr>
+            <p:ph type="sldNum" sz="quarter" idx="10"/>
+          </p:nvPr>
+        </p:nvSpPr>
+        <p:spPr/>
+        <p:txBody>
+          <a:bodyPr/>
+          <a:lstStyle/>
+          <a:p>
+            <a:fld id="{F7021451-1387-4CA6-816F-3879F97B5CBC}" type="slidenum">
+              <a:rPr lang="en-US"/>
+              <a:t>5</a:t>
+            </a:fld>
+            <a:endParaRPr lang="en-US"/>
+          </a:p>
+        </p:txBody>
+      </p:sp>
+    </p:spTree>
+    <p:extLst>
+      <p:ext uri="{BB962C8B-B14F-4D97-AF65-F5344CB8AC3E}">
+        <p14:creationId xmlns:p14="http://schemas.microsoft.com/office/powerpoint/2010/main" val="1024086991"/>
+      </p:ext>
+    </p:extLst>
+  </p:cSld>
+  <p:clrMapOvr>
+    <a:masterClrMapping/>
+  </p:clrMapOvr>
+</p:notes>
+</file>
+
 <file path=ppt/slideLayouts/slideLayout1.xml><?xml version="1.0" encoding="utf-8"?>
 <p:sldLayout xmlns:a="http://schemas.openxmlformats.org/drawingml/2006/main" xmlns:r="http://schemas.openxmlformats.org/officeDocument/2006/relationships" xmlns:p="http://schemas.openxmlformats.org/presentationml/2006/main" preserve="1">
   <p:cSld name="DEFAULT">
@@ -1170,7 +1259,7 @@
         </p:nvSpPr>
         <p:spPr>
           <a:xfrm>
-            <a:off x="731520" y="1280160"/>
+            <a:off x="731520" y="1097280"/>
             <a:ext cx="7772400" cy="1371600"/>
           </a:xfrm>
           <a:prstGeom prst="rect">
@@ -1187,7 +1276,7 @@
               <a:buNone/>
             </a:pPr>
             <a:r>
-              <a:rPr lang="en-US" sz="3600" b="1" dirty="0">
+              <a:rPr lang="en-US" sz="4000" b="1" dirty="0">
                 <a:solidFill>
                   <a:srgbClr val="FFFFFF"/>
                 </a:solidFill>
@@ -1197,7 +1286,7 @@
               </a:rPr>
               <a:t>Mixtures &amp; Solutions</a:t>
             </a:r>
-            <a:endParaRPr lang="en-US" sz="3600" dirty="0"/>
+            <a:endParaRPr lang="en-US" sz="4000" dirty="0"/>
           </a:p>
         </p:txBody>
       </p:sp>
@@ -1209,7 +1298,7 @@
         </p:nvSpPr>
         <p:spPr>
           <a:xfrm>
-            <a:off x="731520" y="2743200"/>
+            <a:off x="731520" y="2560320"/>
             <a:ext cx="7772400" cy="548640"/>
           </a:xfrm>
           <a:prstGeom prst="rect">
@@ -1228,13 +1317,13 @@
             <a:r>
               <a:rPr lang="en-US" sz="1600" dirty="0">
                 <a:solidFill>
-                  <a:srgbClr val="9B9690"/>
+                  <a:srgbClr val="E9C46A"/>
                 </a:solidFill>
                 <a:latin typeface="Calibri" pitchFamily="34" charset="0"/>
                 <a:ea typeface="Calibri" pitchFamily="34" charset="-122"/>
                 <a:cs typeface="Calibri" pitchFamily="34" charset="-120"/>
               </a:rPr>
-              <a:t>G6 Science · Chemistry</a:t>
+              <a:t>Grade 6 Science · Mr Zocchi</a:t>
             </a:r>
             <a:endParaRPr lang="en-US" sz="1600" dirty="0"/>
           </a:p>
@@ -1242,14 +1331,36 @@
       </p:sp>
       <p:sp>
         <p:nvSpPr>
-          <p:cNvPr id="5" name="Text 3"/>
-          <p:cNvSpPr/>
-          <p:nvPr/>
-        </p:nvSpPr>
-        <p:spPr>
-          <a:xfrm>
-            <a:off x="731520" y="4389120"/>
-            <a:ext cx="7772400" cy="457200"/>
+          <p:cNvPr id="5" name="Shape 3"/>
+          <p:cNvSpPr/>
+          <p:nvPr/>
+        </p:nvSpPr>
+        <p:spPr>
+          <a:xfrm>
+            <a:off x="731520" y="3474720"/>
+            <a:ext cx="2011680" cy="411480"/>
+          </a:xfrm>
+          <a:prstGeom prst="roundRect">
+            <a:avLst>
+              <a:gd name="adj" fmla="val 17778"/>
+            </a:avLst>
+          </a:prstGeom>
+          <a:solidFill>
+            <a:srgbClr val="2A9D8F"/>
+          </a:solidFill>
+          <a:ln/>
+        </p:spPr>
+      </p:sp>
+      <p:sp>
+        <p:nvSpPr>
+          <p:cNvPr id="6" name="Text 4"/>
+          <p:cNvSpPr/>
+          <p:nvPr/>
+        </p:nvSpPr>
+        <p:spPr>
+          <a:xfrm>
+            <a:off x="731520" y="3474720"/>
+            <a:ext cx="2011680" cy="411480"/>
           </a:xfrm>
           <a:prstGeom prst="rect">
             <a:avLst/>
@@ -1261,21 +1372,21 @@
           <a:bodyPr wrap="square" rtlCol="0" anchor="ctr"/>
           <a:lstStyle/>
           <a:p>
-            <a:pPr indent="0" marL="0">
+            <a:pPr algn="ctr" indent="0" marL="0">
               <a:buNone/>
             </a:pPr>
             <a:r>
-              <a:rPr lang="en-US" sz="1000" dirty="0">
-                <a:solidFill>
-                  <a:srgbClr val="6B6660"/>
+              <a:rPr lang="en-US" sz="1200" b="1" dirty="0">
+                <a:solidFill>
+                  <a:srgbClr val="FFFFFF"/>
                 </a:solidFill>
                 <a:latin typeface="Calibri" pitchFamily="34" charset="0"/>
                 <a:ea typeface="Calibri" pitchFamily="34" charset="-122"/>
                 <a:cs typeface="Calibri" pitchFamily="34" charset="-120"/>
               </a:rPr>
-              <a:t>Mr Zocchi · mrzocchi.com</a:t>
-            </a:r>
-            <a:endParaRPr lang="en-US" sz="1000" dirty="0"/>
+              <a:t>Term 2 · Chemistry</a:t>
+            </a:r>
+            <a:endParaRPr lang="en-US" sz="1200" dirty="0"/>
           </a:p>
         </p:txBody>
       </p:sp>
@@ -1293,7 +1404,7 @@
     <p:bg>
       <p:bgPr>
         <a:solidFill>
-          <a:srgbClr val="FFFFFF"/>
+          <a:srgbClr val="FAF8F5"/>
         </a:solidFill>
       </p:bgPr>
     </p:bg>
@@ -1339,8 +1450,8 @@
         </p:nvSpPr>
         <p:spPr>
           <a:xfrm>
-            <a:off x="548640" y="274320"/>
-            <a:ext cx="8046720" cy="640080"/>
+            <a:off x="7772400" y="4709160"/>
+            <a:ext cx="1097280" cy="320040"/>
           </a:xfrm>
           <a:prstGeom prst="rect">
             <a:avLst/>
@@ -1349,14 +1460,105 @@
           <a:ln/>
         </p:spPr>
         <p:txBody>
-          <a:bodyPr wrap="square" lIns="0" tIns="0" rIns="0" bIns="0" rtlCol="0" anchor="ctr"/>
+          <a:bodyPr wrap="square" rtlCol="0" anchor="ctr"/>
+          <a:lstStyle/>
+          <a:p>
+            <a:pPr algn="r" indent="0" marL="0">
+              <a:buNone/>
+            </a:pPr>
+            <a:r>
+              <a:rPr lang="en-US" sz="900" dirty="0">
+                <a:solidFill>
+                  <a:srgbClr val="6B6660"/>
+                </a:solidFill>
+                <a:latin typeface="Calibri" pitchFamily="34" charset="0"/>
+                <a:ea typeface="Calibri" pitchFamily="34" charset="-122"/>
+                <a:cs typeface="Calibri" pitchFamily="34" charset="-120"/>
+              </a:rPr>
+              <a:t>2 / 5</a:t>
+            </a:r>
+            <a:endParaRPr lang="en-US" sz="900" dirty="0"/>
+          </a:p>
+        </p:txBody>
+      </p:sp>
+      <p:sp>
+        <p:nvSpPr>
+          <p:cNvPr id="4" name="Shape 2"/>
+          <p:cNvSpPr/>
+          <p:nvPr/>
+        </p:nvSpPr>
+        <p:spPr>
+          <a:xfrm>
+            <a:off x="1371600" y="914400"/>
+            <a:ext cx="6400800" cy="3200400"/>
+          </a:xfrm>
+          <a:prstGeom prst="rect">
+            <a:avLst/>
+          </a:prstGeom>
+          <a:solidFill>
+            <a:srgbClr val="FFFFFF"/>
+          </a:solidFill>
+          <a:ln w="12700">
+            <a:solidFill>
+              <a:srgbClr val="E5E2DC"/>
+            </a:solidFill>
+            <a:prstDash val="solid"/>
+          </a:ln>
+          <a:effectLst>
+            <a:outerShdw sx="100000" sy="100000" kx="0" ky="0" algn="bl" rotWithShape="0" blurRad="50800" dist="25400" dir="8100000">
+              <a:srgbClr val="000000">
+                <a:alpha val="10000"/>
+              </a:srgbClr>
+            </a:outerShdw>
+          </a:effectLst>
+        </p:spPr>
+      </p:sp>
+      <p:sp>
+        <p:nvSpPr>
+          <p:cNvPr id="5" name="Shape 3"/>
+          <p:cNvSpPr/>
+          <p:nvPr/>
+        </p:nvSpPr>
+        <p:spPr>
+          <a:xfrm>
+            <a:off x="1371600" y="914400"/>
+            <a:ext cx="91440" cy="3200400"/>
+          </a:xfrm>
+          <a:prstGeom prst="rect">
+            <a:avLst/>
+          </a:prstGeom>
+          <a:solidFill>
+            <a:srgbClr val="2A9D8F"/>
+          </a:solidFill>
+          <a:ln/>
+        </p:spPr>
+      </p:sp>
+      <p:sp>
+        <p:nvSpPr>
+          <p:cNvPr id="6" name="Text 4"/>
+          <p:cNvSpPr/>
+          <p:nvPr/>
+        </p:nvSpPr>
+        <p:spPr>
+          <a:xfrm>
+            <a:off x="1828800" y="1097280"/>
+            <a:ext cx="5669280" cy="640080"/>
+          </a:xfrm>
+          <a:prstGeom prst="rect">
+            <a:avLst/>
+          </a:prstGeom>
+          <a:noFill/>
+          <a:ln/>
+        </p:spPr>
+        <p:txBody>
+          <a:bodyPr wrap="square" rtlCol="0" anchor="ctr"/>
           <a:lstStyle/>
           <a:p>
             <a:pPr indent="0" marL="0">
               <a:buNone/>
             </a:pPr>
             <a:r>
-              <a:rPr lang="en-US" sz="2600" b="1" dirty="0">
+              <a:rPr lang="en-US" sz="2400" b="1" dirty="0">
                 <a:solidFill>
                   <a:srgbClr val="1B2A4A"/>
                 </a:solidFill>
@@ -1366,20 +1568,20 @@
               </a:rPr>
               <a:t>What is a Mixture?</a:t>
             </a:r>
-            <a:endParaRPr lang="en-US" sz="2600" dirty="0"/>
-          </a:p>
-        </p:txBody>
-      </p:sp>
-      <p:sp>
-        <p:nvSpPr>
-          <p:cNvPr id="4" name="Text 2"/>
-          <p:cNvSpPr/>
-          <p:nvPr/>
-        </p:nvSpPr>
-        <p:spPr>
-          <a:xfrm>
-            <a:off x="548640" y="1097280"/>
-            <a:ext cx="8046720" cy="3474720"/>
+            <a:endParaRPr lang="en-US" sz="2400" dirty="0"/>
+          </a:p>
+        </p:txBody>
+      </p:sp>
+      <p:sp>
+        <p:nvSpPr>
+          <p:cNvPr id="7" name="Text 5"/>
+          <p:cNvSpPr/>
+          <p:nvPr/>
+        </p:nvSpPr>
+        <p:spPr>
+          <a:xfrm>
+            <a:off x="1828800" y="1828800"/>
+            <a:ext cx="5669280" cy="2011680"/>
           </a:xfrm>
           <a:prstGeom prst="rect">
             <a:avLst/>
@@ -1391,12 +1593,11 @@
           <a:bodyPr wrap="square" rtlCol="0" anchor="t"/>
           <a:lstStyle/>
           <a:p>
-            <a:pPr marL="342900" indent="-342900">
-              <a:spcAft>
-                <a:spcPts val="800"/>
-              </a:spcAft>
-              <a:buSzPct val="100000"/>
-              <a:buChar char="•"/>
+            <a:pPr indent="0" marL="0">
+              <a:lnSpc>
+                <a:spcPct val="130000"/>
+              </a:lnSpc>
+              <a:buNone/>
             </a:pPr>
             <a:r>
               <a:rPr lang="en-US" sz="1500" dirty="0">
@@ -1407,128 +1608,9 @@
                 <a:ea typeface="Calibri" pitchFamily="34" charset="-122"/>
                 <a:cs typeface="Calibri" pitchFamily="34" charset="-120"/>
               </a:rPr>
-              <a:t>Two or more substances combined but NOT chemically joined</a:t>
+              <a:t>A mixture is two or more substances combined together that are NOT chemically bonded. Each substance keeps its own properties. Mixtures can be separated by physical methods. Examples: salt water, air, sand and iron filings.</a:t>
             </a:r>
             <a:endParaRPr lang="en-US" sz="1500" dirty="0"/>
-          </a:p>
-          <a:p>
-            <a:pPr marL="342900" indent="-342900">
-              <a:spcAft>
-                <a:spcPts val="800"/>
-              </a:spcAft>
-              <a:buSzPct val="100000"/>
-              <a:buChar char="•"/>
-            </a:pPr>
-            <a:r>
-              <a:rPr lang="en-US" sz="1500" dirty="0">
-                <a:solidFill>
-                  <a:srgbClr val="3D3A36"/>
-                </a:solidFill>
-                <a:latin typeface="Calibri" pitchFamily="34" charset="0"/>
-                <a:ea typeface="Calibri" pitchFamily="34" charset="-122"/>
-                <a:cs typeface="Calibri" pitchFamily="34" charset="-120"/>
-              </a:rPr>
-              <a:t>Each substance keeps its own properties</a:t>
-            </a:r>
-            <a:endParaRPr lang="en-US" sz="1500" dirty="0"/>
-          </a:p>
-          <a:p>
-            <a:pPr marL="342900" indent="-342900">
-              <a:spcAft>
-                <a:spcPts val="800"/>
-              </a:spcAft>
-              <a:buSzPct val="100000"/>
-              <a:buChar char="•"/>
-            </a:pPr>
-            <a:r>
-              <a:rPr lang="en-US" sz="1500" dirty="0">
-                <a:solidFill>
-                  <a:srgbClr val="3D3A36"/>
-                </a:solidFill>
-                <a:latin typeface="Calibri" pitchFamily="34" charset="0"/>
-                <a:ea typeface="Calibri" pitchFamily="34" charset="-122"/>
-                <a:cs typeface="Calibri" pitchFamily="34" charset="-120"/>
-              </a:rPr>
-              <a:t>Can be separated by physical methods (filtering, evaporating)</a:t>
-            </a:r>
-            <a:endParaRPr lang="en-US" sz="1500" dirty="0"/>
-          </a:p>
-          <a:p>
-            <a:pPr marL="342900" indent="-342900">
-              <a:spcAft>
-                <a:spcPts val="800"/>
-              </a:spcAft>
-              <a:buSzPct val="100000"/>
-              <a:buChar char="•"/>
-            </a:pPr>
-            <a:r>
-              <a:rPr lang="en-US" sz="1500" dirty="0">
-                <a:solidFill>
-                  <a:srgbClr val="3D3A36"/>
-                </a:solidFill>
-                <a:latin typeface="Calibri" pitchFamily="34" charset="0"/>
-                <a:ea typeface="Calibri" pitchFamily="34" charset="-122"/>
-                <a:cs typeface="Calibri" pitchFamily="34" charset="-120"/>
-              </a:rPr>
-              <a:t>Examples: salt water, air, sand and iron filings</a:t>
-            </a:r>
-            <a:endParaRPr lang="en-US" sz="1500" dirty="0"/>
-          </a:p>
-        </p:txBody>
-      </p:sp>
-      <p:sp>
-        <p:nvSpPr>
-          <p:cNvPr id="5" name="Shape 3"/>
-          <p:cNvSpPr/>
-          <p:nvPr/>
-        </p:nvSpPr>
-        <p:spPr>
-          <a:xfrm>
-            <a:off x="548640" y="4754880"/>
-            <a:ext cx="8046720" cy="9144"/>
-          </a:xfrm>
-          <a:prstGeom prst="rect">
-            <a:avLst/>
-          </a:prstGeom>
-          <a:solidFill>
-            <a:srgbClr val="F3F1EE"/>
-          </a:solidFill>
-          <a:ln/>
-        </p:spPr>
-      </p:sp>
-      <p:sp>
-        <p:nvSpPr>
-          <p:cNvPr id="6" name="Text 4"/>
-          <p:cNvSpPr/>
-          <p:nvPr/>
-        </p:nvSpPr>
-        <p:spPr>
-          <a:xfrm>
-            <a:off x="548640" y="4800600"/>
-            <a:ext cx="3657600" cy="274320"/>
-          </a:xfrm>
-          <a:prstGeom prst="rect">
-            <a:avLst/>
-          </a:prstGeom>
-          <a:noFill/>
-          <a:ln/>
-        </p:spPr>
-        <p:txBody>
-          <a:bodyPr wrap="square" rtlCol="0" anchor="ctr"/>
-          <a:lstStyle/>
-          <a:p>
-            <a:pPr indent="0" marL="0">
-              <a:buNone/>
-            </a:pPr>
-            <a:r>
-              <a:rPr lang="en-US" sz="800" dirty="0">
-                <a:solidFill>
-                  <a:srgbClr val="9B9690"/>
-                </a:solidFill>
-              </a:rPr>
-              <a:t>mrzocchi.com</a:t>
-            </a:r>
-            <a:endParaRPr lang="en-US" sz="800" dirty="0"/>
           </a:p>
         </p:txBody>
       </p:sp>
@@ -1592,8 +1674,8 @@
         </p:nvSpPr>
         <p:spPr>
           <a:xfrm>
-            <a:off x="548640" y="274320"/>
-            <a:ext cx="8046720" cy="640080"/>
+            <a:off x="7772400" y="4709160"/>
+            <a:ext cx="1097280" cy="320040"/>
           </a:xfrm>
           <a:prstGeom prst="rect">
             <a:avLst/>
@@ -1602,7 +1684,46 @@
           <a:ln/>
         </p:spPr>
         <p:txBody>
-          <a:bodyPr wrap="square" lIns="0" tIns="0" rIns="0" bIns="0" rtlCol="0" anchor="ctr"/>
+          <a:bodyPr wrap="square" rtlCol="0" anchor="ctr"/>
+          <a:lstStyle/>
+          <a:p>
+            <a:pPr algn="r" indent="0" marL="0">
+              <a:buNone/>
+            </a:pPr>
+            <a:r>
+              <a:rPr lang="en-US" sz="900" dirty="0">
+                <a:solidFill>
+                  <a:srgbClr val="6B6660"/>
+                </a:solidFill>
+                <a:latin typeface="Calibri" pitchFamily="34" charset="0"/>
+                <a:ea typeface="Calibri" pitchFamily="34" charset="-122"/>
+                <a:cs typeface="Calibri" pitchFamily="34" charset="-120"/>
+              </a:rPr>
+              <a:t>3 / 5</a:t>
+            </a:r>
+            <a:endParaRPr lang="en-US" sz="900" dirty="0"/>
+          </a:p>
+        </p:txBody>
+      </p:sp>
+      <p:sp>
+        <p:nvSpPr>
+          <p:cNvPr id="4" name="Text 2"/>
+          <p:cNvSpPr/>
+          <p:nvPr/>
+        </p:nvSpPr>
+        <p:spPr>
+          <a:xfrm>
+            <a:off x="457200" y="274320"/>
+            <a:ext cx="8229600" cy="640080"/>
+          </a:xfrm>
+          <a:prstGeom prst="rect">
+            <a:avLst/>
+          </a:prstGeom>
+          <a:noFill/>
+          <a:ln/>
+        </p:spPr>
+        <p:txBody>
+          <a:bodyPr wrap="square" rtlCol="0" anchor="ctr"/>
           <a:lstStyle/>
           <a:p>
             <a:pPr indent="0" marL="0">
@@ -1617,7 +1738,7 @@
                 <a:ea typeface="Georgia" pitchFamily="34" charset="-122"/>
                 <a:cs typeface="Georgia" pitchFamily="34" charset="-120"/>
               </a:rPr>
-              <a:t>Key Terms</a:t>
+              <a:t>Types of Mixtures</a:t>
             </a:r>
             <a:endParaRPr lang="en-US" sz="2600" dirty="0"/>
           </a:p>
@@ -1625,14 +1746,14 @@
       </p:sp>
       <p:sp>
         <p:nvSpPr>
-          <p:cNvPr id="4" name="Shape 2"/>
-          <p:cNvSpPr/>
-          <p:nvPr/>
-        </p:nvSpPr>
-        <p:spPr>
-          <a:xfrm>
-            <a:off x="548640" y="1097280"/>
-            <a:ext cx="3749040" cy="594360"/>
+          <p:cNvPr id="5" name="Shape 3"/>
+          <p:cNvSpPr/>
+          <p:nvPr/>
+        </p:nvSpPr>
+        <p:spPr>
+          <a:xfrm>
+            <a:off x="457200" y="1188720"/>
+            <a:ext cx="2560320" cy="1828800"/>
           </a:xfrm>
           <a:prstGeom prst="rect">
             <a:avLst/>
@@ -1640,7 +1761,12 @@
           <a:solidFill>
             <a:srgbClr val="FFFFFF"/>
           </a:solidFill>
-          <a:ln/>
+          <a:ln w="12700">
+            <a:solidFill>
+              <a:srgbClr val="E5E2DC"/>
+            </a:solidFill>
+            <a:prstDash val="solid"/>
+          </a:ln>
           <a:effectLst>
             <a:outerShdw sx="100000" sy="100000" kx="0" ky="0" algn="bl" rotWithShape="0" blurRad="50800" dist="25400" dir="8100000">
               <a:srgbClr val="000000">
@@ -1652,14 +1778,14 @@
       </p:sp>
       <p:sp>
         <p:nvSpPr>
-          <p:cNvPr id="5" name="Shape 3"/>
-          <p:cNvSpPr/>
-          <p:nvPr/>
-        </p:nvSpPr>
-        <p:spPr>
-          <a:xfrm>
-            <a:off x="548640" y="1097280"/>
-            <a:ext cx="54864" cy="594360"/>
+          <p:cNvPr id="6" name="Shape 4"/>
+          <p:cNvSpPr/>
+          <p:nvPr/>
+        </p:nvSpPr>
+        <p:spPr>
+          <a:xfrm>
+            <a:off x="457200" y="1188720"/>
+            <a:ext cx="2560320" cy="54864"/>
           </a:xfrm>
           <a:prstGeom prst="rect">
             <a:avLst/>
@@ -1672,14 +1798,14 @@
       </p:sp>
       <p:sp>
         <p:nvSpPr>
-          <p:cNvPr id="6" name="Text 4"/>
-          <p:cNvSpPr/>
-          <p:nvPr/>
-        </p:nvSpPr>
-        <p:spPr>
-          <a:xfrm>
-            <a:off x="685800" y="1143000"/>
-            <a:ext cx="3520440" cy="502920"/>
+          <p:cNvPr id="7" name="Text 5"/>
+          <p:cNvSpPr/>
+          <p:nvPr/>
+        </p:nvSpPr>
+        <p:spPr>
+          <a:xfrm>
+            <a:off x="594360" y="1325880"/>
+            <a:ext cx="2286000" cy="365760"/>
           </a:xfrm>
           <a:prstGeom prst="rect">
             <a:avLst/>
@@ -1695,41 +1821,69 @@
               <a:buNone/>
             </a:pPr>
             <a:r>
-              <a:rPr lang="en-US" sz="1200" b="1" dirty="0">
+              <a:rPr lang="en-US" sz="1400" b="1" dirty="0">
                 <a:solidFill>
                   <a:srgbClr val="1B2A4A"/>
                 </a:solidFill>
-              </a:rPr>
-              <a:t>Mixture</a:t>
-            </a:r>
-            <a:endParaRPr lang="en-US" sz="1200" dirty="0"/>
-          </a:p>
+                <a:latin typeface="Calibri" pitchFamily="34" charset="0"/>
+                <a:ea typeface="Calibri" pitchFamily="34" charset="-122"/>
+                <a:cs typeface="Calibri" pitchFamily="34" charset="-120"/>
+              </a:rPr>
+              <a:t>Solutions</a:t>
+            </a:r>
+            <a:endParaRPr lang="en-US" sz="1400" dirty="0"/>
+          </a:p>
+        </p:txBody>
+      </p:sp>
+      <p:sp>
+        <p:nvSpPr>
+          <p:cNvPr id="8" name="Text 6"/>
+          <p:cNvSpPr/>
+          <p:nvPr/>
+        </p:nvSpPr>
+        <p:spPr>
+          <a:xfrm>
+            <a:off x="594360" y="1737360"/>
+            <a:ext cx="2286000" cy="1097280"/>
+          </a:xfrm>
+          <a:prstGeom prst="rect">
+            <a:avLst/>
+          </a:prstGeom>
+          <a:noFill/>
+          <a:ln/>
+        </p:spPr>
+        <p:txBody>
+          <a:bodyPr wrap="square" rtlCol="0" anchor="t"/>
+          <a:lstStyle/>
           <a:p>
             <a:pPr indent="0" marL="0">
               <a:buNone/>
             </a:pPr>
             <a:r>
-              <a:rPr lang="en-US" sz="1000" dirty="0">
-                <a:solidFill>
-                  <a:srgbClr val="6B6660"/>
-                </a:solidFill>
-              </a:rPr>
-              <a:t>Two+ substances not chemically bonded</a:t>
-            </a:r>
-            <a:endParaRPr lang="en-US" sz="1200" dirty="0"/>
-          </a:p>
-        </p:txBody>
-      </p:sp>
-      <p:sp>
-        <p:nvSpPr>
-          <p:cNvPr id="7" name="Shape 5"/>
-          <p:cNvSpPr/>
-          <p:nvPr/>
-        </p:nvSpPr>
-        <p:spPr>
-          <a:xfrm>
-            <a:off x="4480560" y="1097280"/>
-            <a:ext cx="3749040" cy="594360"/>
+              <a:rPr lang="en-US" sz="1100" dirty="0">
+                <a:solidFill>
+                  <a:srgbClr val="3D3A36"/>
+                </a:solidFill>
+                <a:latin typeface="Calibri" pitchFamily="34" charset="0"/>
+                <a:ea typeface="Calibri" pitchFamily="34" charset="-122"/>
+                <a:cs typeface="Calibri" pitchFamily="34" charset="-120"/>
+              </a:rPr>
+              <a:t>A solute dissolves in a solvent to form a solution. Example: salt (solute) dissolves in water (solvent). The solution is transparent — you cannot see the particles.</a:t>
+            </a:r>
+            <a:endParaRPr lang="en-US" sz="1100" dirty="0"/>
+          </a:p>
+        </p:txBody>
+      </p:sp>
+      <p:sp>
+        <p:nvSpPr>
+          <p:cNvPr id="9" name="Shape 7"/>
+          <p:cNvSpPr/>
+          <p:nvPr/>
+        </p:nvSpPr>
+        <p:spPr>
+          <a:xfrm>
+            <a:off x="3291840" y="1188720"/>
+            <a:ext cx="2560320" cy="1828800"/>
           </a:xfrm>
           <a:prstGeom prst="rect">
             <a:avLst/>
@@ -1737,7 +1891,12 @@
           <a:solidFill>
             <a:srgbClr val="FFFFFF"/>
           </a:solidFill>
-          <a:ln/>
+          <a:ln w="12700">
+            <a:solidFill>
+              <a:srgbClr val="E5E2DC"/>
+            </a:solidFill>
+            <a:prstDash val="solid"/>
+          </a:ln>
           <a:effectLst>
             <a:outerShdw sx="100000" sy="100000" kx="0" ky="0" algn="bl" rotWithShape="0" blurRad="50800" dist="25400" dir="8100000">
               <a:srgbClr val="000000">
@@ -1749,14 +1908,14 @@
       </p:sp>
       <p:sp>
         <p:nvSpPr>
-          <p:cNvPr id="8" name="Shape 6"/>
-          <p:cNvSpPr/>
-          <p:nvPr/>
-        </p:nvSpPr>
-        <p:spPr>
-          <a:xfrm>
-            <a:off x="4480560" y="1097280"/>
-            <a:ext cx="54864" cy="594360"/>
+          <p:cNvPr id="10" name="Shape 8"/>
+          <p:cNvSpPr/>
+          <p:nvPr/>
+        </p:nvSpPr>
+        <p:spPr>
+          <a:xfrm>
+            <a:off x="3291840" y="1188720"/>
+            <a:ext cx="2560320" cy="54864"/>
           </a:xfrm>
           <a:prstGeom prst="rect">
             <a:avLst/>
@@ -1769,14 +1928,14 @@
       </p:sp>
       <p:sp>
         <p:nvSpPr>
-          <p:cNvPr id="9" name="Text 7"/>
-          <p:cNvSpPr/>
-          <p:nvPr/>
-        </p:nvSpPr>
-        <p:spPr>
-          <a:xfrm>
-            <a:off x="4617720" y="1143000"/>
-            <a:ext cx="3520440" cy="502920"/>
+          <p:cNvPr id="11" name="Text 9"/>
+          <p:cNvSpPr/>
+          <p:nvPr/>
+        </p:nvSpPr>
+        <p:spPr>
+          <a:xfrm>
+            <a:off x="3429000" y="1325880"/>
+            <a:ext cx="2286000" cy="365760"/>
           </a:xfrm>
           <a:prstGeom prst="rect">
             <a:avLst/>
@@ -1792,41 +1951,69 @@
               <a:buNone/>
             </a:pPr>
             <a:r>
-              <a:rPr lang="en-US" sz="1200" b="1" dirty="0">
+              <a:rPr lang="en-US" sz="1400" b="1" dirty="0">
                 <a:solidFill>
                   <a:srgbClr val="1B2A4A"/>
                 </a:solidFill>
-              </a:rPr>
-              <a:t>Solution</a:t>
-            </a:r>
-            <a:endParaRPr lang="en-US" sz="1200" dirty="0"/>
-          </a:p>
+                <a:latin typeface="Calibri" pitchFamily="34" charset="0"/>
+                <a:ea typeface="Calibri" pitchFamily="34" charset="-122"/>
+                <a:cs typeface="Calibri" pitchFamily="34" charset="-120"/>
+              </a:rPr>
+              <a:t>Suspensions</a:t>
+            </a:r>
+            <a:endParaRPr lang="en-US" sz="1400" dirty="0"/>
+          </a:p>
+        </p:txBody>
+      </p:sp>
+      <p:sp>
+        <p:nvSpPr>
+          <p:cNvPr id="12" name="Text 10"/>
+          <p:cNvSpPr/>
+          <p:nvPr/>
+        </p:nvSpPr>
+        <p:spPr>
+          <a:xfrm>
+            <a:off x="3429000" y="1737360"/>
+            <a:ext cx="2286000" cy="1097280"/>
+          </a:xfrm>
+          <a:prstGeom prst="rect">
+            <a:avLst/>
+          </a:prstGeom>
+          <a:noFill/>
+          <a:ln/>
+        </p:spPr>
+        <p:txBody>
+          <a:bodyPr wrap="square" rtlCol="0" anchor="t"/>
+          <a:lstStyle/>
           <a:p>
             <a:pPr indent="0" marL="0">
               <a:buNone/>
             </a:pPr>
             <a:r>
-              <a:rPr lang="en-US" sz="1000" dirty="0">
-                <a:solidFill>
-                  <a:srgbClr val="6B6660"/>
-                </a:solidFill>
-              </a:rPr>
-              <a:t>A mixture where a solid dissolves in a liquid</a:t>
-            </a:r>
-            <a:endParaRPr lang="en-US" sz="1200" dirty="0"/>
-          </a:p>
-        </p:txBody>
-      </p:sp>
-      <p:sp>
-        <p:nvSpPr>
-          <p:cNvPr id="10" name="Shape 8"/>
-          <p:cNvSpPr/>
-          <p:nvPr/>
-        </p:nvSpPr>
-        <p:spPr>
-          <a:xfrm>
-            <a:off x="548640" y="1828800"/>
-            <a:ext cx="3749040" cy="594360"/>
+              <a:rPr lang="en-US" sz="1100" dirty="0">
+                <a:solidFill>
+                  <a:srgbClr val="3D3A36"/>
+                </a:solidFill>
+                <a:latin typeface="Calibri" pitchFamily="34" charset="0"/>
+                <a:ea typeface="Calibri" pitchFamily="34" charset="-122"/>
+                <a:cs typeface="Calibri" pitchFamily="34" charset="-120"/>
+              </a:rPr>
+              <a:t>Particles are mixed but do NOT dissolve. They are large enough to see and will eventually settle. Example: muddy water, orange juice with pulp.</a:t>
+            </a:r>
+            <a:endParaRPr lang="en-US" sz="1100" dirty="0"/>
+          </a:p>
+        </p:txBody>
+      </p:sp>
+      <p:sp>
+        <p:nvSpPr>
+          <p:cNvPr id="13" name="Shape 11"/>
+          <p:cNvSpPr/>
+          <p:nvPr/>
+        </p:nvSpPr>
+        <p:spPr>
+          <a:xfrm>
+            <a:off x="6126480" y="1188720"/>
+            <a:ext cx="2560320" cy="1828800"/>
           </a:xfrm>
           <a:prstGeom prst="rect">
             <a:avLst/>
@@ -1834,7 +2021,12 @@
           <a:solidFill>
             <a:srgbClr val="FFFFFF"/>
           </a:solidFill>
-          <a:ln/>
+          <a:ln w="12700">
+            <a:solidFill>
+              <a:srgbClr val="E5E2DC"/>
+            </a:solidFill>
+            <a:prstDash val="solid"/>
+          </a:ln>
           <a:effectLst>
             <a:outerShdw sx="100000" sy="100000" kx="0" ky="0" algn="bl" rotWithShape="0" blurRad="50800" dist="25400" dir="8100000">
               <a:srgbClr val="000000">
@@ -1846,14 +2038,14 @@
       </p:sp>
       <p:sp>
         <p:nvSpPr>
-          <p:cNvPr id="11" name="Shape 9"/>
-          <p:cNvSpPr/>
-          <p:nvPr/>
-        </p:nvSpPr>
-        <p:spPr>
-          <a:xfrm>
-            <a:off x="548640" y="1828800"/>
-            <a:ext cx="54864" cy="594360"/>
+          <p:cNvPr id="14" name="Shape 12"/>
+          <p:cNvSpPr/>
+          <p:nvPr/>
+        </p:nvSpPr>
+        <p:spPr>
+          <a:xfrm>
+            <a:off x="6126480" y="1188720"/>
+            <a:ext cx="2560320" cy="54864"/>
           </a:xfrm>
           <a:prstGeom prst="rect">
             <a:avLst/>
@@ -1866,14 +2058,14 @@
       </p:sp>
       <p:sp>
         <p:nvSpPr>
-          <p:cNvPr id="12" name="Text 10"/>
-          <p:cNvSpPr/>
-          <p:nvPr/>
-        </p:nvSpPr>
-        <p:spPr>
-          <a:xfrm>
-            <a:off x="685800" y="1874520"/>
-            <a:ext cx="3520440" cy="502920"/>
+          <p:cNvPr id="15" name="Text 13"/>
+          <p:cNvSpPr/>
+          <p:nvPr/>
+        </p:nvSpPr>
+        <p:spPr>
+          <a:xfrm>
+            <a:off x="6263640" y="1325880"/>
+            <a:ext cx="2286000" cy="365760"/>
           </a:xfrm>
           <a:prstGeom prst="rect">
             <a:avLst/>
@@ -1889,549 +2081,56 @@
               <a:buNone/>
             </a:pPr>
             <a:r>
-              <a:rPr lang="en-US" sz="1200" b="1" dirty="0">
+              <a:rPr lang="en-US" sz="1400" b="1" dirty="0">
                 <a:solidFill>
                   <a:srgbClr val="1B2A4A"/>
                 </a:solidFill>
-              </a:rPr>
-              <a:t>Solute</a:t>
-            </a:r>
-            <a:endParaRPr lang="en-US" sz="1200" dirty="0"/>
-          </a:p>
+                <a:latin typeface="Calibri" pitchFamily="34" charset="0"/>
+                <a:ea typeface="Calibri" pitchFamily="34" charset="-122"/>
+                <a:cs typeface="Calibri" pitchFamily="34" charset="-120"/>
+              </a:rPr>
+              <a:t>Colloids</a:t>
+            </a:r>
+            <a:endParaRPr lang="en-US" sz="1400" dirty="0"/>
+          </a:p>
+        </p:txBody>
+      </p:sp>
+      <p:sp>
+        <p:nvSpPr>
+          <p:cNvPr id="16" name="Text 14"/>
+          <p:cNvSpPr/>
+          <p:nvPr/>
+        </p:nvSpPr>
+        <p:spPr>
+          <a:xfrm>
+            <a:off x="6263640" y="1737360"/>
+            <a:ext cx="2286000" cy="1097280"/>
+          </a:xfrm>
+          <a:prstGeom prst="rect">
+            <a:avLst/>
+          </a:prstGeom>
+          <a:noFill/>
+          <a:ln/>
+        </p:spPr>
+        <p:txBody>
+          <a:bodyPr wrap="square" rtlCol="0" anchor="t"/>
+          <a:lstStyle/>
           <a:p>
             <a:pPr indent="0" marL="0">
               <a:buNone/>
             </a:pPr>
             <a:r>
-              <a:rPr lang="en-US" sz="1000" dirty="0">
-                <a:solidFill>
-                  <a:srgbClr val="6B6660"/>
-                </a:solidFill>
-              </a:rPr>
-              <a:t>The substance that dissolves (e.g., salt)</a:t>
-            </a:r>
-            <a:endParaRPr lang="en-US" sz="1200" dirty="0"/>
-          </a:p>
-        </p:txBody>
-      </p:sp>
-      <p:sp>
-        <p:nvSpPr>
-          <p:cNvPr id="13" name="Shape 11"/>
-          <p:cNvSpPr/>
-          <p:nvPr/>
-        </p:nvSpPr>
-        <p:spPr>
-          <a:xfrm>
-            <a:off x="4480560" y="1828800"/>
-            <a:ext cx="3749040" cy="594360"/>
-          </a:xfrm>
-          <a:prstGeom prst="rect">
-            <a:avLst/>
-          </a:prstGeom>
-          <a:solidFill>
-            <a:srgbClr val="FFFFFF"/>
-          </a:solidFill>
-          <a:ln/>
-          <a:effectLst>
-            <a:outerShdw sx="100000" sy="100000" kx="0" ky="0" algn="bl" rotWithShape="0" blurRad="50800" dist="25400" dir="8100000">
-              <a:srgbClr val="000000">
-                <a:alpha val="10000"/>
-              </a:srgbClr>
-            </a:outerShdw>
-          </a:effectLst>
-        </p:spPr>
-      </p:sp>
-      <p:sp>
-        <p:nvSpPr>
-          <p:cNvPr id="14" name="Shape 12"/>
-          <p:cNvSpPr/>
-          <p:nvPr/>
-        </p:nvSpPr>
-        <p:spPr>
-          <a:xfrm>
-            <a:off x="4480560" y="1828800"/>
-            <a:ext cx="54864" cy="594360"/>
-          </a:xfrm>
-          <a:prstGeom prst="rect">
-            <a:avLst/>
-          </a:prstGeom>
-          <a:solidFill>
-            <a:srgbClr val="2A9D8F"/>
-          </a:solidFill>
-          <a:ln/>
-        </p:spPr>
-      </p:sp>
-      <p:sp>
-        <p:nvSpPr>
-          <p:cNvPr id="15" name="Text 13"/>
-          <p:cNvSpPr/>
-          <p:nvPr/>
-        </p:nvSpPr>
-        <p:spPr>
-          <a:xfrm>
-            <a:off x="4617720" y="1874520"/>
-            <a:ext cx="3520440" cy="502920"/>
-          </a:xfrm>
-          <a:prstGeom prst="rect">
-            <a:avLst/>
-          </a:prstGeom>
-          <a:noFill/>
-          <a:ln/>
-        </p:spPr>
-        <p:txBody>
-          <a:bodyPr wrap="square" rtlCol="0" anchor="ctr"/>
-          <a:lstStyle/>
-          <a:p>
-            <a:pPr indent="0" marL="0">
-              <a:buNone/>
-            </a:pPr>
-            <a:r>
-              <a:rPr lang="en-US" sz="1200" b="1" dirty="0">
-                <a:solidFill>
-                  <a:srgbClr val="1B2A4A"/>
-                </a:solidFill>
-              </a:rPr>
-              <a:t>Solvent</a:t>
-            </a:r>
-            <a:endParaRPr lang="en-US" sz="1200" dirty="0"/>
-          </a:p>
-          <a:p>
-            <a:pPr indent="0" marL="0">
-              <a:buNone/>
-            </a:pPr>
-            <a:r>
-              <a:rPr lang="en-US" sz="1000" dirty="0">
-                <a:solidFill>
-                  <a:srgbClr val="6B6660"/>
-                </a:solidFill>
-              </a:rPr>
-              <a:t>The liquid that does the dissolving (e.g., water)</a:t>
-            </a:r>
-            <a:endParaRPr lang="en-US" sz="1200" dirty="0"/>
-          </a:p>
-        </p:txBody>
-      </p:sp>
-      <p:sp>
-        <p:nvSpPr>
-          <p:cNvPr id="16" name="Shape 14"/>
-          <p:cNvSpPr/>
-          <p:nvPr/>
-        </p:nvSpPr>
-        <p:spPr>
-          <a:xfrm>
-            <a:off x="548640" y="2560320"/>
-            <a:ext cx="3749040" cy="594360"/>
-          </a:xfrm>
-          <a:prstGeom prst="rect">
-            <a:avLst/>
-          </a:prstGeom>
-          <a:solidFill>
-            <a:srgbClr val="FFFFFF"/>
-          </a:solidFill>
-          <a:ln/>
-          <a:effectLst>
-            <a:outerShdw sx="100000" sy="100000" kx="0" ky="0" algn="bl" rotWithShape="0" blurRad="50800" dist="25400" dir="8100000">
-              <a:srgbClr val="000000">
-                <a:alpha val="10000"/>
-              </a:srgbClr>
-            </a:outerShdw>
-          </a:effectLst>
-        </p:spPr>
-      </p:sp>
-      <p:sp>
-        <p:nvSpPr>
-          <p:cNvPr id="17" name="Shape 15"/>
-          <p:cNvSpPr/>
-          <p:nvPr/>
-        </p:nvSpPr>
-        <p:spPr>
-          <a:xfrm>
-            <a:off x="548640" y="2560320"/>
-            <a:ext cx="54864" cy="594360"/>
-          </a:xfrm>
-          <a:prstGeom prst="rect">
-            <a:avLst/>
-          </a:prstGeom>
-          <a:solidFill>
-            <a:srgbClr val="2A9D8F"/>
-          </a:solidFill>
-          <a:ln/>
-        </p:spPr>
-      </p:sp>
-      <p:sp>
-        <p:nvSpPr>
-          <p:cNvPr id="18" name="Text 16"/>
-          <p:cNvSpPr/>
-          <p:nvPr/>
-        </p:nvSpPr>
-        <p:spPr>
-          <a:xfrm>
-            <a:off x="685800" y="2606040"/>
-            <a:ext cx="3520440" cy="502920"/>
-          </a:xfrm>
-          <a:prstGeom prst="rect">
-            <a:avLst/>
-          </a:prstGeom>
-          <a:noFill/>
-          <a:ln/>
-        </p:spPr>
-        <p:txBody>
-          <a:bodyPr wrap="square" rtlCol="0" anchor="ctr"/>
-          <a:lstStyle/>
-          <a:p>
-            <a:pPr indent="0" marL="0">
-              <a:buNone/>
-            </a:pPr>
-            <a:r>
-              <a:rPr lang="en-US" sz="1200" b="1" dirty="0">
-                <a:solidFill>
-                  <a:srgbClr val="1B2A4A"/>
-                </a:solidFill>
-              </a:rPr>
-              <a:t>Soluble</a:t>
-            </a:r>
-            <a:endParaRPr lang="en-US" sz="1200" dirty="0"/>
-          </a:p>
-          <a:p>
-            <a:pPr indent="0" marL="0">
-              <a:buNone/>
-            </a:pPr>
-            <a:r>
-              <a:rPr lang="en-US" sz="1000" dirty="0">
-                <a:solidFill>
-                  <a:srgbClr val="6B6660"/>
-                </a:solidFill>
-              </a:rPr>
-              <a:t>Able to dissolve in a liquid</a:t>
-            </a:r>
-            <a:endParaRPr lang="en-US" sz="1200" dirty="0"/>
-          </a:p>
-        </p:txBody>
-      </p:sp>
-      <p:sp>
-        <p:nvSpPr>
-          <p:cNvPr id="19" name="Shape 17"/>
-          <p:cNvSpPr/>
-          <p:nvPr/>
-        </p:nvSpPr>
-        <p:spPr>
-          <a:xfrm>
-            <a:off x="4480560" y="2560320"/>
-            <a:ext cx="3749040" cy="594360"/>
-          </a:xfrm>
-          <a:prstGeom prst="rect">
-            <a:avLst/>
-          </a:prstGeom>
-          <a:solidFill>
-            <a:srgbClr val="FFFFFF"/>
-          </a:solidFill>
-          <a:ln/>
-          <a:effectLst>
-            <a:outerShdw sx="100000" sy="100000" kx="0" ky="0" algn="bl" rotWithShape="0" blurRad="50800" dist="25400" dir="8100000">
-              <a:srgbClr val="000000">
-                <a:alpha val="10000"/>
-              </a:srgbClr>
-            </a:outerShdw>
-          </a:effectLst>
-        </p:spPr>
-      </p:sp>
-      <p:sp>
-        <p:nvSpPr>
-          <p:cNvPr id="20" name="Shape 18"/>
-          <p:cNvSpPr/>
-          <p:nvPr/>
-        </p:nvSpPr>
-        <p:spPr>
-          <a:xfrm>
-            <a:off x="4480560" y="2560320"/>
-            <a:ext cx="54864" cy="594360"/>
-          </a:xfrm>
-          <a:prstGeom prst="rect">
-            <a:avLst/>
-          </a:prstGeom>
-          <a:solidFill>
-            <a:srgbClr val="2A9D8F"/>
-          </a:solidFill>
-          <a:ln/>
-        </p:spPr>
-      </p:sp>
-      <p:sp>
-        <p:nvSpPr>
-          <p:cNvPr id="21" name="Text 19"/>
-          <p:cNvSpPr/>
-          <p:nvPr/>
-        </p:nvSpPr>
-        <p:spPr>
-          <a:xfrm>
-            <a:off x="4617720" y="2606040"/>
-            <a:ext cx="3520440" cy="502920"/>
-          </a:xfrm>
-          <a:prstGeom prst="rect">
-            <a:avLst/>
-          </a:prstGeom>
-          <a:noFill/>
-          <a:ln/>
-        </p:spPr>
-        <p:txBody>
-          <a:bodyPr wrap="square" rtlCol="0" anchor="ctr"/>
-          <a:lstStyle/>
-          <a:p>
-            <a:pPr indent="0" marL="0">
-              <a:buNone/>
-            </a:pPr>
-            <a:r>
-              <a:rPr lang="en-US" sz="1200" b="1" dirty="0">
-                <a:solidFill>
-                  <a:srgbClr val="1B2A4A"/>
-                </a:solidFill>
-              </a:rPr>
-              <a:t>Insoluble</a:t>
-            </a:r>
-            <a:endParaRPr lang="en-US" sz="1200" dirty="0"/>
-          </a:p>
-          <a:p>
-            <a:pPr indent="0" marL="0">
-              <a:buNone/>
-            </a:pPr>
-            <a:r>
-              <a:rPr lang="en-US" sz="1000" dirty="0">
-                <a:solidFill>
-                  <a:srgbClr val="6B6660"/>
-                </a:solidFill>
-              </a:rPr>
-              <a:t>Cannot dissolve (e.g., sand in water)</a:t>
-            </a:r>
-            <a:endParaRPr lang="en-US" sz="1200" dirty="0"/>
-          </a:p>
-        </p:txBody>
-      </p:sp>
-      <p:sp>
-        <p:nvSpPr>
-          <p:cNvPr id="22" name="Shape 20"/>
-          <p:cNvSpPr/>
-          <p:nvPr/>
-        </p:nvSpPr>
-        <p:spPr>
-          <a:xfrm>
-            <a:off x="548640" y="3291840"/>
-            <a:ext cx="3749040" cy="594360"/>
-          </a:xfrm>
-          <a:prstGeom prst="rect">
-            <a:avLst/>
-          </a:prstGeom>
-          <a:solidFill>
-            <a:srgbClr val="FFFFFF"/>
-          </a:solidFill>
-          <a:ln/>
-          <a:effectLst>
-            <a:outerShdw sx="100000" sy="100000" kx="0" ky="0" algn="bl" rotWithShape="0" blurRad="50800" dist="25400" dir="8100000">
-              <a:srgbClr val="000000">
-                <a:alpha val="10000"/>
-              </a:srgbClr>
-            </a:outerShdw>
-          </a:effectLst>
-        </p:spPr>
-      </p:sp>
-      <p:sp>
-        <p:nvSpPr>
-          <p:cNvPr id="23" name="Shape 21"/>
-          <p:cNvSpPr/>
-          <p:nvPr/>
-        </p:nvSpPr>
-        <p:spPr>
-          <a:xfrm>
-            <a:off x="548640" y="3291840"/>
-            <a:ext cx="54864" cy="594360"/>
-          </a:xfrm>
-          <a:prstGeom prst="rect">
-            <a:avLst/>
-          </a:prstGeom>
-          <a:solidFill>
-            <a:srgbClr val="2A9D8F"/>
-          </a:solidFill>
-          <a:ln/>
-        </p:spPr>
-      </p:sp>
-      <p:sp>
-        <p:nvSpPr>
-          <p:cNvPr id="24" name="Text 22"/>
-          <p:cNvSpPr/>
-          <p:nvPr/>
-        </p:nvSpPr>
-        <p:spPr>
-          <a:xfrm>
-            <a:off x="685800" y="3337560"/>
-            <a:ext cx="3520440" cy="502920"/>
-          </a:xfrm>
-          <a:prstGeom prst="rect">
-            <a:avLst/>
-          </a:prstGeom>
-          <a:noFill/>
-          <a:ln/>
-        </p:spPr>
-        <p:txBody>
-          <a:bodyPr wrap="square" rtlCol="0" anchor="ctr"/>
-          <a:lstStyle/>
-          <a:p>
-            <a:pPr indent="0" marL="0">
-              <a:buNone/>
-            </a:pPr>
-            <a:r>
-              <a:rPr lang="en-US" sz="1200" b="1" dirty="0">
-                <a:solidFill>
-                  <a:srgbClr val="1B2A4A"/>
-                </a:solidFill>
-              </a:rPr>
-              <a:t>Saturated</a:t>
-            </a:r>
-            <a:endParaRPr lang="en-US" sz="1200" dirty="0"/>
-          </a:p>
-          <a:p>
-            <a:pPr indent="0" marL="0">
-              <a:buNone/>
-            </a:pPr>
-            <a:r>
-              <a:rPr lang="en-US" sz="1000" dirty="0">
-                <a:solidFill>
-                  <a:srgbClr val="6B6660"/>
-                </a:solidFill>
-              </a:rPr>
-              <a:t>No more solute can dissolve at that temperature</a:t>
-            </a:r>
-            <a:endParaRPr lang="en-US" sz="1200" dirty="0"/>
-          </a:p>
-        </p:txBody>
-      </p:sp>
-      <p:sp>
-        <p:nvSpPr>
-          <p:cNvPr id="25" name="Shape 23"/>
-          <p:cNvSpPr/>
-          <p:nvPr/>
-        </p:nvSpPr>
-        <p:spPr>
-          <a:xfrm>
-            <a:off x="4480560" y="3291840"/>
-            <a:ext cx="3749040" cy="594360"/>
-          </a:xfrm>
-          <a:prstGeom prst="rect">
-            <a:avLst/>
-          </a:prstGeom>
-          <a:solidFill>
-            <a:srgbClr val="FFFFFF"/>
-          </a:solidFill>
-          <a:ln/>
-          <a:effectLst>
-            <a:outerShdw sx="100000" sy="100000" kx="0" ky="0" algn="bl" rotWithShape="0" blurRad="50800" dist="25400" dir="8100000">
-              <a:srgbClr val="000000">
-                <a:alpha val="10000"/>
-              </a:srgbClr>
-            </a:outerShdw>
-          </a:effectLst>
-        </p:spPr>
-      </p:sp>
-      <p:sp>
-        <p:nvSpPr>
-          <p:cNvPr id="26" name="Shape 24"/>
-          <p:cNvSpPr/>
-          <p:nvPr/>
-        </p:nvSpPr>
-        <p:spPr>
-          <a:xfrm>
-            <a:off x="4480560" y="3291840"/>
-            <a:ext cx="54864" cy="594360"/>
-          </a:xfrm>
-          <a:prstGeom prst="rect">
-            <a:avLst/>
-          </a:prstGeom>
-          <a:solidFill>
-            <a:srgbClr val="2A9D8F"/>
-          </a:solidFill>
-          <a:ln/>
-        </p:spPr>
-      </p:sp>
-      <p:sp>
-        <p:nvSpPr>
-          <p:cNvPr id="27" name="Text 25"/>
-          <p:cNvSpPr/>
-          <p:nvPr/>
-        </p:nvSpPr>
-        <p:spPr>
-          <a:xfrm>
-            <a:off x="4617720" y="3337560"/>
-            <a:ext cx="3520440" cy="502920"/>
-          </a:xfrm>
-          <a:prstGeom prst="rect">
-            <a:avLst/>
-          </a:prstGeom>
-          <a:noFill/>
-          <a:ln/>
-        </p:spPr>
-        <p:txBody>
-          <a:bodyPr wrap="square" rtlCol="0" anchor="ctr"/>
-          <a:lstStyle/>
-          <a:p>
-            <a:pPr indent="0" marL="0">
-              <a:buNone/>
-            </a:pPr>
-            <a:r>
-              <a:rPr lang="en-US" sz="1200" b="1" dirty="0">
-                <a:solidFill>
-                  <a:srgbClr val="1B2A4A"/>
-                </a:solidFill>
-              </a:rPr>
-              <a:t>Dissolving</a:t>
-            </a:r>
-            <a:endParaRPr lang="en-US" sz="1200" dirty="0"/>
-          </a:p>
-          <a:p>
-            <a:pPr indent="0" marL="0">
-              <a:buNone/>
-            </a:pPr>
-            <a:r>
-              <a:rPr lang="en-US" sz="1000" dirty="0">
-                <a:solidFill>
-                  <a:srgbClr val="6B6660"/>
-                </a:solidFill>
-              </a:rPr>
-              <a:t>Solute particles mix evenly between solvent particles</a:t>
-            </a:r>
-            <a:endParaRPr lang="en-US" sz="1200" dirty="0"/>
-          </a:p>
-        </p:txBody>
-      </p:sp>
-      <p:sp>
-        <p:nvSpPr>
-          <p:cNvPr id="28" name="Text 26"/>
-          <p:cNvSpPr/>
-          <p:nvPr/>
-        </p:nvSpPr>
-        <p:spPr>
-          <a:xfrm>
-            <a:off x="548640" y="4800600"/>
-            <a:ext cx="3657600" cy="274320"/>
-          </a:xfrm>
-          <a:prstGeom prst="rect">
-            <a:avLst/>
-          </a:prstGeom>
-          <a:noFill/>
-          <a:ln/>
-        </p:spPr>
-        <p:txBody>
-          <a:bodyPr wrap="square" rtlCol="0" anchor="ctr"/>
-          <a:lstStyle/>
-          <a:p>
-            <a:pPr indent="0" marL="0">
-              <a:buNone/>
-            </a:pPr>
-            <a:r>
-              <a:rPr lang="en-US" sz="800" dirty="0">
-                <a:solidFill>
-                  <a:srgbClr val="9B9690"/>
-                </a:solidFill>
-              </a:rPr>
-              <a:t>mrzocchi.com</a:t>
-            </a:r>
-            <a:endParaRPr lang="en-US" sz="800" dirty="0"/>
+              <a:rPr lang="en-US" sz="1100" dirty="0">
+                <a:solidFill>
+                  <a:srgbClr val="3D3A36"/>
+                </a:solidFill>
+                <a:latin typeface="Calibri" pitchFamily="34" charset="0"/>
+                <a:ea typeface="Calibri" pitchFamily="34" charset="-122"/>
+                <a:cs typeface="Calibri" pitchFamily="34" charset="-120"/>
+              </a:rPr>
+              <a:t>Particles are between solution and suspension size. They don't settle and scatter light (Tyndall effect). Example: milk, fog, smoke.</a:t>
+            </a:r>
+            <a:endParaRPr lang="en-US" sz="1100" dirty="0"/>
           </a:p>
         </p:txBody>
       </p:sp>
@@ -2446,6 +2145,486 @@
 <file path=ppt/slides/slide4.xml><?xml version="1.0" encoding="utf-8"?>
 <p:sld xmlns:a="http://schemas.openxmlformats.org/drawingml/2006/main" xmlns:r="http://schemas.openxmlformats.org/officeDocument/2006/relationships" xmlns:p="http://schemas.openxmlformats.org/presentationml/2006/main">
   <p:cSld name="Slide 4">
+    <p:bg>
+      <p:bgPr>
+        <a:solidFill>
+          <a:srgbClr val="FAF8F5"/>
+        </a:solidFill>
+      </p:bgPr>
+    </p:bg>
+    <p:spTree>
+      <p:nvGrpSpPr>
+        <p:cNvPr id="1" name=""/>
+        <p:cNvGrpSpPr/>
+        <p:nvPr/>
+      </p:nvGrpSpPr>
+      <p:grpSpPr>
+        <a:xfrm>
+          <a:off x="0" y="0"/>
+          <a:ext cx="0" cy="0"/>
+          <a:chOff x="0" y="0"/>
+          <a:chExt cx="0" cy="0"/>
+        </a:xfrm>
+      </p:grpSpPr>
+      <p:sp>
+        <p:nvSpPr>
+          <p:cNvPr id="2" name="Shape 0"/>
+          <p:cNvSpPr/>
+          <p:nvPr/>
+        </p:nvSpPr>
+        <p:spPr>
+          <a:xfrm>
+            <a:off x="0" y="0"/>
+            <a:ext cx="9144000" cy="54864"/>
+          </a:xfrm>
+          <a:prstGeom prst="rect">
+            <a:avLst/>
+          </a:prstGeom>
+          <a:solidFill>
+            <a:srgbClr val="2A9D8F"/>
+          </a:solidFill>
+          <a:ln/>
+        </p:spPr>
+      </p:sp>
+      <p:sp>
+        <p:nvSpPr>
+          <p:cNvPr id="3" name="Text 1"/>
+          <p:cNvSpPr/>
+          <p:nvPr/>
+        </p:nvSpPr>
+        <p:spPr>
+          <a:xfrm>
+            <a:off x="7772400" y="4709160"/>
+            <a:ext cx="1097280" cy="320040"/>
+          </a:xfrm>
+          <a:prstGeom prst="rect">
+            <a:avLst/>
+          </a:prstGeom>
+          <a:noFill/>
+          <a:ln/>
+        </p:spPr>
+        <p:txBody>
+          <a:bodyPr wrap="square" rtlCol="0" anchor="ctr"/>
+          <a:lstStyle/>
+          <a:p>
+            <a:pPr algn="r" indent="0" marL="0">
+              <a:buNone/>
+            </a:pPr>
+            <a:r>
+              <a:rPr lang="en-US" sz="900" dirty="0">
+                <a:solidFill>
+                  <a:srgbClr val="6B6660"/>
+                </a:solidFill>
+                <a:latin typeface="Calibri" pitchFamily="34" charset="0"/>
+                <a:ea typeface="Calibri" pitchFamily="34" charset="-122"/>
+                <a:cs typeface="Calibri" pitchFamily="34" charset="-120"/>
+              </a:rPr>
+              <a:t>4 / 5</a:t>
+            </a:r>
+            <a:endParaRPr lang="en-US" sz="900" dirty="0"/>
+          </a:p>
+        </p:txBody>
+      </p:sp>
+      <p:sp>
+        <p:nvSpPr>
+          <p:cNvPr id="4" name="Text 2"/>
+          <p:cNvSpPr/>
+          <p:nvPr/>
+        </p:nvSpPr>
+        <p:spPr>
+          <a:xfrm>
+            <a:off x="457200" y="274320"/>
+            <a:ext cx="8229600" cy="640080"/>
+          </a:xfrm>
+          <a:prstGeom prst="rect">
+            <a:avLst/>
+          </a:prstGeom>
+          <a:noFill/>
+          <a:ln/>
+        </p:spPr>
+        <p:txBody>
+          <a:bodyPr wrap="square" rtlCol="0" anchor="ctr"/>
+          <a:lstStyle/>
+          <a:p>
+            <a:pPr indent="0" marL="0">
+              <a:buNone/>
+            </a:pPr>
+            <a:r>
+              <a:rPr lang="en-US" sz="2600" b="1" dirty="0">
+                <a:solidFill>
+                  <a:srgbClr val="1B2A4A"/>
+                </a:solidFill>
+                <a:latin typeface="Georgia" pitchFamily="34" charset="0"/>
+                <a:ea typeface="Georgia" pitchFamily="34" charset="-122"/>
+                <a:cs typeface="Georgia" pitchFamily="34" charset="-120"/>
+              </a:rPr>
+              <a:t>Dissolving</a:t>
+            </a:r>
+            <a:endParaRPr lang="en-US" sz="2600" dirty="0"/>
+          </a:p>
+        </p:txBody>
+      </p:sp>
+      <p:sp>
+        <p:nvSpPr>
+          <p:cNvPr id="5" name="Text 3"/>
+          <p:cNvSpPr/>
+          <p:nvPr/>
+        </p:nvSpPr>
+        <p:spPr>
+          <a:xfrm>
+            <a:off x="457200" y="1188720"/>
+            <a:ext cx="3840480" cy="3474720"/>
+          </a:xfrm>
+          <a:prstGeom prst="rect">
+            <a:avLst/>
+          </a:prstGeom>
+          <a:noFill/>
+          <a:ln/>
+        </p:spPr>
+        <p:txBody>
+          <a:bodyPr wrap="square" rtlCol="0" anchor="t"/>
+          <a:lstStyle/>
+          <a:p>
+            <a:pPr marL="342900" indent="-342900">
+              <a:spcAft>
+                <a:spcPts val="600"/>
+              </a:spcAft>
+              <a:buSzPct val="100000"/>
+              <a:buChar char="•"/>
+            </a:pPr>
+            <a:r>
+              <a:rPr lang="en-US" sz="1400" dirty="0">
+                <a:solidFill>
+                  <a:srgbClr val="3D3A36"/>
+                </a:solidFill>
+                <a:latin typeface="Calibri" pitchFamily="34" charset="0"/>
+                <a:ea typeface="Calibri" pitchFamily="34" charset="-122"/>
+                <a:cs typeface="Calibri" pitchFamily="34" charset="-120"/>
+              </a:rPr>
+              <a:t>Dissolving is a physical change — no new substance is formed</a:t>
+            </a:r>
+            <a:endParaRPr lang="en-US" sz="1400" dirty="0"/>
+          </a:p>
+          <a:p>
+            <a:pPr marL="342900" indent="-342900">
+              <a:spcAft>
+                <a:spcPts val="600"/>
+              </a:spcAft>
+              <a:buSzPct val="100000"/>
+              <a:buChar char="•"/>
+            </a:pPr>
+            <a:r>
+              <a:rPr lang="en-US" sz="1400" dirty="0">
+                <a:solidFill>
+                  <a:srgbClr val="3D3A36"/>
+                </a:solidFill>
+                <a:latin typeface="Calibri" pitchFamily="34" charset="0"/>
+                <a:ea typeface="Calibri" pitchFamily="34" charset="-122"/>
+                <a:cs typeface="Calibri" pitchFamily="34" charset="-120"/>
+              </a:rPr>
+              <a:t>The solute particles spread evenly between solvent particles</a:t>
+            </a:r>
+            <a:endParaRPr lang="en-US" sz="1400" dirty="0"/>
+          </a:p>
+          <a:p>
+            <a:pPr marL="342900" indent="-342900">
+              <a:spcAft>
+                <a:spcPts val="600"/>
+              </a:spcAft>
+              <a:buSzPct val="100000"/>
+              <a:buChar char="•"/>
+            </a:pPr>
+            <a:r>
+              <a:rPr lang="en-US" sz="1400" dirty="0">
+                <a:solidFill>
+                  <a:srgbClr val="3D3A36"/>
+                </a:solidFill>
+                <a:latin typeface="Calibri" pitchFamily="34" charset="0"/>
+                <a:ea typeface="Calibri" pitchFamily="34" charset="-122"/>
+                <a:cs typeface="Calibri" pitchFamily="34" charset="-120"/>
+              </a:rPr>
+              <a:t>A saturated solution cannot dissolve any more solute</a:t>
+            </a:r>
+            <a:endParaRPr lang="en-US" sz="1400" dirty="0"/>
+          </a:p>
+          <a:p>
+            <a:pPr marL="342900" indent="-342900">
+              <a:spcAft>
+                <a:spcPts val="600"/>
+              </a:spcAft>
+              <a:buSzPct val="100000"/>
+              <a:buChar char="•"/>
+            </a:pPr>
+            <a:r>
+              <a:rPr lang="en-US" sz="1400" dirty="0">
+                <a:solidFill>
+                  <a:srgbClr val="3D3A36"/>
+                </a:solidFill>
+                <a:latin typeface="Calibri" pitchFamily="34" charset="0"/>
+                <a:ea typeface="Calibri" pitchFamily="34" charset="-122"/>
+                <a:cs typeface="Calibri" pitchFamily="34" charset="-120"/>
+              </a:rPr>
+              <a:t>Factors that speed up dissolving: stirring, heating, crushing the solute into smaller pieces</a:t>
+            </a:r>
+            <a:endParaRPr lang="en-US" sz="1400" dirty="0"/>
+          </a:p>
+          <a:p>
+            <a:pPr marL="342900" indent="-342900">
+              <a:spcAft>
+                <a:spcPts val="600"/>
+              </a:spcAft>
+              <a:buSzPct val="100000"/>
+              <a:buChar char="•"/>
+            </a:pPr>
+            <a:r>
+              <a:rPr lang="en-US" sz="1400" dirty="0">
+                <a:solidFill>
+                  <a:srgbClr val="3D3A36"/>
+                </a:solidFill>
+                <a:latin typeface="Calibri" pitchFamily="34" charset="0"/>
+                <a:ea typeface="Calibri" pitchFamily="34" charset="-122"/>
+                <a:cs typeface="Calibri" pitchFamily="34" charset="-120"/>
+              </a:rPr>
+              <a:t>The dissolved substance is still there — you can get it back by evaporating the solvent</a:t>
+            </a:r>
+            <a:endParaRPr lang="en-US" sz="1400" dirty="0"/>
+          </a:p>
+        </p:txBody>
+      </p:sp>
+      <p:sp>
+        <p:nvSpPr>
+          <p:cNvPr id="6" name="Shape 4"/>
+          <p:cNvSpPr/>
+          <p:nvPr/>
+        </p:nvSpPr>
+        <p:spPr>
+          <a:xfrm>
+            <a:off x="4846320" y="1188720"/>
+            <a:ext cx="3840480" cy="3474720"/>
+          </a:xfrm>
+          <a:prstGeom prst="rect">
+            <a:avLst/>
+          </a:prstGeom>
+          <a:solidFill>
+            <a:srgbClr val="FFFFFF"/>
+          </a:solidFill>
+          <a:ln w="12700">
+            <a:solidFill>
+              <a:srgbClr val="E5E2DC"/>
+            </a:solidFill>
+            <a:prstDash val="solid"/>
+          </a:ln>
+          <a:effectLst>
+            <a:outerShdw sx="100000" sy="100000" kx="0" ky="0" algn="bl" rotWithShape="0" blurRad="50800" dist="25400" dir="8100000">
+              <a:srgbClr val="000000">
+                <a:alpha val="10000"/>
+              </a:srgbClr>
+            </a:outerShdw>
+          </a:effectLst>
+        </p:spPr>
+      </p:sp>
+      <p:sp>
+        <p:nvSpPr>
+          <p:cNvPr id="7" name="Shape 5"/>
+          <p:cNvSpPr/>
+          <p:nvPr/>
+        </p:nvSpPr>
+        <p:spPr>
+          <a:xfrm>
+            <a:off x="4846320" y="1188720"/>
+            <a:ext cx="3840480" cy="54864"/>
+          </a:xfrm>
+          <a:prstGeom prst="rect">
+            <a:avLst/>
+          </a:prstGeom>
+          <a:solidFill>
+            <a:srgbClr val="2A9D8F"/>
+          </a:solidFill>
+          <a:ln/>
+        </p:spPr>
+      </p:sp>
+      <p:sp>
+        <p:nvSpPr>
+          <p:cNvPr id="8" name="Text 6"/>
+          <p:cNvSpPr/>
+          <p:nvPr/>
+        </p:nvSpPr>
+        <p:spPr>
+          <a:xfrm>
+            <a:off x="5120640" y="1371600"/>
+            <a:ext cx="3291840" cy="3108960"/>
+          </a:xfrm>
+          <a:prstGeom prst="rect">
+            <a:avLst/>
+          </a:prstGeom>
+          <a:noFill/>
+          <a:ln/>
+        </p:spPr>
+        <p:txBody>
+          <a:bodyPr wrap="square" rtlCol="0" anchor="t"/>
+          <a:lstStyle/>
+          <a:p>
+            <a:pPr indent="0" marL="0">
+              <a:spcAft>
+                <a:spcPts val="400"/>
+              </a:spcAft>
+              <a:buNone/>
+            </a:pPr>
+            <a:r>
+              <a:rPr lang="en-US" sz="1600" b="1" dirty="0">
+                <a:solidFill>
+                  <a:srgbClr val="1B2A4A"/>
+                </a:solidFill>
+                <a:latin typeface="Calibri" pitchFamily="34" charset="0"/>
+                <a:ea typeface="Calibri" pitchFamily="34" charset="-122"/>
+                <a:cs typeface="Calibri" pitchFamily="34" charset="-120"/>
+              </a:rPr>
+              <a:t>Key Vocabulary</a:t>
+            </a:r>
+            <a:endParaRPr lang="en-US" sz="1600" dirty="0"/>
+          </a:p>
+          <a:p>
+            <a:pPr indent="0" marL="0">
+              <a:spcAft>
+                <a:spcPts val="400"/>
+              </a:spcAft>
+              <a:buNone/>
+            </a:pPr>
+            <a:endParaRPr lang="en-US" sz="1600" dirty="0"/>
+          </a:p>
+          <a:p>
+            <a:pPr indent="0" marL="0">
+              <a:spcAft>
+                <a:spcPts val="400"/>
+              </a:spcAft>
+              <a:buNone/>
+            </a:pPr>
+            <a:r>
+              <a:rPr lang="en-US" sz="1300" dirty="0">
+                <a:solidFill>
+                  <a:srgbClr val="3D3A36"/>
+                </a:solidFill>
+                <a:latin typeface="Calibri" pitchFamily="34" charset="0"/>
+                <a:ea typeface="Calibri" pitchFamily="34" charset="-122"/>
+                <a:cs typeface="Calibri" pitchFamily="34" charset="-120"/>
+              </a:rPr>
+              <a:t>Solute — the substance that dissolves (e.g. salt)</a:t>
+            </a:r>
+            <a:endParaRPr lang="en-US" sz="1600" dirty="0"/>
+          </a:p>
+          <a:p>
+            <a:pPr indent="0" marL="0">
+              <a:spcAft>
+                <a:spcPts val="400"/>
+              </a:spcAft>
+              <a:buNone/>
+            </a:pPr>
+            <a:r>
+              <a:rPr lang="en-US" sz="1300" dirty="0">
+                <a:solidFill>
+                  <a:srgbClr val="3D3A36"/>
+                </a:solidFill>
+                <a:latin typeface="Calibri" pitchFamily="34" charset="0"/>
+                <a:ea typeface="Calibri" pitchFamily="34" charset="-122"/>
+                <a:cs typeface="Calibri" pitchFamily="34" charset="-120"/>
+              </a:rPr>
+              <a:t>Solvent — the liquid that does the dissolving (e.g. water)</a:t>
+            </a:r>
+            <a:endParaRPr lang="en-US" sz="1600" dirty="0"/>
+          </a:p>
+          <a:p>
+            <a:pPr indent="0" marL="0">
+              <a:spcAft>
+                <a:spcPts val="400"/>
+              </a:spcAft>
+              <a:buNone/>
+            </a:pPr>
+            <a:r>
+              <a:rPr lang="en-US" sz="1300" dirty="0">
+                <a:solidFill>
+                  <a:srgbClr val="3D3A36"/>
+                </a:solidFill>
+                <a:latin typeface="Calibri" pitchFamily="34" charset="0"/>
+                <a:ea typeface="Calibri" pitchFamily="34" charset="-122"/>
+                <a:cs typeface="Calibri" pitchFamily="34" charset="-120"/>
+              </a:rPr>
+              <a:t>Solution — solute + solvent mixed evenly</a:t>
+            </a:r>
+            <a:endParaRPr lang="en-US" sz="1600" dirty="0"/>
+          </a:p>
+          <a:p>
+            <a:pPr indent="0" marL="0">
+              <a:spcAft>
+                <a:spcPts val="400"/>
+              </a:spcAft>
+              <a:buNone/>
+            </a:pPr>
+            <a:r>
+              <a:rPr lang="en-US" sz="1300" dirty="0">
+                <a:solidFill>
+                  <a:srgbClr val="3D3A36"/>
+                </a:solidFill>
+                <a:latin typeface="Calibri" pitchFamily="34" charset="0"/>
+                <a:ea typeface="Calibri" pitchFamily="34" charset="-122"/>
+                <a:cs typeface="Calibri" pitchFamily="34" charset="-120"/>
+              </a:rPr>
+              <a:t>Soluble — CAN dissolve in a solvent</a:t>
+            </a:r>
+            <a:endParaRPr lang="en-US" sz="1600" dirty="0"/>
+          </a:p>
+          <a:p>
+            <a:pPr indent="0" marL="0">
+              <a:spcAft>
+                <a:spcPts val="400"/>
+              </a:spcAft>
+              <a:buNone/>
+            </a:pPr>
+            <a:r>
+              <a:rPr lang="en-US" sz="1300" dirty="0">
+                <a:solidFill>
+                  <a:srgbClr val="3D3A36"/>
+                </a:solidFill>
+                <a:latin typeface="Calibri" pitchFamily="34" charset="0"/>
+                <a:ea typeface="Calibri" pitchFamily="34" charset="-122"/>
+                <a:cs typeface="Calibri" pitchFamily="34" charset="-120"/>
+              </a:rPr>
+              <a:t>Insoluble — CANNOT dissolve in a solvent</a:t>
+            </a:r>
+            <a:endParaRPr lang="en-US" sz="1600" dirty="0"/>
+          </a:p>
+          <a:p>
+            <a:pPr indent="0" marL="0">
+              <a:spcAft>
+                <a:spcPts val="400"/>
+              </a:spcAft>
+              <a:buNone/>
+            </a:pPr>
+            <a:r>
+              <a:rPr lang="en-US" sz="1300" dirty="0">
+                <a:solidFill>
+                  <a:srgbClr val="3D3A36"/>
+                </a:solidFill>
+                <a:latin typeface="Calibri" pitchFamily="34" charset="0"/>
+                <a:ea typeface="Calibri" pitchFamily="34" charset="-122"/>
+                <a:cs typeface="Calibri" pitchFamily="34" charset="-120"/>
+              </a:rPr>
+              <a:t>Saturated — no more solute can dissolve</a:t>
+            </a:r>
+            <a:endParaRPr lang="en-US" sz="1600" dirty="0"/>
+          </a:p>
+        </p:txBody>
+      </p:sp>
+    </p:spTree>
+  </p:cSld>
+  <p:clrMapOvr>
+    <a:masterClrMapping/>
+  </p:clrMapOvr>
+</p:sld>
+</file>
+
+<file path=ppt/slides/slide5.xml><?xml version="1.0" encoding="utf-8"?>
+<p:sld xmlns:a="http://schemas.openxmlformats.org/drawingml/2006/main" xmlns:r="http://schemas.openxmlformats.org/officeDocument/2006/relationships" xmlns:p="http://schemas.openxmlformats.org/presentationml/2006/main">
+  <p:cSld name="Slide 5">
     <p:bg>
       <p:bgPr>
         <a:solidFill>
@@ -2476,13 +2655,13 @@
         <p:spPr>
           <a:xfrm>
             <a:off x="0" y="0"/>
-            <a:ext cx="9144000" cy="54864"/>
-          </a:xfrm>
-          <a:prstGeom prst="rect">
-            <a:avLst/>
-          </a:prstGeom>
-          <a:solidFill>
-            <a:srgbClr val="2A9D8F"/>
+            <a:ext cx="109728" cy="5143500"/>
+          </a:xfrm>
+          <a:prstGeom prst="rect">
+            <a:avLst/>
+          </a:prstGeom>
+          <a:solidFill>
+            <a:srgbClr val="E9C46A"/>
           </a:solidFill>
           <a:ln/>
         </p:spPr>
@@ -2495,8 +2674,8 @@
         </p:nvSpPr>
         <p:spPr>
           <a:xfrm>
-            <a:off x="548640" y="457200"/>
-            <a:ext cx="8046720" cy="640080"/>
+            <a:off x="731520" y="457200"/>
+            <a:ext cx="7772400" cy="731520"/>
           </a:xfrm>
           <a:prstGeom prst="rect">
             <a:avLst/>
@@ -2512,7 +2691,7 @@
               <a:buNone/>
             </a:pPr>
             <a:r>
-              <a:rPr lang="en-US" sz="2800" b="1" dirty="0">
+              <a:rPr lang="en-US" sz="3200" b="1" dirty="0">
                 <a:solidFill>
                   <a:srgbClr val="FFFFFF"/>
                 </a:solidFill>
@@ -2522,7 +2701,7 @@
               </a:rPr>
               <a:t>Key Takeaways</a:t>
             </a:r>
-            <a:endParaRPr lang="en-US" sz="2800" dirty="0"/>
+            <a:endParaRPr lang="en-US" sz="3200" dirty="0"/>
           </a:p>
         </p:txBody>
       </p:sp>
@@ -2534,8 +2713,8 @@
         </p:nvSpPr>
         <p:spPr>
           <a:xfrm>
-            <a:off x="731520" y="1371600"/>
-            <a:ext cx="7680960" cy="3200400"/>
+            <a:off x="731520" y="1463040"/>
+            <a:ext cx="7772400" cy="3200400"/>
           </a:xfrm>
           <a:prstGeom prst="rect">
             <a:avLst/>
@@ -2555,7 +2734,7 @@
               <a:buChar char="•"/>
             </a:pPr>
             <a:r>
-              <a:rPr lang="en-US" sz="1600" dirty="0">
+              <a:rPr lang="en-US" sz="1500" dirty="0">
                 <a:solidFill>
                   <a:srgbClr val="CADCFC"/>
                 </a:solidFill>
@@ -2563,9 +2742,9 @@
                 <a:ea typeface="Calibri" pitchFamily="34" charset="-122"/>
                 <a:cs typeface="Calibri" pitchFamily="34" charset="-120"/>
               </a:rPr>
-              <a:t>Mixtures are NOT chemically bonded — can be separated physically</a:t>
-            </a:r>
-            <a:endParaRPr lang="en-US" sz="1600" dirty="0"/>
+              <a:t>Mixtures: two+ substances not chemically bonded, keep own properties</a:t>
+            </a:r>
+            <a:endParaRPr lang="en-US" sz="1500" dirty="0"/>
           </a:p>
           <a:p>
             <a:pPr marL="342900" indent="-342900">
@@ -2576,7 +2755,7 @@
               <a:buChar char="•"/>
             </a:pPr>
             <a:r>
-              <a:rPr lang="en-US" sz="1600" dirty="0">
+              <a:rPr lang="en-US" sz="1500" dirty="0">
                 <a:solidFill>
                   <a:srgbClr val="CADCFC"/>
                 </a:solidFill>
@@ -2584,9 +2763,9 @@
                 <a:ea typeface="Calibri" pitchFamily="34" charset="-122"/>
                 <a:cs typeface="Calibri" pitchFamily="34" charset="-120"/>
               </a:rPr>
-              <a:t>Solution = solute + solvent</a:t>
-            </a:r>
-            <a:endParaRPr lang="en-US" sz="1600" dirty="0"/>
+              <a:t>Solutions: solute dissolves in solvent, transparent</a:t>
+            </a:r>
+            <a:endParaRPr lang="en-US" sz="1500" dirty="0"/>
           </a:p>
           <a:p>
             <a:pPr marL="342900" indent="-342900">
@@ -2597,7 +2776,7 @@
               <a:buChar char="•"/>
             </a:pPr>
             <a:r>
-              <a:rPr lang="en-US" sz="1600" dirty="0">
+              <a:rPr lang="en-US" sz="1500" dirty="0">
                 <a:solidFill>
                   <a:srgbClr val="CADCFC"/>
                 </a:solidFill>
@@ -2605,9 +2784,9 @@
                 <a:ea typeface="Calibri" pitchFamily="34" charset="-122"/>
                 <a:cs typeface="Calibri" pitchFamily="34" charset="-120"/>
               </a:rPr>
-              <a:t>Soluble substances dissolve; insoluble substances don't</a:t>
-            </a:r>
-            <a:endParaRPr lang="en-US" sz="1600" dirty="0"/>
+              <a:t>Dissolving is faster with heat, stirring, and smaller particles</a:t>
+            </a:r>
+            <a:endParaRPr lang="en-US" sz="1500" dirty="0"/>
           </a:p>
           <a:p>
             <a:pPr marL="342900" indent="-342900">
@@ -2618,7 +2797,7 @@
               <a:buChar char="•"/>
             </a:pPr>
             <a:r>
-              <a:rPr lang="en-US" sz="1600" dirty="0">
+              <a:rPr lang="en-US" sz="1500" dirty="0">
                 <a:solidFill>
                   <a:srgbClr val="CADCFC"/>
                 </a:solidFill>
@@ -2626,9 +2805,30 @@
                 <a:ea typeface="Calibri" pitchFamily="34" charset="-122"/>
                 <a:cs typeface="Calibri" pitchFamily="34" charset="-120"/>
               </a:rPr>
-              <a:t>Heating usually helps more solute dissolve</a:t>
-            </a:r>
-            <a:endParaRPr lang="en-US" sz="1600" dirty="0"/>
+              <a:t>Saturated = no more solute can dissolve</a:t>
+            </a:r>
+            <a:endParaRPr lang="en-US" sz="1500" dirty="0"/>
+          </a:p>
+          <a:p>
+            <a:pPr marL="342900" indent="-342900">
+              <a:spcAft>
+                <a:spcPts val="1000"/>
+              </a:spcAft>
+              <a:buSzPct val="100000"/>
+              <a:buChar char="•"/>
+            </a:pPr>
+            <a:r>
+              <a:rPr lang="en-US" sz="1500" dirty="0">
+                <a:solidFill>
+                  <a:srgbClr val="CADCFC"/>
+                </a:solidFill>
+                <a:latin typeface="Calibri" pitchFamily="34" charset="0"/>
+                <a:ea typeface="Calibri" pitchFamily="34" charset="-122"/>
+                <a:cs typeface="Calibri" pitchFamily="34" charset="-120"/>
+              </a:rPr>
+              <a:t>Mixtures can be separated by physical methods</a:t>
+            </a:r>
+            <a:endParaRPr lang="en-US" sz="1500" dirty="0"/>
           </a:p>
         </p:txBody>
       </p:sp>
@@ -2640,8 +2840,8 @@
         </p:nvSpPr>
         <p:spPr>
           <a:xfrm>
-            <a:off x="548640" y="4572000"/>
-            <a:ext cx="3657600" cy="274320"/>
+            <a:off x="731520" y="4572000"/>
+            <a:ext cx="7772400" cy="365760"/>
           </a:xfrm>
           <a:prstGeom prst="rect">
             <a:avLst/>
@@ -2657,14 +2857,17 @@
               <a:buNone/>
             </a:pPr>
             <a:r>
-              <a:rPr lang="en-US" sz="1000" dirty="0">
-                <a:solidFill>
-                  <a:srgbClr val="6B6660"/>
-                </a:solidFill>
+              <a:rPr lang="en-US" sz="1100" dirty="0">
+                <a:solidFill>
+                  <a:srgbClr val="E9C46A"/>
+                </a:solidFill>
+                <a:latin typeface="Calibri" pitchFamily="34" charset="0"/>
+                <a:ea typeface="Calibri" pitchFamily="34" charset="-122"/>
+                <a:cs typeface="Calibri" pitchFamily="34" charset="-120"/>
               </a:rPr>
               <a:t>mrzocchi.com</a:t>
             </a:r>
-            <a:endParaRPr lang="en-US" sz="1000" dirty="0"/>
+            <a:endParaRPr lang="en-US" sz="1100" dirty="0"/>
           </a:p>
         </p:txBody>
       </p:sp>

--- a/static/ppts/G6_Sci_T2_Mixtures.pptx
+++ b/static/ppts/G6_Sci_T2_Mixtures.pptx
@@ -10,9 +10,11 @@
     <p:sldId id="258" r:id="rId4"/>
     <p:sldId id="259" r:id="rId5"/>
     <p:sldId id="260" r:id="rId6"/>
+    <p:sldId id="261" r:id="rId7"/>
+    <p:sldId id="262" r:id="rId8"/>
   </p:sldIdLst>
   <p:notesMasterIdLst>
-    <p:notesMasterId r:id="rId7"/>
+    <p:notesMasterId r:id="rId9"/>
   </p:notesMasterIdLst>
   <p:sldSz cx="9144000" cy="5143500"/>
   <p:notesSz cx="5143500" cy="9144000"/>
@@ -900,6 +902,182 @@
 </p:notes>
 </file>
 
+<file path=ppt/notesSlides/notesSlide6.xml><?xml version="1.0" encoding="utf-8"?>
+<p:notes xmlns:a="http://schemas.openxmlformats.org/drawingml/2006/main" xmlns:r="http://schemas.openxmlformats.org/officeDocument/2006/relationships" xmlns:p="http://schemas.openxmlformats.org/presentationml/2006/main">
+  <p:cSld>
+    <p:spTree>
+      <p:nvGrpSpPr>
+        <p:cNvPr id="1" name=""/>
+        <p:cNvGrpSpPr/>
+        <p:nvPr/>
+      </p:nvGrpSpPr>
+      <p:grpSpPr>
+        <a:xfrm>
+          <a:off x="0" y="0"/>
+          <a:ext cx="0" cy="0"/>
+          <a:chOff x="0" y="0"/>
+          <a:chExt cx="0" cy="0"/>
+        </a:xfrm>
+      </p:grpSpPr>
+      <p:sp>
+        <p:nvSpPr>
+          <p:cNvPr id="2" name="Slide Image Placeholder 1"/>
+          <p:cNvSpPr>
+            <a:spLocks noGrp="1" noRot="1" noChangeAspect="1"/>
+          </p:cNvSpPr>
+          <p:nvPr>
+            <p:ph type="sldImg"/>
+          </p:nvPr>
+        </p:nvSpPr>
+        <p:spPr/>
+      </p:sp>
+      <p:sp>
+        <p:nvSpPr>
+          <p:cNvPr id="3" name="Notes Placeholder 2"/>
+          <p:cNvSpPr>
+            <a:spLocks noGrp="1"/>
+          </p:cNvSpPr>
+          <p:nvPr>
+            <p:ph type="body" idx="1"/>
+          </p:nvPr>
+        </p:nvSpPr>
+        <p:spPr/>
+        <p:txBody>
+          <a:bodyPr/>
+          <a:lstStyle/>
+          <a:p>
+            <a:r>
+              <a:rPr lang="en-US" dirty="0"/>
+              <a:t/>
+            </a:r>
+            <a:endParaRPr lang="en-US" dirty="0"/>
+          </a:p>
+        </p:txBody>
+      </p:sp>
+      <p:sp>
+        <p:nvSpPr>
+          <p:cNvPr id="4" name="Slide Number Placeholder 3"/>
+          <p:cNvSpPr>
+            <a:spLocks noGrp="1"/>
+          </p:cNvSpPr>
+          <p:nvPr>
+            <p:ph type="sldNum" sz="quarter" idx="10"/>
+          </p:nvPr>
+        </p:nvSpPr>
+        <p:spPr/>
+        <p:txBody>
+          <a:bodyPr/>
+          <a:lstStyle/>
+          <a:p>
+            <a:fld id="{F7021451-1387-4CA6-816F-3879F97B5CBC}" type="slidenum">
+              <a:rPr lang="en-US"/>
+              <a:t>6</a:t>
+            </a:fld>
+            <a:endParaRPr lang="en-US"/>
+          </a:p>
+        </p:txBody>
+      </p:sp>
+    </p:spTree>
+    <p:extLst>
+      <p:ext uri="{BB962C8B-B14F-4D97-AF65-F5344CB8AC3E}">
+        <p14:creationId xmlns:p14="http://schemas.microsoft.com/office/powerpoint/2010/main" val="1024086991"/>
+      </p:ext>
+    </p:extLst>
+  </p:cSld>
+  <p:clrMapOvr>
+    <a:masterClrMapping/>
+  </p:clrMapOvr>
+</p:notes>
+</file>
+
+<file path=ppt/notesSlides/notesSlide7.xml><?xml version="1.0" encoding="utf-8"?>
+<p:notes xmlns:a="http://schemas.openxmlformats.org/drawingml/2006/main" xmlns:r="http://schemas.openxmlformats.org/officeDocument/2006/relationships" xmlns:p="http://schemas.openxmlformats.org/presentationml/2006/main">
+  <p:cSld>
+    <p:spTree>
+      <p:nvGrpSpPr>
+        <p:cNvPr id="1" name=""/>
+        <p:cNvGrpSpPr/>
+        <p:nvPr/>
+      </p:nvGrpSpPr>
+      <p:grpSpPr>
+        <a:xfrm>
+          <a:off x="0" y="0"/>
+          <a:ext cx="0" cy="0"/>
+          <a:chOff x="0" y="0"/>
+          <a:chExt cx="0" cy="0"/>
+        </a:xfrm>
+      </p:grpSpPr>
+      <p:sp>
+        <p:nvSpPr>
+          <p:cNvPr id="2" name="Slide Image Placeholder 1"/>
+          <p:cNvSpPr>
+            <a:spLocks noGrp="1" noRot="1" noChangeAspect="1"/>
+          </p:cNvSpPr>
+          <p:nvPr>
+            <p:ph type="sldImg"/>
+          </p:nvPr>
+        </p:nvSpPr>
+        <p:spPr/>
+      </p:sp>
+      <p:sp>
+        <p:nvSpPr>
+          <p:cNvPr id="3" name="Notes Placeholder 2"/>
+          <p:cNvSpPr>
+            <a:spLocks noGrp="1"/>
+          </p:cNvSpPr>
+          <p:nvPr>
+            <p:ph type="body" idx="1"/>
+          </p:nvPr>
+        </p:nvSpPr>
+        <p:spPr/>
+        <p:txBody>
+          <a:bodyPr/>
+          <a:lstStyle/>
+          <a:p>
+            <a:r>
+              <a:rPr lang="en-US" dirty="0"/>
+              <a:t/>
+            </a:r>
+            <a:endParaRPr lang="en-US" dirty="0"/>
+          </a:p>
+        </p:txBody>
+      </p:sp>
+      <p:sp>
+        <p:nvSpPr>
+          <p:cNvPr id="4" name="Slide Number Placeholder 3"/>
+          <p:cNvSpPr>
+            <a:spLocks noGrp="1"/>
+          </p:cNvSpPr>
+          <p:nvPr>
+            <p:ph type="sldNum" sz="quarter" idx="10"/>
+          </p:nvPr>
+        </p:nvSpPr>
+        <p:spPr/>
+        <p:txBody>
+          <a:bodyPr/>
+          <a:lstStyle/>
+          <a:p>
+            <a:fld id="{F7021451-1387-4CA6-816F-3879F97B5CBC}" type="slidenum">
+              <a:rPr lang="en-US"/>
+              <a:t>7</a:t>
+            </a:fld>
+            <a:endParaRPr lang="en-US"/>
+          </a:p>
+        </p:txBody>
+      </p:sp>
+    </p:spTree>
+    <p:extLst>
+      <p:ext uri="{BB962C8B-B14F-4D97-AF65-F5344CB8AC3E}">
+        <p14:creationId xmlns:p14="http://schemas.microsoft.com/office/powerpoint/2010/main" val="1024086991"/>
+      </p:ext>
+    </p:extLst>
+  </p:cSld>
+  <p:clrMapOvr>
+    <a:masterClrMapping/>
+  </p:clrMapOvr>
+</p:notes>
+</file>
+
 <file path=ppt/slideLayouts/slideLayout1.xml><?xml version="1.0" encoding="utf-8"?>
 <p:sldLayout xmlns:a="http://schemas.openxmlformats.org/drawingml/2006/main" xmlns:r="http://schemas.openxmlformats.org/officeDocument/2006/relationships" xmlns:p="http://schemas.openxmlformats.org/presentationml/2006/main" preserve="1">
   <p:cSld name="DEFAULT">
@@ -1210,13 +1388,6 @@
 <file path=ppt/slides/slide1.xml><?xml version="1.0" encoding="utf-8"?>
 <p:sld xmlns:a="http://schemas.openxmlformats.org/drawingml/2006/main" xmlns:r="http://schemas.openxmlformats.org/officeDocument/2006/relationships" xmlns:p="http://schemas.openxmlformats.org/presentationml/2006/main">
   <p:cSld name="Slide 1">
-    <p:bg>
-      <p:bgPr>
-        <a:solidFill>
-          <a:srgbClr val="1B2A4A"/>
-        </a:solidFill>
-      </p:bgPr>
-    </p:bg>
     <p:spTree>
       <p:nvGrpSpPr>
         <p:cNvPr id="1" name=""/>
@@ -1240,7 +1411,27 @@
         <p:spPr>
           <a:xfrm>
             <a:off x="0" y="0"/>
-            <a:ext cx="109728" cy="5143500"/>
+            <a:ext cx="9144000" cy="5143500"/>
+          </a:xfrm>
+          <a:prstGeom prst="rect">
+            <a:avLst/>
+          </a:prstGeom>
+          <a:solidFill>
+            <a:srgbClr val="1B2A4A"/>
+          </a:solidFill>
+          <a:ln/>
+        </p:spPr>
+      </p:sp>
+      <p:sp>
+        <p:nvSpPr>
+          <p:cNvPr id="3" name="Shape 1"/>
+          <p:cNvSpPr/>
+          <p:nvPr/>
+        </p:nvSpPr>
+        <p:spPr>
+          <a:xfrm>
+            <a:off x="0" y="4777740"/>
+            <a:ext cx="9144000" cy="365760"/>
           </a:xfrm>
           <a:prstGeom prst="rect">
             <a:avLst/>
@@ -1253,14 +1444,36 @@
       </p:sp>
       <p:sp>
         <p:nvSpPr>
-          <p:cNvPr id="3" name="Text 1"/>
-          <p:cNvSpPr/>
-          <p:nvPr/>
-        </p:nvSpPr>
-        <p:spPr>
-          <a:xfrm>
-            <a:off x="731520" y="1097280"/>
-            <a:ext cx="7772400" cy="1371600"/>
+          <p:cNvPr id="4" name="Shape 2"/>
+          <p:cNvSpPr/>
+          <p:nvPr/>
+        </p:nvSpPr>
+        <p:spPr>
+          <a:xfrm>
+            <a:off x="6858000" y="-1371600"/>
+            <a:ext cx="4572000" cy="4572000"/>
+          </a:xfrm>
+          <a:prstGeom prst="ellipse">
+            <a:avLst/>
+          </a:prstGeom>
+          <a:solidFill>
+            <a:srgbClr val="2A9D8F">
+              <a:alpha val="12000"/>
+            </a:srgbClr>
+          </a:solidFill>
+          <a:ln/>
+        </p:spPr>
+      </p:sp>
+      <p:sp>
+        <p:nvSpPr>
+          <p:cNvPr id="5" name="Text 3"/>
+          <p:cNvSpPr/>
+          <p:nvPr/>
+        </p:nvSpPr>
+        <p:spPr>
+          <a:xfrm>
+            <a:off x="731520" y="914400"/>
+            <a:ext cx="7680960" cy="457200"/>
           </a:xfrm>
           <a:prstGeom prst="rect">
             <a:avLst/>
@@ -1276,7 +1489,46 @@
               <a:buNone/>
             </a:pPr>
             <a:r>
-              <a:rPr lang="en-US" sz="4000" b="1" dirty="0">
+              <a:rPr lang="en-US" sz="1300" b="1" spc="500" kern="0" dirty="0">
+                <a:solidFill>
+                  <a:srgbClr val="2A9D8F"/>
+                </a:solidFill>
+                <a:latin typeface="Calibri" pitchFamily="34" charset="0"/>
+                <a:ea typeface="Calibri" pitchFamily="34" charset="-122"/>
+                <a:cs typeface="Calibri" pitchFamily="34" charset="-120"/>
+              </a:rPr>
+              <a:t>GRADE 6 SCIENCE</a:t>
+            </a:r>
+            <a:endParaRPr lang="en-US" sz="1300" dirty="0"/>
+          </a:p>
+        </p:txBody>
+      </p:sp>
+      <p:sp>
+        <p:nvSpPr>
+          <p:cNvPr id="6" name="Text 4"/>
+          <p:cNvSpPr/>
+          <p:nvPr/>
+        </p:nvSpPr>
+        <p:spPr>
+          <a:xfrm>
+            <a:off x="731520" y="1463040"/>
+            <a:ext cx="6858000" cy="1645920"/>
+          </a:xfrm>
+          <a:prstGeom prst="rect">
+            <a:avLst/>
+          </a:prstGeom>
+          <a:noFill/>
+          <a:ln/>
+        </p:spPr>
+        <p:txBody>
+          <a:bodyPr wrap="square" rtlCol="0" anchor="t"/>
+          <a:lstStyle/>
+          <a:p>
+            <a:pPr indent="0" marL="0">
+              <a:buNone/>
+            </a:pPr>
+            <a:r>
+              <a:rPr lang="en-US" sz="3800" b="1" dirty="0">
                 <a:solidFill>
                   <a:srgbClr val="FFFFFF"/>
                 </a:solidFill>
@@ -1286,20 +1538,20 @@
               </a:rPr>
               <a:t>Mixtures &amp; Solutions</a:t>
             </a:r>
-            <a:endParaRPr lang="en-US" sz="4000" dirty="0"/>
-          </a:p>
-        </p:txBody>
-      </p:sp>
-      <p:sp>
-        <p:nvSpPr>
-          <p:cNvPr id="4" name="Text 2"/>
-          <p:cNvSpPr/>
-          <p:nvPr/>
-        </p:nvSpPr>
-        <p:spPr>
-          <a:xfrm>
-            <a:off x="731520" y="2560320"/>
-            <a:ext cx="7772400" cy="548640"/>
+            <a:endParaRPr lang="en-US" sz="3800" dirty="0"/>
+          </a:p>
+        </p:txBody>
+      </p:sp>
+      <p:sp>
+        <p:nvSpPr>
+          <p:cNvPr id="7" name="Text 5"/>
+          <p:cNvSpPr/>
+          <p:nvPr/>
+        </p:nvSpPr>
+        <p:spPr>
+          <a:xfrm>
+            <a:off x="731520" y="3200400"/>
+            <a:ext cx="6400800" cy="548640"/>
           </a:xfrm>
           <a:prstGeom prst="rect">
             <a:avLst/>
@@ -1315,15 +1567,15 @@
               <a:buNone/>
             </a:pPr>
             <a:r>
-              <a:rPr lang="en-US" sz="1600" dirty="0">
-                <a:solidFill>
-                  <a:srgbClr val="E9C46A"/>
+              <a:rPr lang="en-US" sz="1600" i="1" dirty="0">
+                <a:solidFill>
+                  <a:srgbClr val="9B9690"/>
                 </a:solidFill>
                 <a:latin typeface="Calibri" pitchFamily="34" charset="0"/>
                 <a:ea typeface="Calibri" pitchFamily="34" charset="-122"/>
                 <a:cs typeface="Calibri" pitchFamily="34" charset="-120"/>
               </a:rPr>
-              <a:t>Grade 6 Science · Mr Zocchi</a:t>
+              <a:t>When substances combine without chemical change</a:t>
             </a:r>
             <a:endParaRPr lang="en-US" sz="1600" dirty="0"/>
           </a:p>
@@ -1331,36 +1583,14 @@
       </p:sp>
       <p:sp>
         <p:nvSpPr>
-          <p:cNvPr id="5" name="Shape 3"/>
-          <p:cNvSpPr/>
-          <p:nvPr/>
-        </p:nvSpPr>
-        <p:spPr>
-          <a:xfrm>
-            <a:off x="731520" y="3474720"/>
-            <a:ext cx="2011680" cy="411480"/>
-          </a:xfrm>
-          <a:prstGeom prst="roundRect">
-            <a:avLst>
-              <a:gd name="adj" fmla="val 17778"/>
-            </a:avLst>
-          </a:prstGeom>
-          <a:solidFill>
-            <a:srgbClr val="2A9D8F"/>
-          </a:solidFill>
-          <a:ln/>
-        </p:spPr>
-      </p:sp>
-      <p:sp>
-        <p:nvSpPr>
-          <p:cNvPr id="6" name="Text 4"/>
-          <p:cNvSpPr/>
-          <p:nvPr/>
-        </p:nvSpPr>
-        <p:spPr>
-          <a:xfrm>
-            <a:off x="731520" y="3474720"/>
-            <a:ext cx="2011680" cy="411480"/>
+          <p:cNvPr id="8" name="Text 6"/>
+          <p:cNvSpPr/>
+          <p:nvPr/>
+        </p:nvSpPr>
+        <p:spPr>
+          <a:xfrm>
+            <a:off x="731520" y="4297680"/>
+            <a:ext cx="2743200" cy="365760"/>
           </a:xfrm>
           <a:prstGeom prst="rect">
             <a:avLst/>
@@ -1372,21 +1602,21 @@
           <a:bodyPr wrap="square" rtlCol="0" anchor="ctr"/>
           <a:lstStyle/>
           <a:p>
-            <a:pPr algn="ctr" indent="0" marL="0">
+            <a:pPr indent="0" marL="0">
               <a:buNone/>
             </a:pPr>
             <a:r>
-              <a:rPr lang="en-US" sz="1200" b="1" dirty="0">
-                <a:solidFill>
-                  <a:srgbClr val="FFFFFF"/>
+              <a:rPr lang="en-US" sz="1100" dirty="0">
+                <a:solidFill>
+                  <a:srgbClr val="9B9690"/>
                 </a:solidFill>
                 <a:latin typeface="Calibri" pitchFamily="34" charset="0"/>
                 <a:ea typeface="Calibri" pitchFamily="34" charset="-122"/>
                 <a:cs typeface="Calibri" pitchFamily="34" charset="-120"/>
               </a:rPr>
-              <a:t>Term 2 · Chemistry</a:t>
-            </a:r>
-            <a:endParaRPr lang="en-US" sz="1200" dirty="0"/>
+              <a:t>mrzocchi.com</a:t>
+            </a:r>
+            <a:endParaRPr lang="en-US" sz="1100" dirty="0"/>
           </a:p>
         </p:txBody>
       </p:sp>
@@ -1431,7 +1661,47 @@
         <p:spPr>
           <a:xfrm>
             <a:off x="0" y="0"/>
-            <a:ext cx="9144000" cy="54864"/>
+            <a:ext cx="9144000" cy="822960"/>
+          </a:xfrm>
+          <a:prstGeom prst="rect">
+            <a:avLst/>
+          </a:prstGeom>
+          <a:solidFill>
+            <a:srgbClr val="FFFFFF"/>
+          </a:solidFill>
+          <a:ln/>
+        </p:spPr>
+      </p:sp>
+      <p:sp>
+        <p:nvSpPr>
+          <p:cNvPr id="3" name="Shape 1"/>
+          <p:cNvSpPr/>
+          <p:nvPr/>
+        </p:nvSpPr>
+        <p:spPr>
+          <a:xfrm>
+            <a:off x="0" y="804672"/>
+            <a:ext cx="9144000" cy="27432"/>
+          </a:xfrm>
+          <a:prstGeom prst="rect">
+            <a:avLst/>
+          </a:prstGeom>
+          <a:solidFill>
+            <a:srgbClr val="E5E2DC"/>
+          </a:solidFill>
+          <a:ln/>
+        </p:spPr>
+      </p:sp>
+      <p:sp>
+        <p:nvSpPr>
+          <p:cNvPr id="4" name="Shape 2"/>
+          <p:cNvSpPr/>
+          <p:nvPr/>
+        </p:nvSpPr>
+        <p:spPr>
+          <a:xfrm>
+            <a:off x="548640" y="201168"/>
+            <a:ext cx="54864" cy="420624"/>
           </a:xfrm>
           <a:prstGeom prst="rect">
             <a:avLst/>
@@ -1444,14 +1714,14 @@
       </p:sp>
       <p:sp>
         <p:nvSpPr>
-          <p:cNvPr id="3" name="Text 1"/>
-          <p:cNvSpPr/>
-          <p:nvPr/>
-        </p:nvSpPr>
-        <p:spPr>
-          <a:xfrm>
-            <a:off x="7772400" y="4709160"/>
-            <a:ext cx="1097280" cy="320040"/>
+          <p:cNvPr id="5" name="Text 3"/>
+          <p:cNvSpPr/>
+          <p:nvPr/>
+        </p:nvSpPr>
+        <p:spPr>
+          <a:xfrm>
+            <a:off x="777240" y="137160"/>
+            <a:ext cx="7772400" cy="548640"/>
           </a:xfrm>
           <a:prstGeom prst="rect">
             <a:avLst/>
@@ -1460,37 +1730,37 @@
           <a:ln/>
         </p:spPr>
         <p:txBody>
-          <a:bodyPr wrap="square" rtlCol="0" anchor="ctr"/>
-          <a:lstStyle/>
-          <a:p>
-            <a:pPr algn="r" indent="0" marL="0">
+          <a:bodyPr wrap="square" lIns="0" tIns="0" rIns="0" bIns="0" rtlCol="0" anchor="ctr"/>
+          <a:lstStyle/>
+          <a:p>
+            <a:pPr indent="0" marL="0">
               <a:buNone/>
             </a:pPr>
             <a:r>
-              <a:rPr lang="en-US" sz="900" dirty="0">
-                <a:solidFill>
-                  <a:srgbClr val="6B6660"/>
-                </a:solidFill>
-                <a:latin typeface="Calibri" pitchFamily="34" charset="0"/>
-                <a:ea typeface="Calibri" pitchFamily="34" charset="-122"/>
-                <a:cs typeface="Calibri" pitchFamily="34" charset="-120"/>
-              </a:rPr>
-              <a:t>2 / 5</a:t>
-            </a:r>
-            <a:endParaRPr lang="en-US" sz="900" dirty="0"/>
-          </a:p>
-        </p:txBody>
-      </p:sp>
-      <p:sp>
-        <p:nvSpPr>
-          <p:cNvPr id="4" name="Shape 2"/>
-          <p:cNvSpPr/>
-          <p:nvPr/>
-        </p:nvSpPr>
-        <p:spPr>
-          <a:xfrm>
-            <a:off x="1371600" y="914400"/>
-            <a:ext cx="6400800" cy="3200400"/>
+              <a:rPr lang="en-US" sz="2000" b="1" dirty="0">
+                <a:solidFill>
+                  <a:srgbClr val="1B2A4A"/>
+                </a:solidFill>
+                <a:latin typeface="Georgia" pitchFamily="34" charset="0"/>
+                <a:ea typeface="Georgia" pitchFamily="34" charset="-122"/>
+                <a:cs typeface="Georgia" pitchFamily="34" charset="-120"/>
+              </a:rPr>
+              <a:t>Key Vocabulary</a:t>
+            </a:r>
+            <a:endParaRPr lang="en-US" sz="2000" dirty="0"/>
+          </a:p>
+        </p:txBody>
+      </p:sp>
+      <p:sp>
+        <p:nvSpPr>
+          <p:cNvPr id="6" name="Shape 4"/>
+          <p:cNvSpPr/>
+          <p:nvPr/>
+        </p:nvSpPr>
+        <p:spPr>
+          <a:xfrm>
+            <a:off x="731520" y="1051560"/>
+            <a:ext cx="3657600" cy="658368"/>
           </a:xfrm>
           <a:prstGeom prst="rect">
             <a:avLst/>
@@ -1498,12 +1768,7 @@
           <a:solidFill>
             <a:srgbClr val="FFFFFF"/>
           </a:solidFill>
-          <a:ln w="12700">
-            <a:solidFill>
-              <a:srgbClr val="E5E2DC"/>
-            </a:solidFill>
-            <a:prstDash val="solid"/>
-          </a:ln>
+          <a:ln/>
           <a:effectLst>
             <a:outerShdw sx="100000" sy="100000" kx="0" ky="0" algn="bl" rotWithShape="0" blurRad="50800" dist="25400" dir="8100000">
               <a:srgbClr val="000000">
@@ -1515,14 +1780,14 @@
       </p:sp>
       <p:sp>
         <p:nvSpPr>
-          <p:cNvPr id="5" name="Shape 3"/>
-          <p:cNvSpPr/>
-          <p:nvPr/>
-        </p:nvSpPr>
-        <p:spPr>
-          <a:xfrm>
-            <a:off x="1371600" y="914400"/>
-            <a:ext cx="91440" cy="3200400"/>
+          <p:cNvPr id="7" name="Shape 5"/>
+          <p:cNvSpPr/>
+          <p:nvPr/>
+        </p:nvSpPr>
+        <p:spPr>
+          <a:xfrm>
+            <a:off x="731520" y="1051560"/>
+            <a:ext cx="54864" cy="658368"/>
           </a:xfrm>
           <a:prstGeom prst="rect">
             <a:avLst/>
@@ -1535,14 +1800,14 @@
       </p:sp>
       <p:sp>
         <p:nvSpPr>
-          <p:cNvPr id="6" name="Text 4"/>
-          <p:cNvSpPr/>
-          <p:nvPr/>
-        </p:nvSpPr>
-        <p:spPr>
-          <a:xfrm>
-            <a:off x="1828800" y="1097280"/>
-            <a:ext cx="5669280" cy="640080"/>
+          <p:cNvPr id="8" name="Text 6"/>
+          <p:cNvSpPr/>
+          <p:nvPr/>
+        </p:nvSpPr>
+        <p:spPr>
+          <a:xfrm>
+            <a:off x="914400" y="1051560"/>
+            <a:ext cx="1463040" cy="658368"/>
           </a:xfrm>
           <a:prstGeom prst="rect">
             <a:avLst/>
@@ -1551,14 +1816,14 @@
           <a:ln/>
         </p:spPr>
         <p:txBody>
-          <a:bodyPr wrap="square" rtlCol="0" anchor="ctr"/>
+          <a:bodyPr wrap="square" lIns="0" tIns="0" rIns="0" bIns="0" rtlCol="0" anchor="ctr"/>
           <a:lstStyle/>
           <a:p>
             <a:pPr indent="0" marL="0">
               <a:buNone/>
             </a:pPr>
             <a:r>
-              <a:rPr lang="en-US" sz="2400" b="1" dirty="0">
+              <a:rPr lang="en-US" sz="1300" b="1" dirty="0">
                 <a:solidFill>
                   <a:srgbClr val="1B2A4A"/>
                 </a:solidFill>
@@ -1566,22 +1831,22 @@
                 <a:ea typeface="Georgia" pitchFamily="34" charset="-122"/>
                 <a:cs typeface="Georgia" pitchFamily="34" charset="-120"/>
               </a:rPr>
-              <a:t>What is a Mixture?</a:t>
-            </a:r>
-            <a:endParaRPr lang="en-US" sz="2400" dirty="0"/>
-          </a:p>
-        </p:txBody>
-      </p:sp>
-      <p:sp>
-        <p:nvSpPr>
-          <p:cNvPr id="7" name="Text 5"/>
-          <p:cNvSpPr/>
-          <p:nvPr/>
-        </p:nvSpPr>
-        <p:spPr>
-          <a:xfrm>
-            <a:off x="1828800" y="1828800"/>
-            <a:ext cx="5669280" cy="2011680"/>
+              <a:t>Mixture</a:t>
+            </a:r>
+            <a:endParaRPr lang="en-US" sz="1300" dirty="0"/>
+          </a:p>
+        </p:txBody>
+      </p:sp>
+      <p:sp>
+        <p:nvSpPr>
+          <p:cNvPr id="9" name="Text 7"/>
+          <p:cNvSpPr/>
+          <p:nvPr/>
+        </p:nvSpPr>
+        <p:spPr>
+          <a:xfrm>
+            <a:off x="2377440" y="1051560"/>
+            <a:ext cx="1920240" cy="658368"/>
           </a:xfrm>
           <a:prstGeom prst="rect">
             <a:avLst/>
@@ -1590,27 +1855,899 @@
           <a:ln/>
         </p:spPr>
         <p:txBody>
-          <a:bodyPr wrap="square" rtlCol="0" anchor="t"/>
+          <a:bodyPr wrap="square" lIns="0" tIns="0" rIns="0" bIns="0" rtlCol="0" anchor="ctr"/>
           <a:lstStyle/>
           <a:p>
             <a:pPr indent="0" marL="0">
-              <a:lnSpc>
-                <a:spcPct val="130000"/>
-              </a:lnSpc>
               <a:buNone/>
             </a:pPr>
             <a:r>
-              <a:rPr lang="en-US" sz="1500" dirty="0">
-                <a:solidFill>
-                  <a:srgbClr val="3D3A36"/>
+              <a:rPr lang="en-US" sz="1100" dirty="0">
+                <a:solidFill>
+                  <a:srgbClr val="6B6660"/>
                 </a:solidFill>
                 <a:latin typeface="Calibri" pitchFamily="34" charset="0"/>
                 <a:ea typeface="Calibri" pitchFamily="34" charset="-122"/>
                 <a:cs typeface="Calibri" pitchFamily="34" charset="-120"/>
               </a:rPr>
-              <a:t>A mixture is two or more substances combined together that are NOT chemically bonded. Each substance keeps its own properties. Mixtures can be separated by physical methods. Examples: salt water, air, sand and iron filings.</a:t>
-            </a:r>
-            <a:endParaRPr lang="en-US" sz="1500" dirty="0"/>
+              <a:t>Two or more substances not chemically joined</a:t>
+            </a:r>
+            <a:endParaRPr lang="en-US" sz="1100" dirty="0"/>
+          </a:p>
+        </p:txBody>
+      </p:sp>
+      <p:sp>
+        <p:nvSpPr>
+          <p:cNvPr id="10" name="Shape 8"/>
+          <p:cNvSpPr/>
+          <p:nvPr/>
+        </p:nvSpPr>
+        <p:spPr>
+          <a:xfrm>
+            <a:off x="4754880" y="1051560"/>
+            <a:ext cx="3657600" cy="658368"/>
+          </a:xfrm>
+          <a:prstGeom prst="rect">
+            <a:avLst/>
+          </a:prstGeom>
+          <a:solidFill>
+            <a:srgbClr val="FFFFFF"/>
+          </a:solidFill>
+          <a:ln/>
+          <a:effectLst>
+            <a:outerShdw sx="100000" sy="100000" kx="0" ky="0" algn="bl" rotWithShape="0" blurRad="50800" dist="25400" dir="8100000">
+              <a:srgbClr val="000000">
+                <a:alpha val="10000"/>
+              </a:srgbClr>
+            </a:outerShdw>
+          </a:effectLst>
+        </p:spPr>
+      </p:sp>
+      <p:sp>
+        <p:nvSpPr>
+          <p:cNvPr id="11" name="Shape 9"/>
+          <p:cNvSpPr/>
+          <p:nvPr/>
+        </p:nvSpPr>
+        <p:spPr>
+          <a:xfrm>
+            <a:off x="4754880" y="1051560"/>
+            <a:ext cx="54864" cy="658368"/>
+          </a:xfrm>
+          <a:prstGeom prst="rect">
+            <a:avLst/>
+          </a:prstGeom>
+          <a:solidFill>
+            <a:srgbClr val="2A9D8F"/>
+          </a:solidFill>
+          <a:ln/>
+        </p:spPr>
+      </p:sp>
+      <p:sp>
+        <p:nvSpPr>
+          <p:cNvPr id="12" name="Text 10"/>
+          <p:cNvSpPr/>
+          <p:nvPr/>
+        </p:nvSpPr>
+        <p:spPr>
+          <a:xfrm>
+            <a:off x="4937760" y="1051560"/>
+            <a:ext cx="1463040" cy="658368"/>
+          </a:xfrm>
+          <a:prstGeom prst="rect">
+            <a:avLst/>
+          </a:prstGeom>
+          <a:noFill/>
+          <a:ln/>
+        </p:spPr>
+        <p:txBody>
+          <a:bodyPr wrap="square" lIns="0" tIns="0" rIns="0" bIns="0" rtlCol="0" anchor="ctr"/>
+          <a:lstStyle/>
+          <a:p>
+            <a:pPr indent="0" marL="0">
+              <a:buNone/>
+            </a:pPr>
+            <a:r>
+              <a:rPr lang="en-US" sz="1300" b="1" dirty="0">
+                <a:solidFill>
+                  <a:srgbClr val="1B2A4A"/>
+                </a:solidFill>
+                <a:latin typeface="Georgia" pitchFamily="34" charset="0"/>
+                <a:ea typeface="Georgia" pitchFamily="34" charset="-122"/>
+                <a:cs typeface="Georgia" pitchFamily="34" charset="-120"/>
+              </a:rPr>
+              <a:t>Solution</a:t>
+            </a:r>
+            <a:endParaRPr lang="en-US" sz="1300" dirty="0"/>
+          </a:p>
+        </p:txBody>
+      </p:sp>
+      <p:sp>
+        <p:nvSpPr>
+          <p:cNvPr id="13" name="Text 11"/>
+          <p:cNvSpPr/>
+          <p:nvPr/>
+        </p:nvSpPr>
+        <p:spPr>
+          <a:xfrm>
+            <a:off x="6400800" y="1051560"/>
+            <a:ext cx="1920240" cy="658368"/>
+          </a:xfrm>
+          <a:prstGeom prst="rect">
+            <a:avLst/>
+          </a:prstGeom>
+          <a:noFill/>
+          <a:ln/>
+        </p:spPr>
+        <p:txBody>
+          <a:bodyPr wrap="square" lIns="0" tIns="0" rIns="0" bIns="0" rtlCol="0" anchor="ctr"/>
+          <a:lstStyle/>
+          <a:p>
+            <a:pPr indent="0" marL="0">
+              <a:buNone/>
+            </a:pPr>
+            <a:r>
+              <a:rPr lang="en-US" sz="1100" dirty="0">
+                <a:solidFill>
+                  <a:srgbClr val="6B6660"/>
+                </a:solidFill>
+                <a:latin typeface="Calibri" pitchFamily="34" charset="0"/>
+                <a:ea typeface="Calibri" pitchFamily="34" charset="-122"/>
+                <a:cs typeface="Calibri" pitchFamily="34" charset="-120"/>
+              </a:rPr>
+              <a:t>A mixture where a solute dissolves in a solvent</a:t>
+            </a:r>
+            <a:endParaRPr lang="en-US" sz="1100" dirty="0"/>
+          </a:p>
+        </p:txBody>
+      </p:sp>
+      <p:sp>
+        <p:nvSpPr>
+          <p:cNvPr id="14" name="Shape 12"/>
+          <p:cNvSpPr/>
+          <p:nvPr/>
+        </p:nvSpPr>
+        <p:spPr>
+          <a:xfrm>
+            <a:off x="731520" y="1819656"/>
+            <a:ext cx="3657600" cy="658368"/>
+          </a:xfrm>
+          <a:prstGeom prst="rect">
+            <a:avLst/>
+          </a:prstGeom>
+          <a:solidFill>
+            <a:srgbClr val="FFFFFF"/>
+          </a:solidFill>
+          <a:ln/>
+          <a:effectLst>
+            <a:outerShdw sx="100000" sy="100000" kx="0" ky="0" algn="bl" rotWithShape="0" blurRad="50800" dist="25400" dir="8100000">
+              <a:srgbClr val="000000">
+                <a:alpha val="10000"/>
+              </a:srgbClr>
+            </a:outerShdw>
+          </a:effectLst>
+        </p:spPr>
+      </p:sp>
+      <p:sp>
+        <p:nvSpPr>
+          <p:cNvPr id="15" name="Shape 13"/>
+          <p:cNvSpPr/>
+          <p:nvPr/>
+        </p:nvSpPr>
+        <p:spPr>
+          <a:xfrm>
+            <a:off x="731520" y="1819656"/>
+            <a:ext cx="54864" cy="658368"/>
+          </a:xfrm>
+          <a:prstGeom prst="rect">
+            <a:avLst/>
+          </a:prstGeom>
+          <a:solidFill>
+            <a:srgbClr val="2A9D8F"/>
+          </a:solidFill>
+          <a:ln/>
+        </p:spPr>
+      </p:sp>
+      <p:sp>
+        <p:nvSpPr>
+          <p:cNvPr id="16" name="Text 14"/>
+          <p:cNvSpPr/>
+          <p:nvPr/>
+        </p:nvSpPr>
+        <p:spPr>
+          <a:xfrm>
+            <a:off x="914400" y="1819656"/>
+            <a:ext cx="1463040" cy="658368"/>
+          </a:xfrm>
+          <a:prstGeom prst="rect">
+            <a:avLst/>
+          </a:prstGeom>
+          <a:noFill/>
+          <a:ln/>
+        </p:spPr>
+        <p:txBody>
+          <a:bodyPr wrap="square" lIns="0" tIns="0" rIns="0" bIns="0" rtlCol="0" anchor="ctr"/>
+          <a:lstStyle/>
+          <a:p>
+            <a:pPr indent="0" marL="0">
+              <a:buNone/>
+            </a:pPr>
+            <a:r>
+              <a:rPr lang="en-US" sz="1300" b="1" dirty="0">
+                <a:solidFill>
+                  <a:srgbClr val="1B2A4A"/>
+                </a:solidFill>
+                <a:latin typeface="Georgia" pitchFamily="34" charset="0"/>
+                <a:ea typeface="Georgia" pitchFamily="34" charset="-122"/>
+                <a:cs typeface="Georgia" pitchFamily="34" charset="-120"/>
+              </a:rPr>
+              <a:t>Solute</a:t>
+            </a:r>
+            <a:endParaRPr lang="en-US" sz="1300" dirty="0"/>
+          </a:p>
+        </p:txBody>
+      </p:sp>
+      <p:sp>
+        <p:nvSpPr>
+          <p:cNvPr id="17" name="Text 15"/>
+          <p:cNvSpPr/>
+          <p:nvPr/>
+        </p:nvSpPr>
+        <p:spPr>
+          <a:xfrm>
+            <a:off x="2377440" y="1819656"/>
+            <a:ext cx="1920240" cy="658368"/>
+          </a:xfrm>
+          <a:prstGeom prst="rect">
+            <a:avLst/>
+          </a:prstGeom>
+          <a:noFill/>
+          <a:ln/>
+        </p:spPr>
+        <p:txBody>
+          <a:bodyPr wrap="square" lIns="0" tIns="0" rIns="0" bIns="0" rtlCol="0" anchor="ctr"/>
+          <a:lstStyle/>
+          <a:p>
+            <a:pPr indent="0" marL="0">
+              <a:buNone/>
+            </a:pPr>
+            <a:r>
+              <a:rPr lang="en-US" sz="1100" dirty="0">
+                <a:solidFill>
+                  <a:srgbClr val="6B6660"/>
+                </a:solidFill>
+                <a:latin typeface="Calibri" pitchFamily="34" charset="0"/>
+                <a:ea typeface="Calibri" pitchFamily="34" charset="-122"/>
+                <a:cs typeface="Calibri" pitchFamily="34" charset="-120"/>
+              </a:rPr>
+              <a:t>The substance that dissolves</a:t>
+            </a:r>
+            <a:endParaRPr lang="en-US" sz="1100" dirty="0"/>
+          </a:p>
+        </p:txBody>
+      </p:sp>
+      <p:sp>
+        <p:nvSpPr>
+          <p:cNvPr id="18" name="Shape 16"/>
+          <p:cNvSpPr/>
+          <p:nvPr/>
+        </p:nvSpPr>
+        <p:spPr>
+          <a:xfrm>
+            <a:off x="4754880" y="1819656"/>
+            <a:ext cx="3657600" cy="658368"/>
+          </a:xfrm>
+          <a:prstGeom prst="rect">
+            <a:avLst/>
+          </a:prstGeom>
+          <a:solidFill>
+            <a:srgbClr val="FFFFFF"/>
+          </a:solidFill>
+          <a:ln/>
+          <a:effectLst>
+            <a:outerShdw sx="100000" sy="100000" kx="0" ky="0" algn="bl" rotWithShape="0" blurRad="50800" dist="25400" dir="8100000">
+              <a:srgbClr val="000000">
+                <a:alpha val="10000"/>
+              </a:srgbClr>
+            </a:outerShdw>
+          </a:effectLst>
+        </p:spPr>
+      </p:sp>
+      <p:sp>
+        <p:nvSpPr>
+          <p:cNvPr id="19" name="Shape 17"/>
+          <p:cNvSpPr/>
+          <p:nvPr/>
+        </p:nvSpPr>
+        <p:spPr>
+          <a:xfrm>
+            <a:off x="4754880" y="1819656"/>
+            <a:ext cx="54864" cy="658368"/>
+          </a:xfrm>
+          <a:prstGeom prst="rect">
+            <a:avLst/>
+          </a:prstGeom>
+          <a:solidFill>
+            <a:srgbClr val="2A9D8F"/>
+          </a:solidFill>
+          <a:ln/>
+        </p:spPr>
+      </p:sp>
+      <p:sp>
+        <p:nvSpPr>
+          <p:cNvPr id="20" name="Text 18"/>
+          <p:cNvSpPr/>
+          <p:nvPr/>
+        </p:nvSpPr>
+        <p:spPr>
+          <a:xfrm>
+            <a:off x="4937760" y="1819656"/>
+            <a:ext cx="1463040" cy="658368"/>
+          </a:xfrm>
+          <a:prstGeom prst="rect">
+            <a:avLst/>
+          </a:prstGeom>
+          <a:noFill/>
+          <a:ln/>
+        </p:spPr>
+        <p:txBody>
+          <a:bodyPr wrap="square" lIns="0" tIns="0" rIns="0" bIns="0" rtlCol="0" anchor="ctr"/>
+          <a:lstStyle/>
+          <a:p>
+            <a:pPr indent="0" marL="0">
+              <a:buNone/>
+            </a:pPr>
+            <a:r>
+              <a:rPr lang="en-US" sz="1300" b="1" dirty="0">
+                <a:solidFill>
+                  <a:srgbClr val="1B2A4A"/>
+                </a:solidFill>
+                <a:latin typeface="Georgia" pitchFamily="34" charset="0"/>
+                <a:ea typeface="Georgia" pitchFamily="34" charset="-122"/>
+                <a:cs typeface="Georgia" pitchFamily="34" charset="-120"/>
+              </a:rPr>
+              <a:t>Solvent</a:t>
+            </a:r>
+            <a:endParaRPr lang="en-US" sz="1300" dirty="0"/>
+          </a:p>
+        </p:txBody>
+      </p:sp>
+      <p:sp>
+        <p:nvSpPr>
+          <p:cNvPr id="21" name="Text 19"/>
+          <p:cNvSpPr/>
+          <p:nvPr/>
+        </p:nvSpPr>
+        <p:spPr>
+          <a:xfrm>
+            <a:off x="6400800" y="1819656"/>
+            <a:ext cx="1920240" cy="658368"/>
+          </a:xfrm>
+          <a:prstGeom prst="rect">
+            <a:avLst/>
+          </a:prstGeom>
+          <a:noFill/>
+          <a:ln/>
+        </p:spPr>
+        <p:txBody>
+          <a:bodyPr wrap="square" lIns="0" tIns="0" rIns="0" bIns="0" rtlCol="0" anchor="ctr"/>
+          <a:lstStyle/>
+          <a:p>
+            <a:pPr indent="0" marL="0">
+              <a:buNone/>
+            </a:pPr>
+            <a:r>
+              <a:rPr lang="en-US" sz="1100" dirty="0">
+                <a:solidFill>
+                  <a:srgbClr val="6B6660"/>
+                </a:solidFill>
+                <a:latin typeface="Calibri" pitchFamily="34" charset="0"/>
+                <a:ea typeface="Calibri" pitchFamily="34" charset="-122"/>
+                <a:cs typeface="Calibri" pitchFamily="34" charset="-120"/>
+              </a:rPr>
+              <a:t>The liquid that does the dissolving</a:t>
+            </a:r>
+            <a:endParaRPr lang="en-US" sz="1100" dirty="0"/>
+          </a:p>
+        </p:txBody>
+      </p:sp>
+      <p:sp>
+        <p:nvSpPr>
+          <p:cNvPr id="22" name="Shape 20"/>
+          <p:cNvSpPr/>
+          <p:nvPr/>
+        </p:nvSpPr>
+        <p:spPr>
+          <a:xfrm>
+            <a:off x="731520" y="2587752"/>
+            <a:ext cx="3657600" cy="658368"/>
+          </a:xfrm>
+          <a:prstGeom prst="rect">
+            <a:avLst/>
+          </a:prstGeom>
+          <a:solidFill>
+            <a:srgbClr val="FFFFFF"/>
+          </a:solidFill>
+          <a:ln/>
+          <a:effectLst>
+            <a:outerShdw sx="100000" sy="100000" kx="0" ky="0" algn="bl" rotWithShape="0" blurRad="50800" dist="25400" dir="8100000">
+              <a:srgbClr val="000000">
+                <a:alpha val="10000"/>
+              </a:srgbClr>
+            </a:outerShdw>
+          </a:effectLst>
+        </p:spPr>
+      </p:sp>
+      <p:sp>
+        <p:nvSpPr>
+          <p:cNvPr id="23" name="Shape 21"/>
+          <p:cNvSpPr/>
+          <p:nvPr/>
+        </p:nvSpPr>
+        <p:spPr>
+          <a:xfrm>
+            <a:off x="731520" y="2587752"/>
+            <a:ext cx="54864" cy="658368"/>
+          </a:xfrm>
+          <a:prstGeom prst="rect">
+            <a:avLst/>
+          </a:prstGeom>
+          <a:solidFill>
+            <a:srgbClr val="2A9D8F"/>
+          </a:solidFill>
+          <a:ln/>
+        </p:spPr>
+      </p:sp>
+      <p:sp>
+        <p:nvSpPr>
+          <p:cNvPr id="24" name="Text 22"/>
+          <p:cNvSpPr/>
+          <p:nvPr/>
+        </p:nvSpPr>
+        <p:spPr>
+          <a:xfrm>
+            <a:off x="914400" y="2587752"/>
+            <a:ext cx="1463040" cy="658368"/>
+          </a:xfrm>
+          <a:prstGeom prst="rect">
+            <a:avLst/>
+          </a:prstGeom>
+          <a:noFill/>
+          <a:ln/>
+        </p:spPr>
+        <p:txBody>
+          <a:bodyPr wrap="square" lIns="0" tIns="0" rIns="0" bIns="0" rtlCol="0" anchor="ctr"/>
+          <a:lstStyle/>
+          <a:p>
+            <a:pPr indent="0" marL="0">
+              <a:buNone/>
+            </a:pPr>
+            <a:r>
+              <a:rPr lang="en-US" sz="1300" b="1" dirty="0">
+                <a:solidFill>
+                  <a:srgbClr val="1B2A4A"/>
+                </a:solidFill>
+                <a:latin typeface="Georgia" pitchFamily="34" charset="0"/>
+                <a:ea typeface="Georgia" pitchFamily="34" charset="-122"/>
+                <a:cs typeface="Georgia" pitchFamily="34" charset="-120"/>
+              </a:rPr>
+              <a:t>Soluble</a:t>
+            </a:r>
+            <a:endParaRPr lang="en-US" sz="1300" dirty="0"/>
+          </a:p>
+        </p:txBody>
+      </p:sp>
+      <p:sp>
+        <p:nvSpPr>
+          <p:cNvPr id="25" name="Text 23"/>
+          <p:cNvSpPr/>
+          <p:nvPr/>
+        </p:nvSpPr>
+        <p:spPr>
+          <a:xfrm>
+            <a:off x="2377440" y="2587752"/>
+            <a:ext cx="1920240" cy="658368"/>
+          </a:xfrm>
+          <a:prstGeom prst="rect">
+            <a:avLst/>
+          </a:prstGeom>
+          <a:noFill/>
+          <a:ln/>
+        </p:spPr>
+        <p:txBody>
+          <a:bodyPr wrap="square" lIns="0" tIns="0" rIns="0" bIns="0" rtlCol="0" anchor="ctr"/>
+          <a:lstStyle/>
+          <a:p>
+            <a:pPr indent="0" marL="0">
+              <a:buNone/>
+            </a:pPr>
+            <a:r>
+              <a:rPr lang="en-US" sz="1100" dirty="0">
+                <a:solidFill>
+                  <a:srgbClr val="6B6660"/>
+                </a:solidFill>
+                <a:latin typeface="Calibri" pitchFamily="34" charset="0"/>
+                <a:ea typeface="Calibri" pitchFamily="34" charset="-122"/>
+                <a:cs typeface="Calibri" pitchFamily="34" charset="-120"/>
+              </a:rPr>
+              <a:t>Can dissolve in a solvent</a:t>
+            </a:r>
+            <a:endParaRPr lang="en-US" sz="1100" dirty="0"/>
+          </a:p>
+        </p:txBody>
+      </p:sp>
+      <p:sp>
+        <p:nvSpPr>
+          <p:cNvPr id="26" name="Shape 24"/>
+          <p:cNvSpPr/>
+          <p:nvPr/>
+        </p:nvSpPr>
+        <p:spPr>
+          <a:xfrm>
+            <a:off x="4754880" y="2587752"/>
+            <a:ext cx="3657600" cy="658368"/>
+          </a:xfrm>
+          <a:prstGeom prst="rect">
+            <a:avLst/>
+          </a:prstGeom>
+          <a:solidFill>
+            <a:srgbClr val="FFFFFF"/>
+          </a:solidFill>
+          <a:ln/>
+          <a:effectLst>
+            <a:outerShdw sx="100000" sy="100000" kx="0" ky="0" algn="bl" rotWithShape="0" blurRad="50800" dist="25400" dir="8100000">
+              <a:srgbClr val="000000">
+                <a:alpha val="10000"/>
+              </a:srgbClr>
+            </a:outerShdw>
+          </a:effectLst>
+        </p:spPr>
+      </p:sp>
+      <p:sp>
+        <p:nvSpPr>
+          <p:cNvPr id="27" name="Shape 25"/>
+          <p:cNvSpPr/>
+          <p:nvPr/>
+        </p:nvSpPr>
+        <p:spPr>
+          <a:xfrm>
+            <a:off x="4754880" y="2587752"/>
+            <a:ext cx="54864" cy="658368"/>
+          </a:xfrm>
+          <a:prstGeom prst="rect">
+            <a:avLst/>
+          </a:prstGeom>
+          <a:solidFill>
+            <a:srgbClr val="2A9D8F"/>
+          </a:solidFill>
+          <a:ln/>
+        </p:spPr>
+      </p:sp>
+      <p:sp>
+        <p:nvSpPr>
+          <p:cNvPr id="28" name="Text 26"/>
+          <p:cNvSpPr/>
+          <p:nvPr/>
+        </p:nvSpPr>
+        <p:spPr>
+          <a:xfrm>
+            <a:off x="4937760" y="2587752"/>
+            <a:ext cx="1463040" cy="658368"/>
+          </a:xfrm>
+          <a:prstGeom prst="rect">
+            <a:avLst/>
+          </a:prstGeom>
+          <a:noFill/>
+          <a:ln/>
+        </p:spPr>
+        <p:txBody>
+          <a:bodyPr wrap="square" lIns="0" tIns="0" rIns="0" bIns="0" rtlCol="0" anchor="ctr"/>
+          <a:lstStyle/>
+          <a:p>
+            <a:pPr indent="0" marL="0">
+              <a:buNone/>
+            </a:pPr>
+            <a:r>
+              <a:rPr lang="en-US" sz="1300" b="1" dirty="0">
+                <a:solidFill>
+                  <a:srgbClr val="1B2A4A"/>
+                </a:solidFill>
+                <a:latin typeface="Georgia" pitchFamily="34" charset="0"/>
+                <a:ea typeface="Georgia" pitchFamily="34" charset="-122"/>
+                <a:cs typeface="Georgia" pitchFamily="34" charset="-120"/>
+              </a:rPr>
+              <a:t>Insoluble</a:t>
+            </a:r>
+            <a:endParaRPr lang="en-US" sz="1300" dirty="0"/>
+          </a:p>
+        </p:txBody>
+      </p:sp>
+      <p:sp>
+        <p:nvSpPr>
+          <p:cNvPr id="29" name="Text 27"/>
+          <p:cNvSpPr/>
+          <p:nvPr/>
+        </p:nvSpPr>
+        <p:spPr>
+          <a:xfrm>
+            <a:off x="6400800" y="2587752"/>
+            <a:ext cx="1920240" cy="658368"/>
+          </a:xfrm>
+          <a:prstGeom prst="rect">
+            <a:avLst/>
+          </a:prstGeom>
+          <a:noFill/>
+          <a:ln/>
+        </p:spPr>
+        <p:txBody>
+          <a:bodyPr wrap="square" lIns="0" tIns="0" rIns="0" bIns="0" rtlCol="0" anchor="ctr"/>
+          <a:lstStyle/>
+          <a:p>
+            <a:pPr indent="0" marL="0">
+              <a:buNone/>
+            </a:pPr>
+            <a:r>
+              <a:rPr lang="en-US" sz="1100" dirty="0">
+                <a:solidFill>
+                  <a:srgbClr val="6B6660"/>
+                </a:solidFill>
+                <a:latin typeface="Calibri" pitchFamily="34" charset="0"/>
+                <a:ea typeface="Calibri" pitchFamily="34" charset="-122"/>
+                <a:cs typeface="Calibri" pitchFamily="34" charset="-120"/>
+              </a:rPr>
+              <a:t>Cannot dissolve</a:t>
+            </a:r>
+            <a:endParaRPr lang="en-US" sz="1100" dirty="0"/>
+          </a:p>
+        </p:txBody>
+      </p:sp>
+      <p:sp>
+        <p:nvSpPr>
+          <p:cNvPr id="30" name="Shape 28"/>
+          <p:cNvSpPr/>
+          <p:nvPr/>
+        </p:nvSpPr>
+        <p:spPr>
+          <a:xfrm>
+            <a:off x="731520" y="3355848"/>
+            <a:ext cx="3657600" cy="658368"/>
+          </a:xfrm>
+          <a:prstGeom prst="rect">
+            <a:avLst/>
+          </a:prstGeom>
+          <a:solidFill>
+            <a:srgbClr val="FFFFFF"/>
+          </a:solidFill>
+          <a:ln/>
+          <a:effectLst>
+            <a:outerShdw sx="100000" sy="100000" kx="0" ky="0" algn="bl" rotWithShape="0" blurRad="50800" dist="25400" dir="8100000">
+              <a:srgbClr val="000000">
+                <a:alpha val="10000"/>
+              </a:srgbClr>
+            </a:outerShdw>
+          </a:effectLst>
+        </p:spPr>
+      </p:sp>
+      <p:sp>
+        <p:nvSpPr>
+          <p:cNvPr id="31" name="Shape 29"/>
+          <p:cNvSpPr/>
+          <p:nvPr/>
+        </p:nvSpPr>
+        <p:spPr>
+          <a:xfrm>
+            <a:off x="731520" y="3355848"/>
+            <a:ext cx="54864" cy="658368"/>
+          </a:xfrm>
+          <a:prstGeom prst="rect">
+            <a:avLst/>
+          </a:prstGeom>
+          <a:solidFill>
+            <a:srgbClr val="2A9D8F"/>
+          </a:solidFill>
+          <a:ln/>
+        </p:spPr>
+      </p:sp>
+      <p:sp>
+        <p:nvSpPr>
+          <p:cNvPr id="32" name="Text 30"/>
+          <p:cNvSpPr/>
+          <p:nvPr/>
+        </p:nvSpPr>
+        <p:spPr>
+          <a:xfrm>
+            <a:off x="914400" y="3355848"/>
+            <a:ext cx="1463040" cy="658368"/>
+          </a:xfrm>
+          <a:prstGeom prst="rect">
+            <a:avLst/>
+          </a:prstGeom>
+          <a:noFill/>
+          <a:ln/>
+        </p:spPr>
+        <p:txBody>
+          <a:bodyPr wrap="square" lIns="0" tIns="0" rIns="0" bIns="0" rtlCol="0" anchor="ctr"/>
+          <a:lstStyle/>
+          <a:p>
+            <a:pPr indent="0" marL="0">
+              <a:buNone/>
+            </a:pPr>
+            <a:r>
+              <a:rPr lang="en-US" sz="1300" b="1" dirty="0">
+                <a:solidFill>
+                  <a:srgbClr val="1B2A4A"/>
+                </a:solidFill>
+                <a:latin typeface="Georgia" pitchFamily="34" charset="0"/>
+                <a:ea typeface="Georgia" pitchFamily="34" charset="-122"/>
+                <a:cs typeface="Georgia" pitchFamily="34" charset="-120"/>
+              </a:rPr>
+              <a:t>Saturated</a:t>
+            </a:r>
+            <a:endParaRPr lang="en-US" sz="1300" dirty="0"/>
+          </a:p>
+        </p:txBody>
+      </p:sp>
+      <p:sp>
+        <p:nvSpPr>
+          <p:cNvPr id="33" name="Text 31"/>
+          <p:cNvSpPr/>
+          <p:nvPr/>
+        </p:nvSpPr>
+        <p:spPr>
+          <a:xfrm>
+            <a:off x="2377440" y="3355848"/>
+            <a:ext cx="1920240" cy="658368"/>
+          </a:xfrm>
+          <a:prstGeom prst="rect">
+            <a:avLst/>
+          </a:prstGeom>
+          <a:noFill/>
+          <a:ln/>
+        </p:spPr>
+        <p:txBody>
+          <a:bodyPr wrap="square" lIns="0" tIns="0" rIns="0" bIns="0" rtlCol="0" anchor="ctr"/>
+          <a:lstStyle/>
+          <a:p>
+            <a:pPr indent="0" marL="0">
+              <a:buNone/>
+            </a:pPr>
+            <a:r>
+              <a:rPr lang="en-US" sz="1100" dirty="0">
+                <a:solidFill>
+                  <a:srgbClr val="6B6660"/>
+                </a:solidFill>
+                <a:latin typeface="Calibri" pitchFamily="34" charset="0"/>
+                <a:ea typeface="Calibri" pitchFamily="34" charset="-122"/>
+                <a:cs typeface="Calibri" pitchFamily="34" charset="-120"/>
+              </a:rPr>
+              <a:t>No more solute can dissolve</a:t>
+            </a:r>
+            <a:endParaRPr lang="en-US" sz="1100" dirty="0"/>
+          </a:p>
+        </p:txBody>
+      </p:sp>
+      <p:sp>
+        <p:nvSpPr>
+          <p:cNvPr id="34" name="Shape 32"/>
+          <p:cNvSpPr/>
+          <p:nvPr/>
+        </p:nvSpPr>
+        <p:spPr>
+          <a:xfrm>
+            <a:off x="4754880" y="3355848"/>
+            <a:ext cx="3657600" cy="658368"/>
+          </a:xfrm>
+          <a:prstGeom prst="rect">
+            <a:avLst/>
+          </a:prstGeom>
+          <a:solidFill>
+            <a:srgbClr val="FFFFFF"/>
+          </a:solidFill>
+          <a:ln/>
+          <a:effectLst>
+            <a:outerShdw sx="100000" sy="100000" kx="0" ky="0" algn="bl" rotWithShape="0" blurRad="50800" dist="25400" dir="8100000">
+              <a:srgbClr val="000000">
+                <a:alpha val="10000"/>
+              </a:srgbClr>
+            </a:outerShdw>
+          </a:effectLst>
+        </p:spPr>
+      </p:sp>
+      <p:sp>
+        <p:nvSpPr>
+          <p:cNvPr id="35" name="Shape 33"/>
+          <p:cNvSpPr/>
+          <p:nvPr/>
+        </p:nvSpPr>
+        <p:spPr>
+          <a:xfrm>
+            <a:off x="4754880" y="3355848"/>
+            <a:ext cx="54864" cy="658368"/>
+          </a:xfrm>
+          <a:prstGeom prst="rect">
+            <a:avLst/>
+          </a:prstGeom>
+          <a:solidFill>
+            <a:srgbClr val="2A9D8F"/>
+          </a:solidFill>
+          <a:ln/>
+        </p:spPr>
+      </p:sp>
+      <p:sp>
+        <p:nvSpPr>
+          <p:cNvPr id="36" name="Text 34"/>
+          <p:cNvSpPr/>
+          <p:nvPr/>
+        </p:nvSpPr>
+        <p:spPr>
+          <a:xfrm>
+            <a:off x="4937760" y="3355848"/>
+            <a:ext cx="1463040" cy="658368"/>
+          </a:xfrm>
+          <a:prstGeom prst="rect">
+            <a:avLst/>
+          </a:prstGeom>
+          <a:noFill/>
+          <a:ln/>
+        </p:spPr>
+        <p:txBody>
+          <a:bodyPr wrap="square" lIns="0" tIns="0" rIns="0" bIns="0" rtlCol="0" anchor="ctr"/>
+          <a:lstStyle/>
+          <a:p>
+            <a:pPr indent="0" marL="0">
+              <a:buNone/>
+            </a:pPr>
+            <a:r>
+              <a:rPr lang="en-US" sz="1300" b="1" dirty="0">
+                <a:solidFill>
+                  <a:srgbClr val="1B2A4A"/>
+                </a:solidFill>
+                <a:latin typeface="Georgia" pitchFamily="34" charset="0"/>
+                <a:ea typeface="Georgia" pitchFamily="34" charset="-122"/>
+                <a:cs typeface="Georgia" pitchFamily="34" charset="-120"/>
+              </a:rPr>
+              <a:t>Pure substance</a:t>
+            </a:r>
+            <a:endParaRPr lang="en-US" sz="1300" dirty="0"/>
+          </a:p>
+        </p:txBody>
+      </p:sp>
+      <p:sp>
+        <p:nvSpPr>
+          <p:cNvPr id="37" name="Text 35"/>
+          <p:cNvSpPr/>
+          <p:nvPr/>
+        </p:nvSpPr>
+        <p:spPr>
+          <a:xfrm>
+            <a:off x="6400800" y="3355848"/>
+            <a:ext cx="1920240" cy="658368"/>
+          </a:xfrm>
+          <a:prstGeom prst="rect">
+            <a:avLst/>
+          </a:prstGeom>
+          <a:noFill/>
+          <a:ln/>
+        </p:spPr>
+        <p:txBody>
+          <a:bodyPr wrap="square" lIns="0" tIns="0" rIns="0" bIns="0" rtlCol="0" anchor="ctr"/>
+          <a:lstStyle/>
+          <a:p>
+            <a:pPr indent="0" marL="0">
+              <a:buNone/>
+            </a:pPr>
+            <a:r>
+              <a:rPr lang="en-US" sz="1100" dirty="0">
+                <a:solidFill>
+                  <a:srgbClr val="6B6660"/>
+                </a:solidFill>
+                <a:latin typeface="Calibri" pitchFamily="34" charset="0"/>
+                <a:ea typeface="Calibri" pitchFamily="34" charset="-122"/>
+                <a:cs typeface="Calibri" pitchFamily="34" charset="-120"/>
+              </a:rPr>
+              <a:t>Contains only ONE type of particle</a:t>
+            </a:r>
+            <a:endParaRPr lang="en-US" sz="1100" dirty="0"/>
           </a:p>
         </p:txBody>
       </p:sp>
@@ -1655,7 +2792,47 @@
         <p:spPr>
           <a:xfrm>
             <a:off x="0" y="0"/>
-            <a:ext cx="9144000" cy="54864"/>
+            <a:ext cx="9144000" cy="822960"/>
+          </a:xfrm>
+          <a:prstGeom prst="rect">
+            <a:avLst/>
+          </a:prstGeom>
+          <a:solidFill>
+            <a:srgbClr val="FFFFFF"/>
+          </a:solidFill>
+          <a:ln/>
+        </p:spPr>
+      </p:sp>
+      <p:sp>
+        <p:nvSpPr>
+          <p:cNvPr id="3" name="Shape 1"/>
+          <p:cNvSpPr/>
+          <p:nvPr/>
+        </p:nvSpPr>
+        <p:spPr>
+          <a:xfrm>
+            <a:off x="0" y="804672"/>
+            <a:ext cx="9144000" cy="27432"/>
+          </a:xfrm>
+          <a:prstGeom prst="rect">
+            <a:avLst/>
+          </a:prstGeom>
+          <a:solidFill>
+            <a:srgbClr val="E5E2DC"/>
+          </a:solidFill>
+          <a:ln/>
+        </p:spPr>
+      </p:sp>
+      <p:sp>
+        <p:nvSpPr>
+          <p:cNvPr id="4" name="Shape 2"/>
+          <p:cNvSpPr/>
+          <p:nvPr/>
+        </p:nvSpPr>
+        <p:spPr>
+          <a:xfrm>
+            <a:off x="548640" y="201168"/>
+            <a:ext cx="54864" cy="420624"/>
           </a:xfrm>
           <a:prstGeom prst="rect">
             <a:avLst/>
@@ -1668,14 +2845,14 @@
       </p:sp>
       <p:sp>
         <p:nvSpPr>
-          <p:cNvPr id="3" name="Text 1"/>
-          <p:cNvSpPr/>
-          <p:nvPr/>
-        </p:nvSpPr>
-        <p:spPr>
-          <a:xfrm>
-            <a:off x="7772400" y="4709160"/>
-            <a:ext cx="1097280" cy="320040"/>
+          <p:cNvPr id="5" name="Text 3"/>
+          <p:cNvSpPr/>
+          <p:nvPr/>
+        </p:nvSpPr>
+        <p:spPr>
+          <a:xfrm>
+            <a:off x="777240" y="137160"/>
+            <a:ext cx="7772400" cy="548640"/>
           </a:xfrm>
           <a:prstGeom prst="rect">
             <a:avLst/>
@@ -1684,53 +2861,14 @@
           <a:ln/>
         </p:spPr>
         <p:txBody>
-          <a:bodyPr wrap="square" rtlCol="0" anchor="ctr"/>
-          <a:lstStyle/>
-          <a:p>
-            <a:pPr algn="r" indent="0" marL="0">
-              <a:buNone/>
-            </a:pPr>
-            <a:r>
-              <a:rPr lang="en-US" sz="900" dirty="0">
-                <a:solidFill>
-                  <a:srgbClr val="6B6660"/>
-                </a:solidFill>
-                <a:latin typeface="Calibri" pitchFamily="34" charset="0"/>
-                <a:ea typeface="Calibri" pitchFamily="34" charset="-122"/>
-                <a:cs typeface="Calibri" pitchFamily="34" charset="-120"/>
-              </a:rPr>
-              <a:t>3 / 5</a:t>
-            </a:r>
-            <a:endParaRPr lang="en-US" sz="900" dirty="0"/>
-          </a:p>
-        </p:txBody>
-      </p:sp>
-      <p:sp>
-        <p:nvSpPr>
-          <p:cNvPr id="4" name="Text 2"/>
-          <p:cNvSpPr/>
-          <p:nvPr/>
-        </p:nvSpPr>
-        <p:spPr>
-          <a:xfrm>
-            <a:off x="457200" y="274320"/>
-            <a:ext cx="8229600" cy="640080"/>
-          </a:xfrm>
-          <a:prstGeom prst="rect">
-            <a:avLst/>
-          </a:prstGeom>
-          <a:noFill/>
-          <a:ln/>
-        </p:spPr>
-        <p:txBody>
-          <a:bodyPr wrap="square" rtlCol="0" anchor="ctr"/>
+          <a:bodyPr wrap="square" lIns="0" tIns="0" rIns="0" bIns="0" rtlCol="0" anchor="ctr"/>
           <a:lstStyle/>
           <a:p>
             <a:pPr indent="0" marL="0">
               <a:buNone/>
             </a:pPr>
             <a:r>
-              <a:rPr lang="en-US" sz="2600" b="1" dirty="0">
+              <a:rPr lang="en-US" sz="2000" b="1" dirty="0">
                 <a:solidFill>
                   <a:srgbClr val="1B2A4A"/>
                 </a:solidFill>
@@ -1738,22 +2876,22 @@
                 <a:ea typeface="Georgia" pitchFamily="34" charset="-122"/>
                 <a:cs typeface="Georgia" pitchFamily="34" charset="-120"/>
               </a:rPr>
-              <a:t>Types of Mixtures</a:t>
-            </a:r>
-            <a:endParaRPr lang="en-US" sz="2600" dirty="0"/>
-          </a:p>
-        </p:txBody>
-      </p:sp>
-      <p:sp>
-        <p:nvSpPr>
-          <p:cNvPr id="5" name="Shape 3"/>
-          <p:cNvSpPr/>
-          <p:nvPr/>
-        </p:nvSpPr>
-        <p:spPr>
-          <a:xfrm>
-            <a:off x="457200" y="1188720"/>
-            <a:ext cx="2560320" cy="1828800"/>
+              <a:t>Pure Substances vs Mixtures</a:t>
+            </a:r>
+            <a:endParaRPr lang="en-US" sz="2000" dirty="0"/>
+          </a:p>
+        </p:txBody>
+      </p:sp>
+      <p:sp>
+        <p:nvSpPr>
+          <p:cNvPr id="6" name="Shape 4"/>
+          <p:cNvSpPr/>
+          <p:nvPr/>
+        </p:nvSpPr>
+        <p:spPr>
+          <a:xfrm>
+            <a:off x="548640" y="1051560"/>
+            <a:ext cx="3840480" cy="3474720"/>
           </a:xfrm>
           <a:prstGeom prst="rect">
             <a:avLst/>
@@ -1761,12 +2899,7 @@
           <a:solidFill>
             <a:srgbClr val="FFFFFF"/>
           </a:solidFill>
-          <a:ln w="12700">
-            <a:solidFill>
-              <a:srgbClr val="E5E2DC"/>
-            </a:solidFill>
-            <a:prstDash val="solid"/>
-          </a:ln>
+          <a:ln/>
           <a:effectLst>
             <a:outerShdw sx="100000" sy="100000" kx="0" ky="0" algn="bl" rotWithShape="0" blurRad="50800" dist="25400" dir="8100000">
               <a:srgbClr val="000000">
@@ -1778,14 +2911,14 @@
       </p:sp>
       <p:sp>
         <p:nvSpPr>
-          <p:cNvPr id="6" name="Shape 4"/>
-          <p:cNvSpPr/>
-          <p:nvPr/>
-        </p:nvSpPr>
-        <p:spPr>
-          <a:xfrm>
-            <a:off x="457200" y="1188720"/>
-            <a:ext cx="2560320" cy="54864"/>
+          <p:cNvPr id="7" name="Shape 5"/>
+          <p:cNvSpPr/>
+          <p:nvPr/>
+        </p:nvSpPr>
+        <p:spPr>
+          <a:xfrm>
+            <a:off x="548640" y="1051560"/>
+            <a:ext cx="3840480" cy="54864"/>
           </a:xfrm>
           <a:prstGeom prst="rect">
             <a:avLst/>
@@ -1798,14 +2931,14 @@
       </p:sp>
       <p:sp>
         <p:nvSpPr>
-          <p:cNvPr id="7" name="Text 5"/>
-          <p:cNvSpPr/>
-          <p:nvPr/>
-        </p:nvSpPr>
-        <p:spPr>
-          <a:xfrm>
-            <a:off x="594360" y="1325880"/>
-            <a:ext cx="2286000" cy="365760"/>
+          <p:cNvPr id="8" name="Text 6"/>
+          <p:cNvSpPr/>
+          <p:nvPr/>
+        </p:nvSpPr>
+        <p:spPr>
+          <a:xfrm>
+            <a:off x="777240" y="1188720"/>
+            <a:ext cx="3383280" cy="457200"/>
           </a:xfrm>
           <a:prstGeom prst="rect">
             <a:avLst/>
@@ -1814,53 +2947,78 @@
           <a:ln/>
         </p:spPr>
         <p:txBody>
-          <a:bodyPr wrap="square" rtlCol="0" anchor="ctr"/>
+          <a:bodyPr wrap="square" lIns="0" tIns="0" rIns="0" bIns="0" rtlCol="0" anchor="ctr"/>
           <a:lstStyle/>
           <a:p>
             <a:pPr indent="0" marL="0">
               <a:buNone/>
             </a:pPr>
             <a:r>
-              <a:rPr lang="en-US" sz="1400" b="1" dirty="0">
+              <a:rPr lang="en-US" sz="1500" b="1" dirty="0">
                 <a:solidFill>
                   <a:srgbClr val="1B2A4A"/>
+                </a:solidFill>
+                <a:latin typeface="Georgia" pitchFamily="34" charset="0"/>
+                <a:ea typeface="Georgia" pitchFamily="34" charset="-122"/>
+                <a:cs typeface="Georgia" pitchFamily="34" charset="-120"/>
+              </a:rPr>
+              <a:t>Pure Substance</a:t>
+            </a:r>
+            <a:endParaRPr lang="en-US" sz="1500" dirty="0"/>
+          </a:p>
+        </p:txBody>
+      </p:sp>
+      <p:sp>
+        <p:nvSpPr>
+          <p:cNvPr id="9" name="Text 7"/>
+          <p:cNvSpPr/>
+          <p:nvPr/>
+        </p:nvSpPr>
+        <p:spPr>
+          <a:xfrm>
+            <a:off x="777240" y="1691640"/>
+            <a:ext cx="3383280" cy="2651760"/>
+          </a:xfrm>
+          <a:prstGeom prst="rect">
+            <a:avLst/>
+          </a:prstGeom>
+          <a:noFill/>
+          <a:ln/>
+        </p:spPr>
+        <p:txBody>
+          <a:bodyPr wrap="square" rtlCol="0" anchor="t"/>
+          <a:lstStyle/>
+          <a:p>
+            <a:pPr marL="342900" indent="-342900">
+              <a:spcAft>
+                <a:spcPts val="600"/>
+              </a:spcAft>
+              <a:buSzPct val="100000"/>
+              <a:buChar char="•"/>
+            </a:pPr>
+            <a:r>
+              <a:rPr lang="en-US" sz="1300" dirty="0">
+                <a:solidFill>
+                  <a:srgbClr val="3D3A36"/>
                 </a:solidFill>
                 <a:latin typeface="Calibri" pitchFamily="34" charset="0"/>
                 <a:ea typeface="Calibri" pitchFamily="34" charset="-122"/>
                 <a:cs typeface="Calibri" pitchFamily="34" charset="-120"/>
               </a:rPr>
-              <a:t>Solutions</a:t>
-            </a:r>
-            <a:endParaRPr lang="en-US" sz="1400" dirty="0"/>
-          </a:p>
-        </p:txBody>
-      </p:sp>
-      <p:sp>
-        <p:nvSpPr>
-          <p:cNvPr id="8" name="Text 6"/>
-          <p:cNvSpPr/>
-          <p:nvPr/>
-        </p:nvSpPr>
-        <p:spPr>
-          <a:xfrm>
-            <a:off x="594360" y="1737360"/>
-            <a:ext cx="2286000" cy="1097280"/>
-          </a:xfrm>
-          <a:prstGeom prst="rect">
-            <a:avLst/>
-          </a:prstGeom>
-          <a:noFill/>
-          <a:ln/>
-        </p:spPr>
-        <p:txBody>
-          <a:bodyPr wrap="square" rtlCol="0" anchor="t"/>
-          <a:lstStyle/>
-          <a:p>
-            <a:pPr indent="0" marL="0">
-              <a:buNone/>
-            </a:pPr>
-            <a:r>
-              <a:rPr lang="en-US" sz="1100" dirty="0">
+              <a:t>Contains only ONE type of particle</a:t>
+            </a:r>
+            <a:endParaRPr lang="en-US" sz="1300" dirty="0"/>
+          </a:p>
+          <a:p>
+            <a:pPr marL="342900" indent="-342900">
+              <a:spcAft>
+                <a:spcPts val="600"/>
+              </a:spcAft>
+              <a:buSzPct val="100000"/>
+              <a:buChar char="•"/>
+            </a:pPr>
+            <a:r>
+              <a:rPr lang="en-US" sz="1300" dirty="0">
                 <a:solidFill>
                   <a:srgbClr val="3D3A36"/>
                 </a:solidFill>
@@ -1868,22 +3026,64 @@
                 <a:ea typeface="Calibri" pitchFamily="34" charset="-122"/>
                 <a:cs typeface="Calibri" pitchFamily="34" charset="-120"/>
               </a:rPr>
-              <a:t>A solute dissolves in a solvent to form a solution. Example: salt (solute) dissolves in water (solvent). The solution is transparent — you cannot see the particles.</a:t>
-            </a:r>
-            <a:endParaRPr lang="en-US" sz="1100" dirty="0"/>
-          </a:p>
-        </p:txBody>
-      </p:sp>
-      <p:sp>
-        <p:nvSpPr>
-          <p:cNvPr id="9" name="Shape 7"/>
-          <p:cNvSpPr/>
-          <p:nvPr/>
-        </p:nvSpPr>
-        <p:spPr>
-          <a:xfrm>
-            <a:off x="3291840" y="1188720"/>
-            <a:ext cx="2560320" cy="1828800"/>
+              <a:t>Has a FIXED melting and boiling point</a:t>
+            </a:r>
+            <a:endParaRPr lang="en-US" sz="1300" dirty="0"/>
+          </a:p>
+          <a:p>
+            <a:pPr marL="342900" indent="-342900">
+              <a:spcAft>
+                <a:spcPts val="600"/>
+              </a:spcAft>
+              <a:buSzPct val="100000"/>
+              <a:buChar char="•"/>
+            </a:pPr>
+            <a:r>
+              <a:rPr lang="en-US" sz="1300" dirty="0">
+                <a:solidFill>
+                  <a:srgbClr val="3D3A36"/>
+                </a:solidFill>
+                <a:latin typeface="Calibri" pitchFamily="34" charset="0"/>
+                <a:ea typeface="Calibri" pitchFamily="34" charset="-122"/>
+                <a:cs typeface="Calibri" pitchFamily="34" charset="-120"/>
+              </a:rPr>
+              <a:t>Examples: pure water, gold, oxygen</a:t>
+            </a:r>
+            <a:endParaRPr lang="en-US" sz="1300" dirty="0"/>
+          </a:p>
+          <a:p>
+            <a:pPr marL="342900" indent="-342900">
+              <a:spcAft>
+                <a:spcPts val="600"/>
+              </a:spcAft>
+              <a:buSzPct val="100000"/>
+              <a:buChar char="•"/>
+            </a:pPr>
+            <a:r>
+              <a:rPr lang="en-US" sz="1300" dirty="0">
+                <a:solidFill>
+                  <a:srgbClr val="3D3A36"/>
+                </a:solidFill>
+                <a:latin typeface="Calibri" pitchFamily="34" charset="0"/>
+                <a:ea typeface="Calibri" pitchFamily="34" charset="-122"/>
+                <a:cs typeface="Calibri" pitchFamily="34" charset="-120"/>
+              </a:rPr>
+              <a:t>Diamond, table salt (NaCl)</a:t>
+            </a:r>
+            <a:endParaRPr lang="en-US" sz="1300" dirty="0"/>
+          </a:p>
+        </p:txBody>
+      </p:sp>
+      <p:sp>
+        <p:nvSpPr>
+          <p:cNvPr id="10" name="Shape 8"/>
+          <p:cNvSpPr/>
+          <p:nvPr/>
+        </p:nvSpPr>
+        <p:spPr>
+          <a:xfrm>
+            <a:off x="4754880" y="1051560"/>
+            <a:ext cx="3840480" cy="3474720"/>
           </a:xfrm>
           <a:prstGeom prst="rect">
             <a:avLst/>
@@ -1891,12 +3091,7 @@
           <a:solidFill>
             <a:srgbClr val="FFFFFF"/>
           </a:solidFill>
-          <a:ln w="12700">
-            <a:solidFill>
-              <a:srgbClr val="E5E2DC"/>
-            </a:solidFill>
-            <a:prstDash val="solid"/>
-          </a:ln>
+          <a:ln/>
           <a:effectLst>
             <a:outerShdw sx="100000" sy="100000" kx="0" ky="0" algn="bl" rotWithShape="0" blurRad="50800" dist="25400" dir="8100000">
               <a:srgbClr val="000000">
@@ -1908,34 +3103,34 @@
       </p:sp>
       <p:sp>
         <p:nvSpPr>
-          <p:cNvPr id="10" name="Shape 8"/>
-          <p:cNvSpPr/>
-          <p:nvPr/>
-        </p:nvSpPr>
-        <p:spPr>
-          <a:xfrm>
-            <a:off x="3291840" y="1188720"/>
-            <a:ext cx="2560320" cy="54864"/>
-          </a:xfrm>
-          <a:prstGeom prst="rect">
-            <a:avLst/>
-          </a:prstGeom>
-          <a:solidFill>
-            <a:srgbClr val="2A9D8F"/>
-          </a:solidFill>
-          <a:ln/>
-        </p:spPr>
-      </p:sp>
-      <p:sp>
-        <p:nvSpPr>
-          <p:cNvPr id="11" name="Text 9"/>
-          <p:cNvSpPr/>
-          <p:nvPr/>
-        </p:nvSpPr>
-        <p:spPr>
-          <a:xfrm>
-            <a:off x="3429000" y="1325880"/>
-            <a:ext cx="2286000" cy="365760"/>
+          <p:cNvPr id="11" name="Shape 9"/>
+          <p:cNvSpPr/>
+          <p:nvPr/>
+        </p:nvSpPr>
+        <p:spPr>
+          <a:xfrm>
+            <a:off x="4754880" y="1051560"/>
+            <a:ext cx="3840480" cy="54864"/>
+          </a:xfrm>
+          <a:prstGeom prst="rect">
+            <a:avLst/>
+          </a:prstGeom>
+          <a:solidFill>
+            <a:srgbClr val="E9C46A"/>
+          </a:solidFill>
+          <a:ln/>
+        </p:spPr>
+      </p:sp>
+      <p:sp>
+        <p:nvSpPr>
+          <p:cNvPr id="12" name="Text 10"/>
+          <p:cNvSpPr/>
+          <p:nvPr/>
+        </p:nvSpPr>
+        <p:spPr>
+          <a:xfrm>
+            <a:off x="4983480" y="1188720"/>
+            <a:ext cx="3383280" cy="457200"/>
           </a:xfrm>
           <a:prstGeom prst="rect">
             <a:avLst/>
@@ -1944,53 +3139,78 @@
           <a:ln/>
         </p:spPr>
         <p:txBody>
-          <a:bodyPr wrap="square" rtlCol="0" anchor="ctr"/>
+          <a:bodyPr wrap="square" lIns="0" tIns="0" rIns="0" bIns="0" rtlCol="0" anchor="ctr"/>
           <a:lstStyle/>
           <a:p>
             <a:pPr indent="0" marL="0">
               <a:buNone/>
             </a:pPr>
             <a:r>
-              <a:rPr lang="en-US" sz="1400" b="1" dirty="0">
+              <a:rPr lang="en-US" sz="1500" b="1" dirty="0">
                 <a:solidFill>
                   <a:srgbClr val="1B2A4A"/>
+                </a:solidFill>
+                <a:latin typeface="Georgia" pitchFamily="34" charset="0"/>
+                <a:ea typeface="Georgia" pitchFamily="34" charset="-122"/>
+                <a:cs typeface="Georgia" pitchFamily="34" charset="-120"/>
+              </a:rPr>
+              <a:t>Mixture</a:t>
+            </a:r>
+            <a:endParaRPr lang="en-US" sz="1500" dirty="0"/>
+          </a:p>
+        </p:txBody>
+      </p:sp>
+      <p:sp>
+        <p:nvSpPr>
+          <p:cNvPr id="13" name="Text 11"/>
+          <p:cNvSpPr/>
+          <p:nvPr/>
+        </p:nvSpPr>
+        <p:spPr>
+          <a:xfrm>
+            <a:off x="4983480" y="1691640"/>
+            <a:ext cx="3383280" cy="2651760"/>
+          </a:xfrm>
+          <a:prstGeom prst="rect">
+            <a:avLst/>
+          </a:prstGeom>
+          <a:noFill/>
+          <a:ln/>
+        </p:spPr>
+        <p:txBody>
+          <a:bodyPr wrap="square" rtlCol="0" anchor="t"/>
+          <a:lstStyle/>
+          <a:p>
+            <a:pPr marL="342900" indent="-342900">
+              <a:spcAft>
+                <a:spcPts val="600"/>
+              </a:spcAft>
+              <a:buSzPct val="100000"/>
+              <a:buChar char="•"/>
+            </a:pPr>
+            <a:r>
+              <a:rPr lang="en-US" sz="1300" dirty="0">
+                <a:solidFill>
+                  <a:srgbClr val="3D3A36"/>
                 </a:solidFill>
                 <a:latin typeface="Calibri" pitchFamily="34" charset="0"/>
                 <a:ea typeface="Calibri" pitchFamily="34" charset="-122"/>
                 <a:cs typeface="Calibri" pitchFamily="34" charset="-120"/>
               </a:rPr>
-              <a:t>Suspensions</a:t>
-            </a:r>
-            <a:endParaRPr lang="en-US" sz="1400" dirty="0"/>
-          </a:p>
-        </p:txBody>
-      </p:sp>
-      <p:sp>
-        <p:nvSpPr>
-          <p:cNvPr id="12" name="Text 10"/>
-          <p:cNvSpPr/>
-          <p:nvPr/>
-        </p:nvSpPr>
-        <p:spPr>
-          <a:xfrm>
-            <a:off x="3429000" y="1737360"/>
-            <a:ext cx="2286000" cy="1097280"/>
-          </a:xfrm>
-          <a:prstGeom prst="rect">
-            <a:avLst/>
-          </a:prstGeom>
-          <a:noFill/>
-          <a:ln/>
-        </p:spPr>
-        <p:txBody>
-          <a:bodyPr wrap="square" rtlCol="0" anchor="t"/>
-          <a:lstStyle/>
-          <a:p>
-            <a:pPr indent="0" marL="0">
-              <a:buNone/>
-            </a:pPr>
-            <a:r>
-              <a:rPr lang="en-US" sz="1100" dirty="0">
+              <a:t>Contains TWO or MORE types of particle</a:t>
+            </a:r>
+            <a:endParaRPr lang="en-US" sz="1300" dirty="0"/>
+          </a:p>
+          <a:p>
+            <a:pPr marL="342900" indent="-342900">
+              <a:spcAft>
+                <a:spcPts val="600"/>
+              </a:spcAft>
+              <a:buSzPct val="100000"/>
+              <a:buChar char="•"/>
+            </a:pPr>
+            <a:r>
+              <a:rPr lang="en-US" sz="1300" dirty="0">
                 <a:solidFill>
                   <a:srgbClr val="3D3A36"/>
                 </a:solidFill>
@@ -1998,129 +3218,41 @@
                 <a:ea typeface="Calibri" pitchFamily="34" charset="-122"/>
                 <a:cs typeface="Calibri" pitchFamily="34" charset="-120"/>
               </a:rPr>
-              <a:t>Particles are mixed but do NOT dissolve. They are large enough to see and will eventually settle. Example: muddy water, orange juice with pulp.</a:t>
-            </a:r>
-            <a:endParaRPr lang="en-US" sz="1100" dirty="0"/>
-          </a:p>
-        </p:txBody>
-      </p:sp>
-      <p:sp>
-        <p:nvSpPr>
-          <p:cNvPr id="13" name="Shape 11"/>
-          <p:cNvSpPr/>
-          <p:nvPr/>
-        </p:nvSpPr>
-        <p:spPr>
-          <a:xfrm>
-            <a:off x="6126480" y="1188720"/>
-            <a:ext cx="2560320" cy="1828800"/>
-          </a:xfrm>
-          <a:prstGeom prst="rect">
-            <a:avLst/>
-          </a:prstGeom>
-          <a:solidFill>
-            <a:srgbClr val="FFFFFF"/>
-          </a:solidFill>
-          <a:ln w="12700">
-            <a:solidFill>
-              <a:srgbClr val="E5E2DC"/>
-            </a:solidFill>
-            <a:prstDash val="solid"/>
-          </a:ln>
-          <a:effectLst>
-            <a:outerShdw sx="100000" sy="100000" kx="0" ky="0" algn="bl" rotWithShape="0" blurRad="50800" dist="25400" dir="8100000">
-              <a:srgbClr val="000000">
-                <a:alpha val="10000"/>
-              </a:srgbClr>
-            </a:outerShdw>
-          </a:effectLst>
-        </p:spPr>
-      </p:sp>
-      <p:sp>
-        <p:nvSpPr>
-          <p:cNvPr id="14" name="Shape 12"/>
-          <p:cNvSpPr/>
-          <p:nvPr/>
-        </p:nvSpPr>
-        <p:spPr>
-          <a:xfrm>
-            <a:off x="6126480" y="1188720"/>
-            <a:ext cx="2560320" cy="54864"/>
-          </a:xfrm>
-          <a:prstGeom prst="rect">
-            <a:avLst/>
-          </a:prstGeom>
-          <a:solidFill>
-            <a:srgbClr val="2A9D8F"/>
-          </a:solidFill>
-          <a:ln/>
-        </p:spPr>
-      </p:sp>
-      <p:sp>
-        <p:nvSpPr>
-          <p:cNvPr id="15" name="Text 13"/>
-          <p:cNvSpPr/>
-          <p:nvPr/>
-        </p:nvSpPr>
-        <p:spPr>
-          <a:xfrm>
-            <a:off x="6263640" y="1325880"/>
-            <a:ext cx="2286000" cy="365760"/>
-          </a:xfrm>
-          <a:prstGeom prst="rect">
-            <a:avLst/>
-          </a:prstGeom>
-          <a:noFill/>
-          <a:ln/>
-        </p:spPr>
-        <p:txBody>
-          <a:bodyPr wrap="square" rtlCol="0" anchor="ctr"/>
-          <a:lstStyle/>
-          <a:p>
-            <a:pPr indent="0" marL="0">
-              <a:buNone/>
-            </a:pPr>
-            <a:r>
-              <a:rPr lang="en-US" sz="1400" b="1" dirty="0">
-                <a:solidFill>
-                  <a:srgbClr val="1B2A4A"/>
+              <a:t>Melting/boiling point varies</a:t>
+            </a:r>
+            <a:endParaRPr lang="en-US" sz="1300" dirty="0"/>
+          </a:p>
+          <a:p>
+            <a:pPr marL="342900" indent="-342900">
+              <a:spcAft>
+                <a:spcPts val="600"/>
+              </a:spcAft>
+              <a:buSzPct val="100000"/>
+              <a:buChar char="•"/>
+            </a:pPr>
+            <a:r>
+              <a:rPr lang="en-US" sz="1300" dirty="0">
+                <a:solidFill>
+                  <a:srgbClr val="3D3A36"/>
                 </a:solidFill>
                 <a:latin typeface="Calibri" pitchFamily="34" charset="0"/>
                 <a:ea typeface="Calibri" pitchFamily="34" charset="-122"/>
                 <a:cs typeface="Calibri" pitchFamily="34" charset="-120"/>
               </a:rPr>
-              <a:t>Colloids</a:t>
-            </a:r>
-            <a:endParaRPr lang="en-US" sz="1400" dirty="0"/>
-          </a:p>
-        </p:txBody>
-      </p:sp>
-      <p:sp>
-        <p:nvSpPr>
-          <p:cNvPr id="16" name="Text 14"/>
-          <p:cNvSpPr/>
-          <p:nvPr/>
-        </p:nvSpPr>
-        <p:spPr>
-          <a:xfrm>
-            <a:off x="6263640" y="1737360"/>
-            <a:ext cx="2286000" cy="1097280"/>
-          </a:xfrm>
-          <a:prstGeom prst="rect">
-            <a:avLst/>
-          </a:prstGeom>
-          <a:noFill/>
-          <a:ln/>
-        </p:spPr>
-        <p:txBody>
-          <a:bodyPr wrap="square" rtlCol="0" anchor="t"/>
-          <a:lstStyle/>
-          <a:p>
-            <a:pPr indent="0" marL="0">
-              <a:buNone/>
-            </a:pPr>
-            <a:r>
-              <a:rPr lang="en-US" sz="1100" dirty="0">
+              <a:t>Examples: air, salt water, sand + iron</a:t>
+            </a:r>
+            <a:endParaRPr lang="en-US" sz="1300" dirty="0"/>
+          </a:p>
+          <a:p>
+            <a:pPr marL="342900" indent="-342900">
+              <a:spcAft>
+                <a:spcPts val="600"/>
+              </a:spcAft>
+              <a:buSzPct val="100000"/>
+              <a:buChar char="•"/>
+            </a:pPr>
+            <a:r>
+              <a:rPr lang="en-US" sz="1300" dirty="0">
                 <a:solidFill>
                   <a:srgbClr val="3D3A36"/>
                 </a:solidFill>
@@ -2128,9 +3260,9 @@
                 <a:ea typeface="Calibri" pitchFamily="34" charset="-122"/>
                 <a:cs typeface="Calibri" pitchFamily="34" charset="-120"/>
               </a:rPr>
-              <a:t>Particles are between solution and suspension size. They don't settle and scatter light (Tyndall effect). Example: milk, fog, smoke.</a:t>
-            </a:r>
-            <a:endParaRPr lang="en-US" sz="1100" dirty="0"/>
+              <a:t>Components keep their own properties</a:t>
+            </a:r>
+            <a:endParaRPr lang="en-US" sz="1300" dirty="0"/>
           </a:p>
         </p:txBody>
       </p:sp>
@@ -2175,7 +3307,47 @@
         <p:spPr>
           <a:xfrm>
             <a:off x="0" y="0"/>
-            <a:ext cx="9144000" cy="54864"/>
+            <a:ext cx="9144000" cy="822960"/>
+          </a:xfrm>
+          <a:prstGeom prst="rect">
+            <a:avLst/>
+          </a:prstGeom>
+          <a:solidFill>
+            <a:srgbClr val="FFFFFF"/>
+          </a:solidFill>
+          <a:ln/>
+        </p:spPr>
+      </p:sp>
+      <p:sp>
+        <p:nvSpPr>
+          <p:cNvPr id="3" name="Shape 1"/>
+          <p:cNvSpPr/>
+          <p:nvPr/>
+        </p:nvSpPr>
+        <p:spPr>
+          <a:xfrm>
+            <a:off x="0" y="804672"/>
+            <a:ext cx="9144000" cy="27432"/>
+          </a:xfrm>
+          <a:prstGeom prst="rect">
+            <a:avLst/>
+          </a:prstGeom>
+          <a:solidFill>
+            <a:srgbClr val="E5E2DC"/>
+          </a:solidFill>
+          <a:ln/>
+        </p:spPr>
+      </p:sp>
+      <p:sp>
+        <p:nvSpPr>
+          <p:cNvPr id="4" name="Shape 2"/>
+          <p:cNvSpPr/>
+          <p:nvPr/>
+        </p:nvSpPr>
+        <p:spPr>
+          <a:xfrm>
+            <a:off x="548640" y="201168"/>
+            <a:ext cx="54864" cy="420624"/>
           </a:xfrm>
           <a:prstGeom prst="rect">
             <a:avLst/>
@@ -2188,14 +3360,14 @@
       </p:sp>
       <p:sp>
         <p:nvSpPr>
-          <p:cNvPr id="3" name="Text 1"/>
-          <p:cNvSpPr/>
-          <p:nvPr/>
-        </p:nvSpPr>
-        <p:spPr>
-          <a:xfrm>
-            <a:off x="7772400" y="4709160"/>
-            <a:ext cx="1097280" cy="320040"/>
+          <p:cNvPr id="5" name="Text 3"/>
+          <p:cNvSpPr/>
+          <p:nvPr/>
+        </p:nvSpPr>
+        <p:spPr>
+          <a:xfrm>
+            <a:off x="777240" y="137160"/>
+            <a:ext cx="7772400" cy="548640"/>
           </a:xfrm>
           <a:prstGeom prst="rect">
             <a:avLst/>
@@ -2204,96 +3376,78 @@
           <a:ln/>
         </p:spPr>
         <p:txBody>
-          <a:bodyPr wrap="square" rtlCol="0" anchor="ctr"/>
-          <a:lstStyle/>
-          <a:p>
-            <a:pPr algn="r" indent="0" marL="0">
+          <a:bodyPr wrap="square" lIns="0" tIns="0" rIns="0" bIns="0" rtlCol="0" anchor="ctr"/>
+          <a:lstStyle/>
+          <a:p>
+            <a:pPr indent="0" marL="0">
               <a:buNone/>
             </a:pPr>
             <a:r>
-              <a:rPr lang="en-US" sz="900" dirty="0">
-                <a:solidFill>
-                  <a:srgbClr val="6B6660"/>
+              <a:rPr lang="en-US" sz="2000" b="1" dirty="0">
+                <a:solidFill>
+                  <a:srgbClr val="1B2A4A"/>
+                </a:solidFill>
+                <a:latin typeface="Georgia" pitchFamily="34" charset="0"/>
+                <a:ea typeface="Georgia" pitchFamily="34" charset="-122"/>
+                <a:cs typeface="Georgia" pitchFamily="34" charset="-120"/>
+              </a:rPr>
+              <a:t>Solutions — Dissolving Explained</a:t>
+            </a:r>
+            <a:endParaRPr lang="en-US" sz="2000" dirty="0"/>
+          </a:p>
+        </p:txBody>
+      </p:sp>
+      <p:sp>
+        <p:nvSpPr>
+          <p:cNvPr id="6" name="Text 4"/>
+          <p:cNvSpPr/>
+          <p:nvPr/>
+        </p:nvSpPr>
+        <p:spPr>
+          <a:xfrm>
+            <a:off x="731520" y="1051560"/>
+            <a:ext cx="7680960" cy="3108960"/>
+          </a:xfrm>
+          <a:prstGeom prst="rect">
+            <a:avLst/>
+          </a:prstGeom>
+          <a:noFill/>
+          <a:ln/>
+        </p:spPr>
+        <p:txBody>
+          <a:bodyPr wrap="square" rtlCol="0" anchor="t"/>
+          <a:lstStyle/>
+          <a:p>
+            <a:pPr marL="342900" indent="-342900">
+              <a:spcAft>
+                <a:spcPts val="800"/>
+              </a:spcAft>
+              <a:buSzPct val="100000"/>
+              <a:buChar char="•"/>
+            </a:pPr>
+            <a:r>
+              <a:rPr lang="en-US" sz="1500" dirty="0">
+                <a:solidFill>
+                  <a:srgbClr val="3D3A36"/>
                 </a:solidFill>
                 <a:latin typeface="Calibri" pitchFamily="34" charset="0"/>
                 <a:ea typeface="Calibri" pitchFamily="34" charset="-122"/>
                 <a:cs typeface="Calibri" pitchFamily="34" charset="-120"/>
               </a:rPr>
-              <a:t>4 / 5</a:t>
-            </a:r>
-            <a:endParaRPr lang="en-US" sz="900" dirty="0"/>
-          </a:p>
-        </p:txBody>
-      </p:sp>
-      <p:sp>
-        <p:nvSpPr>
-          <p:cNvPr id="4" name="Text 2"/>
-          <p:cNvSpPr/>
-          <p:nvPr/>
-        </p:nvSpPr>
-        <p:spPr>
-          <a:xfrm>
-            <a:off x="457200" y="274320"/>
-            <a:ext cx="8229600" cy="640080"/>
-          </a:xfrm>
-          <a:prstGeom prst="rect">
-            <a:avLst/>
-          </a:prstGeom>
-          <a:noFill/>
-          <a:ln/>
-        </p:spPr>
-        <p:txBody>
-          <a:bodyPr wrap="square" rtlCol="0" anchor="ctr"/>
-          <a:lstStyle/>
-          <a:p>
-            <a:pPr indent="0" marL="0">
-              <a:buNone/>
-            </a:pPr>
-            <a:r>
-              <a:rPr lang="en-US" sz="2600" b="1" dirty="0">
-                <a:solidFill>
-                  <a:srgbClr val="1B2A4A"/>
-                </a:solidFill>
-                <a:latin typeface="Georgia" pitchFamily="34" charset="0"/>
-                <a:ea typeface="Georgia" pitchFamily="34" charset="-122"/>
-                <a:cs typeface="Georgia" pitchFamily="34" charset="-120"/>
-              </a:rPr>
-              <a:t>Dissolving</a:t>
-            </a:r>
-            <a:endParaRPr lang="en-US" sz="2600" dirty="0"/>
-          </a:p>
-        </p:txBody>
-      </p:sp>
-      <p:sp>
-        <p:nvSpPr>
-          <p:cNvPr id="5" name="Text 3"/>
-          <p:cNvSpPr/>
-          <p:nvPr/>
-        </p:nvSpPr>
-        <p:spPr>
-          <a:xfrm>
-            <a:off x="457200" y="1188720"/>
-            <a:ext cx="3840480" cy="3474720"/>
-          </a:xfrm>
-          <a:prstGeom prst="rect">
-            <a:avLst/>
-          </a:prstGeom>
-          <a:noFill/>
-          <a:ln/>
-        </p:spPr>
-        <p:txBody>
-          <a:bodyPr wrap="square" rtlCol="0" anchor="t"/>
-          <a:lstStyle/>
+              <a:t>When sugar dissolves in water: sugar = SOLUTE, water = SOLVENT.</a:t>
+            </a:r>
+            <a:endParaRPr lang="en-US" sz="1500" dirty="0"/>
+          </a:p>
           <a:p>
             <a:pPr marL="342900" indent="-342900">
               <a:spcAft>
-                <a:spcPts val="600"/>
+                <a:spcPts val="800"/>
               </a:spcAft>
               <a:buSzPct val="100000"/>
               <a:buChar char="•"/>
             </a:pPr>
             <a:r>
-              <a:rPr lang="en-US" sz="1400" dirty="0">
+              <a:rPr lang="en-US" sz="1500" dirty="0">
                 <a:solidFill>
                   <a:srgbClr val="3D3A36"/>
                 </a:solidFill>
@@ -2301,20 +3455,20 @@
                 <a:ea typeface="Calibri" pitchFamily="34" charset="-122"/>
                 <a:cs typeface="Calibri" pitchFamily="34" charset="-120"/>
               </a:rPr>
-              <a:t>Dissolving is a physical change — no new substance is formed</a:t>
-            </a:r>
-            <a:endParaRPr lang="en-US" sz="1400" dirty="0"/>
+              <a:t>The sugar particles spread evenly through the water.</a:t>
+            </a:r>
+            <a:endParaRPr lang="en-US" sz="1500" dirty="0"/>
           </a:p>
           <a:p>
             <a:pPr marL="342900" indent="-342900">
               <a:spcAft>
-                <a:spcPts val="600"/>
+                <a:spcPts val="800"/>
               </a:spcAft>
               <a:buSzPct val="100000"/>
               <a:buChar char="•"/>
             </a:pPr>
             <a:r>
-              <a:rPr lang="en-US" sz="1400" dirty="0">
+              <a:rPr lang="en-US" sz="1500" dirty="0">
                 <a:solidFill>
                   <a:srgbClr val="3D3A36"/>
                 </a:solidFill>
@@ -2322,20 +3476,20 @@
                 <a:ea typeface="Calibri" pitchFamily="34" charset="-122"/>
                 <a:cs typeface="Calibri" pitchFamily="34" charset="-120"/>
               </a:rPr>
-              <a:t>The solute particles spread evenly between solvent particles</a:t>
-            </a:r>
-            <a:endParaRPr lang="en-US" sz="1400" dirty="0"/>
+              <a:t>The solution looks clear — you cannot see individual sugar particles.</a:t>
+            </a:r>
+            <a:endParaRPr lang="en-US" sz="1500" dirty="0"/>
           </a:p>
           <a:p>
             <a:pPr marL="342900" indent="-342900">
               <a:spcAft>
-                <a:spcPts val="600"/>
+                <a:spcPts val="800"/>
               </a:spcAft>
               <a:buSzPct val="100000"/>
               <a:buChar char="•"/>
             </a:pPr>
             <a:r>
-              <a:rPr lang="en-US" sz="1400" dirty="0">
+              <a:rPr lang="en-US" sz="1500" dirty="0">
                 <a:solidFill>
                   <a:srgbClr val="3D3A36"/>
                 </a:solidFill>
@@ -2343,20 +3497,20 @@
                 <a:ea typeface="Calibri" pitchFamily="34" charset="-122"/>
                 <a:cs typeface="Calibri" pitchFamily="34" charset="-120"/>
               </a:rPr>
-              <a:t>A saturated solution cannot dissolve any more solute</a:t>
-            </a:r>
-            <a:endParaRPr lang="en-US" sz="1400" dirty="0"/>
+              <a:t>The sugar is still there — you can taste it! It hasn't disappeared.</a:t>
+            </a:r>
+            <a:endParaRPr lang="en-US" sz="1500" dirty="0"/>
           </a:p>
           <a:p>
             <a:pPr marL="342900" indent="-342900">
               <a:spcAft>
-                <a:spcPts val="600"/>
+                <a:spcPts val="800"/>
               </a:spcAft>
               <a:buSzPct val="100000"/>
               <a:buChar char="•"/>
             </a:pPr>
             <a:r>
-              <a:rPr lang="en-US" sz="1400" dirty="0">
+              <a:rPr lang="en-US" sz="1500" dirty="0">
                 <a:solidFill>
                   <a:srgbClr val="3D3A36"/>
                 </a:solidFill>
@@ -2364,56 +3518,30 @@
                 <a:ea typeface="Calibri" pitchFamily="34" charset="-122"/>
                 <a:cs typeface="Calibri" pitchFamily="34" charset="-120"/>
               </a:rPr>
-              <a:t>Factors that speed up dissolving: stirring, heating, crushing the solute into smaller pieces</a:t>
-            </a:r>
-            <a:endParaRPr lang="en-US" sz="1400" dirty="0"/>
-          </a:p>
-          <a:p>
-            <a:pPr marL="342900" indent="-342900">
-              <a:spcAft>
-                <a:spcPts val="600"/>
-              </a:spcAft>
-              <a:buSzPct val="100000"/>
-              <a:buChar char="•"/>
-            </a:pPr>
-            <a:r>
-              <a:rPr lang="en-US" sz="1400" dirty="0">
-                <a:solidFill>
-                  <a:srgbClr val="3D3A36"/>
-                </a:solidFill>
-                <a:latin typeface="Calibri" pitchFamily="34" charset="0"/>
-                <a:ea typeface="Calibri" pitchFamily="34" charset="-122"/>
-                <a:cs typeface="Calibri" pitchFamily="34" charset="-120"/>
-              </a:rPr>
-              <a:t>The dissolved substance is still there — you can get it back by evaporating the solvent</a:t>
-            </a:r>
-            <a:endParaRPr lang="en-US" sz="1400" dirty="0"/>
-          </a:p>
-        </p:txBody>
-      </p:sp>
-      <p:sp>
-        <p:nvSpPr>
-          <p:cNvPr id="6" name="Shape 4"/>
-          <p:cNvSpPr/>
-          <p:nvPr/>
-        </p:nvSpPr>
-        <p:spPr>
-          <a:xfrm>
-            <a:off x="4846320" y="1188720"/>
-            <a:ext cx="3840480" cy="3474720"/>
-          </a:xfrm>
-          <a:prstGeom prst="rect">
-            <a:avLst/>
-          </a:prstGeom>
-          <a:solidFill>
-            <a:srgbClr val="FFFFFF"/>
-          </a:solidFill>
-          <a:ln w="12700">
-            <a:solidFill>
-              <a:srgbClr val="E5E2DC"/>
-            </a:solidFill>
-            <a:prstDash val="solid"/>
-          </a:ln>
+              <a:t>If you add too much sugar, it stops dissolving → SATURATED solution.</a:t>
+            </a:r>
+            <a:endParaRPr lang="en-US" sz="1500" dirty="0"/>
+          </a:p>
+        </p:txBody>
+      </p:sp>
+      <p:sp>
+        <p:nvSpPr>
+          <p:cNvPr id="7" name="Shape 5"/>
+          <p:cNvSpPr/>
+          <p:nvPr/>
+        </p:nvSpPr>
+        <p:spPr>
+          <a:xfrm>
+            <a:off x="731520" y="4206240"/>
+            <a:ext cx="7680960" cy="640080"/>
+          </a:xfrm>
+          <a:prstGeom prst="rect">
+            <a:avLst/>
+          </a:prstGeom>
+          <a:solidFill>
+            <a:srgbClr val="E8F5F3"/>
+          </a:solidFill>
+          <a:ln/>
           <a:effectLst>
             <a:outerShdw sx="100000" sy="100000" kx="0" ky="0" algn="bl" rotWithShape="0" blurRad="50800" dist="25400" dir="8100000">
               <a:srgbClr val="000000">
@@ -2425,34 +3553,14 @@
       </p:sp>
       <p:sp>
         <p:nvSpPr>
-          <p:cNvPr id="7" name="Shape 5"/>
-          <p:cNvSpPr/>
-          <p:nvPr/>
-        </p:nvSpPr>
-        <p:spPr>
-          <a:xfrm>
-            <a:off x="4846320" y="1188720"/>
-            <a:ext cx="3840480" cy="54864"/>
-          </a:xfrm>
-          <a:prstGeom prst="rect">
-            <a:avLst/>
-          </a:prstGeom>
-          <a:solidFill>
-            <a:srgbClr val="2A9D8F"/>
-          </a:solidFill>
-          <a:ln/>
-        </p:spPr>
-      </p:sp>
-      <p:sp>
-        <p:nvSpPr>
           <p:cNvPr id="8" name="Text 6"/>
           <p:cNvSpPr/>
           <p:nvPr/>
         </p:nvSpPr>
         <p:spPr>
           <a:xfrm>
-            <a:off x="5120640" y="1371600"/>
-            <a:ext cx="3291840" cy="3108960"/>
+            <a:off x="914400" y="4251960"/>
+            <a:ext cx="7315200" cy="548640"/>
           </a:xfrm>
           <a:prstGeom prst="rect">
             <a:avLst/>
@@ -2461,46 +3569,28 @@
           <a:ln/>
         </p:spPr>
         <p:txBody>
-          <a:bodyPr wrap="square" rtlCol="0" anchor="t"/>
+          <a:bodyPr wrap="square" rtlCol="0" anchor="ctr"/>
           <a:lstStyle/>
           <a:p>
             <a:pPr indent="0" marL="0">
-              <a:spcAft>
-                <a:spcPts val="400"/>
-              </a:spcAft>
               <a:buNone/>
             </a:pPr>
             <a:r>
-              <a:rPr lang="en-US" sz="1600" b="1" dirty="0">
-                <a:solidFill>
-                  <a:srgbClr val="1B2A4A"/>
+              <a:rPr lang="en-US" sz="1200" b="1" dirty="0">
+                <a:solidFill>
+                  <a:srgbClr val="2A9D8F"/>
                 </a:solidFill>
                 <a:latin typeface="Calibri" pitchFamily="34" charset="0"/>
                 <a:ea typeface="Calibri" pitchFamily="34" charset="-122"/>
                 <a:cs typeface="Calibri" pitchFamily="34" charset="-120"/>
               </a:rPr>
-              <a:t>Key Vocabulary</a:t>
-            </a:r>
-            <a:endParaRPr lang="en-US" sz="1600" dirty="0"/>
-          </a:p>
-          <a:p>
+              <a:t>Key Idea: </a:t>
+            </a:r>
             <a:pPr indent="0" marL="0">
-              <a:spcAft>
-                <a:spcPts val="400"/>
-              </a:spcAft>
               <a:buNone/>
             </a:pPr>
-            <a:endParaRPr lang="en-US" sz="1600" dirty="0"/>
-          </a:p>
-          <a:p>
-            <a:pPr indent="0" marL="0">
-              <a:spcAft>
-                <a:spcPts val="400"/>
-              </a:spcAft>
-              <a:buNone/>
-            </a:pPr>
-            <a:r>
-              <a:rPr lang="en-US" sz="1300" dirty="0">
+            <a:r>
+              <a:rPr lang="en-US" sz="1200" i="1" dirty="0">
                 <a:solidFill>
                   <a:srgbClr val="3D3A36"/>
                 </a:solidFill>
@@ -2508,109 +3598,9 @@
                 <a:ea typeface="Calibri" pitchFamily="34" charset="-122"/>
                 <a:cs typeface="Calibri" pitchFamily="34" charset="-120"/>
               </a:rPr>
-              <a:t>Solute — the substance that dissolves (e.g. salt)</a:t>
-            </a:r>
-            <a:endParaRPr lang="en-US" sz="1600" dirty="0"/>
-          </a:p>
-          <a:p>
-            <a:pPr indent="0" marL="0">
-              <a:spcAft>
-                <a:spcPts val="400"/>
-              </a:spcAft>
-              <a:buNone/>
-            </a:pPr>
-            <a:r>
-              <a:rPr lang="en-US" sz="1300" dirty="0">
-                <a:solidFill>
-                  <a:srgbClr val="3D3A36"/>
-                </a:solidFill>
-                <a:latin typeface="Calibri" pitchFamily="34" charset="0"/>
-                <a:ea typeface="Calibri" pitchFamily="34" charset="-122"/>
-                <a:cs typeface="Calibri" pitchFamily="34" charset="-120"/>
-              </a:rPr>
-              <a:t>Solvent — the liquid that does the dissolving (e.g. water)</a:t>
-            </a:r>
-            <a:endParaRPr lang="en-US" sz="1600" dirty="0"/>
-          </a:p>
-          <a:p>
-            <a:pPr indent="0" marL="0">
-              <a:spcAft>
-                <a:spcPts val="400"/>
-              </a:spcAft>
-              <a:buNone/>
-            </a:pPr>
-            <a:r>
-              <a:rPr lang="en-US" sz="1300" dirty="0">
-                <a:solidFill>
-                  <a:srgbClr val="3D3A36"/>
-                </a:solidFill>
-                <a:latin typeface="Calibri" pitchFamily="34" charset="0"/>
-                <a:ea typeface="Calibri" pitchFamily="34" charset="-122"/>
-                <a:cs typeface="Calibri" pitchFamily="34" charset="-120"/>
-              </a:rPr>
-              <a:t>Solution — solute + solvent mixed evenly</a:t>
-            </a:r>
-            <a:endParaRPr lang="en-US" sz="1600" dirty="0"/>
-          </a:p>
-          <a:p>
-            <a:pPr indent="0" marL="0">
-              <a:spcAft>
-                <a:spcPts val="400"/>
-              </a:spcAft>
-              <a:buNone/>
-            </a:pPr>
-            <a:r>
-              <a:rPr lang="en-US" sz="1300" dirty="0">
-                <a:solidFill>
-                  <a:srgbClr val="3D3A36"/>
-                </a:solidFill>
-                <a:latin typeface="Calibri" pitchFamily="34" charset="0"/>
-                <a:ea typeface="Calibri" pitchFamily="34" charset="-122"/>
-                <a:cs typeface="Calibri" pitchFamily="34" charset="-120"/>
-              </a:rPr>
-              <a:t>Soluble — CAN dissolve in a solvent</a:t>
-            </a:r>
-            <a:endParaRPr lang="en-US" sz="1600" dirty="0"/>
-          </a:p>
-          <a:p>
-            <a:pPr indent="0" marL="0">
-              <a:spcAft>
-                <a:spcPts val="400"/>
-              </a:spcAft>
-              <a:buNone/>
-            </a:pPr>
-            <a:r>
-              <a:rPr lang="en-US" sz="1300" dirty="0">
-                <a:solidFill>
-                  <a:srgbClr val="3D3A36"/>
-                </a:solidFill>
-                <a:latin typeface="Calibri" pitchFamily="34" charset="0"/>
-                <a:ea typeface="Calibri" pitchFamily="34" charset="-122"/>
-                <a:cs typeface="Calibri" pitchFamily="34" charset="-120"/>
-              </a:rPr>
-              <a:t>Insoluble — CANNOT dissolve in a solvent</a:t>
-            </a:r>
-            <a:endParaRPr lang="en-US" sz="1600" dirty="0"/>
-          </a:p>
-          <a:p>
-            <a:pPr indent="0" marL="0">
-              <a:spcAft>
-                <a:spcPts val="400"/>
-              </a:spcAft>
-              <a:buNone/>
-            </a:pPr>
-            <a:r>
-              <a:rPr lang="en-US" sz="1300" dirty="0">
-                <a:solidFill>
-                  <a:srgbClr val="3D3A36"/>
-                </a:solidFill>
-                <a:latin typeface="Calibri" pitchFamily="34" charset="0"/>
-                <a:ea typeface="Calibri" pitchFamily="34" charset="-122"/>
-                <a:cs typeface="Calibri" pitchFamily="34" charset="-120"/>
-              </a:rPr>
-              <a:t>Saturated — no more solute can dissolve</a:t>
-            </a:r>
-            <a:endParaRPr lang="en-US" sz="1600" dirty="0"/>
+              <a:t>Dissolving is a physical change — you can get the sugar back by evaporating the water.</a:t>
+            </a:r>
+            <a:endParaRPr lang="en-US" sz="1200" dirty="0"/>
           </a:p>
         </p:txBody>
       </p:sp>
@@ -2628,7 +3618,7 @@
     <p:bg>
       <p:bgPr>
         <a:solidFill>
-          <a:srgbClr val="1B2A4A"/>
+          <a:srgbClr val="FAF8F5"/>
         </a:solidFill>
       </p:bgPr>
     </p:bg>
@@ -2655,27 +3645,67 @@
         <p:spPr>
           <a:xfrm>
             <a:off x="0" y="0"/>
-            <a:ext cx="109728" cy="5143500"/>
-          </a:xfrm>
-          <a:prstGeom prst="rect">
-            <a:avLst/>
-          </a:prstGeom>
-          <a:solidFill>
-            <a:srgbClr val="E9C46A"/>
-          </a:solidFill>
-          <a:ln/>
-        </p:spPr>
-      </p:sp>
-      <p:sp>
-        <p:nvSpPr>
-          <p:cNvPr id="3" name="Text 1"/>
-          <p:cNvSpPr/>
-          <p:nvPr/>
-        </p:nvSpPr>
-        <p:spPr>
-          <a:xfrm>
-            <a:off x="731520" y="457200"/>
-            <a:ext cx="7772400" cy="731520"/>
+            <a:ext cx="9144000" cy="822960"/>
+          </a:xfrm>
+          <a:prstGeom prst="rect">
+            <a:avLst/>
+          </a:prstGeom>
+          <a:solidFill>
+            <a:srgbClr val="FFFFFF"/>
+          </a:solidFill>
+          <a:ln/>
+        </p:spPr>
+      </p:sp>
+      <p:sp>
+        <p:nvSpPr>
+          <p:cNvPr id="3" name="Shape 1"/>
+          <p:cNvSpPr/>
+          <p:nvPr/>
+        </p:nvSpPr>
+        <p:spPr>
+          <a:xfrm>
+            <a:off x="0" y="804672"/>
+            <a:ext cx="9144000" cy="27432"/>
+          </a:xfrm>
+          <a:prstGeom prst="rect">
+            <a:avLst/>
+          </a:prstGeom>
+          <a:solidFill>
+            <a:srgbClr val="E5E2DC"/>
+          </a:solidFill>
+          <a:ln/>
+        </p:spPr>
+      </p:sp>
+      <p:sp>
+        <p:nvSpPr>
+          <p:cNvPr id="4" name="Shape 2"/>
+          <p:cNvSpPr/>
+          <p:nvPr/>
+        </p:nvSpPr>
+        <p:spPr>
+          <a:xfrm>
+            <a:off x="548640" y="201168"/>
+            <a:ext cx="54864" cy="420624"/>
+          </a:xfrm>
+          <a:prstGeom prst="rect">
+            <a:avLst/>
+          </a:prstGeom>
+          <a:solidFill>
+            <a:srgbClr val="2A9D8F"/>
+          </a:solidFill>
+          <a:ln/>
+        </p:spPr>
+      </p:sp>
+      <p:sp>
+        <p:nvSpPr>
+          <p:cNvPr id="5" name="Text 3"/>
+          <p:cNvSpPr/>
+          <p:nvPr/>
+        </p:nvSpPr>
+        <p:spPr>
+          <a:xfrm>
+            <a:off x="777240" y="137160"/>
+            <a:ext cx="7772400" cy="548640"/>
           </a:xfrm>
           <a:prstGeom prst="rect">
             <a:avLst/>
@@ -2684,37 +3714,37 @@
           <a:ln/>
         </p:spPr>
         <p:txBody>
-          <a:bodyPr wrap="square" rtlCol="0" anchor="ctr"/>
+          <a:bodyPr wrap="square" lIns="0" tIns="0" rIns="0" bIns="0" rtlCol="0" anchor="ctr"/>
           <a:lstStyle/>
           <a:p>
             <a:pPr indent="0" marL="0">
               <a:buNone/>
             </a:pPr>
             <a:r>
-              <a:rPr lang="en-US" sz="3200" b="1" dirty="0">
-                <a:solidFill>
-                  <a:srgbClr val="FFFFFF"/>
+              <a:rPr lang="en-US" sz="2000" b="1" dirty="0">
+                <a:solidFill>
+                  <a:srgbClr val="1B2A4A"/>
                 </a:solidFill>
                 <a:latin typeface="Georgia" pitchFamily="34" charset="0"/>
                 <a:ea typeface="Georgia" pitchFamily="34" charset="-122"/>
                 <a:cs typeface="Georgia" pitchFamily="34" charset="-120"/>
               </a:rPr>
-              <a:t>Key Takeaways</a:t>
-            </a:r>
-            <a:endParaRPr lang="en-US" sz="3200" dirty="0"/>
-          </a:p>
-        </p:txBody>
-      </p:sp>
-      <p:sp>
-        <p:nvSpPr>
-          <p:cNvPr id="4" name="Text 2"/>
-          <p:cNvSpPr/>
-          <p:nvPr/>
-        </p:nvSpPr>
-        <p:spPr>
-          <a:xfrm>
-            <a:off x="731520" y="1463040"/>
-            <a:ext cx="7772400" cy="3200400"/>
+              <a:t>Factors That Affect Dissolving Speed</a:t>
+            </a:r>
+            <a:endParaRPr lang="en-US" sz="2000" dirty="0"/>
+          </a:p>
+        </p:txBody>
+      </p:sp>
+      <p:sp>
+        <p:nvSpPr>
+          <p:cNvPr id="6" name="Text 4"/>
+          <p:cNvSpPr/>
+          <p:nvPr/>
+        </p:nvSpPr>
+        <p:spPr>
+          <a:xfrm>
+            <a:off x="731520" y="1051560"/>
+            <a:ext cx="7680960" cy="3108960"/>
           </a:xfrm>
           <a:prstGeom prst="rect">
             <a:avLst/>
@@ -2728,7 +3758,7 @@
           <a:p>
             <a:pPr marL="342900" indent="-342900">
               <a:spcAft>
-                <a:spcPts val="1000"/>
+                <a:spcPts val="800"/>
               </a:spcAft>
               <a:buSzPct val="100000"/>
               <a:buChar char="•"/>
@@ -2736,20 +3766,20 @@
             <a:r>
               <a:rPr lang="en-US" sz="1500" dirty="0">
                 <a:solidFill>
-                  <a:srgbClr val="CADCFC"/>
+                  <a:srgbClr val="3D3A36"/>
                 </a:solidFill>
                 <a:latin typeface="Calibri" pitchFamily="34" charset="0"/>
                 <a:ea typeface="Calibri" pitchFamily="34" charset="-122"/>
                 <a:cs typeface="Calibri" pitchFamily="34" charset="-120"/>
               </a:rPr>
-              <a:t>Mixtures: two+ substances not chemically bonded, keep own properties</a:t>
+              <a:t>TEMPERATURE: hot water dissolves things faster (particles move faster).</a:t>
             </a:r>
             <a:endParaRPr lang="en-US" sz="1500" dirty="0"/>
           </a:p>
           <a:p>
             <a:pPr marL="342900" indent="-342900">
               <a:spcAft>
-                <a:spcPts val="1000"/>
+                <a:spcPts val="800"/>
               </a:spcAft>
               <a:buSzPct val="100000"/>
               <a:buChar char="•"/>
@@ -2757,20 +3787,20 @@
             <a:r>
               <a:rPr lang="en-US" sz="1500" dirty="0">
                 <a:solidFill>
-                  <a:srgbClr val="CADCFC"/>
+                  <a:srgbClr val="3D3A36"/>
                 </a:solidFill>
                 <a:latin typeface="Calibri" pitchFamily="34" charset="0"/>
                 <a:ea typeface="Calibri" pitchFamily="34" charset="-122"/>
                 <a:cs typeface="Calibri" pitchFamily="34" charset="-120"/>
               </a:rPr>
-              <a:t>Solutions: solute dissolves in solvent, transparent</a:t>
+              <a:t>STIRRING: moves fresh solvent to the solute surface.</a:t>
             </a:r>
             <a:endParaRPr lang="en-US" sz="1500" dirty="0"/>
           </a:p>
           <a:p>
             <a:pPr marL="342900" indent="-342900">
               <a:spcAft>
-                <a:spcPts val="1000"/>
+                <a:spcPts val="800"/>
               </a:spcAft>
               <a:buSzPct val="100000"/>
               <a:buChar char="•"/>
@@ -2778,20 +3808,20 @@
             <a:r>
               <a:rPr lang="en-US" sz="1500" dirty="0">
                 <a:solidFill>
-                  <a:srgbClr val="CADCFC"/>
+                  <a:srgbClr val="3D3A36"/>
                 </a:solidFill>
                 <a:latin typeface="Calibri" pitchFamily="34" charset="0"/>
                 <a:ea typeface="Calibri" pitchFamily="34" charset="-122"/>
                 <a:cs typeface="Calibri" pitchFamily="34" charset="-120"/>
               </a:rPr>
-              <a:t>Dissolving is faster with heat, stirring, and smaller particles</a:t>
+              <a:t>PARTICLE SIZE: smaller pieces dissolve faster (more surface area).</a:t>
             </a:r>
             <a:endParaRPr lang="en-US" sz="1500" dirty="0"/>
           </a:p>
           <a:p>
             <a:pPr marL="342900" indent="-342900">
               <a:spcAft>
-                <a:spcPts val="1000"/>
+                <a:spcPts val="800"/>
               </a:spcAft>
               <a:buSzPct val="100000"/>
               <a:buChar char="•"/>
@@ -2799,20 +3829,20 @@
             <a:r>
               <a:rPr lang="en-US" sz="1500" dirty="0">
                 <a:solidFill>
-                  <a:srgbClr val="CADCFC"/>
+                  <a:srgbClr val="3D3A36"/>
                 </a:solidFill>
                 <a:latin typeface="Calibri" pitchFamily="34" charset="0"/>
                 <a:ea typeface="Calibri" pitchFamily="34" charset="-122"/>
                 <a:cs typeface="Calibri" pitchFamily="34" charset="-120"/>
               </a:rPr>
-              <a:t>Saturated = no more solute can dissolve</a:t>
+              <a:t>These factors DON'T change HOW MUCH dissolves — only how FAST.</a:t>
             </a:r>
             <a:endParaRPr lang="en-US" sz="1500" dirty="0"/>
           </a:p>
           <a:p>
             <a:pPr marL="342900" indent="-342900">
               <a:spcAft>
-                <a:spcPts val="1000"/>
+                <a:spcPts val="800"/>
               </a:spcAft>
               <a:buSzPct val="100000"/>
               <a:buChar char="•"/>
@@ -2820,18 +3850,110 @@
             <a:r>
               <a:rPr lang="en-US" sz="1500" dirty="0">
                 <a:solidFill>
-                  <a:srgbClr val="CADCFC"/>
+                  <a:srgbClr val="3D3A36"/>
                 </a:solidFill>
                 <a:latin typeface="Calibri" pitchFamily="34" charset="0"/>
                 <a:ea typeface="Calibri" pitchFamily="34" charset="-122"/>
                 <a:cs typeface="Calibri" pitchFamily="34" charset="-120"/>
               </a:rPr>
-              <a:t>Mixtures can be separated by physical methods</a:t>
+              <a:t>To dissolve MORE, you need a higher temperature.</a:t>
             </a:r>
             <a:endParaRPr lang="en-US" sz="1500" dirty="0"/>
           </a:p>
         </p:txBody>
       </p:sp>
+    </p:spTree>
+  </p:cSld>
+  <p:clrMapOvr>
+    <a:masterClrMapping/>
+  </p:clrMapOvr>
+</p:sld>
+</file>
+
+<file path=ppt/slides/slide6.xml><?xml version="1.0" encoding="utf-8"?>
+<p:sld xmlns:a="http://schemas.openxmlformats.org/drawingml/2006/main" xmlns:r="http://schemas.openxmlformats.org/officeDocument/2006/relationships" xmlns:p="http://schemas.openxmlformats.org/presentationml/2006/main">
+  <p:cSld name="Slide 6">
+    <p:bg>
+      <p:bgPr>
+        <a:solidFill>
+          <a:srgbClr val="FAF8F5"/>
+        </a:solidFill>
+      </p:bgPr>
+    </p:bg>
+    <p:spTree>
+      <p:nvGrpSpPr>
+        <p:cNvPr id="1" name=""/>
+        <p:cNvGrpSpPr/>
+        <p:nvPr/>
+      </p:nvGrpSpPr>
+      <p:grpSpPr>
+        <a:xfrm>
+          <a:off x="0" y="0"/>
+          <a:ext cx="0" cy="0"/>
+          <a:chOff x="0" y="0"/>
+          <a:chExt cx="0" cy="0"/>
+        </a:xfrm>
+      </p:grpSpPr>
+      <p:sp>
+        <p:nvSpPr>
+          <p:cNvPr id="2" name="Shape 0"/>
+          <p:cNvSpPr/>
+          <p:nvPr/>
+        </p:nvSpPr>
+        <p:spPr>
+          <a:xfrm>
+            <a:off x="0" y="0"/>
+            <a:ext cx="9144000" cy="822960"/>
+          </a:xfrm>
+          <a:prstGeom prst="rect">
+            <a:avLst/>
+          </a:prstGeom>
+          <a:solidFill>
+            <a:srgbClr val="FFFFFF"/>
+          </a:solidFill>
+          <a:ln/>
+        </p:spPr>
+      </p:sp>
+      <p:sp>
+        <p:nvSpPr>
+          <p:cNvPr id="3" name="Shape 1"/>
+          <p:cNvSpPr/>
+          <p:nvPr/>
+        </p:nvSpPr>
+        <p:spPr>
+          <a:xfrm>
+            <a:off x="0" y="804672"/>
+            <a:ext cx="9144000" cy="27432"/>
+          </a:xfrm>
+          <a:prstGeom prst="rect">
+            <a:avLst/>
+          </a:prstGeom>
+          <a:solidFill>
+            <a:srgbClr val="E5E2DC"/>
+          </a:solidFill>
+          <a:ln/>
+        </p:spPr>
+      </p:sp>
+      <p:sp>
+        <p:nvSpPr>
+          <p:cNvPr id="4" name="Shape 2"/>
+          <p:cNvSpPr/>
+          <p:nvPr/>
+        </p:nvSpPr>
+        <p:spPr>
+          <a:xfrm>
+            <a:off x="548640" y="201168"/>
+            <a:ext cx="54864" cy="420624"/>
+          </a:xfrm>
+          <a:prstGeom prst="rect">
+            <a:avLst/>
+          </a:prstGeom>
+          <a:solidFill>
+            <a:srgbClr val="2A9D8F"/>
+          </a:solidFill>
+          <a:ln/>
+        </p:spPr>
+      </p:sp>
       <p:sp>
         <p:nvSpPr>
           <p:cNvPr id="5" name="Text 3"/>
@@ -2840,8 +3962,8 @@
         </p:nvSpPr>
         <p:spPr>
           <a:xfrm>
-            <a:off x="731520" y="4572000"/>
-            <a:ext cx="7772400" cy="365760"/>
+            <a:off x="777240" y="137160"/>
+            <a:ext cx="7772400" cy="548640"/>
           </a:xfrm>
           <a:prstGeom prst="rect">
             <a:avLst/>
@@ -2850,24 +3972,783 @@
           <a:ln/>
         </p:spPr>
         <p:txBody>
-          <a:bodyPr wrap="square" rtlCol="0" anchor="ctr"/>
+          <a:bodyPr wrap="square" lIns="0" tIns="0" rIns="0" bIns="0" rtlCol="0" anchor="ctr"/>
           <a:lstStyle/>
           <a:p>
             <a:pPr indent="0" marL="0">
               <a:buNone/>
             </a:pPr>
             <a:r>
-              <a:rPr lang="en-US" sz="1100" dirty="0">
-                <a:solidFill>
-                  <a:srgbClr val="E9C46A"/>
+              <a:rPr lang="en-US" sz="2000" b="1" dirty="0">
+                <a:solidFill>
+                  <a:srgbClr val="1B2A4A"/>
+                </a:solidFill>
+                <a:latin typeface="Georgia" pitchFamily="34" charset="0"/>
+                <a:ea typeface="Georgia" pitchFamily="34" charset="-122"/>
+                <a:cs typeface="Georgia" pitchFamily="34" charset="-120"/>
+              </a:rPr>
+              <a:t>Check Your Understanding</a:t>
+            </a:r>
+            <a:endParaRPr lang="en-US" sz="2000" dirty="0"/>
+          </a:p>
+        </p:txBody>
+      </p:sp>
+      <p:sp>
+        <p:nvSpPr>
+          <p:cNvPr id="6" name="Shape 4"/>
+          <p:cNvSpPr/>
+          <p:nvPr/>
+        </p:nvSpPr>
+        <p:spPr>
+          <a:xfrm>
+            <a:off x="731520" y="1051560"/>
+            <a:ext cx="7680960" cy="438912"/>
+          </a:xfrm>
+          <a:prstGeom prst="rect">
+            <a:avLst/>
+          </a:prstGeom>
+          <a:solidFill>
+            <a:srgbClr val="FFFFFF"/>
+          </a:solidFill>
+          <a:ln/>
+        </p:spPr>
+      </p:sp>
+      <p:sp>
+        <p:nvSpPr>
+          <p:cNvPr id="7" name="Text 5"/>
+          <p:cNvSpPr/>
+          <p:nvPr/>
+        </p:nvSpPr>
+        <p:spPr>
+          <a:xfrm>
+            <a:off x="868680" y="1051560"/>
+            <a:ext cx="320040" cy="438912"/>
+          </a:xfrm>
+          <a:prstGeom prst="rect">
+            <a:avLst/>
+          </a:prstGeom>
+          <a:noFill/>
+          <a:ln/>
+        </p:spPr>
+        <p:txBody>
+          <a:bodyPr wrap="square" rtlCol="0" anchor="ctr"/>
+          <a:lstStyle/>
+          <a:p>
+            <a:pPr indent="0" marL="0">
+              <a:buNone/>
+            </a:pPr>
+            <a:r>
+              <a:rPr lang="en-US" sz="1400" dirty="0">
+                <a:solidFill>
+                  <a:srgbClr val="2A9D8F"/>
+                </a:solidFill>
+              </a:rPr>
+              <a:t>☐</a:t>
+            </a:r>
+            <a:endParaRPr lang="en-US" sz="1400" dirty="0"/>
+          </a:p>
+        </p:txBody>
+      </p:sp>
+      <p:sp>
+        <p:nvSpPr>
+          <p:cNvPr id="8" name="Text 6"/>
+          <p:cNvSpPr/>
+          <p:nvPr/>
+        </p:nvSpPr>
+        <p:spPr>
+          <a:xfrm>
+            <a:off x="1234440" y="1051560"/>
+            <a:ext cx="6949440" cy="438912"/>
+          </a:xfrm>
+          <a:prstGeom prst="rect">
+            <a:avLst/>
+          </a:prstGeom>
+          <a:noFill/>
+          <a:ln/>
+        </p:spPr>
+        <p:txBody>
+          <a:bodyPr wrap="square" rtlCol="0" anchor="ctr"/>
+          <a:lstStyle/>
+          <a:p>
+            <a:pPr indent="0" marL="0">
+              <a:buNone/>
+            </a:pPr>
+            <a:r>
+              <a:rPr lang="en-US" sz="1300" dirty="0">
+                <a:solidFill>
+                  <a:srgbClr val="3D3A36"/>
                 </a:solidFill>
                 <a:latin typeface="Calibri" pitchFamily="34" charset="0"/>
                 <a:ea typeface="Calibri" pitchFamily="34" charset="-122"/>
                 <a:cs typeface="Calibri" pitchFamily="34" charset="-120"/>
               </a:rPr>
+              <a:t>I know the difference between a pure substance and a mixture</a:t>
+            </a:r>
+            <a:endParaRPr lang="en-US" sz="1300" dirty="0"/>
+          </a:p>
+        </p:txBody>
+      </p:sp>
+      <p:sp>
+        <p:nvSpPr>
+          <p:cNvPr id="9" name="Shape 7"/>
+          <p:cNvSpPr/>
+          <p:nvPr/>
+        </p:nvSpPr>
+        <p:spPr>
+          <a:xfrm>
+            <a:off x="731520" y="1554480"/>
+            <a:ext cx="7680960" cy="438912"/>
+          </a:xfrm>
+          <a:prstGeom prst="rect">
+            <a:avLst/>
+          </a:prstGeom>
+          <a:solidFill>
+            <a:srgbClr val="F8F6F3"/>
+          </a:solidFill>
+          <a:ln/>
+        </p:spPr>
+      </p:sp>
+      <p:sp>
+        <p:nvSpPr>
+          <p:cNvPr id="10" name="Text 8"/>
+          <p:cNvSpPr/>
+          <p:nvPr/>
+        </p:nvSpPr>
+        <p:spPr>
+          <a:xfrm>
+            <a:off x="868680" y="1554480"/>
+            <a:ext cx="320040" cy="438912"/>
+          </a:xfrm>
+          <a:prstGeom prst="rect">
+            <a:avLst/>
+          </a:prstGeom>
+          <a:noFill/>
+          <a:ln/>
+        </p:spPr>
+        <p:txBody>
+          <a:bodyPr wrap="square" rtlCol="0" anchor="ctr"/>
+          <a:lstStyle/>
+          <a:p>
+            <a:pPr indent="0" marL="0">
+              <a:buNone/>
+            </a:pPr>
+            <a:r>
+              <a:rPr lang="en-US" sz="1400" dirty="0">
+                <a:solidFill>
+                  <a:srgbClr val="2A9D8F"/>
+                </a:solidFill>
+              </a:rPr>
+              <a:t>☐</a:t>
+            </a:r>
+            <a:endParaRPr lang="en-US" sz="1400" dirty="0"/>
+          </a:p>
+        </p:txBody>
+      </p:sp>
+      <p:sp>
+        <p:nvSpPr>
+          <p:cNvPr id="11" name="Text 9"/>
+          <p:cNvSpPr/>
+          <p:nvPr/>
+        </p:nvSpPr>
+        <p:spPr>
+          <a:xfrm>
+            <a:off x="1234440" y="1554480"/>
+            <a:ext cx="6949440" cy="438912"/>
+          </a:xfrm>
+          <a:prstGeom prst="rect">
+            <a:avLst/>
+          </a:prstGeom>
+          <a:noFill/>
+          <a:ln/>
+        </p:spPr>
+        <p:txBody>
+          <a:bodyPr wrap="square" rtlCol="0" anchor="ctr"/>
+          <a:lstStyle/>
+          <a:p>
+            <a:pPr indent="0" marL="0">
+              <a:buNone/>
+            </a:pPr>
+            <a:r>
+              <a:rPr lang="en-US" sz="1300" dirty="0">
+                <a:solidFill>
+                  <a:srgbClr val="3D3A36"/>
+                </a:solidFill>
+                <a:latin typeface="Calibri" pitchFamily="34" charset="0"/>
+                <a:ea typeface="Calibri" pitchFamily="34" charset="-122"/>
+                <a:cs typeface="Calibri" pitchFamily="34" charset="-120"/>
+              </a:rPr>
+              <a:t>I can define solute, solvent, and solution</a:t>
+            </a:r>
+            <a:endParaRPr lang="en-US" sz="1300" dirty="0"/>
+          </a:p>
+        </p:txBody>
+      </p:sp>
+      <p:sp>
+        <p:nvSpPr>
+          <p:cNvPr id="12" name="Shape 10"/>
+          <p:cNvSpPr/>
+          <p:nvPr/>
+        </p:nvSpPr>
+        <p:spPr>
+          <a:xfrm>
+            <a:off x="731520" y="2057400"/>
+            <a:ext cx="7680960" cy="438912"/>
+          </a:xfrm>
+          <a:prstGeom prst="rect">
+            <a:avLst/>
+          </a:prstGeom>
+          <a:solidFill>
+            <a:srgbClr val="FFFFFF"/>
+          </a:solidFill>
+          <a:ln/>
+        </p:spPr>
+      </p:sp>
+      <p:sp>
+        <p:nvSpPr>
+          <p:cNvPr id="13" name="Text 11"/>
+          <p:cNvSpPr/>
+          <p:nvPr/>
+        </p:nvSpPr>
+        <p:spPr>
+          <a:xfrm>
+            <a:off x="868680" y="2057400"/>
+            <a:ext cx="320040" cy="438912"/>
+          </a:xfrm>
+          <a:prstGeom prst="rect">
+            <a:avLst/>
+          </a:prstGeom>
+          <a:noFill/>
+          <a:ln/>
+        </p:spPr>
+        <p:txBody>
+          <a:bodyPr wrap="square" rtlCol="0" anchor="ctr"/>
+          <a:lstStyle/>
+          <a:p>
+            <a:pPr indent="0" marL="0">
+              <a:buNone/>
+            </a:pPr>
+            <a:r>
+              <a:rPr lang="en-US" sz="1400" dirty="0">
+                <a:solidFill>
+                  <a:srgbClr val="2A9D8F"/>
+                </a:solidFill>
+              </a:rPr>
+              <a:t>☐</a:t>
+            </a:r>
+            <a:endParaRPr lang="en-US" sz="1400" dirty="0"/>
+          </a:p>
+        </p:txBody>
+      </p:sp>
+      <p:sp>
+        <p:nvSpPr>
+          <p:cNvPr id="14" name="Text 12"/>
+          <p:cNvSpPr/>
+          <p:nvPr/>
+        </p:nvSpPr>
+        <p:spPr>
+          <a:xfrm>
+            <a:off x="1234440" y="2057400"/>
+            <a:ext cx="6949440" cy="438912"/>
+          </a:xfrm>
+          <a:prstGeom prst="rect">
+            <a:avLst/>
+          </a:prstGeom>
+          <a:noFill/>
+          <a:ln/>
+        </p:spPr>
+        <p:txBody>
+          <a:bodyPr wrap="square" rtlCol="0" anchor="ctr"/>
+          <a:lstStyle/>
+          <a:p>
+            <a:pPr indent="0" marL="0">
+              <a:buNone/>
+            </a:pPr>
+            <a:r>
+              <a:rPr lang="en-US" sz="1300" dirty="0">
+                <a:solidFill>
+                  <a:srgbClr val="3D3A36"/>
+                </a:solidFill>
+                <a:latin typeface="Calibri" pitchFamily="34" charset="0"/>
+                <a:ea typeface="Calibri" pitchFamily="34" charset="-122"/>
+                <a:cs typeface="Calibri" pitchFamily="34" charset="-120"/>
+              </a:rPr>
+              <a:t>I can explain what happens when something dissolves</a:t>
+            </a:r>
+            <a:endParaRPr lang="en-US" sz="1300" dirty="0"/>
+          </a:p>
+        </p:txBody>
+      </p:sp>
+      <p:sp>
+        <p:nvSpPr>
+          <p:cNvPr id="15" name="Shape 13"/>
+          <p:cNvSpPr/>
+          <p:nvPr/>
+        </p:nvSpPr>
+        <p:spPr>
+          <a:xfrm>
+            <a:off x="731520" y="2560320"/>
+            <a:ext cx="7680960" cy="438912"/>
+          </a:xfrm>
+          <a:prstGeom prst="rect">
+            <a:avLst/>
+          </a:prstGeom>
+          <a:solidFill>
+            <a:srgbClr val="F8F6F3"/>
+          </a:solidFill>
+          <a:ln/>
+        </p:spPr>
+      </p:sp>
+      <p:sp>
+        <p:nvSpPr>
+          <p:cNvPr id="16" name="Text 14"/>
+          <p:cNvSpPr/>
+          <p:nvPr/>
+        </p:nvSpPr>
+        <p:spPr>
+          <a:xfrm>
+            <a:off x="868680" y="2560320"/>
+            <a:ext cx="320040" cy="438912"/>
+          </a:xfrm>
+          <a:prstGeom prst="rect">
+            <a:avLst/>
+          </a:prstGeom>
+          <a:noFill/>
+          <a:ln/>
+        </p:spPr>
+        <p:txBody>
+          <a:bodyPr wrap="square" rtlCol="0" anchor="ctr"/>
+          <a:lstStyle/>
+          <a:p>
+            <a:pPr indent="0" marL="0">
+              <a:buNone/>
+            </a:pPr>
+            <a:r>
+              <a:rPr lang="en-US" sz="1400" dirty="0">
+                <a:solidFill>
+                  <a:srgbClr val="2A9D8F"/>
+                </a:solidFill>
+              </a:rPr>
+              <a:t>☐</a:t>
+            </a:r>
+            <a:endParaRPr lang="en-US" sz="1400" dirty="0"/>
+          </a:p>
+        </p:txBody>
+      </p:sp>
+      <p:sp>
+        <p:nvSpPr>
+          <p:cNvPr id="17" name="Text 15"/>
+          <p:cNvSpPr/>
+          <p:nvPr/>
+        </p:nvSpPr>
+        <p:spPr>
+          <a:xfrm>
+            <a:off x="1234440" y="2560320"/>
+            <a:ext cx="6949440" cy="438912"/>
+          </a:xfrm>
+          <a:prstGeom prst="rect">
+            <a:avLst/>
+          </a:prstGeom>
+          <a:noFill/>
+          <a:ln/>
+        </p:spPr>
+        <p:txBody>
+          <a:bodyPr wrap="square" rtlCol="0" anchor="ctr"/>
+          <a:lstStyle/>
+          <a:p>
+            <a:pPr indent="0" marL="0">
+              <a:buNone/>
+            </a:pPr>
+            <a:r>
+              <a:rPr lang="en-US" sz="1300" dirty="0">
+                <a:solidFill>
+                  <a:srgbClr val="3D3A36"/>
+                </a:solidFill>
+                <a:latin typeface="Calibri" pitchFamily="34" charset="0"/>
+                <a:ea typeface="Calibri" pitchFamily="34" charset="-122"/>
+                <a:cs typeface="Calibri" pitchFamily="34" charset="-120"/>
+              </a:rPr>
+              <a:t>I know what a saturated solution is</a:t>
+            </a:r>
+            <a:endParaRPr lang="en-US" sz="1300" dirty="0"/>
+          </a:p>
+        </p:txBody>
+      </p:sp>
+      <p:sp>
+        <p:nvSpPr>
+          <p:cNvPr id="18" name="Shape 16"/>
+          <p:cNvSpPr/>
+          <p:nvPr/>
+        </p:nvSpPr>
+        <p:spPr>
+          <a:xfrm>
+            <a:off x="731520" y="3063240"/>
+            <a:ext cx="7680960" cy="438912"/>
+          </a:xfrm>
+          <a:prstGeom prst="rect">
+            <a:avLst/>
+          </a:prstGeom>
+          <a:solidFill>
+            <a:srgbClr val="FFFFFF"/>
+          </a:solidFill>
+          <a:ln/>
+        </p:spPr>
+      </p:sp>
+      <p:sp>
+        <p:nvSpPr>
+          <p:cNvPr id="19" name="Text 17"/>
+          <p:cNvSpPr/>
+          <p:nvPr/>
+        </p:nvSpPr>
+        <p:spPr>
+          <a:xfrm>
+            <a:off x="868680" y="3063240"/>
+            <a:ext cx="320040" cy="438912"/>
+          </a:xfrm>
+          <a:prstGeom prst="rect">
+            <a:avLst/>
+          </a:prstGeom>
+          <a:noFill/>
+          <a:ln/>
+        </p:spPr>
+        <p:txBody>
+          <a:bodyPr wrap="square" rtlCol="0" anchor="ctr"/>
+          <a:lstStyle/>
+          <a:p>
+            <a:pPr indent="0" marL="0">
+              <a:buNone/>
+            </a:pPr>
+            <a:r>
+              <a:rPr lang="en-US" sz="1400" dirty="0">
+                <a:solidFill>
+                  <a:srgbClr val="2A9D8F"/>
+                </a:solidFill>
+              </a:rPr>
+              <a:t>☐</a:t>
+            </a:r>
+            <a:endParaRPr lang="en-US" sz="1400" dirty="0"/>
+          </a:p>
+        </p:txBody>
+      </p:sp>
+      <p:sp>
+        <p:nvSpPr>
+          <p:cNvPr id="20" name="Text 18"/>
+          <p:cNvSpPr/>
+          <p:nvPr/>
+        </p:nvSpPr>
+        <p:spPr>
+          <a:xfrm>
+            <a:off x="1234440" y="3063240"/>
+            <a:ext cx="6949440" cy="438912"/>
+          </a:xfrm>
+          <a:prstGeom prst="rect">
+            <a:avLst/>
+          </a:prstGeom>
+          <a:noFill/>
+          <a:ln/>
+        </p:spPr>
+        <p:txBody>
+          <a:bodyPr wrap="square" rtlCol="0" anchor="ctr"/>
+          <a:lstStyle/>
+          <a:p>
+            <a:pPr indent="0" marL="0">
+              <a:buNone/>
+            </a:pPr>
+            <a:r>
+              <a:rPr lang="en-US" sz="1300" dirty="0">
+                <a:solidFill>
+                  <a:srgbClr val="3D3A36"/>
+                </a:solidFill>
+                <a:latin typeface="Calibri" pitchFamily="34" charset="0"/>
+                <a:ea typeface="Calibri" pitchFamily="34" charset="-122"/>
+                <a:cs typeface="Calibri" pitchFamily="34" charset="-120"/>
+              </a:rPr>
+              <a:t>I can describe factors that affect dissolving speed</a:t>
+            </a:r>
+            <a:endParaRPr lang="en-US" sz="1300" dirty="0"/>
+          </a:p>
+        </p:txBody>
+      </p:sp>
+      <p:sp>
+        <p:nvSpPr>
+          <p:cNvPr id="21" name="Shape 19"/>
+          <p:cNvSpPr/>
+          <p:nvPr/>
+        </p:nvSpPr>
+        <p:spPr>
+          <a:xfrm>
+            <a:off x="731520" y="3749040"/>
+            <a:ext cx="7680960" cy="594360"/>
+          </a:xfrm>
+          <a:prstGeom prst="rect">
+            <a:avLst/>
+          </a:prstGeom>
+          <a:solidFill>
+            <a:srgbClr val="E8F5F3"/>
+          </a:solidFill>
+          <a:ln/>
+          <a:effectLst>
+            <a:outerShdw sx="100000" sy="100000" kx="0" ky="0" algn="bl" rotWithShape="0" blurRad="50800" dist="25400" dir="8100000">
+              <a:srgbClr val="000000">
+                <a:alpha val="10000"/>
+              </a:srgbClr>
+            </a:outerShdw>
+          </a:effectLst>
+        </p:spPr>
+      </p:sp>
+      <p:sp>
+        <p:nvSpPr>
+          <p:cNvPr id="22" name="Text 20"/>
+          <p:cNvSpPr/>
+          <p:nvPr/>
+        </p:nvSpPr>
+        <p:spPr>
+          <a:xfrm>
+            <a:off x="914400" y="3749040"/>
+            <a:ext cx="7315200" cy="594360"/>
+          </a:xfrm>
+          <a:prstGeom prst="rect">
+            <a:avLst/>
+          </a:prstGeom>
+          <a:noFill/>
+          <a:ln/>
+        </p:spPr>
+        <p:txBody>
+          <a:bodyPr wrap="square" rtlCol="0" anchor="ctr"/>
+          <a:lstStyle/>
+          <a:p>
+            <a:pPr indent="0" marL="0">
+              <a:buNone/>
+            </a:pPr>
+            <a:r>
+              <a:rPr lang="en-US" sz="1200" b="1" dirty="0">
+                <a:solidFill>
+                  <a:srgbClr val="2A9D8F"/>
+                </a:solidFill>
+                <a:latin typeface="Calibri" pitchFamily="34" charset="0"/>
+                <a:ea typeface="Calibri" pitchFamily="34" charset="-122"/>
+                <a:cs typeface="Calibri" pitchFamily="34" charset="-120"/>
+              </a:rPr>
+              <a:t>Key Idea: </a:t>
+            </a:r>
+            <a:pPr indent="0" marL="0">
+              <a:buNone/>
+            </a:pPr>
+            <a:r>
+              <a:rPr lang="en-US" sz="1200" i="1" dirty="0">
+                <a:solidFill>
+                  <a:srgbClr val="3D3A36"/>
+                </a:solidFill>
+                <a:latin typeface="Calibri" pitchFamily="34" charset="0"/>
+                <a:ea typeface="Calibri" pitchFamily="34" charset="-122"/>
+                <a:cs typeface="Calibri" pitchFamily="34" charset="-120"/>
+              </a:rPr>
+              <a:t>In a solution, the solute is still there — it has just spread evenly through the solvent.</a:t>
+            </a:r>
+            <a:endParaRPr lang="en-US" sz="1200" dirty="0"/>
+          </a:p>
+        </p:txBody>
+      </p:sp>
+    </p:spTree>
+  </p:cSld>
+  <p:clrMapOvr>
+    <a:masterClrMapping/>
+  </p:clrMapOvr>
+</p:sld>
+</file>
+
+<file path=ppt/slides/slide7.xml><?xml version="1.0" encoding="utf-8"?>
+<p:sld xmlns:a="http://schemas.openxmlformats.org/drawingml/2006/main" xmlns:r="http://schemas.openxmlformats.org/officeDocument/2006/relationships" xmlns:p="http://schemas.openxmlformats.org/presentationml/2006/main">
+  <p:cSld name="Slide 7">
+    <p:spTree>
+      <p:nvGrpSpPr>
+        <p:cNvPr id="1" name=""/>
+        <p:cNvGrpSpPr/>
+        <p:nvPr/>
+      </p:nvGrpSpPr>
+      <p:grpSpPr>
+        <a:xfrm>
+          <a:off x="0" y="0"/>
+          <a:ext cx="0" cy="0"/>
+          <a:chOff x="0" y="0"/>
+          <a:chExt cx="0" cy="0"/>
+        </a:xfrm>
+      </p:grpSpPr>
+      <p:sp>
+        <p:nvSpPr>
+          <p:cNvPr id="2" name="Shape 0"/>
+          <p:cNvSpPr/>
+          <p:nvPr/>
+        </p:nvSpPr>
+        <p:spPr>
+          <a:xfrm>
+            <a:off x="0" y="0"/>
+            <a:ext cx="9144000" cy="5143500"/>
+          </a:xfrm>
+          <a:prstGeom prst="rect">
+            <a:avLst/>
+          </a:prstGeom>
+          <a:solidFill>
+            <a:srgbClr val="1B2A4A"/>
+          </a:solidFill>
+          <a:ln/>
+        </p:spPr>
+      </p:sp>
+      <p:sp>
+        <p:nvSpPr>
+          <p:cNvPr id="3" name="Shape 1"/>
+          <p:cNvSpPr/>
+          <p:nvPr/>
+        </p:nvSpPr>
+        <p:spPr>
+          <a:xfrm>
+            <a:off x="0" y="4777740"/>
+            <a:ext cx="9144000" cy="365760"/>
+          </a:xfrm>
+          <a:prstGeom prst="rect">
+            <a:avLst/>
+          </a:prstGeom>
+          <a:solidFill>
+            <a:srgbClr val="2A9D8F"/>
+          </a:solidFill>
+          <a:ln/>
+        </p:spPr>
+      </p:sp>
+      <p:sp>
+        <p:nvSpPr>
+          <p:cNvPr id="4" name="Shape 2"/>
+          <p:cNvSpPr/>
+          <p:nvPr/>
+        </p:nvSpPr>
+        <p:spPr>
+          <a:xfrm>
+            <a:off x="-914400" y="-914400"/>
+            <a:ext cx="3657600" cy="3657600"/>
+          </a:xfrm>
+          <a:prstGeom prst="ellipse">
+            <a:avLst/>
+          </a:prstGeom>
+          <a:solidFill>
+            <a:srgbClr val="2A9D8F">
+              <a:alpha val="10000"/>
+            </a:srgbClr>
+          </a:solidFill>
+          <a:ln/>
+        </p:spPr>
+      </p:sp>
+      <p:sp>
+        <p:nvSpPr>
+          <p:cNvPr id="5" name="Text 3"/>
+          <p:cNvSpPr/>
+          <p:nvPr/>
+        </p:nvSpPr>
+        <p:spPr>
+          <a:xfrm>
+            <a:off x="731520" y="1463040"/>
+            <a:ext cx="7680960" cy="822960"/>
+          </a:xfrm>
+          <a:prstGeom prst="rect">
+            <a:avLst/>
+          </a:prstGeom>
+          <a:noFill/>
+          <a:ln/>
+        </p:spPr>
+        <p:txBody>
+          <a:bodyPr wrap="square" rtlCol="0" anchor="ctr"/>
+          <a:lstStyle/>
+          <a:p>
+            <a:pPr algn="ctr" indent="0" marL="0">
+              <a:buNone/>
+            </a:pPr>
+            <a:r>
+              <a:rPr lang="en-US" sz="3400" b="1" dirty="0">
+                <a:solidFill>
+                  <a:srgbClr val="FFFFFF"/>
+                </a:solidFill>
+                <a:latin typeface="Georgia" pitchFamily="34" charset="0"/>
+                <a:ea typeface="Georgia" pitchFamily="34" charset="-122"/>
+                <a:cs typeface="Georgia" pitchFamily="34" charset="-120"/>
+              </a:rPr>
+              <a:t>Review &amp; Practise</a:t>
+            </a:r>
+            <a:endParaRPr lang="en-US" sz="3400" dirty="0"/>
+          </a:p>
+        </p:txBody>
+      </p:sp>
+      <p:sp>
+        <p:nvSpPr>
+          <p:cNvPr id="6" name="Text 4"/>
+          <p:cNvSpPr/>
+          <p:nvPr/>
+        </p:nvSpPr>
+        <p:spPr>
+          <a:xfrm>
+            <a:off x="731520" y="2468880"/>
+            <a:ext cx="7680960" cy="457200"/>
+          </a:xfrm>
+          <a:prstGeom prst="rect">
+            <a:avLst/>
+          </a:prstGeom>
+          <a:noFill/>
+          <a:ln/>
+        </p:spPr>
+        <p:txBody>
+          <a:bodyPr wrap="square" rtlCol="0" anchor="ctr"/>
+          <a:lstStyle/>
+          <a:p>
+            <a:pPr algn="ctr" indent="0" marL="0">
+              <a:buNone/>
+            </a:pPr>
+            <a:r>
+              <a:rPr lang="en-US" sz="1800" dirty="0">
+                <a:solidFill>
+                  <a:srgbClr val="2A9D8F"/>
+                </a:solidFill>
+                <a:latin typeface="Calibri" pitchFamily="34" charset="0"/>
+                <a:ea typeface="Calibri" pitchFamily="34" charset="-122"/>
+                <a:cs typeface="Calibri" pitchFamily="34" charset="-120"/>
+              </a:rPr>
               <a:t>mrzocchi.com</a:t>
             </a:r>
-            <a:endParaRPr lang="en-US" sz="1100" dirty="0"/>
+            <a:endParaRPr lang="en-US" sz="1800" dirty="0"/>
+          </a:p>
+        </p:txBody>
+      </p:sp>
+      <p:sp>
+        <p:nvSpPr>
+          <p:cNvPr id="7" name="Text 5"/>
+          <p:cNvSpPr/>
+          <p:nvPr/>
+        </p:nvSpPr>
+        <p:spPr>
+          <a:xfrm>
+            <a:off x="731520" y="3108960"/>
+            <a:ext cx="7680960" cy="457200"/>
+          </a:xfrm>
+          <a:prstGeom prst="rect">
+            <a:avLst/>
+          </a:prstGeom>
+          <a:noFill/>
+          <a:ln/>
+        </p:spPr>
+        <p:txBody>
+          <a:bodyPr wrap="square" rtlCol="0" anchor="ctr"/>
+          <a:lstStyle/>
+          <a:p>
+            <a:pPr algn="ctr" indent="0" marL="0">
+              <a:buNone/>
+            </a:pPr>
+            <a:r>
+              <a:rPr lang="en-US" sz="1300" dirty="0">
+                <a:solidFill>
+                  <a:srgbClr val="9B9690"/>
+                </a:solidFill>
+                <a:latin typeface="Calibri" pitchFamily="34" charset="0"/>
+                <a:ea typeface="Calibri" pitchFamily="34" charset="-122"/>
+                <a:cs typeface="Calibri" pitchFamily="34" charset="-120"/>
+              </a:rPr>
+              <a:t>Use the Self-Quiz, Review Games, and Practice Builder to test yourself.</a:t>
+            </a:r>
+            <a:endParaRPr lang="en-US" sz="1300" dirty="0"/>
           </a:p>
         </p:txBody>
       </p:sp>

--- a/static/ppts/G6_Sci_T2_Mixtures.pptx
+++ b/static/ppts/G6_Sci_T2_Mixtures.pptx
@@ -16,8 +16,8 @@
   <p:notesMasterIdLst>
     <p:notesMasterId r:id="rId9"/>
   </p:notesMasterIdLst>
-  <p:sldSz cx="9144000" cy="5143500"/>
-  <p:notesSz cx="5143500" cy="9144000"/>
+  <p:sldSz cx="12192000" cy="6858000"/>
+  <p:notesSz cx="6858000" cy="12192000"/>
   <p:defaultTextStyle>
     <a:lvl1pPr marL="0" algn="l" defTabSz="914400" rtl="0" eaLnBrk="1" latinLnBrk="0" hangingPunct="1">
       <a:defRPr sz="1800" kern="1200">
@@ -1388,6 +1388,13 @@
 <file path=ppt/slides/slide1.xml><?xml version="1.0" encoding="utf-8"?>
 <p:sld xmlns:a="http://schemas.openxmlformats.org/drawingml/2006/main" xmlns:r="http://schemas.openxmlformats.org/officeDocument/2006/relationships" xmlns:p="http://schemas.openxmlformats.org/presentationml/2006/main">
   <p:cSld name="Slide 1">
+    <p:bg>
+      <p:bgPr>
+        <a:solidFill>
+          <a:srgbClr val="2A9D8F"/>
+        </a:solidFill>
+      </p:bgPr>
+    </p:bg>
     <p:spTree>
       <p:nvGrpSpPr>
         <p:cNvPr id="1" name=""/>
@@ -1410,55 +1417,15 @@
         </p:nvSpPr>
         <p:spPr>
           <a:xfrm>
-            <a:off x="0" y="0"/>
-            <a:ext cx="9144000" cy="5143500"/>
-          </a:xfrm>
-          <a:prstGeom prst="rect">
+            <a:off x="7772400" y="-914400"/>
+            <a:ext cx="3657600" cy="3657600"/>
+          </a:xfrm>
+          <a:prstGeom prst="ellipse">
             <a:avLst/>
           </a:prstGeom>
           <a:solidFill>
-            <a:srgbClr val="1B2A4A"/>
-          </a:solidFill>
-          <a:ln/>
-        </p:spPr>
-      </p:sp>
-      <p:sp>
-        <p:nvSpPr>
-          <p:cNvPr id="3" name="Shape 1"/>
-          <p:cNvSpPr/>
-          <p:nvPr/>
-        </p:nvSpPr>
-        <p:spPr>
-          <a:xfrm>
-            <a:off x="0" y="4777740"/>
-            <a:ext cx="9144000" cy="365760"/>
-          </a:xfrm>
-          <a:prstGeom prst="rect">
-            <a:avLst/>
-          </a:prstGeom>
-          <a:solidFill>
-            <a:srgbClr val="2A9D8F"/>
-          </a:solidFill>
-          <a:ln/>
-        </p:spPr>
-      </p:sp>
-      <p:sp>
-        <p:nvSpPr>
-          <p:cNvPr id="4" name="Shape 2"/>
-          <p:cNvSpPr/>
-          <p:nvPr/>
-        </p:nvSpPr>
-        <p:spPr>
-          <a:xfrm>
-            <a:off x="6858000" y="-1371600"/>
-            <a:ext cx="4572000" cy="4572000"/>
-          </a:xfrm>
-          <a:prstGeom prst="ellipse">
-            <a:avLst/>
-          </a:prstGeom>
-          <a:solidFill>
-            <a:srgbClr val="2A9D8F">
-              <a:alpha val="12000"/>
+            <a:srgbClr val="FFFFFF">
+              <a:alpha val="8000"/>
             </a:srgbClr>
           </a:solidFill>
           <a:ln/>
@@ -1466,14 +1433,14 @@
       </p:sp>
       <p:sp>
         <p:nvSpPr>
-          <p:cNvPr id="5" name="Text 3"/>
-          <p:cNvSpPr/>
-          <p:nvPr/>
-        </p:nvSpPr>
-        <p:spPr>
-          <a:xfrm>
-            <a:off x="731520" y="914400"/>
-            <a:ext cx="7680960" cy="457200"/>
+          <p:cNvPr id="3" name="Text 1"/>
+          <p:cNvSpPr/>
+          <p:nvPr/>
+        </p:nvSpPr>
+        <p:spPr>
+          <a:xfrm>
+            <a:off x="731520" y="548640"/>
+            <a:ext cx="7315200" cy="365760"/>
           </a:xfrm>
           <a:prstGeom prst="rect">
             <a:avLst/>
@@ -1489,30 +1456,30 @@
               <a:buNone/>
             </a:pPr>
             <a:r>
-              <a:rPr lang="en-US" sz="1300" b="1" spc="500" kern="0" dirty="0">
-                <a:solidFill>
-                  <a:srgbClr val="2A9D8F"/>
-                </a:solidFill>
-                <a:latin typeface="Calibri" pitchFamily="34" charset="0"/>
-                <a:ea typeface="Calibri" pitchFamily="34" charset="-122"/>
-                <a:cs typeface="Calibri" pitchFamily="34" charset="-120"/>
+              <a:rPr lang="en-US" sz="1100" b="1" dirty="0">
+                <a:solidFill>
+                  <a:srgbClr val="F2D68A"/>
+                </a:solidFill>
+                <a:latin typeface="Arial" pitchFamily="34" charset="0"/>
+                <a:ea typeface="Arial" pitchFamily="34" charset="-122"/>
+                <a:cs typeface="Arial" pitchFamily="34" charset="-120"/>
               </a:rPr>
               <a:t>GRADE 6 SCIENCE</a:t>
             </a:r>
-            <a:endParaRPr lang="en-US" sz="1300" dirty="0"/>
-          </a:p>
-        </p:txBody>
-      </p:sp>
-      <p:sp>
-        <p:nvSpPr>
-          <p:cNvPr id="6" name="Text 4"/>
-          <p:cNvSpPr/>
-          <p:nvPr/>
-        </p:nvSpPr>
-        <p:spPr>
-          <a:xfrm>
-            <a:off x="731520" y="1463040"/>
-            <a:ext cx="6858000" cy="1645920"/>
+            <a:endParaRPr lang="en-US" sz="1100" dirty="0"/>
+          </a:p>
+        </p:txBody>
+      </p:sp>
+      <p:sp>
+        <p:nvSpPr>
+          <p:cNvPr id="4" name="Text 2"/>
+          <p:cNvSpPr/>
+          <p:nvPr/>
+        </p:nvSpPr>
+        <p:spPr>
+          <a:xfrm>
+            <a:off x="731520" y="1371600"/>
+            <a:ext cx="9144000" cy="1645920"/>
           </a:xfrm>
           <a:prstGeom prst="rect">
             <a:avLst/>
@@ -1521,14 +1488,17 @@
           <a:ln/>
         </p:spPr>
         <p:txBody>
-          <a:bodyPr wrap="square" rtlCol="0" anchor="t"/>
+          <a:bodyPr wrap="square" rtlCol="0" anchor="ctr"/>
           <a:lstStyle/>
           <a:p>
             <a:pPr indent="0" marL="0">
+              <a:lnSpc>
+                <a:spcPct val="110000"/>
+              </a:lnSpc>
               <a:buNone/>
             </a:pPr>
             <a:r>
-              <a:rPr lang="en-US" sz="3800" b="1" dirty="0">
+              <a:rPr lang="en-US" sz="3600" b="1" dirty="0">
                 <a:solidFill>
                   <a:srgbClr val="FFFFFF"/>
                 </a:solidFill>
@@ -1538,20 +1508,20 @@
               </a:rPr>
               <a:t>Mixtures &amp; Solutions</a:t>
             </a:r>
-            <a:endParaRPr lang="en-US" sz="3800" dirty="0"/>
-          </a:p>
-        </p:txBody>
-      </p:sp>
-      <p:sp>
-        <p:nvSpPr>
-          <p:cNvPr id="7" name="Text 5"/>
+            <a:endParaRPr lang="en-US" sz="3600" dirty="0"/>
+          </a:p>
+        </p:txBody>
+      </p:sp>
+      <p:sp>
+        <p:nvSpPr>
+          <p:cNvPr id="5" name="Text 3"/>
           <p:cNvSpPr/>
           <p:nvPr/>
         </p:nvSpPr>
         <p:spPr>
           <a:xfrm>
             <a:off x="731520" y="3200400"/>
-            <a:ext cx="6400800" cy="548640"/>
+            <a:ext cx="7315200" cy="548640"/>
           </a:xfrm>
           <a:prstGeom prst="rect">
             <a:avLst/>
@@ -1567,15 +1537,17 @@
               <a:buNone/>
             </a:pPr>
             <a:r>
-              <a:rPr lang="en-US" sz="1600" i="1" dirty="0">
-                <a:solidFill>
-                  <a:srgbClr val="9B9690"/>
-                </a:solidFill>
-                <a:latin typeface="Calibri" pitchFamily="34" charset="0"/>
-                <a:ea typeface="Calibri" pitchFamily="34" charset="-122"/>
-                <a:cs typeface="Calibri" pitchFamily="34" charset="-120"/>
-              </a:rPr>
-              <a:t>When substances combine without chemical change</a:t>
+              <a:rPr lang="en-US" sz="1600" dirty="0">
+                <a:solidFill>
+                  <a:srgbClr val="FFFFFF">
+                    <a:alpha val="65000"/>
+                  </a:srgbClr>
+                </a:solidFill>
+                <a:latin typeface="Arial" pitchFamily="34" charset="0"/>
+                <a:ea typeface="Arial" pitchFamily="34" charset="-122"/>
+                <a:cs typeface="Arial" pitchFamily="34" charset="-120"/>
+              </a:rPr>
+              <a:t>What happens when substances combine</a:t>
             </a:r>
             <a:endParaRPr lang="en-US" sz="1600" dirty="0"/>
           </a:p>
@@ -1583,14 +1555,14 @@
       </p:sp>
       <p:sp>
         <p:nvSpPr>
-          <p:cNvPr id="8" name="Text 6"/>
-          <p:cNvSpPr/>
-          <p:nvPr/>
-        </p:nvSpPr>
-        <p:spPr>
-          <a:xfrm>
-            <a:off x="731520" y="4297680"/>
-            <a:ext cx="2743200" cy="365760"/>
+          <p:cNvPr id="6" name="Text 4"/>
+          <p:cNvSpPr/>
+          <p:nvPr/>
+        </p:nvSpPr>
+        <p:spPr>
+          <a:xfrm>
+            <a:off x="731520" y="4389120"/>
+            <a:ext cx="2743200" cy="320040"/>
           </a:xfrm>
           <a:prstGeom prst="rect">
             <a:avLst/>
@@ -1606,17 +1578,19 @@
               <a:buNone/>
             </a:pPr>
             <a:r>
-              <a:rPr lang="en-US" sz="1100" dirty="0">
-                <a:solidFill>
-                  <a:srgbClr val="9B9690"/>
-                </a:solidFill>
-                <a:latin typeface="Calibri" pitchFamily="34" charset="0"/>
-                <a:ea typeface="Calibri" pitchFamily="34" charset="-122"/>
-                <a:cs typeface="Calibri" pitchFamily="34" charset="-120"/>
+              <a:rPr lang="en-US" sz="1000" dirty="0">
+                <a:solidFill>
+                  <a:srgbClr val="FFFFFF">
+                    <a:alpha val="40000"/>
+                  </a:srgbClr>
+                </a:solidFill>
+                <a:latin typeface="Arial" pitchFamily="34" charset="0"/>
+                <a:ea typeface="Arial" pitchFamily="34" charset="-122"/>
+                <a:cs typeface="Arial" pitchFamily="34" charset="-120"/>
               </a:rPr>
               <a:t>mrzocchi.com</a:t>
             </a:r>
-            <a:endParaRPr lang="en-US" sz="1100" dirty="0"/>
+            <a:endParaRPr lang="en-US" sz="1000" dirty="0"/>
           </a:p>
         </p:txBody>
       </p:sp>
@@ -1661,67 +1635,113 @@
         <p:spPr>
           <a:xfrm>
             <a:off x="0" y="0"/>
-            <a:ext cx="9144000" cy="822960"/>
-          </a:xfrm>
-          <a:prstGeom prst="rect">
-            <a:avLst/>
+            <a:ext cx="73152" cy="5148072"/>
+          </a:xfrm>
+          <a:prstGeom prst="rect">
+            <a:avLst/>
+          </a:prstGeom>
+          <a:solidFill>
+            <a:srgbClr val="2A9D8F"/>
+          </a:solidFill>
+          <a:ln/>
+        </p:spPr>
+      </p:sp>
+      <p:sp>
+        <p:nvSpPr>
+          <p:cNvPr id="3" name="Text 1"/>
+          <p:cNvSpPr/>
+          <p:nvPr/>
+        </p:nvSpPr>
+        <p:spPr>
+          <a:xfrm>
+            <a:off x="548640" y="274320"/>
+            <a:ext cx="9144000" cy="640080"/>
+          </a:xfrm>
+          <a:prstGeom prst="rect">
+            <a:avLst/>
+          </a:prstGeom>
+          <a:noFill/>
+          <a:ln/>
+        </p:spPr>
+        <p:txBody>
+          <a:bodyPr wrap="square" rtlCol="0" anchor="ctr"/>
+          <a:lstStyle/>
+          <a:p>
+            <a:pPr indent="0" marL="0">
+              <a:buNone/>
+            </a:pPr>
+            <a:r>
+              <a:rPr lang="en-US" sz="2400" b="1" dirty="0">
+                <a:solidFill>
+                  <a:srgbClr val="1B2A4A"/>
+                </a:solidFill>
+                <a:latin typeface="Georgia" pitchFamily="34" charset="0"/>
+                <a:ea typeface="Georgia" pitchFamily="34" charset="-122"/>
+                <a:cs typeface="Georgia" pitchFamily="34" charset="-120"/>
+              </a:rPr>
+              <a:t>Key Vocabulary</a:t>
+            </a:r>
+            <a:endParaRPr lang="en-US" sz="2400" dirty="0"/>
+          </a:p>
+        </p:txBody>
+      </p:sp>
+      <p:sp>
+        <p:nvSpPr>
+          <p:cNvPr id="4" name="Shape 2"/>
+          <p:cNvSpPr/>
+          <p:nvPr/>
+        </p:nvSpPr>
+        <p:spPr>
+          <a:xfrm>
+            <a:off x="548640" y="960120"/>
+            <a:ext cx="2286000" cy="36576"/>
+          </a:xfrm>
+          <a:prstGeom prst="rect">
+            <a:avLst/>
+          </a:prstGeom>
+          <a:solidFill>
+            <a:srgbClr val="2A9D8F"/>
+          </a:solidFill>
+          <a:ln/>
+        </p:spPr>
+      </p:sp>
+      <p:sp>
+        <p:nvSpPr>
+          <p:cNvPr id="5" name="Shape 3"/>
+          <p:cNvSpPr/>
+          <p:nvPr/>
+        </p:nvSpPr>
+        <p:spPr>
+          <a:xfrm>
+            <a:off x="548640" y="1234440"/>
+            <a:ext cx="3200400" cy="914400"/>
+          </a:xfrm>
+          <a:prstGeom prst="roundRect">
+            <a:avLst>
+              <a:gd name="adj" fmla="val 10000"/>
+            </a:avLst>
           </a:prstGeom>
           <a:solidFill>
             <a:srgbClr val="FFFFFF"/>
           </a:solidFill>
-          <a:ln/>
-        </p:spPr>
-      </p:sp>
-      <p:sp>
-        <p:nvSpPr>
-          <p:cNvPr id="3" name="Shape 1"/>
-          <p:cNvSpPr/>
-          <p:nvPr/>
-        </p:nvSpPr>
-        <p:spPr>
-          <a:xfrm>
-            <a:off x="0" y="804672"/>
-            <a:ext cx="9144000" cy="27432"/>
-          </a:xfrm>
-          <a:prstGeom prst="rect">
-            <a:avLst/>
-          </a:prstGeom>
-          <a:solidFill>
-            <a:srgbClr val="E5E2DC"/>
-          </a:solidFill>
-          <a:ln/>
-        </p:spPr>
-      </p:sp>
-      <p:sp>
-        <p:nvSpPr>
-          <p:cNvPr id="4" name="Shape 2"/>
-          <p:cNvSpPr/>
-          <p:nvPr/>
-        </p:nvSpPr>
-        <p:spPr>
-          <a:xfrm>
-            <a:off x="548640" y="201168"/>
-            <a:ext cx="54864" cy="420624"/>
-          </a:xfrm>
-          <a:prstGeom prst="rect">
-            <a:avLst/>
-          </a:prstGeom>
-          <a:solidFill>
-            <a:srgbClr val="2A9D8F"/>
-          </a:solidFill>
-          <a:ln/>
-        </p:spPr>
-      </p:sp>
-      <p:sp>
-        <p:nvSpPr>
-          <p:cNvPr id="5" name="Text 3"/>
-          <p:cNvSpPr/>
-          <p:nvPr/>
-        </p:nvSpPr>
-        <p:spPr>
-          <a:xfrm>
-            <a:off x="777240" y="137160"/>
-            <a:ext cx="7772400" cy="548640"/>
+          <a:ln w="9525">
+            <a:solidFill>
+              <a:srgbClr val="E5E2DC"/>
+            </a:solidFill>
+            <a:prstDash val="solid"/>
+          </a:ln>
+        </p:spPr>
+      </p:sp>
+      <p:sp>
+        <p:nvSpPr>
+          <p:cNvPr id="6" name="Text 4"/>
+          <p:cNvSpPr/>
+          <p:nvPr/>
+        </p:nvSpPr>
+        <p:spPr>
+          <a:xfrm>
+            <a:off x="685800" y="1307592"/>
+            <a:ext cx="2926080" cy="320040"/>
           </a:xfrm>
           <a:prstGeom prst="rect">
             <a:avLst/>
@@ -1730,84 +1750,106 @@
           <a:ln/>
         </p:spPr>
         <p:txBody>
-          <a:bodyPr wrap="square" lIns="0" tIns="0" rIns="0" bIns="0" rtlCol="0" anchor="ctr"/>
+          <a:bodyPr wrap="square" rtlCol="0" anchor="ctr"/>
           <a:lstStyle/>
           <a:p>
             <a:pPr indent="0" marL="0">
               <a:buNone/>
             </a:pPr>
             <a:r>
-              <a:rPr lang="en-US" sz="2000" b="1" dirty="0">
-                <a:solidFill>
-                  <a:srgbClr val="1B2A4A"/>
+              <a:rPr lang="en-US" sz="1400" b="1" dirty="0">
+                <a:solidFill>
+                  <a:srgbClr val="2A9D8F"/>
                 </a:solidFill>
                 <a:latin typeface="Georgia" pitchFamily="34" charset="0"/>
                 <a:ea typeface="Georgia" pitchFamily="34" charset="-122"/>
                 <a:cs typeface="Georgia" pitchFamily="34" charset="-120"/>
               </a:rPr>
-              <a:t>Key Vocabulary</a:t>
-            </a:r>
-            <a:endParaRPr lang="en-US" sz="2000" dirty="0"/>
-          </a:p>
-        </p:txBody>
-      </p:sp>
-      <p:sp>
-        <p:nvSpPr>
-          <p:cNvPr id="6" name="Shape 4"/>
-          <p:cNvSpPr/>
-          <p:nvPr/>
-        </p:nvSpPr>
-        <p:spPr>
-          <a:xfrm>
-            <a:off x="731520" y="1051560"/>
-            <a:ext cx="3657600" cy="658368"/>
-          </a:xfrm>
-          <a:prstGeom prst="rect">
-            <a:avLst/>
+              <a:t>Mixture</a:t>
+            </a:r>
+            <a:endParaRPr lang="en-US" sz="1400" dirty="0"/>
+          </a:p>
+        </p:txBody>
+      </p:sp>
+      <p:sp>
+        <p:nvSpPr>
+          <p:cNvPr id="7" name="Text 5"/>
+          <p:cNvSpPr/>
+          <p:nvPr/>
+        </p:nvSpPr>
+        <p:spPr>
+          <a:xfrm>
+            <a:off x="685800" y="1645920"/>
+            <a:ext cx="2926080" cy="457200"/>
+          </a:xfrm>
+          <a:prstGeom prst="rect">
+            <a:avLst/>
+          </a:prstGeom>
+          <a:noFill/>
+          <a:ln/>
+        </p:spPr>
+        <p:txBody>
+          <a:bodyPr wrap="square" rtlCol="0" anchor="ctr"/>
+          <a:lstStyle/>
+          <a:p>
+            <a:pPr indent="0" marL="0">
+              <a:lnSpc>
+                <a:spcPct val="130000"/>
+              </a:lnSpc>
+              <a:buNone/>
+            </a:pPr>
+            <a:r>
+              <a:rPr lang="en-US" sz="1100" dirty="0">
+                <a:solidFill>
+                  <a:srgbClr val="6B6660"/>
+                </a:solidFill>
+                <a:latin typeface="Arial" pitchFamily="34" charset="0"/>
+                <a:ea typeface="Arial" pitchFamily="34" charset="-122"/>
+                <a:cs typeface="Arial" pitchFamily="34" charset="-120"/>
+              </a:rPr>
+              <a:t>Two or more substances mixed together but NOT chemically joined.</a:t>
+            </a:r>
+            <a:endParaRPr lang="en-US" sz="1100" dirty="0"/>
+          </a:p>
+        </p:txBody>
+      </p:sp>
+      <p:sp>
+        <p:nvSpPr>
+          <p:cNvPr id="8" name="Shape 6"/>
+          <p:cNvSpPr/>
+          <p:nvPr/>
+        </p:nvSpPr>
+        <p:spPr>
+          <a:xfrm>
+            <a:off x="4023360" y="1234440"/>
+            <a:ext cx="3200400" cy="914400"/>
+          </a:xfrm>
+          <a:prstGeom prst="roundRect">
+            <a:avLst>
+              <a:gd name="adj" fmla="val 10000"/>
+            </a:avLst>
           </a:prstGeom>
           <a:solidFill>
             <a:srgbClr val="FFFFFF"/>
           </a:solidFill>
-          <a:ln/>
-          <a:effectLst>
-            <a:outerShdw sx="100000" sy="100000" kx="0" ky="0" algn="bl" rotWithShape="0" blurRad="50800" dist="25400" dir="8100000">
-              <a:srgbClr val="000000">
-                <a:alpha val="10000"/>
-              </a:srgbClr>
-            </a:outerShdw>
-          </a:effectLst>
-        </p:spPr>
-      </p:sp>
-      <p:sp>
-        <p:nvSpPr>
-          <p:cNvPr id="7" name="Shape 5"/>
-          <p:cNvSpPr/>
-          <p:nvPr/>
-        </p:nvSpPr>
-        <p:spPr>
-          <a:xfrm>
-            <a:off x="731520" y="1051560"/>
-            <a:ext cx="54864" cy="658368"/>
-          </a:xfrm>
-          <a:prstGeom prst="rect">
-            <a:avLst/>
-          </a:prstGeom>
-          <a:solidFill>
-            <a:srgbClr val="2A9D8F"/>
-          </a:solidFill>
-          <a:ln/>
-        </p:spPr>
-      </p:sp>
-      <p:sp>
-        <p:nvSpPr>
-          <p:cNvPr id="8" name="Text 6"/>
-          <p:cNvSpPr/>
-          <p:nvPr/>
-        </p:nvSpPr>
-        <p:spPr>
-          <a:xfrm>
-            <a:off x="914400" y="1051560"/>
-            <a:ext cx="1463040" cy="658368"/>
+          <a:ln w="9525">
+            <a:solidFill>
+              <a:srgbClr val="E5E2DC"/>
+            </a:solidFill>
+            <a:prstDash val="solid"/>
+          </a:ln>
+        </p:spPr>
+      </p:sp>
+      <p:sp>
+        <p:nvSpPr>
+          <p:cNvPr id="9" name="Text 7"/>
+          <p:cNvSpPr/>
+          <p:nvPr/>
+        </p:nvSpPr>
+        <p:spPr>
+          <a:xfrm>
+            <a:off x="4160520" y="1307592"/>
+            <a:ext cx="2926080" cy="320040"/>
           </a:xfrm>
           <a:prstGeom prst="rect">
             <a:avLst/>
@@ -1816,37 +1858,37 @@
           <a:ln/>
         </p:spPr>
         <p:txBody>
-          <a:bodyPr wrap="square" lIns="0" tIns="0" rIns="0" bIns="0" rtlCol="0" anchor="ctr"/>
+          <a:bodyPr wrap="square" rtlCol="0" anchor="ctr"/>
           <a:lstStyle/>
           <a:p>
             <a:pPr indent="0" marL="0">
               <a:buNone/>
             </a:pPr>
             <a:r>
-              <a:rPr lang="en-US" sz="1300" b="1" dirty="0">
-                <a:solidFill>
-                  <a:srgbClr val="1B2A4A"/>
+              <a:rPr lang="en-US" sz="1400" b="1" dirty="0">
+                <a:solidFill>
+                  <a:srgbClr val="2A9D8F"/>
                 </a:solidFill>
                 <a:latin typeface="Georgia" pitchFamily="34" charset="0"/>
                 <a:ea typeface="Georgia" pitchFamily="34" charset="-122"/>
                 <a:cs typeface="Georgia" pitchFamily="34" charset="-120"/>
               </a:rPr>
-              <a:t>Mixture</a:t>
-            </a:r>
-            <a:endParaRPr lang="en-US" sz="1300" dirty="0"/>
-          </a:p>
-        </p:txBody>
-      </p:sp>
-      <p:sp>
-        <p:nvSpPr>
-          <p:cNvPr id="9" name="Text 7"/>
-          <p:cNvSpPr/>
-          <p:nvPr/>
-        </p:nvSpPr>
-        <p:spPr>
-          <a:xfrm>
-            <a:off x="2377440" y="1051560"/>
-            <a:ext cx="1920240" cy="658368"/>
+              <a:t>Solution</a:t>
+            </a:r>
+            <a:endParaRPr lang="en-US" sz="1400" dirty="0"/>
+          </a:p>
+        </p:txBody>
+      </p:sp>
+      <p:sp>
+        <p:nvSpPr>
+          <p:cNvPr id="10" name="Text 8"/>
+          <p:cNvSpPr/>
+          <p:nvPr/>
+        </p:nvSpPr>
+        <p:spPr>
+          <a:xfrm>
+            <a:off x="4160520" y="1645920"/>
+            <a:ext cx="2926080" cy="457200"/>
           </a:xfrm>
           <a:prstGeom prst="rect">
             <a:avLst/>
@@ -1855,10 +1897,13 @@
           <a:ln/>
         </p:spPr>
         <p:txBody>
-          <a:bodyPr wrap="square" lIns="0" tIns="0" rIns="0" bIns="0" rtlCol="0" anchor="ctr"/>
+          <a:bodyPr wrap="square" rtlCol="0" anchor="ctr"/>
           <a:lstStyle/>
           <a:p>
             <a:pPr indent="0" marL="0">
+              <a:lnSpc>
+                <a:spcPct val="130000"/>
+              </a:lnSpc>
               <a:buNone/>
             </a:pPr>
             <a:r>
@@ -1866,11 +1911,11 @@
                 <a:solidFill>
                   <a:srgbClr val="6B6660"/>
                 </a:solidFill>
-                <a:latin typeface="Calibri" pitchFamily="34" charset="0"/>
-                <a:ea typeface="Calibri" pitchFamily="34" charset="-122"/>
-                <a:cs typeface="Calibri" pitchFamily="34" charset="-120"/>
-              </a:rPr>
-              <a:t>Two or more substances not chemically joined</a:t>
+                <a:latin typeface="Arial" pitchFamily="34" charset="0"/>
+                <a:ea typeface="Arial" pitchFamily="34" charset="-122"/>
+                <a:cs typeface="Arial" pitchFamily="34" charset="-120"/>
+              </a:rPr>
+              <a:t>A mixture where a solid dissolves in a liquid.</a:t>
             </a:r>
             <a:endParaRPr lang="en-US" sz="1100" dirty="0"/>
           </a:p>
@@ -1878,49 +1923,29 @@
       </p:sp>
       <p:sp>
         <p:nvSpPr>
-          <p:cNvPr id="10" name="Shape 8"/>
-          <p:cNvSpPr/>
-          <p:nvPr/>
-        </p:nvSpPr>
-        <p:spPr>
-          <a:xfrm>
-            <a:off x="4754880" y="1051560"/>
-            <a:ext cx="3657600" cy="658368"/>
-          </a:xfrm>
-          <a:prstGeom prst="rect">
-            <a:avLst/>
+          <p:cNvPr id="11" name="Shape 9"/>
+          <p:cNvSpPr/>
+          <p:nvPr/>
+        </p:nvSpPr>
+        <p:spPr>
+          <a:xfrm>
+            <a:off x="7498080" y="1234440"/>
+            <a:ext cx="3200400" cy="914400"/>
+          </a:xfrm>
+          <a:prstGeom prst="roundRect">
+            <a:avLst>
+              <a:gd name="adj" fmla="val 10000"/>
+            </a:avLst>
           </a:prstGeom>
           <a:solidFill>
             <a:srgbClr val="FFFFFF"/>
           </a:solidFill>
-          <a:ln/>
-          <a:effectLst>
-            <a:outerShdw sx="100000" sy="100000" kx="0" ky="0" algn="bl" rotWithShape="0" blurRad="50800" dist="25400" dir="8100000">
-              <a:srgbClr val="000000">
-                <a:alpha val="10000"/>
-              </a:srgbClr>
-            </a:outerShdw>
-          </a:effectLst>
-        </p:spPr>
-      </p:sp>
-      <p:sp>
-        <p:nvSpPr>
-          <p:cNvPr id="11" name="Shape 9"/>
-          <p:cNvSpPr/>
-          <p:nvPr/>
-        </p:nvSpPr>
-        <p:spPr>
-          <a:xfrm>
-            <a:off x="4754880" y="1051560"/>
-            <a:ext cx="54864" cy="658368"/>
-          </a:xfrm>
-          <a:prstGeom prst="rect">
-            <a:avLst/>
-          </a:prstGeom>
-          <a:solidFill>
-            <a:srgbClr val="2A9D8F"/>
-          </a:solidFill>
-          <a:ln/>
+          <a:ln w="9525">
+            <a:solidFill>
+              <a:srgbClr val="E5E2DC"/>
+            </a:solidFill>
+            <a:prstDash val="solid"/>
+          </a:ln>
         </p:spPr>
       </p:sp>
       <p:sp>
@@ -1931,8 +1956,8 @@
         </p:nvSpPr>
         <p:spPr>
           <a:xfrm>
-            <a:off x="4937760" y="1051560"/>
-            <a:ext cx="1463040" cy="658368"/>
+            <a:off x="7635240" y="1307592"/>
+            <a:ext cx="2926080" cy="320040"/>
           </a:xfrm>
           <a:prstGeom prst="rect">
             <a:avLst/>
@@ -1941,24 +1966,24 @@
           <a:ln/>
         </p:spPr>
         <p:txBody>
-          <a:bodyPr wrap="square" lIns="0" tIns="0" rIns="0" bIns="0" rtlCol="0" anchor="ctr"/>
+          <a:bodyPr wrap="square" rtlCol="0" anchor="ctr"/>
           <a:lstStyle/>
           <a:p>
             <a:pPr indent="0" marL="0">
               <a:buNone/>
             </a:pPr>
             <a:r>
-              <a:rPr lang="en-US" sz="1300" b="1" dirty="0">
-                <a:solidFill>
-                  <a:srgbClr val="1B2A4A"/>
+              <a:rPr lang="en-US" sz="1400" b="1" dirty="0">
+                <a:solidFill>
+                  <a:srgbClr val="2A9D8F"/>
                 </a:solidFill>
                 <a:latin typeface="Georgia" pitchFamily="34" charset="0"/>
                 <a:ea typeface="Georgia" pitchFamily="34" charset="-122"/>
                 <a:cs typeface="Georgia" pitchFamily="34" charset="-120"/>
               </a:rPr>
-              <a:t>Solution</a:t>
-            </a:r>
-            <a:endParaRPr lang="en-US" sz="1300" dirty="0"/>
+              <a:t>Solute</a:t>
+            </a:r>
+            <a:endParaRPr lang="en-US" sz="1400" dirty="0"/>
           </a:p>
         </p:txBody>
       </p:sp>
@@ -1970,8 +1995,8 @@
         </p:nvSpPr>
         <p:spPr>
           <a:xfrm>
-            <a:off x="6400800" y="1051560"/>
-            <a:ext cx="1920240" cy="658368"/>
+            <a:off x="7635240" y="1645920"/>
+            <a:ext cx="2926080" cy="457200"/>
           </a:xfrm>
           <a:prstGeom prst="rect">
             <a:avLst/>
@@ -1980,10 +2005,13 @@
           <a:ln/>
         </p:spPr>
         <p:txBody>
-          <a:bodyPr wrap="square" lIns="0" tIns="0" rIns="0" bIns="0" rtlCol="0" anchor="ctr"/>
+          <a:bodyPr wrap="square" rtlCol="0" anchor="ctr"/>
           <a:lstStyle/>
           <a:p>
             <a:pPr indent="0" marL="0">
+              <a:lnSpc>
+                <a:spcPct val="130000"/>
+              </a:lnSpc>
               <a:buNone/>
             </a:pPr>
             <a:r>
@@ -1991,11 +2019,11 @@
                 <a:solidFill>
                   <a:srgbClr val="6B6660"/>
                 </a:solidFill>
-                <a:latin typeface="Calibri" pitchFamily="34" charset="0"/>
-                <a:ea typeface="Calibri" pitchFamily="34" charset="-122"/>
-                <a:cs typeface="Calibri" pitchFamily="34" charset="-120"/>
-              </a:rPr>
-              <a:t>A mixture where a solute dissolves in a solvent</a:t>
+                <a:latin typeface="Arial" pitchFamily="34" charset="0"/>
+                <a:ea typeface="Arial" pitchFamily="34" charset="-122"/>
+                <a:cs typeface="Arial" pitchFamily="34" charset="-120"/>
+              </a:rPr>
+              <a:t>The substance that dissolves (e.g. sugar).</a:t>
             </a:r>
             <a:endParaRPr lang="en-US" sz="1100" dirty="0"/>
           </a:p>
@@ -2009,55 +2037,35 @@
         </p:nvSpPr>
         <p:spPr>
           <a:xfrm>
-            <a:off x="731520" y="1819656"/>
-            <a:ext cx="3657600" cy="658368"/>
-          </a:xfrm>
-          <a:prstGeom prst="rect">
-            <a:avLst/>
+            <a:off x="548640" y="2286000"/>
+            <a:ext cx="3200400" cy="914400"/>
+          </a:xfrm>
+          <a:prstGeom prst="roundRect">
+            <a:avLst>
+              <a:gd name="adj" fmla="val 10000"/>
+            </a:avLst>
           </a:prstGeom>
           <a:solidFill>
             <a:srgbClr val="FFFFFF"/>
           </a:solidFill>
-          <a:ln/>
-          <a:effectLst>
-            <a:outerShdw sx="100000" sy="100000" kx="0" ky="0" algn="bl" rotWithShape="0" blurRad="50800" dist="25400" dir="8100000">
-              <a:srgbClr val="000000">
-                <a:alpha val="10000"/>
-              </a:srgbClr>
-            </a:outerShdw>
-          </a:effectLst>
-        </p:spPr>
-      </p:sp>
-      <p:sp>
-        <p:nvSpPr>
-          <p:cNvPr id="15" name="Shape 13"/>
-          <p:cNvSpPr/>
-          <p:nvPr/>
-        </p:nvSpPr>
-        <p:spPr>
-          <a:xfrm>
-            <a:off x="731520" y="1819656"/>
-            <a:ext cx="54864" cy="658368"/>
-          </a:xfrm>
-          <a:prstGeom prst="rect">
-            <a:avLst/>
-          </a:prstGeom>
-          <a:solidFill>
-            <a:srgbClr val="2A9D8F"/>
-          </a:solidFill>
-          <a:ln/>
-        </p:spPr>
-      </p:sp>
-      <p:sp>
-        <p:nvSpPr>
-          <p:cNvPr id="16" name="Text 14"/>
-          <p:cNvSpPr/>
-          <p:nvPr/>
-        </p:nvSpPr>
-        <p:spPr>
-          <a:xfrm>
-            <a:off x="914400" y="1819656"/>
-            <a:ext cx="1463040" cy="658368"/>
+          <a:ln w="9525">
+            <a:solidFill>
+              <a:srgbClr val="E5E2DC"/>
+            </a:solidFill>
+            <a:prstDash val="solid"/>
+          </a:ln>
+        </p:spPr>
+      </p:sp>
+      <p:sp>
+        <p:nvSpPr>
+          <p:cNvPr id="15" name="Text 13"/>
+          <p:cNvSpPr/>
+          <p:nvPr/>
+        </p:nvSpPr>
+        <p:spPr>
+          <a:xfrm>
+            <a:off x="685800" y="2359152"/>
+            <a:ext cx="2926080" cy="320040"/>
           </a:xfrm>
           <a:prstGeom prst="rect">
             <a:avLst/>
@@ -2066,37 +2074,37 @@
           <a:ln/>
         </p:spPr>
         <p:txBody>
-          <a:bodyPr wrap="square" lIns="0" tIns="0" rIns="0" bIns="0" rtlCol="0" anchor="ctr"/>
+          <a:bodyPr wrap="square" rtlCol="0" anchor="ctr"/>
           <a:lstStyle/>
           <a:p>
             <a:pPr indent="0" marL="0">
               <a:buNone/>
             </a:pPr>
             <a:r>
-              <a:rPr lang="en-US" sz="1300" b="1" dirty="0">
-                <a:solidFill>
-                  <a:srgbClr val="1B2A4A"/>
+              <a:rPr lang="en-US" sz="1400" b="1" dirty="0">
+                <a:solidFill>
+                  <a:srgbClr val="2A9D8F"/>
                 </a:solidFill>
                 <a:latin typeface="Georgia" pitchFamily="34" charset="0"/>
                 <a:ea typeface="Georgia" pitchFamily="34" charset="-122"/>
                 <a:cs typeface="Georgia" pitchFamily="34" charset="-120"/>
               </a:rPr>
-              <a:t>Solute</a:t>
-            </a:r>
-            <a:endParaRPr lang="en-US" sz="1300" dirty="0"/>
-          </a:p>
-        </p:txBody>
-      </p:sp>
-      <p:sp>
-        <p:nvSpPr>
-          <p:cNvPr id="17" name="Text 15"/>
-          <p:cNvSpPr/>
-          <p:nvPr/>
-        </p:nvSpPr>
-        <p:spPr>
-          <a:xfrm>
-            <a:off x="2377440" y="1819656"/>
-            <a:ext cx="1920240" cy="658368"/>
+              <a:t>Solvent</a:t>
+            </a:r>
+            <a:endParaRPr lang="en-US" sz="1400" dirty="0"/>
+          </a:p>
+        </p:txBody>
+      </p:sp>
+      <p:sp>
+        <p:nvSpPr>
+          <p:cNvPr id="16" name="Text 14"/>
+          <p:cNvSpPr/>
+          <p:nvPr/>
+        </p:nvSpPr>
+        <p:spPr>
+          <a:xfrm>
+            <a:off x="685800" y="2697480"/>
+            <a:ext cx="2926080" cy="457200"/>
           </a:xfrm>
           <a:prstGeom prst="rect">
             <a:avLst/>
@@ -2105,10 +2113,13 @@
           <a:ln/>
         </p:spPr>
         <p:txBody>
-          <a:bodyPr wrap="square" lIns="0" tIns="0" rIns="0" bIns="0" rtlCol="0" anchor="ctr"/>
+          <a:bodyPr wrap="square" rtlCol="0" anchor="ctr"/>
           <a:lstStyle/>
           <a:p>
             <a:pPr indent="0" marL="0">
+              <a:lnSpc>
+                <a:spcPct val="130000"/>
+              </a:lnSpc>
               <a:buNone/>
             </a:pPr>
             <a:r>
@@ -2116,11 +2127,11 @@
                 <a:solidFill>
                   <a:srgbClr val="6B6660"/>
                 </a:solidFill>
-                <a:latin typeface="Calibri" pitchFamily="34" charset="0"/>
-                <a:ea typeface="Calibri" pitchFamily="34" charset="-122"/>
-                <a:cs typeface="Calibri" pitchFamily="34" charset="-120"/>
-              </a:rPr>
-              <a:t>The substance that dissolves</a:t>
+                <a:latin typeface="Arial" pitchFamily="34" charset="0"/>
+                <a:ea typeface="Arial" pitchFamily="34" charset="-122"/>
+                <a:cs typeface="Arial" pitchFamily="34" charset="-120"/>
+              </a:rPr>
+              <a:t>The liquid that does the dissolving (e.g. water).</a:t>
             </a:r>
             <a:endParaRPr lang="en-US" sz="1100" dirty="0"/>
           </a:p>
@@ -2128,61 +2139,41 @@
       </p:sp>
       <p:sp>
         <p:nvSpPr>
-          <p:cNvPr id="18" name="Shape 16"/>
-          <p:cNvSpPr/>
-          <p:nvPr/>
-        </p:nvSpPr>
-        <p:spPr>
-          <a:xfrm>
-            <a:off x="4754880" y="1819656"/>
-            <a:ext cx="3657600" cy="658368"/>
-          </a:xfrm>
-          <a:prstGeom prst="rect">
-            <a:avLst/>
+          <p:cNvPr id="17" name="Shape 15"/>
+          <p:cNvSpPr/>
+          <p:nvPr/>
+        </p:nvSpPr>
+        <p:spPr>
+          <a:xfrm>
+            <a:off x="4023360" y="2286000"/>
+            <a:ext cx="3200400" cy="914400"/>
+          </a:xfrm>
+          <a:prstGeom prst="roundRect">
+            <a:avLst>
+              <a:gd name="adj" fmla="val 10000"/>
+            </a:avLst>
           </a:prstGeom>
           <a:solidFill>
             <a:srgbClr val="FFFFFF"/>
           </a:solidFill>
-          <a:ln/>
-          <a:effectLst>
-            <a:outerShdw sx="100000" sy="100000" kx="0" ky="0" algn="bl" rotWithShape="0" blurRad="50800" dist="25400" dir="8100000">
-              <a:srgbClr val="000000">
-                <a:alpha val="10000"/>
-              </a:srgbClr>
-            </a:outerShdw>
-          </a:effectLst>
-        </p:spPr>
-      </p:sp>
-      <p:sp>
-        <p:nvSpPr>
-          <p:cNvPr id="19" name="Shape 17"/>
-          <p:cNvSpPr/>
-          <p:nvPr/>
-        </p:nvSpPr>
-        <p:spPr>
-          <a:xfrm>
-            <a:off x="4754880" y="1819656"/>
-            <a:ext cx="54864" cy="658368"/>
-          </a:xfrm>
-          <a:prstGeom prst="rect">
-            <a:avLst/>
-          </a:prstGeom>
-          <a:solidFill>
-            <a:srgbClr val="2A9D8F"/>
-          </a:solidFill>
-          <a:ln/>
-        </p:spPr>
-      </p:sp>
-      <p:sp>
-        <p:nvSpPr>
-          <p:cNvPr id="20" name="Text 18"/>
-          <p:cNvSpPr/>
-          <p:nvPr/>
-        </p:nvSpPr>
-        <p:spPr>
-          <a:xfrm>
-            <a:off x="4937760" y="1819656"/>
-            <a:ext cx="1463040" cy="658368"/>
+          <a:ln w="9525">
+            <a:solidFill>
+              <a:srgbClr val="E5E2DC"/>
+            </a:solidFill>
+            <a:prstDash val="solid"/>
+          </a:ln>
+        </p:spPr>
+      </p:sp>
+      <p:sp>
+        <p:nvSpPr>
+          <p:cNvPr id="18" name="Text 16"/>
+          <p:cNvSpPr/>
+          <p:nvPr/>
+        </p:nvSpPr>
+        <p:spPr>
+          <a:xfrm>
+            <a:off x="4160520" y="2359152"/>
+            <a:ext cx="2926080" cy="320040"/>
           </a:xfrm>
           <a:prstGeom prst="rect">
             <a:avLst/>
@@ -2191,37 +2182,37 @@
           <a:ln/>
         </p:spPr>
         <p:txBody>
-          <a:bodyPr wrap="square" lIns="0" tIns="0" rIns="0" bIns="0" rtlCol="0" anchor="ctr"/>
+          <a:bodyPr wrap="square" rtlCol="0" anchor="ctr"/>
           <a:lstStyle/>
           <a:p>
             <a:pPr indent="0" marL="0">
               <a:buNone/>
             </a:pPr>
             <a:r>
-              <a:rPr lang="en-US" sz="1300" b="1" dirty="0">
-                <a:solidFill>
-                  <a:srgbClr val="1B2A4A"/>
+              <a:rPr lang="en-US" sz="1400" b="1" dirty="0">
+                <a:solidFill>
+                  <a:srgbClr val="2A9D8F"/>
                 </a:solidFill>
                 <a:latin typeface="Georgia" pitchFamily="34" charset="0"/>
                 <a:ea typeface="Georgia" pitchFamily="34" charset="-122"/>
                 <a:cs typeface="Georgia" pitchFamily="34" charset="-120"/>
               </a:rPr>
-              <a:t>Solvent</a:t>
-            </a:r>
-            <a:endParaRPr lang="en-US" sz="1300" dirty="0"/>
-          </a:p>
-        </p:txBody>
-      </p:sp>
-      <p:sp>
-        <p:nvSpPr>
-          <p:cNvPr id="21" name="Text 19"/>
-          <p:cNvSpPr/>
-          <p:nvPr/>
-        </p:nvSpPr>
-        <p:spPr>
-          <a:xfrm>
-            <a:off x="6400800" y="1819656"/>
-            <a:ext cx="1920240" cy="658368"/>
+              <a:t>Soluble</a:t>
+            </a:r>
+            <a:endParaRPr lang="en-US" sz="1400" dirty="0"/>
+          </a:p>
+        </p:txBody>
+      </p:sp>
+      <p:sp>
+        <p:nvSpPr>
+          <p:cNvPr id="19" name="Text 17"/>
+          <p:cNvSpPr/>
+          <p:nvPr/>
+        </p:nvSpPr>
+        <p:spPr>
+          <a:xfrm>
+            <a:off x="4160520" y="2697480"/>
+            <a:ext cx="2926080" cy="457200"/>
           </a:xfrm>
           <a:prstGeom prst="rect">
             <a:avLst/>
@@ -2230,10 +2221,13 @@
           <a:ln/>
         </p:spPr>
         <p:txBody>
-          <a:bodyPr wrap="square" lIns="0" tIns="0" rIns="0" bIns="0" rtlCol="0" anchor="ctr"/>
+          <a:bodyPr wrap="square" rtlCol="0" anchor="ctr"/>
           <a:lstStyle/>
           <a:p>
             <a:pPr indent="0" marL="0">
+              <a:lnSpc>
+                <a:spcPct val="130000"/>
+              </a:lnSpc>
               <a:buNone/>
             </a:pPr>
             <a:r>
@@ -2241,11 +2235,11 @@
                 <a:solidFill>
                   <a:srgbClr val="6B6660"/>
                 </a:solidFill>
-                <a:latin typeface="Calibri" pitchFamily="34" charset="0"/>
-                <a:ea typeface="Calibri" pitchFamily="34" charset="-122"/>
-                <a:cs typeface="Calibri" pitchFamily="34" charset="-120"/>
-              </a:rPr>
-              <a:t>The liquid that does the dissolving</a:t>
+                <a:latin typeface="Arial" pitchFamily="34" charset="0"/>
+                <a:ea typeface="Arial" pitchFamily="34" charset="-122"/>
+                <a:cs typeface="Arial" pitchFamily="34" charset="-120"/>
+              </a:rPr>
+              <a:t>A substance that CAN dissolve in a solvent.</a:t>
             </a:r>
             <a:endParaRPr lang="en-US" sz="1100" dirty="0"/>
           </a:p>
@@ -2253,61 +2247,41 @@
       </p:sp>
       <p:sp>
         <p:nvSpPr>
-          <p:cNvPr id="22" name="Shape 20"/>
-          <p:cNvSpPr/>
-          <p:nvPr/>
-        </p:nvSpPr>
-        <p:spPr>
-          <a:xfrm>
-            <a:off x="731520" y="2587752"/>
-            <a:ext cx="3657600" cy="658368"/>
-          </a:xfrm>
-          <a:prstGeom prst="rect">
-            <a:avLst/>
+          <p:cNvPr id="20" name="Shape 18"/>
+          <p:cNvSpPr/>
+          <p:nvPr/>
+        </p:nvSpPr>
+        <p:spPr>
+          <a:xfrm>
+            <a:off x="7498080" y="2286000"/>
+            <a:ext cx="3200400" cy="914400"/>
+          </a:xfrm>
+          <a:prstGeom prst="roundRect">
+            <a:avLst>
+              <a:gd name="adj" fmla="val 10000"/>
+            </a:avLst>
           </a:prstGeom>
           <a:solidFill>
             <a:srgbClr val="FFFFFF"/>
           </a:solidFill>
-          <a:ln/>
-          <a:effectLst>
-            <a:outerShdw sx="100000" sy="100000" kx="0" ky="0" algn="bl" rotWithShape="0" blurRad="50800" dist="25400" dir="8100000">
-              <a:srgbClr val="000000">
-                <a:alpha val="10000"/>
-              </a:srgbClr>
-            </a:outerShdw>
-          </a:effectLst>
-        </p:spPr>
-      </p:sp>
-      <p:sp>
-        <p:nvSpPr>
-          <p:cNvPr id="23" name="Shape 21"/>
-          <p:cNvSpPr/>
-          <p:nvPr/>
-        </p:nvSpPr>
-        <p:spPr>
-          <a:xfrm>
-            <a:off x="731520" y="2587752"/>
-            <a:ext cx="54864" cy="658368"/>
-          </a:xfrm>
-          <a:prstGeom prst="rect">
-            <a:avLst/>
-          </a:prstGeom>
-          <a:solidFill>
-            <a:srgbClr val="2A9D8F"/>
-          </a:solidFill>
-          <a:ln/>
-        </p:spPr>
-      </p:sp>
-      <p:sp>
-        <p:nvSpPr>
-          <p:cNvPr id="24" name="Text 22"/>
-          <p:cNvSpPr/>
-          <p:nvPr/>
-        </p:nvSpPr>
-        <p:spPr>
-          <a:xfrm>
-            <a:off x="914400" y="2587752"/>
-            <a:ext cx="1463040" cy="658368"/>
+          <a:ln w="9525">
+            <a:solidFill>
+              <a:srgbClr val="E5E2DC"/>
+            </a:solidFill>
+            <a:prstDash val="solid"/>
+          </a:ln>
+        </p:spPr>
+      </p:sp>
+      <p:sp>
+        <p:nvSpPr>
+          <p:cNvPr id="21" name="Text 19"/>
+          <p:cNvSpPr/>
+          <p:nvPr/>
+        </p:nvSpPr>
+        <p:spPr>
+          <a:xfrm>
+            <a:off x="7635240" y="2359152"/>
+            <a:ext cx="2926080" cy="320040"/>
           </a:xfrm>
           <a:prstGeom prst="rect">
             <a:avLst/>
@@ -2316,37 +2290,37 @@
           <a:ln/>
         </p:spPr>
         <p:txBody>
-          <a:bodyPr wrap="square" lIns="0" tIns="0" rIns="0" bIns="0" rtlCol="0" anchor="ctr"/>
+          <a:bodyPr wrap="square" rtlCol="0" anchor="ctr"/>
           <a:lstStyle/>
           <a:p>
             <a:pPr indent="0" marL="0">
               <a:buNone/>
             </a:pPr>
             <a:r>
-              <a:rPr lang="en-US" sz="1300" b="1" dirty="0">
-                <a:solidFill>
-                  <a:srgbClr val="1B2A4A"/>
+              <a:rPr lang="en-US" sz="1400" b="1" dirty="0">
+                <a:solidFill>
+                  <a:srgbClr val="2A9D8F"/>
                 </a:solidFill>
                 <a:latin typeface="Georgia" pitchFamily="34" charset="0"/>
                 <a:ea typeface="Georgia" pitchFamily="34" charset="-122"/>
                 <a:cs typeface="Georgia" pitchFamily="34" charset="-120"/>
               </a:rPr>
-              <a:t>Soluble</a:t>
-            </a:r>
-            <a:endParaRPr lang="en-US" sz="1300" dirty="0"/>
-          </a:p>
-        </p:txBody>
-      </p:sp>
-      <p:sp>
-        <p:nvSpPr>
-          <p:cNvPr id="25" name="Text 23"/>
-          <p:cNvSpPr/>
-          <p:nvPr/>
-        </p:nvSpPr>
-        <p:spPr>
-          <a:xfrm>
-            <a:off x="2377440" y="2587752"/>
-            <a:ext cx="1920240" cy="658368"/>
+              <a:t>Insoluble</a:t>
+            </a:r>
+            <a:endParaRPr lang="en-US" sz="1400" dirty="0"/>
+          </a:p>
+        </p:txBody>
+      </p:sp>
+      <p:sp>
+        <p:nvSpPr>
+          <p:cNvPr id="22" name="Text 20"/>
+          <p:cNvSpPr/>
+          <p:nvPr/>
+        </p:nvSpPr>
+        <p:spPr>
+          <a:xfrm>
+            <a:off x="7635240" y="2697480"/>
+            <a:ext cx="2926080" cy="457200"/>
           </a:xfrm>
           <a:prstGeom prst="rect">
             <a:avLst/>
@@ -2355,10 +2329,13 @@
           <a:ln/>
         </p:spPr>
         <p:txBody>
-          <a:bodyPr wrap="square" lIns="0" tIns="0" rIns="0" bIns="0" rtlCol="0" anchor="ctr"/>
+          <a:bodyPr wrap="square" rtlCol="0" anchor="ctr"/>
           <a:lstStyle/>
           <a:p>
             <a:pPr indent="0" marL="0">
+              <a:lnSpc>
+                <a:spcPct val="130000"/>
+              </a:lnSpc>
               <a:buNone/>
             </a:pPr>
             <a:r>
@@ -2366,386 +2343,11 @@
                 <a:solidFill>
                   <a:srgbClr val="6B6660"/>
                 </a:solidFill>
-                <a:latin typeface="Calibri" pitchFamily="34" charset="0"/>
-                <a:ea typeface="Calibri" pitchFamily="34" charset="-122"/>
-                <a:cs typeface="Calibri" pitchFamily="34" charset="-120"/>
-              </a:rPr>
-              <a:t>Can dissolve in a solvent</a:t>
-            </a:r>
-            <a:endParaRPr lang="en-US" sz="1100" dirty="0"/>
-          </a:p>
-        </p:txBody>
-      </p:sp>
-      <p:sp>
-        <p:nvSpPr>
-          <p:cNvPr id="26" name="Shape 24"/>
-          <p:cNvSpPr/>
-          <p:nvPr/>
-        </p:nvSpPr>
-        <p:spPr>
-          <a:xfrm>
-            <a:off x="4754880" y="2587752"/>
-            <a:ext cx="3657600" cy="658368"/>
-          </a:xfrm>
-          <a:prstGeom prst="rect">
-            <a:avLst/>
-          </a:prstGeom>
-          <a:solidFill>
-            <a:srgbClr val="FFFFFF"/>
-          </a:solidFill>
-          <a:ln/>
-          <a:effectLst>
-            <a:outerShdw sx="100000" sy="100000" kx="0" ky="0" algn="bl" rotWithShape="0" blurRad="50800" dist="25400" dir="8100000">
-              <a:srgbClr val="000000">
-                <a:alpha val="10000"/>
-              </a:srgbClr>
-            </a:outerShdw>
-          </a:effectLst>
-        </p:spPr>
-      </p:sp>
-      <p:sp>
-        <p:nvSpPr>
-          <p:cNvPr id="27" name="Shape 25"/>
-          <p:cNvSpPr/>
-          <p:nvPr/>
-        </p:nvSpPr>
-        <p:spPr>
-          <a:xfrm>
-            <a:off x="4754880" y="2587752"/>
-            <a:ext cx="54864" cy="658368"/>
-          </a:xfrm>
-          <a:prstGeom prst="rect">
-            <a:avLst/>
-          </a:prstGeom>
-          <a:solidFill>
-            <a:srgbClr val="2A9D8F"/>
-          </a:solidFill>
-          <a:ln/>
-        </p:spPr>
-      </p:sp>
-      <p:sp>
-        <p:nvSpPr>
-          <p:cNvPr id="28" name="Text 26"/>
-          <p:cNvSpPr/>
-          <p:nvPr/>
-        </p:nvSpPr>
-        <p:spPr>
-          <a:xfrm>
-            <a:off x="4937760" y="2587752"/>
-            <a:ext cx="1463040" cy="658368"/>
-          </a:xfrm>
-          <a:prstGeom prst="rect">
-            <a:avLst/>
-          </a:prstGeom>
-          <a:noFill/>
-          <a:ln/>
-        </p:spPr>
-        <p:txBody>
-          <a:bodyPr wrap="square" lIns="0" tIns="0" rIns="0" bIns="0" rtlCol="0" anchor="ctr"/>
-          <a:lstStyle/>
-          <a:p>
-            <a:pPr indent="0" marL="0">
-              <a:buNone/>
-            </a:pPr>
-            <a:r>
-              <a:rPr lang="en-US" sz="1300" b="1" dirty="0">
-                <a:solidFill>
-                  <a:srgbClr val="1B2A4A"/>
-                </a:solidFill>
-                <a:latin typeface="Georgia" pitchFamily="34" charset="0"/>
-                <a:ea typeface="Georgia" pitchFamily="34" charset="-122"/>
-                <a:cs typeface="Georgia" pitchFamily="34" charset="-120"/>
-              </a:rPr>
-              <a:t>Insoluble</a:t>
-            </a:r>
-            <a:endParaRPr lang="en-US" sz="1300" dirty="0"/>
-          </a:p>
-        </p:txBody>
-      </p:sp>
-      <p:sp>
-        <p:nvSpPr>
-          <p:cNvPr id="29" name="Text 27"/>
-          <p:cNvSpPr/>
-          <p:nvPr/>
-        </p:nvSpPr>
-        <p:spPr>
-          <a:xfrm>
-            <a:off x="6400800" y="2587752"/>
-            <a:ext cx="1920240" cy="658368"/>
-          </a:xfrm>
-          <a:prstGeom prst="rect">
-            <a:avLst/>
-          </a:prstGeom>
-          <a:noFill/>
-          <a:ln/>
-        </p:spPr>
-        <p:txBody>
-          <a:bodyPr wrap="square" lIns="0" tIns="0" rIns="0" bIns="0" rtlCol="0" anchor="ctr"/>
-          <a:lstStyle/>
-          <a:p>
-            <a:pPr indent="0" marL="0">
-              <a:buNone/>
-            </a:pPr>
-            <a:r>
-              <a:rPr lang="en-US" sz="1100" dirty="0">
-                <a:solidFill>
-                  <a:srgbClr val="6B6660"/>
-                </a:solidFill>
-                <a:latin typeface="Calibri" pitchFamily="34" charset="0"/>
-                <a:ea typeface="Calibri" pitchFamily="34" charset="-122"/>
-                <a:cs typeface="Calibri" pitchFamily="34" charset="-120"/>
-              </a:rPr>
-              <a:t>Cannot dissolve</a:t>
-            </a:r>
-            <a:endParaRPr lang="en-US" sz="1100" dirty="0"/>
-          </a:p>
-        </p:txBody>
-      </p:sp>
-      <p:sp>
-        <p:nvSpPr>
-          <p:cNvPr id="30" name="Shape 28"/>
-          <p:cNvSpPr/>
-          <p:nvPr/>
-        </p:nvSpPr>
-        <p:spPr>
-          <a:xfrm>
-            <a:off x="731520" y="3355848"/>
-            <a:ext cx="3657600" cy="658368"/>
-          </a:xfrm>
-          <a:prstGeom prst="rect">
-            <a:avLst/>
-          </a:prstGeom>
-          <a:solidFill>
-            <a:srgbClr val="FFFFFF"/>
-          </a:solidFill>
-          <a:ln/>
-          <a:effectLst>
-            <a:outerShdw sx="100000" sy="100000" kx="0" ky="0" algn="bl" rotWithShape="0" blurRad="50800" dist="25400" dir="8100000">
-              <a:srgbClr val="000000">
-                <a:alpha val="10000"/>
-              </a:srgbClr>
-            </a:outerShdw>
-          </a:effectLst>
-        </p:spPr>
-      </p:sp>
-      <p:sp>
-        <p:nvSpPr>
-          <p:cNvPr id="31" name="Shape 29"/>
-          <p:cNvSpPr/>
-          <p:nvPr/>
-        </p:nvSpPr>
-        <p:spPr>
-          <a:xfrm>
-            <a:off x="731520" y="3355848"/>
-            <a:ext cx="54864" cy="658368"/>
-          </a:xfrm>
-          <a:prstGeom prst="rect">
-            <a:avLst/>
-          </a:prstGeom>
-          <a:solidFill>
-            <a:srgbClr val="2A9D8F"/>
-          </a:solidFill>
-          <a:ln/>
-        </p:spPr>
-      </p:sp>
-      <p:sp>
-        <p:nvSpPr>
-          <p:cNvPr id="32" name="Text 30"/>
-          <p:cNvSpPr/>
-          <p:nvPr/>
-        </p:nvSpPr>
-        <p:spPr>
-          <a:xfrm>
-            <a:off x="914400" y="3355848"/>
-            <a:ext cx="1463040" cy="658368"/>
-          </a:xfrm>
-          <a:prstGeom prst="rect">
-            <a:avLst/>
-          </a:prstGeom>
-          <a:noFill/>
-          <a:ln/>
-        </p:spPr>
-        <p:txBody>
-          <a:bodyPr wrap="square" lIns="0" tIns="0" rIns="0" bIns="0" rtlCol="0" anchor="ctr"/>
-          <a:lstStyle/>
-          <a:p>
-            <a:pPr indent="0" marL="0">
-              <a:buNone/>
-            </a:pPr>
-            <a:r>
-              <a:rPr lang="en-US" sz="1300" b="1" dirty="0">
-                <a:solidFill>
-                  <a:srgbClr val="1B2A4A"/>
-                </a:solidFill>
-                <a:latin typeface="Georgia" pitchFamily="34" charset="0"/>
-                <a:ea typeface="Georgia" pitchFamily="34" charset="-122"/>
-                <a:cs typeface="Georgia" pitchFamily="34" charset="-120"/>
-              </a:rPr>
-              <a:t>Saturated</a:t>
-            </a:r>
-            <a:endParaRPr lang="en-US" sz="1300" dirty="0"/>
-          </a:p>
-        </p:txBody>
-      </p:sp>
-      <p:sp>
-        <p:nvSpPr>
-          <p:cNvPr id="33" name="Text 31"/>
-          <p:cNvSpPr/>
-          <p:nvPr/>
-        </p:nvSpPr>
-        <p:spPr>
-          <a:xfrm>
-            <a:off x="2377440" y="3355848"/>
-            <a:ext cx="1920240" cy="658368"/>
-          </a:xfrm>
-          <a:prstGeom prst="rect">
-            <a:avLst/>
-          </a:prstGeom>
-          <a:noFill/>
-          <a:ln/>
-        </p:spPr>
-        <p:txBody>
-          <a:bodyPr wrap="square" lIns="0" tIns="0" rIns="0" bIns="0" rtlCol="0" anchor="ctr"/>
-          <a:lstStyle/>
-          <a:p>
-            <a:pPr indent="0" marL="0">
-              <a:buNone/>
-            </a:pPr>
-            <a:r>
-              <a:rPr lang="en-US" sz="1100" dirty="0">
-                <a:solidFill>
-                  <a:srgbClr val="6B6660"/>
-                </a:solidFill>
-                <a:latin typeface="Calibri" pitchFamily="34" charset="0"/>
-                <a:ea typeface="Calibri" pitchFamily="34" charset="-122"/>
-                <a:cs typeface="Calibri" pitchFamily="34" charset="-120"/>
-              </a:rPr>
-              <a:t>No more solute can dissolve</a:t>
-            </a:r>
-            <a:endParaRPr lang="en-US" sz="1100" dirty="0"/>
-          </a:p>
-        </p:txBody>
-      </p:sp>
-      <p:sp>
-        <p:nvSpPr>
-          <p:cNvPr id="34" name="Shape 32"/>
-          <p:cNvSpPr/>
-          <p:nvPr/>
-        </p:nvSpPr>
-        <p:spPr>
-          <a:xfrm>
-            <a:off x="4754880" y="3355848"/>
-            <a:ext cx="3657600" cy="658368"/>
-          </a:xfrm>
-          <a:prstGeom prst="rect">
-            <a:avLst/>
-          </a:prstGeom>
-          <a:solidFill>
-            <a:srgbClr val="FFFFFF"/>
-          </a:solidFill>
-          <a:ln/>
-          <a:effectLst>
-            <a:outerShdw sx="100000" sy="100000" kx="0" ky="0" algn="bl" rotWithShape="0" blurRad="50800" dist="25400" dir="8100000">
-              <a:srgbClr val="000000">
-                <a:alpha val="10000"/>
-              </a:srgbClr>
-            </a:outerShdw>
-          </a:effectLst>
-        </p:spPr>
-      </p:sp>
-      <p:sp>
-        <p:nvSpPr>
-          <p:cNvPr id="35" name="Shape 33"/>
-          <p:cNvSpPr/>
-          <p:nvPr/>
-        </p:nvSpPr>
-        <p:spPr>
-          <a:xfrm>
-            <a:off x="4754880" y="3355848"/>
-            <a:ext cx="54864" cy="658368"/>
-          </a:xfrm>
-          <a:prstGeom prst="rect">
-            <a:avLst/>
-          </a:prstGeom>
-          <a:solidFill>
-            <a:srgbClr val="2A9D8F"/>
-          </a:solidFill>
-          <a:ln/>
-        </p:spPr>
-      </p:sp>
-      <p:sp>
-        <p:nvSpPr>
-          <p:cNvPr id="36" name="Text 34"/>
-          <p:cNvSpPr/>
-          <p:nvPr/>
-        </p:nvSpPr>
-        <p:spPr>
-          <a:xfrm>
-            <a:off x="4937760" y="3355848"/>
-            <a:ext cx="1463040" cy="658368"/>
-          </a:xfrm>
-          <a:prstGeom prst="rect">
-            <a:avLst/>
-          </a:prstGeom>
-          <a:noFill/>
-          <a:ln/>
-        </p:spPr>
-        <p:txBody>
-          <a:bodyPr wrap="square" lIns="0" tIns="0" rIns="0" bIns="0" rtlCol="0" anchor="ctr"/>
-          <a:lstStyle/>
-          <a:p>
-            <a:pPr indent="0" marL="0">
-              <a:buNone/>
-            </a:pPr>
-            <a:r>
-              <a:rPr lang="en-US" sz="1300" b="1" dirty="0">
-                <a:solidFill>
-                  <a:srgbClr val="1B2A4A"/>
-                </a:solidFill>
-                <a:latin typeface="Georgia" pitchFamily="34" charset="0"/>
-                <a:ea typeface="Georgia" pitchFamily="34" charset="-122"/>
-                <a:cs typeface="Georgia" pitchFamily="34" charset="-120"/>
-              </a:rPr>
-              <a:t>Pure substance</a:t>
-            </a:r>
-            <a:endParaRPr lang="en-US" sz="1300" dirty="0"/>
-          </a:p>
-        </p:txBody>
-      </p:sp>
-      <p:sp>
-        <p:nvSpPr>
-          <p:cNvPr id="37" name="Text 35"/>
-          <p:cNvSpPr/>
-          <p:nvPr/>
-        </p:nvSpPr>
-        <p:spPr>
-          <a:xfrm>
-            <a:off x="6400800" y="3355848"/>
-            <a:ext cx="1920240" cy="658368"/>
-          </a:xfrm>
-          <a:prstGeom prst="rect">
-            <a:avLst/>
-          </a:prstGeom>
-          <a:noFill/>
-          <a:ln/>
-        </p:spPr>
-        <p:txBody>
-          <a:bodyPr wrap="square" lIns="0" tIns="0" rIns="0" bIns="0" rtlCol="0" anchor="ctr"/>
-          <a:lstStyle/>
-          <a:p>
-            <a:pPr indent="0" marL="0">
-              <a:buNone/>
-            </a:pPr>
-            <a:r>
-              <a:rPr lang="en-US" sz="1100" dirty="0">
-                <a:solidFill>
-                  <a:srgbClr val="6B6660"/>
-                </a:solidFill>
-                <a:latin typeface="Calibri" pitchFamily="34" charset="0"/>
-                <a:ea typeface="Calibri" pitchFamily="34" charset="-122"/>
-                <a:cs typeface="Calibri" pitchFamily="34" charset="-120"/>
-              </a:rPr>
-              <a:t>Contains only ONE type of particle</a:t>
+                <a:latin typeface="Arial" pitchFamily="34" charset="0"/>
+                <a:ea typeface="Arial" pitchFamily="34" charset="-122"/>
+                <a:cs typeface="Arial" pitchFamily="34" charset="-120"/>
+              </a:rPr>
+              <a:t>A substance that CANNOT dissolve — stays visible.</a:t>
             </a:r>
             <a:endParaRPr lang="en-US" sz="1100" dirty="0"/>
           </a:p>
@@ -2792,47 +2394,7 @@
         <p:spPr>
           <a:xfrm>
             <a:off x="0" y="0"/>
-            <a:ext cx="9144000" cy="822960"/>
-          </a:xfrm>
-          <a:prstGeom prst="rect">
-            <a:avLst/>
-          </a:prstGeom>
-          <a:solidFill>
-            <a:srgbClr val="FFFFFF"/>
-          </a:solidFill>
-          <a:ln/>
-        </p:spPr>
-      </p:sp>
-      <p:sp>
-        <p:nvSpPr>
-          <p:cNvPr id="3" name="Shape 1"/>
-          <p:cNvSpPr/>
-          <p:nvPr/>
-        </p:nvSpPr>
-        <p:spPr>
-          <a:xfrm>
-            <a:off x="0" y="804672"/>
-            <a:ext cx="9144000" cy="27432"/>
-          </a:xfrm>
-          <a:prstGeom prst="rect">
-            <a:avLst/>
-          </a:prstGeom>
-          <a:solidFill>
-            <a:srgbClr val="E5E2DC"/>
-          </a:solidFill>
-          <a:ln/>
-        </p:spPr>
-      </p:sp>
-      <p:sp>
-        <p:nvSpPr>
-          <p:cNvPr id="4" name="Shape 2"/>
-          <p:cNvSpPr/>
-          <p:nvPr/>
-        </p:nvSpPr>
-        <p:spPr>
-          <a:xfrm>
-            <a:off x="548640" y="201168"/>
-            <a:ext cx="54864" cy="420624"/>
+            <a:ext cx="73152" cy="5148072"/>
           </a:xfrm>
           <a:prstGeom prst="rect">
             <a:avLst/>
@@ -2845,14 +2407,14 @@
       </p:sp>
       <p:sp>
         <p:nvSpPr>
-          <p:cNvPr id="5" name="Text 3"/>
-          <p:cNvSpPr/>
-          <p:nvPr/>
-        </p:nvSpPr>
-        <p:spPr>
-          <a:xfrm>
-            <a:off x="777240" y="137160"/>
-            <a:ext cx="7772400" cy="548640"/>
+          <p:cNvPr id="3" name="Text 1"/>
+          <p:cNvSpPr/>
+          <p:nvPr/>
+        </p:nvSpPr>
+        <p:spPr>
+          <a:xfrm>
+            <a:off x="548640" y="274320"/>
+            <a:ext cx="9144000" cy="640080"/>
           </a:xfrm>
           <a:prstGeom prst="rect">
             <a:avLst/>
@@ -2861,14 +2423,14 @@
           <a:ln/>
         </p:spPr>
         <p:txBody>
-          <a:bodyPr wrap="square" lIns="0" tIns="0" rIns="0" bIns="0" rtlCol="0" anchor="ctr"/>
+          <a:bodyPr wrap="square" rtlCol="0" anchor="ctr"/>
           <a:lstStyle/>
           <a:p>
             <a:pPr indent="0" marL="0">
               <a:buNone/>
             </a:pPr>
             <a:r>
-              <a:rPr lang="en-US" sz="2000" b="1" dirty="0">
+              <a:rPr lang="en-US" sz="2400" b="1" dirty="0">
                 <a:solidFill>
                   <a:srgbClr val="1B2A4A"/>
                 </a:solidFill>
@@ -2876,49 +2438,22 @@
                 <a:ea typeface="Georgia" pitchFamily="34" charset="-122"/>
                 <a:cs typeface="Georgia" pitchFamily="34" charset="-120"/>
               </a:rPr>
-              <a:t>Pure Substances vs Mixtures</a:t>
-            </a:r>
-            <a:endParaRPr lang="en-US" sz="2000" dirty="0"/>
-          </a:p>
-        </p:txBody>
-      </p:sp>
-      <p:sp>
-        <p:nvSpPr>
-          <p:cNvPr id="6" name="Shape 4"/>
-          <p:cNvSpPr/>
-          <p:nvPr/>
-        </p:nvSpPr>
-        <p:spPr>
-          <a:xfrm>
-            <a:off x="548640" y="1051560"/>
-            <a:ext cx="3840480" cy="3474720"/>
-          </a:xfrm>
-          <a:prstGeom prst="rect">
-            <a:avLst/>
-          </a:prstGeom>
-          <a:solidFill>
-            <a:srgbClr val="FFFFFF"/>
-          </a:solidFill>
-          <a:ln/>
-          <a:effectLst>
-            <a:outerShdw sx="100000" sy="100000" kx="0" ky="0" algn="bl" rotWithShape="0" blurRad="50800" dist="25400" dir="8100000">
-              <a:srgbClr val="000000">
-                <a:alpha val="10000"/>
-              </a:srgbClr>
-            </a:outerShdw>
-          </a:effectLst>
-        </p:spPr>
-      </p:sp>
-      <p:sp>
-        <p:nvSpPr>
-          <p:cNvPr id="7" name="Shape 5"/>
-          <p:cNvSpPr/>
-          <p:nvPr/>
-        </p:nvSpPr>
-        <p:spPr>
-          <a:xfrm>
-            <a:off x="548640" y="1051560"/>
-            <a:ext cx="3840480" cy="54864"/>
+              <a:t>Mixtures vs Pure Substances</a:t>
+            </a:r>
+            <a:endParaRPr lang="en-US" sz="2400" dirty="0"/>
+          </a:p>
+        </p:txBody>
+      </p:sp>
+      <p:sp>
+        <p:nvSpPr>
+          <p:cNvPr id="4" name="Shape 2"/>
+          <p:cNvSpPr/>
+          <p:nvPr/>
+        </p:nvSpPr>
+        <p:spPr>
+          <a:xfrm>
+            <a:off x="548640" y="960120"/>
+            <a:ext cx="2286000" cy="36576"/>
           </a:xfrm>
           <a:prstGeom prst="rect">
             <a:avLst/>
@@ -2931,14 +2466,14 @@
       </p:sp>
       <p:sp>
         <p:nvSpPr>
-          <p:cNvPr id="8" name="Text 6"/>
-          <p:cNvSpPr/>
-          <p:nvPr/>
-        </p:nvSpPr>
-        <p:spPr>
-          <a:xfrm>
-            <a:off x="777240" y="1188720"/>
-            <a:ext cx="3383280" cy="457200"/>
+          <p:cNvPr id="5" name="Text 3"/>
+          <p:cNvSpPr/>
+          <p:nvPr/>
+        </p:nvSpPr>
+        <p:spPr>
+          <a:xfrm>
+            <a:off x="548640" y="1188720"/>
+            <a:ext cx="10058400" cy="3474720"/>
           </a:xfrm>
           <a:prstGeom prst="rect">
             <a:avLst/>
@@ -2947,322 +2482,117 @@
           <a:ln/>
         </p:spPr>
         <p:txBody>
-          <a:bodyPr wrap="square" lIns="0" tIns="0" rIns="0" bIns="0" rtlCol="0" anchor="ctr"/>
-          <a:lstStyle/>
-          <a:p>
-            <a:pPr indent="0" marL="0">
-              <a:buNone/>
-            </a:pPr>
-            <a:r>
-              <a:rPr lang="en-US" sz="1500" b="1" dirty="0">
-                <a:solidFill>
-                  <a:srgbClr val="1B2A4A"/>
-                </a:solidFill>
-                <a:latin typeface="Georgia" pitchFamily="34" charset="0"/>
-                <a:ea typeface="Georgia" pitchFamily="34" charset="-122"/>
-                <a:cs typeface="Georgia" pitchFamily="34" charset="-120"/>
-              </a:rPr>
-              <a:t>Pure Substance</a:t>
-            </a:r>
-            <a:endParaRPr lang="en-US" sz="1500" dirty="0"/>
-          </a:p>
-        </p:txBody>
-      </p:sp>
-      <p:sp>
-        <p:nvSpPr>
-          <p:cNvPr id="9" name="Text 7"/>
-          <p:cNvSpPr/>
-          <p:nvPr/>
-        </p:nvSpPr>
-        <p:spPr>
-          <a:xfrm>
-            <a:off x="777240" y="1691640"/>
-            <a:ext cx="3383280" cy="2651760"/>
-          </a:xfrm>
-          <a:prstGeom prst="rect">
-            <a:avLst/>
-          </a:prstGeom>
-          <a:noFill/>
-          <a:ln/>
-        </p:spPr>
-        <p:txBody>
           <a:bodyPr wrap="square" rtlCol="0" anchor="t"/>
           <a:lstStyle/>
           <a:p>
-            <a:pPr marL="342900" indent="-342900">
+            <a:pPr>
+              <a:lnSpc>
+                <a:spcPct val="150000"/>
+              </a:lnSpc>
               <a:spcAft>
                 <a:spcPts val="600"/>
               </a:spcAft>
-              <a:buSzPct val="100000"/>
-              <a:buChar char="•"/>
-            </a:pPr>
-            <a:r>
-              <a:rPr lang="en-US" sz="1300" dirty="0">
+            </a:pPr>
+            <a:r>
+              <a:rPr lang="en-US" sz="1500" dirty="0">
                 <a:solidFill>
                   <a:srgbClr val="3D3A36"/>
                 </a:solidFill>
-                <a:latin typeface="Calibri" pitchFamily="34" charset="0"/>
-                <a:ea typeface="Calibri" pitchFamily="34" charset="-122"/>
-                <a:cs typeface="Calibri" pitchFamily="34" charset="-120"/>
-              </a:rPr>
-              <a:t>Contains only ONE type of particle</a:t>
-            </a:r>
-            <a:endParaRPr lang="en-US" sz="1300" dirty="0"/>
-          </a:p>
-          <a:p>
-            <a:pPr marL="342900" indent="-342900">
+                <a:latin typeface="Arial" pitchFamily="34" charset="0"/>
+                <a:ea typeface="Arial" pitchFamily="34" charset="-122"/>
+                <a:cs typeface="Arial" pitchFamily="34" charset="-120"/>
+              </a:rPr>
+              <a:t>A pure substance has only ONE type of particle (element or compound).</a:t>
+            </a:r>
+            <a:endParaRPr lang="en-US" sz="1500" dirty="0"/>
+          </a:p>
+          <a:p>
+            <a:pPr>
+              <a:lnSpc>
+                <a:spcPct val="150000"/>
+              </a:lnSpc>
               <a:spcAft>
                 <a:spcPts val="600"/>
               </a:spcAft>
-              <a:buSzPct val="100000"/>
-              <a:buChar char="•"/>
-            </a:pPr>
-            <a:r>
-              <a:rPr lang="en-US" sz="1300" dirty="0">
+            </a:pPr>
+            <a:r>
+              <a:rPr lang="en-US" sz="1500" dirty="0">
                 <a:solidFill>
                   <a:srgbClr val="3D3A36"/>
                 </a:solidFill>
-                <a:latin typeface="Calibri" pitchFamily="34" charset="0"/>
-                <a:ea typeface="Calibri" pitchFamily="34" charset="-122"/>
-                <a:cs typeface="Calibri" pitchFamily="34" charset="-120"/>
-              </a:rPr>
-              <a:t>Has a FIXED melting and boiling point</a:t>
-            </a:r>
-            <a:endParaRPr lang="en-US" sz="1300" dirty="0"/>
-          </a:p>
-          <a:p>
-            <a:pPr marL="342900" indent="-342900">
+                <a:latin typeface="Arial" pitchFamily="34" charset="0"/>
+                <a:ea typeface="Arial" pitchFamily="34" charset="-122"/>
+                <a:cs typeface="Arial" pitchFamily="34" charset="-120"/>
+              </a:rPr>
+              <a:t>A mixture has TWO or MORE substances that are NOT chemically bonded.</a:t>
+            </a:r>
+            <a:endParaRPr lang="en-US" sz="1500" dirty="0"/>
+          </a:p>
+          <a:p>
+            <a:pPr>
+              <a:lnSpc>
+                <a:spcPct val="150000"/>
+              </a:lnSpc>
               <a:spcAft>
                 <a:spcPts val="600"/>
               </a:spcAft>
-              <a:buSzPct val="100000"/>
-              <a:buChar char="•"/>
-            </a:pPr>
-            <a:r>
-              <a:rPr lang="en-US" sz="1300" dirty="0">
+            </a:pPr>
+            <a:r>
+              <a:rPr lang="en-US" sz="1500" dirty="0">
                 <a:solidFill>
                   <a:srgbClr val="3D3A36"/>
                 </a:solidFill>
-                <a:latin typeface="Calibri" pitchFamily="34" charset="0"/>
-                <a:ea typeface="Calibri" pitchFamily="34" charset="-122"/>
-                <a:cs typeface="Calibri" pitchFamily="34" charset="-120"/>
-              </a:rPr>
-              <a:t>Examples: pure water, gold, oxygen</a:t>
-            </a:r>
-            <a:endParaRPr lang="en-US" sz="1300" dirty="0"/>
-          </a:p>
-          <a:p>
-            <a:pPr marL="342900" indent="-342900">
+                <a:latin typeface="Arial" pitchFamily="34" charset="0"/>
+                <a:ea typeface="Arial" pitchFamily="34" charset="-122"/>
+                <a:cs typeface="Arial" pitchFamily="34" charset="-120"/>
+              </a:rPr>
+              <a:t>Mixtures can be separated by physical methods (no chemical reaction).</a:t>
+            </a:r>
+            <a:endParaRPr lang="en-US" sz="1500" dirty="0"/>
+          </a:p>
+          <a:p>
+            <a:pPr>
+              <a:lnSpc>
+                <a:spcPct val="150000"/>
+              </a:lnSpc>
               <a:spcAft>
                 <a:spcPts val="600"/>
               </a:spcAft>
-              <a:buSzPct val="100000"/>
-              <a:buChar char="•"/>
-            </a:pPr>
-            <a:r>
-              <a:rPr lang="en-US" sz="1300" dirty="0">
+            </a:pPr>
+            <a:r>
+              <a:rPr lang="en-US" sz="1500" dirty="0">
                 <a:solidFill>
                   <a:srgbClr val="3D3A36"/>
                 </a:solidFill>
-                <a:latin typeface="Calibri" pitchFamily="34" charset="0"/>
-                <a:ea typeface="Calibri" pitchFamily="34" charset="-122"/>
-                <a:cs typeface="Calibri" pitchFamily="34" charset="-120"/>
-              </a:rPr>
-              <a:t>Diamond, table salt (NaCl)</a:t>
-            </a:r>
-            <a:endParaRPr lang="en-US" sz="1300" dirty="0"/>
-          </a:p>
-        </p:txBody>
-      </p:sp>
-      <p:sp>
-        <p:nvSpPr>
-          <p:cNvPr id="10" name="Shape 8"/>
-          <p:cNvSpPr/>
-          <p:nvPr/>
-        </p:nvSpPr>
-        <p:spPr>
-          <a:xfrm>
-            <a:off x="4754880" y="1051560"/>
-            <a:ext cx="3840480" cy="3474720"/>
-          </a:xfrm>
-          <a:prstGeom prst="rect">
-            <a:avLst/>
-          </a:prstGeom>
-          <a:solidFill>
-            <a:srgbClr val="FFFFFF"/>
-          </a:solidFill>
-          <a:ln/>
-          <a:effectLst>
-            <a:outerShdw sx="100000" sy="100000" kx="0" ky="0" algn="bl" rotWithShape="0" blurRad="50800" dist="25400" dir="8100000">
-              <a:srgbClr val="000000">
-                <a:alpha val="10000"/>
-              </a:srgbClr>
-            </a:outerShdw>
-          </a:effectLst>
-        </p:spPr>
-      </p:sp>
-      <p:sp>
-        <p:nvSpPr>
-          <p:cNvPr id="11" name="Shape 9"/>
-          <p:cNvSpPr/>
-          <p:nvPr/>
-        </p:nvSpPr>
-        <p:spPr>
-          <a:xfrm>
-            <a:off x="4754880" y="1051560"/>
-            <a:ext cx="3840480" cy="54864"/>
-          </a:xfrm>
-          <a:prstGeom prst="rect">
-            <a:avLst/>
-          </a:prstGeom>
-          <a:solidFill>
-            <a:srgbClr val="E9C46A"/>
-          </a:solidFill>
-          <a:ln/>
-        </p:spPr>
-      </p:sp>
-      <p:sp>
-        <p:nvSpPr>
-          <p:cNvPr id="12" name="Text 10"/>
-          <p:cNvSpPr/>
-          <p:nvPr/>
-        </p:nvSpPr>
-        <p:spPr>
-          <a:xfrm>
-            <a:off x="4983480" y="1188720"/>
-            <a:ext cx="3383280" cy="457200"/>
-          </a:xfrm>
-          <a:prstGeom prst="rect">
-            <a:avLst/>
-          </a:prstGeom>
-          <a:noFill/>
-          <a:ln/>
-        </p:spPr>
-        <p:txBody>
-          <a:bodyPr wrap="square" lIns="0" tIns="0" rIns="0" bIns="0" rtlCol="0" anchor="ctr"/>
-          <a:lstStyle/>
-          <a:p>
-            <a:pPr indent="0" marL="0">
-              <a:buNone/>
-            </a:pPr>
-            <a:r>
-              <a:rPr lang="en-US" sz="1500" b="1" dirty="0">
-                <a:solidFill>
-                  <a:srgbClr val="1B2A4A"/>
-                </a:solidFill>
-                <a:latin typeface="Georgia" pitchFamily="34" charset="0"/>
-                <a:ea typeface="Georgia" pitchFamily="34" charset="-122"/>
-                <a:cs typeface="Georgia" pitchFamily="34" charset="-120"/>
-              </a:rPr>
-              <a:t>Mixture</a:t>
+                <a:latin typeface="Arial" pitchFamily="34" charset="0"/>
+                <a:ea typeface="Arial" pitchFamily="34" charset="-122"/>
+                <a:cs typeface="Arial" pitchFamily="34" charset="-120"/>
+              </a:rPr>
+              <a:t>The components of a mixture keep their own properties.</a:t>
             </a:r>
             <a:endParaRPr lang="en-US" sz="1500" dirty="0"/>
           </a:p>
-        </p:txBody>
-      </p:sp>
-      <p:sp>
-        <p:nvSpPr>
-          <p:cNvPr id="13" name="Text 11"/>
-          <p:cNvSpPr/>
-          <p:nvPr/>
-        </p:nvSpPr>
-        <p:spPr>
-          <a:xfrm>
-            <a:off x="4983480" y="1691640"/>
-            <a:ext cx="3383280" cy="2651760"/>
-          </a:xfrm>
-          <a:prstGeom prst="rect">
-            <a:avLst/>
-          </a:prstGeom>
-          <a:noFill/>
-          <a:ln/>
-        </p:spPr>
-        <p:txBody>
-          <a:bodyPr wrap="square" rtlCol="0" anchor="t"/>
-          <a:lstStyle/>
-          <a:p>
-            <a:pPr marL="342900" indent="-342900">
+          <a:p>
+            <a:pPr>
+              <a:lnSpc>
+                <a:spcPct val="150000"/>
+              </a:lnSpc>
               <a:spcAft>
                 <a:spcPts val="600"/>
               </a:spcAft>
-              <a:buSzPct val="100000"/>
-              <a:buChar char="•"/>
-            </a:pPr>
-            <a:r>
-              <a:rPr lang="en-US" sz="1300" dirty="0">
+            </a:pPr>
+            <a:r>
+              <a:rPr lang="en-US" sz="1500" dirty="0">
                 <a:solidFill>
                   <a:srgbClr val="3D3A36"/>
                 </a:solidFill>
-                <a:latin typeface="Calibri" pitchFamily="34" charset="0"/>
-                <a:ea typeface="Calibri" pitchFamily="34" charset="-122"/>
-                <a:cs typeface="Calibri" pitchFamily="34" charset="-120"/>
-              </a:rPr>
-              <a:t>Contains TWO or MORE types of particle</a:t>
-            </a:r>
-            <a:endParaRPr lang="en-US" sz="1300" dirty="0"/>
-          </a:p>
-          <a:p>
-            <a:pPr marL="342900" indent="-342900">
-              <a:spcAft>
-                <a:spcPts val="600"/>
-              </a:spcAft>
-              <a:buSzPct val="100000"/>
-              <a:buChar char="•"/>
-            </a:pPr>
-            <a:r>
-              <a:rPr lang="en-US" sz="1300" dirty="0">
-                <a:solidFill>
-                  <a:srgbClr val="3D3A36"/>
-                </a:solidFill>
-                <a:latin typeface="Calibri" pitchFamily="34" charset="0"/>
-                <a:ea typeface="Calibri" pitchFamily="34" charset="-122"/>
-                <a:cs typeface="Calibri" pitchFamily="34" charset="-120"/>
-              </a:rPr>
-              <a:t>Melting/boiling point varies</a:t>
-            </a:r>
-            <a:endParaRPr lang="en-US" sz="1300" dirty="0"/>
-          </a:p>
-          <a:p>
-            <a:pPr marL="342900" indent="-342900">
-              <a:spcAft>
-                <a:spcPts val="600"/>
-              </a:spcAft>
-              <a:buSzPct val="100000"/>
-              <a:buChar char="•"/>
-            </a:pPr>
-            <a:r>
-              <a:rPr lang="en-US" sz="1300" dirty="0">
-                <a:solidFill>
-                  <a:srgbClr val="3D3A36"/>
-                </a:solidFill>
-                <a:latin typeface="Calibri" pitchFamily="34" charset="0"/>
-                <a:ea typeface="Calibri" pitchFamily="34" charset="-122"/>
-                <a:cs typeface="Calibri" pitchFamily="34" charset="-120"/>
-              </a:rPr>
-              <a:t>Examples: air, salt water, sand + iron</a:t>
-            </a:r>
-            <a:endParaRPr lang="en-US" sz="1300" dirty="0"/>
-          </a:p>
-          <a:p>
-            <a:pPr marL="342900" indent="-342900">
-              <a:spcAft>
-                <a:spcPts val="600"/>
-              </a:spcAft>
-              <a:buSzPct val="100000"/>
-              <a:buChar char="•"/>
-            </a:pPr>
-            <a:r>
-              <a:rPr lang="en-US" sz="1300" dirty="0">
-                <a:solidFill>
-                  <a:srgbClr val="3D3A36"/>
-                </a:solidFill>
-                <a:latin typeface="Calibri" pitchFamily="34" charset="0"/>
-                <a:ea typeface="Calibri" pitchFamily="34" charset="-122"/>
-                <a:cs typeface="Calibri" pitchFamily="34" charset="-120"/>
-              </a:rPr>
-              <a:t>Components keep their own properties</a:t>
-            </a:r>
-            <a:endParaRPr lang="en-US" sz="1300" dirty="0"/>
+                <a:latin typeface="Arial" pitchFamily="34" charset="0"/>
+                <a:ea typeface="Arial" pitchFamily="34" charset="-122"/>
+                <a:cs typeface="Arial" pitchFamily="34" charset="-120"/>
+              </a:rPr>
+              <a:t>Examples: air (N₂ + O₂), salt water, sand + iron filings.</a:t>
+            </a:r>
+            <a:endParaRPr lang="en-US" sz="1500" dirty="0"/>
           </a:p>
         </p:txBody>
       </p:sp>
@@ -3307,67 +2637,113 @@
         <p:spPr>
           <a:xfrm>
             <a:off x="0" y="0"/>
-            <a:ext cx="9144000" cy="822960"/>
-          </a:xfrm>
-          <a:prstGeom prst="rect">
-            <a:avLst/>
+            <a:ext cx="73152" cy="5148072"/>
+          </a:xfrm>
+          <a:prstGeom prst="rect">
+            <a:avLst/>
+          </a:prstGeom>
+          <a:solidFill>
+            <a:srgbClr val="2A9D8F"/>
+          </a:solidFill>
+          <a:ln/>
+        </p:spPr>
+      </p:sp>
+      <p:sp>
+        <p:nvSpPr>
+          <p:cNvPr id="3" name="Text 1"/>
+          <p:cNvSpPr/>
+          <p:nvPr/>
+        </p:nvSpPr>
+        <p:spPr>
+          <a:xfrm>
+            <a:off x="548640" y="274320"/>
+            <a:ext cx="9144000" cy="640080"/>
+          </a:xfrm>
+          <a:prstGeom prst="rect">
+            <a:avLst/>
+          </a:prstGeom>
+          <a:noFill/>
+          <a:ln/>
+        </p:spPr>
+        <p:txBody>
+          <a:bodyPr wrap="square" rtlCol="0" anchor="ctr"/>
+          <a:lstStyle/>
+          <a:p>
+            <a:pPr indent="0" marL="0">
+              <a:buNone/>
+            </a:pPr>
+            <a:r>
+              <a:rPr lang="en-US" sz="2400" b="1" dirty="0">
+                <a:solidFill>
+                  <a:srgbClr val="1B2A4A"/>
+                </a:solidFill>
+                <a:latin typeface="Georgia" pitchFamily="34" charset="0"/>
+                <a:ea typeface="Georgia" pitchFamily="34" charset="-122"/>
+                <a:cs typeface="Georgia" pitchFamily="34" charset="-120"/>
+              </a:rPr>
+              <a:t>Soluble vs Insoluble</a:t>
+            </a:r>
+            <a:endParaRPr lang="en-US" sz="2400" dirty="0"/>
+          </a:p>
+        </p:txBody>
+      </p:sp>
+      <p:sp>
+        <p:nvSpPr>
+          <p:cNvPr id="4" name="Shape 2"/>
+          <p:cNvSpPr/>
+          <p:nvPr/>
+        </p:nvSpPr>
+        <p:spPr>
+          <a:xfrm>
+            <a:off x="548640" y="960120"/>
+            <a:ext cx="2286000" cy="36576"/>
+          </a:xfrm>
+          <a:prstGeom prst="rect">
+            <a:avLst/>
+          </a:prstGeom>
+          <a:solidFill>
+            <a:srgbClr val="2A9D8F"/>
+          </a:solidFill>
+          <a:ln/>
+        </p:spPr>
+      </p:sp>
+      <p:sp>
+        <p:nvSpPr>
+          <p:cNvPr id="5" name="Shape 3"/>
+          <p:cNvSpPr/>
+          <p:nvPr/>
+        </p:nvSpPr>
+        <p:spPr>
+          <a:xfrm>
+            <a:off x="548640" y="1188720"/>
+            <a:ext cx="5029200" cy="3474720"/>
+          </a:xfrm>
+          <a:prstGeom prst="roundRect">
+            <a:avLst>
+              <a:gd name="adj" fmla="val 3158"/>
+            </a:avLst>
           </a:prstGeom>
           <a:solidFill>
             <a:srgbClr val="FFFFFF"/>
           </a:solidFill>
-          <a:ln/>
-        </p:spPr>
-      </p:sp>
-      <p:sp>
-        <p:nvSpPr>
-          <p:cNvPr id="3" name="Shape 1"/>
-          <p:cNvSpPr/>
-          <p:nvPr/>
-        </p:nvSpPr>
-        <p:spPr>
-          <a:xfrm>
-            <a:off x="0" y="804672"/>
-            <a:ext cx="9144000" cy="27432"/>
-          </a:xfrm>
-          <a:prstGeom prst="rect">
-            <a:avLst/>
-          </a:prstGeom>
-          <a:solidFill>
-            <a:srgbClr val="E5E2DC"/>
-          </a:solidFill>
-          <a:ln/>
-        </p:spPr>
-      </p:sp>
-      <p:sp>
-        <p:nvSpPr>
-          <p:cNvPr id="4" name="Shape 2"/>
-          <p:cNvSpPr/>
-          <p:nvPr/>
-        </p:nvSpPr>
-        <p:spPr>
-          <a:xfrm>
-            <a:off x="548640" y="201168"/>
-            <a:ext cx="54864" cy="420624"/>
-          </a:xfrm>
-          <a:prstGeom prst="rect">
-            <a:avLst/>
-          </a:prstGeom>
-          <a:solidFill>
-            <a:srgbClr val="2A9D8F"/>
-          </a:solidFill>
-          <a:ln/>
-        </p:spPr>
-      </p:sp>
-      <p:sp>
-        <p:nvSpPr>
-          <p:cNvPr id="5" name="Text 3"/>
-          <p:cNvSpPr/>
-          <p:nvPr/>
-        </p:nvSpPr>
-        <p:spPr>
-          <a:xfrm>
-            <a:off x="777240" y="137160"/>
-            <a:ext cx="7772400" cy="548640"/>
+          <a:ln w="9525">
+            <a:solidFill>
+              <a:srgbClr val="E5E2DC"/>
+            </a:solidFill>
+            <a:prstDash val="solid"/>
+          </a:ln>
+        </p:spPr>
+      </p:sp>
+      <p:sp>
+        <p:nvSpPr>
+          <p:cNvPr id="6" name="Text 4"/>
+          <p:cNvSpPr/>
+          <p:nvPr/>
+        </p:nvSpPr>
+        <p:spPr>
+          <a:xfrm>
+            <a:off x="777240" y="1325880"/>
+            <a:ext cx="4572000" cy="365760"/>
           </a:xfrm>
           <a:prstGeom prst="rect">
             <a:avLst/>
@@ -3376,37 +2752,37 @@
           <a:ln/>
         </p:spPr>
         <p:txBody>
-          <a:bodyPr wrap="square" lIns="0" tIns="0" rIns="0" bIns="0" rtlCol="0" anchor="ctr"/>
+          <a:bodyPr wrap="square" rtlCol="0" anchor="ctr"/>
           <a:lstStyle/>
           <a:p>
             <a:pPr indent="0" marL="0">
               <a:buNone/>
             </a:pPr>
             <a:r>
-              <a:rPr lang="en-US" sz="2000" b="1" dirty="0">
-                <a:solidFill>
-                  <a:srgbClr val="1B2A4A"/>
+              <a:rPr lang="en-US" sz="1500" b="1" dirty="0">
+                <a:solidFill>
+                  <a:srgbClr val="2A9D8F"/>
                 </a:solidFill>
                 <a:latin typeface="Georgia" pitchFamily="34" charset="0"/>
                 <a:ea typeface="Georgia" pitchFamily="34" charset="-122"/>
                 <a:cs typeface="Georgia" pitchFamily="34" charset="-120"/>
               </a:rPr>
-              <a:t>Solutions — Dissolving Explained</a:t>
-            </a:r>
-            <a:endParaRPr lang="en-US" sz="2000" dirty="0"/>
-          </a:p>
-        </p:txBody>
-      </p:sp>
-      <p:sp>
-        <p:nvSpPr>
-          <p:cNvPr id="6" name="Text 4"/>
-          <p:cNvSpPr/>
-          <p:nvPr/>
-        </p:nvSpPr>
-        <p:spPr>
-          <a:xfrm>
-            <a:off x="731520" y="1051560"/>
-            <a:ext cx="7680960" cy="3108960"/>
+              <a:t>Soluble (dissolves)</a:t>
+            </a:r>
+            <a:endParaRPr lang="en-US" sz="1500" dirty="0"/>
+          </a:p>
+        </p:txBody>
+      </p:sp>
+      <p:sp>
+        <p:nvSpPr>
+          <p:cNvPr id="7" name="Text 5"/>
+          <p:cNvSpPr/>
+          <p:nvPr/>
+        </p:nvSpPr>
+        <p:spPr>
+          <a:xfrm>
+            <a:off x="777240" y="1783080"/>
+            <a:ext cx="4572000" cy="2651760"/>
           </a:xfrm>
           <a:prstGeom prst="rect">
             <a:avLst/>
@@ -3418,149 +2794,132 @@
           <a:bodyPr wrap="square" rtlCol="0" anchor="t"/>
           <a:lstStyle/>
           <a:p>
-            <a:pPr marL="342900" indent="-342900">
+            <a:pPr>
+              <a:lnSpc>
+                <a:spcPct val="140000"/>
+              </a:lnSpc>
               <a:spcAft>
-                <a:spcPts val="800"/>
+                <a:spcPts val="400"/>
               </a:spcAft>
-              <a:buSzPct val="100000"/>
-              <a:buChar char="•"/>
-            </a:pPr>
-            <a:r>
-              <a:rPr lang="en-US" sz="1500" dirty="0">
+            </a:pPr>
+            <a:r>
+              <a:rPr lang="en-US" sz="1300" dirty="0">
                 <a:solidFill>
                   <a:srgbClr val="3D3A36"/>
                 </a:solidFill>
-                <a:latin typeface="Calibri" pitchFamily="34" charset="0"/>
-                <a:ea typeface="Calibri" pitchFamily="34" charset="-122"/>
-                <a:cs typeface="Calibri" pitchFamily="34" charset="-120"/>
-              </a:rPr>
-              <a:t>When sugar dissolves in water: sugar = SOLUTE, water = SOLVENT.</a:t>
-            </a:r>
-            <a:endParaRPr lang="en-US" sz="1500" dirty="0"/>
-          </a:p>
-          <a:p>
-            <a:pPr marL="342900" indent="-342900">
+                <a:latin typeface="Arial" pitchFamily="34" charset="0"/>
+                <a:ea typeface="Arial" pitchFamily="34" charset="-122"/>
+                <a:cs typeface="Arial" pitchFamily="34" charset="-120"/>
+              </a:rPr>
+              <a:t>Sugar in water → clear solution.</a:t>
+            </a:r>
+            <a:endParaRPr lang="en-US" sz="1300" dirty="0"/>
+          </a:p>
+          <a:p>
+            <a:pPr>
+              <a:lnSpc>
+                <a:spcPct val="140000"/>
+              </a:lnSpc>
               <a:spcAft>
-                <a:spcPts val="800"/>
+                <a:spcPts val="400"/>
               </a:spcAft>
-              <a:buSzPct val="100000"/>
-              <a:buChar char="•"/>
-            </a:pPr>
-            <a:r>
-              <a:rPr lang="en-US" sz="1500" dirty="0">
+            </a:pPr>
+            <a:r>
+              <a:rPr lang="en-US" sz="1300" dirty="0">
                 <a:solidFill>
                   <a:srgbClr val="3D3A36"/>
                 </a:solidFill>
-                <a:latin typeface="Calibri" pitchFamily="34" charset="0"/>
-                <a:ea typeface="Calibri" pitchFamily="34" charset="-122"/>
-                <a:cs typeface="Calibri" pitchFamily="34" charset="-120"/>
-              </a:rPr>
-              <a:t>The sugar particles spread evenly through the water.</a:t>
-            </a:r>
-            <a:endParaRPr lang="en-US" sz="1500" dirty="0"/>
-          </a:p>
-          <a:p>
-            <a:pPr marL="342900" indent="-342900">
+                <a:latin typeface="Arial" pitchFamily="34" charset="0"/>
+                <a:ea typeface="Arial" pitchFamily="34" charset="-122"/>
+                <a:cs typeface="Arial" pitchFamily="34" charset="-120"/>
+              </a:rPr>
+              <a:t>Salt in water → clear solution.</a:t>
+            </a:r>
+            <a:endParaRPr lang="en-US" sz="1300" dirty="0"/>
+          </a:p>
+          <a:p>
+            <a:pPr>
+              <a:lnSpc>
+                <a:spcPct val="140000"/>
+              </a:lnSpc>
               <a:spcAft>
-                <a:spcPts val="800"/>
+                <a:spcPts val="400"/>
               </a:spcAft>
-              <a:buSzPct val="100000"/>
-              <a:buChar char="•"/>
-            </a:pPr>
-            <a:r>
-              <a:rPr lang="en-US" sz="1500" dirty="0">
+            </a:pPr>
+            <a:r>
+              <a:rPr lang="en-US" sz="1300" dirty="0">
                 <a:solidFill>
                   <a:srgbClr val="3D3A36"/>
                 </a:solidFill>
-                <a:latin typeface="Calibri" pitchFamily="34" charset="0"/>
-                <a:ea typeface="Calibri" pitchFamily="34" charset="-122"/>
-                <a:cs typeface="Calibri" pitchFamily="34" charset="-120"/>
-              </a:rPr>
-              <a:t>The solution looks clear — you cannot see individual sugar particles.</a:t>
-            </a:r>
-            <a:endParaRPr lang="en-US" sz="1500" dirty="0"/>
-          </a:p>
-          <a:p>
-            <a:pPr marL="342900" indent="-342900">
+                <a:latin typeface="Arial" pitchFamily="34" charset="0"/>
+                <a:ea typeface="Arial" pitchFamily="34" charset="-122"/>
+                <a:cs typeface="Arial" pitchFamily="34" charset="-120"/>
+              </a:rPr>
+              <a:t>The particles mix evenly — you can't see them.</a:t>
+            </a:r>
+            <a:endParaRPr lang="en-US" sz="1300" dirty="0"/>
+          </a:p>
+          <a:p>
+            <a:pPr>
+              <a:lnSpc>
+                <a:spcPct val="140000"/>
+              </a:lnSpc>
               <a:spcAft>
-                <a:spcPts val="800"/>
+                <a:spcPts val="400"/>
               </a:spcAft>
-              <a:buSzPct val="100000"/>
-              <a:buChar char="•"/>
-            </a:pPr>
-            <a:r>
-              <a:rPr lang="en-US" sz="1500" dirty="0">
+            </a:pPr>
+            <a:r>
+              <a:rPr lang="en-US" sz="1300" dirty="0">
                 <a:solidFill>
                   <a:srgbClr val="3D3A36"/>
                 </a:solidFill>
-                <a:latin typeface="Calibri" pitchFamily="34" charset="0"/>
-                <a:ea typeface="Calibri" pitchFamily="34" charset="-122"/>
-                <a:cs typeface="Calibri" pitchFamily="34" charset="-120"/>
-              </a:rPr>
-              <a:t>The sugar is still there — you can taste it! It hasn't disappeared.</a:t>
-            </a:r>
-            <a:endParaRPr lang="en-US" sz="1500" dirty="0"/>
-          </a:p>
-          <a:p>
-            <a:pPr marL="342900" indent="-342900">
-              <a:spcAft>
-                <a:spcPts val="800"/>
-              </a:spcAft>
-              <a:buSzPct val="100000"/>
-              <a:buChar char="•"/>
-            </a:pPr>
-            <a:r>
-              <a:rPr lang="en-US" sz="1500" dirty="0">
-                <a:solidFill>
-                  <a:srgbClr val="3D3A36"/>
-                </a:solidFill>
-                <a:latin typeface="Calibri" pitchFamily="34" charset="0"/>
-                <a:ea typeface="Calibri" pitchFamily="34" charset="-122"/>
-                <a:cs typeface="Calibri" pitchFamily="34" charset="-120"/>
-              </a:rPr>
-              <a:t>If you add too much sugar, it stops dissolving → SATURATED solution.</a:t>
-            </a:r>
-            <a:endParaRPr lang="en-US" sz="1500" dirty="0"/>
-          </a:p>
-        </p:txBody>
-      </p:sp>
-      <p:sp>
-        <p:nvSpPr>
-          <p:cNvPr id="7" name="Shape 5"/>
-          <p:cNvSpPr/>
-          <p:nvPr/>
-        </p:nvSpPr>
-        <p:spPr>
-          <a:xfrm>
-            <a:off x="731520" y="4206240"/>
-            <a:ext cx="7680960" cy="640080"/>
-          </a:xfrm>
-          <a:prstGeom prst="rect">
-            <a:avLst/>
+                <a:latin typeface="Arial" pitchFamily="34" charset="0"/>
+                <a:ea typeface="Arial" pitchFamily="34" charset="-122"/>
+                <a:cs typeface="Arial" pitchFamily="34" charset="-120"/>
+              </a:rPr>
+              <a:t>The solution looks transparent.</a:t>
+            </a:r>
+            <a:endParaRPr lang="en-US" sz="1300" dirty="0"/>
+          </a:p>
+        </p:txBody>
+      </p:sp>
+      <p:sp>
+        <p:nvSpPr>
+          <p:cNvPr id="8" name="Shape 6"/>
+          <p:cNvSpPr/>
+          <p:nvPr/>
+        </p:nvSpPr>
+        <p:spPr>
+          <a:xfrm>
+            <a:off x="5852160" y="1188720"/>
+            <a:ext cx="5029200" cy="3474720"/>
+          </a:xfrm>
+          <a:prstGeom prst="roundRect">
+            <a:avLst>
+              <a:gd name="adj" fmla="val 3158"/>
+            </a:avLst>
           </a:prstGeom>
           <a:solidFill>
-            <a:srgbClr val="E8F5F3"/>
+            <a:srgbClr val="FFFFFF"/>
           </a:solidFill>
-          <a:ln/>
-          <a:effectLst>
-            <a:outerShdw sx="100000" sy="100000" kx="0" ky="0" algn="bl" rotWithShape="0" blurRad="50800" dist="25400" dir="8100000">
-              <a:srgbClr val="000000">
-                <a:alpha val="10000"/>
-              </a:srgbClr>
-            </a:outerShdw>
-          </a:effectLst>
-        </p:spPr>
-      </p:sp>
-      <p:sp>
-        <p:nvSpPr>
-          <p:cNvPr id="8" name="Text 6"/>
-          <p:cNvSpPr/>
-          <p:nvPr/>
-        </p:nvSpPr>
-        <p:spPr>
-          <a:xfrm>
-            <a:off x="914400" y="4251960"/>
-            <a:ext cx="7315200" cy="548640"/>
+          <a:ln w="9525">
+            <a:solidFill>
+              <a:srgbClr val="E5E2DC"/>
+            </a:solidFill>
+            <a:prstDash val="solid"/>
+          </a:ln>
+        </p:spPr>
+      </p:sp>
+      <p:sp>
+        <p:nvSpPr>
+          <p:cNvPr id="9" name="Text 7"/>
+          <p:cNvSpPr/>
+          <p:nvPr/>
+        </p:nvSpPr>
+        <p:spPr>
+          <a:xfrm>
+            <a:off x="6080760" y="1325880"/>
+            <a:ext cx="4572000" cy="365760"/>
           </a:xfrm>
           <a:prstGeom prst="rect">
             <a:avLst/>
@@ -3576,31 +2935,127 @@
               <a:buNone/>
             </a:pPr>
             <a:r>
-              <a:rPr lang="en-US" sz="1200" b="1" dirty="0">
-                <a:solidFill>
-                  <a:srgbClr val="2A9D8F"/>
-                </a:solidFill>
-                <a:latin typeface="Calibri" pitchFamily="34" charset="0"/>
-                <a:ea typeface="Calibri" pitchFamily="34" charset="-122"/>
-                <a:cs typeface="Calibri" pitchFamily="34" charset="-120"/>
-              </a:rPr>
-              <a:t>Key Idea: </a:t>
-            </a:r>
-            <a:pPr indent="0" marL="0">
-              <a:buNone/>
-            </a:pPr>
-            <a:r>
-              <a:rPr lang="en-US" sz="1200" i="1" dirty="0">
+              <a:rPr lang="en-US" sz="1500" b="1" dirty="0">
+                <a:solidFill>
+                  <a:srgbClr val="E9C46A"/>
+                </a:solidFill>
+                <a:latin typeface="Georgia" pitchFamily="34" charset="0"/>
+                <a:ea typeface="Georgia" pitchFamily="34" charset="-122"/>
+                <a:cs typeface="Georgia" pitchFamily="34" charset="-120"/>
+              </a:rPr>
+              <a:t>Insoluble (doesn't dissolve)</a:t>
+            </a:r>
+            <a:endParaRPr lang="en-US" sz="1500" dirty="0"/>
+          </a:p>
+        </p:txBody>
+      </p:sp>
+      <p:sp>
+        <p:nvSpPr>
+          <p:cNvPr id="10" name="Text 8"/>
+          <p:cNvSpPr/>
+          <p:nvPr/>
+        </p:nvSpPr>
+        <p:spPr>
+          <a:xfrm>
+            <a:off x="6080760" y="1783080"/>
+            <a:ext cx="4572000" cy="2651760"/>
+          </a:xfrm>
+          <a:prstGeom prst="rect">
+            <a:avLst/>
+          </a:prstGeom>
+          <a:noFill/>
+          <a:ln/>
+        </p:spPr>
+        <p:txBody>
+          <a:bodyPr wrap="square" rtlCol="0" anchor="t"/>
+          <a:lstStyle/>
+          <a:p>
+            <a:pPr>
+              <a:lnSpc>
+                <a:spcPct val="140000"/>
+              </a:lnSpc>
+              <a:spcAft>
+                <a:spcPts val="400"/>
+              </a:spcAft>
+            </a:pPr>
+            <a:r>
+              <a:rPr lang="en-US" sz="1300" dirty="0">
                 <a:solidFill>
                   <a:srgbClr val="3D3A36"/>
                 </a:solidFill>
-                <a:latin typeface="Calibri" pitchFamily="34" charset="0"/>
-                <a:ea typeface="Calibri" pitchFamily="34" charset="-122"/>
-                <a:cs typeface="Calibri" pitchFamily="34" charset="-120"/>
-              </a:rPr>
-              <a:t>Dissolving is a physical change — you can get the sugar back by evaporating the water.</a:t>
-            </a:r>
-            <a:endParaRPr lang="en-US" sz="1200" dirty="0"/>
+                <a:latin typeface="Arial" pitchFamily="34" charset="0"/>
+                <a:ea typeface="Arial" pitchFamily="34" charset="-122"/>
+                <a:cs typeface="Arial" pitchFamily="34" charset="-120"/>
+              </a:rPr>
+              <a:t>Sand in water → stays gritty.</a:t>
+            </a:r>
+            <a:endParaRPr lang="en-US" sz="1300" dirty="0"/>
+          </a:p>
+          <a:p>
+            <a:pPr>
+              <a:lnSpc>
+                <a:spcPct val="140000"/>
+              </a:lnSpc>
+              <a:spcAft>
+                <a:spcPts val="400"/>
+              </a:spcAft>
+            </a:pPr>
+            <a:r>
+              <a:rPr lang="en-US" sz="1300" dirty="0">
+                <a:solidFill>
+                  <a:srgbClr val="3D3A36"/>
+                </a:solidFill>
+                <a:latin typeface="Arial" pitchFamily="34" charset="0"/>
+                <a:ea typeface="Arial" pitchFamily="34" charset="-122"/>
+                <a:cs typeface="Arial" pitchFamily="34" charset="-120"/>
+              </a:rPr>
+              <a:t>Chalk in water → cloudy/milky.</a:t>
+            </a:r>
+            <a:endParaRPr lang="en-US" sz="1300" dirty="0"/>
+          </a:p>
+          <a:p>
+            <a:pPr>
+              <a:lnSpc>
+                <a:spcPct val="140000"/>
+              </a:lnSpc>
+              <a:spcAft>
+                <a:spcPts val="400"/>
+              </a:spcAft>
+            </a:pPr>
+            <a:r>
+              <a:rPr lang="en-US" sz="1300" dirty="0">
+                <a:solidFill>
+                  <a:srgbClr val="3D3A36"/>
+                </a:solidFill>
+                <a:latin typeface="Arial" pitchFamily="34" charset="0"/>
+                <a:ea typeface="Arial" pitchFamily="34" charset="-122"/>
+                <a:cs typeface="Arial" pitchFamily="34" charset="-120"/>
+              </a:rPr>
+              <a:t>The particles don't mix — they settle.</a:t>
+            </a:r>
+            <a:endParaRPr lang="en-US" sz="1300" dirty="0"/>
+          </a:p>
+          <a:p>
+            <a:pPr>
+              <a:lnSpc>
+                <a:spcPct val="140000"/>
+              </a:lnSpc>
+              <a:spcAft>
+                <a:spcPts val="400"/>
+              </a:spcAft>
+            </a:pPr>
+            <a:r>
+              <a:rPr lang="en-US" sz="1300" dirty="0">
+                <a:solidFill>
+                  <a:srgbClr val="3D3A36"/>
+                </a:solidFill>
+                <a:latin typeface="Arial" pitchFamily="34" charset="0"/>
+                <a:ea typeface="Arial" pitchFamily="34" charset="-122"/>
+                <a:cs typeface="Arial" pitchFamily="34" charset="-120"/>
+              </a:rPr>
+              <a:t>Can be separated by filtering.</a:t>
+            </a:r>
+            <a:endParaRPr lang="en-US" sz="1300" dirty="0"/>
           </a:p>
         </p:txBody>
       </p:sp>
@@ -3645,47 +3100,7 @@
         <p:spPr>
           <a:xfrm>
             <a:off x="0" y="0"/>
-            <a:ext cx="9144000" cy="822960"/>
-          </a:xfrm>
-          <a:prstGeom prst="rect">
-            <a:avLst/>
-          </a:prstGeom>
-          <a:solidFill>
-            <a:srgbClr val="FFFFFF"/>
-          </a:solidFill>
-          <a:ln/>
-        </p:spPr>
-      </p:sp>
-      <p:sp>
-        <p:nvSpPr>
-          <p:cNvPr id="3" name="Shape 1"/>
-          <p:cNvSpPr/>
-          <p:nvPr/>
-        </p:nvSpPr>
-        <p:spPr>
-          <a:xfrm>
-            <a:off x="0" y="804672"/>
-            <a:ext cx="9144000" cy="27432"/>
-          </a:xfrm>
-          <a:prstGeom prst="rect">
-            <a:avLst/>
-          </a:prstGeom>
-          <a:solidFill>
-            <a:srgbClr val="E5E2DC"/>
-          </a:solidFill>
-          <a:ln/>
-        </p:spPr>
-      </p:sp>
-      <p:sp>
-        <p:nvSpPr>
-          <p:cNvPr id="4" name="Shape 2"/>
-          <p:cNvSpPr/>
-          <p:nvPr/>
-        </p:nvSpPr>
-        <p:spPr>
-          <a:xfrm>
-            <a:off x="548640" y="201168"/>
-            <a:ext cx="54864" cy="420624"/>
+            <a:ext cx="73152" cy="5148072"/>
           </a:xfrm>
           <a:prstGeom prst="rect">
             <a:avLst/>
@@ -3698,14 +3113,14 @@
       </p:sp>
       <p:sp>
         <p:nvSpPr>
-          <p:cNvPr id="5" name="Text 3"/>
-          <p:cNvSpPr/>
-          <p:nvPr/>
-        </p:nvSpPr>
-        <p:spPr>
-          <a:xfrm>
-            <a:off x="777240" y="137160"/>
-            <a:ext cx="7772400" cy="548640"/>
+          <p:cNvPr id="3" name="Text 1"/>
+          <p:cNvSpPr/>
+          <p:nvPr/>
+        </p:nvSpPr>
+        <p:spPr>
+          <a:xfrm>
+            <a:off x="548640" y="274320"/>
+            <a:ext cx="9144000" cy="640080"/>
           </a:xfrm>
           <a:prstGeom prst="rect">
             <a:avLst/>
@@ -3714,14 +3129,14 @@
           <a:ln/>
         </p:spPr>
         <p:txBody>
-          <a:bodyPr wrap="square" lIns="0" tIns="0" rIns="0" bIns="0" rtlCol="0" anchor="ctr"/>
+          <a:bodyPr wrap="square" rtlCol="0" anchor="ctr"/>
           <a:lstStyle/>
           <a:p>
             <a:pPr indent="0" marL="0">
               <a:buNone/>
             </a:pPr>
             <a:r>
-              <a:rPr lang="en-US" sz="2000" b="1" dirty="0">
+              <a:rPr lang="en-US" sz="2400" b="1" dirty="0">
                 <a:solidFill>
                   <a:srgbClr val="1B2A4A"/>
                 </a:solidFill>
@@ -3729,22 +3144,42 @@
                 <a:ea typeface="Georgia" pitchFamily="34" charset="-122"/>
                 <a:cs typeface="Georgia" pitchFamily="34" charset="-120"/>
               </a:rPr>
-              <a:t>Factors That Affect Dissolving Speed</a:t>
-            </a:r>
-            <a:endParaRPr lang="en-US" sz="2000" dirty="0"/>
-          </a:p>
-        </p:txBody>
-      </p:sp>
-      <p:sp>
-        <p:nvSpPr>
-          <p:cNvPr id="6" name="Text 4"/>
-          <p:cNvSpPr/>
-          <p:nvPr/>
-        </p:nvSpPr>
-        <p:spPr>
-          <a:xfrm>
-            <a:off x="731520" y="1051560"/>
-            <a:ext cx="7680960" cy="3108960"/>
+              <a:t>Factors That Affect Dissolving</a:t>
+            </a:r>
+            <a:endParaRPr lang="en-US" sz="2400" dirty="0"/>
+          </a:p>
+        </p:txBody>
+      </p:sp>
+      <p:sp>
+        <p:nvSpPr>
+          <p:cNvPr id="4" name="Shape 2"/>
+          <p:cNvSpPr/>
+          <p:nvPr/>
+        </p:nvSpPr>
+        <p:spPr>
+          <a:xfrm>
+            <a:off x="548640" y="960120"/>
+            <a:ext cx="2286000" cy="36576"/>
+          </a:xfrm>
+          <a:prstGeom prst="rect">
+            <a:avLst/>
+          </a:prstGeom>
+          <a:solidFill>
+            <a:srgbClr val="2A9D8F"/>
+          </a:solidFill>
+          <a:ln/>
+        </p:spPr>
+      </p:sp>
+      <p:sp>
+        <p:nvSpPr>
+          <p:cNvPr id="5" name="Text 3"/>
+          <p:cNvSpPr/>
+          <p:nvPr/>
+        </p:nvSpPr>
+        <p:spPr>
+          <a:xfrm>
+            <a:off x="548640" y="1188720"/>
+            <a:ext cx="10058400" cy="3474720"/>
           </a:xfrm>
           <a:prstGeom prst="rect">
             <a:avLst/>
@@ -3756,107 +3191,112 @@
           <a:bodyPr wrap="square" rtlCol="0" anchor="t"/>
           <a:lstStyle/>
           <a:p>
-            <a:pPr marL="342900" indent="-342900">
+            <a:pPr>
+              <a:lnSpc>
+                <a:spcPct val="150000"/>
+              </a:lnSpc>
               <a:spcAft>
-                <a:spcPts val="800"/>
+                <a:spcPts val="600"/>
               </a:spcAft>
-              <a:buSzPct val="100000"/>
-              <a:buChar char="•"/>
             </a:pPr>
             <a:r>
               <a:rPr lang="en-US" sz="1500" dirty="0">
                 <a:solidFill>
                   <a:srgbClr val="3D3A36"/>
                 </a:solidFill>
-                <a:latin typeface="Calibri" pitchFamily="34" charset="0"/>
-                <a:ea typeface="Calibri" pitchFamily="34" charset="-122"/>
-                <a:cs typeface="Calibri" pitchFamily="34" charset="-120"/>
-              </a:rPr>
-              <a:t>TEMPERATURE: hot water dissolves things faster (particles move faster).</a:t>
+                <a:latin typeface="Arial" pitchFamily="34" charset="0"/>
+                <a:ea typeface="Arial" pitchFamily="34" charset="-122"/>
+                <a:cs typeface="Arial" pitchFamily="34" charset="-120"/>
+              </a:rPr>
+              <a:t>Temperature: hot water dissolves substances FASTER.</a:t>
             </a:r>
             <a:endParaRPr lang="en-US" sz="1500" dirty="0"/>
           </a:p>
           <a:p>
-            <a:pPr marL="342900" indent="-342900">
+            <a:pPr>
+              <a:lnSpc>
+                <a:spcPct val="150000"/>
+              </a:lnSpc>
               <a:spcAft>
-                <a:spcPts val="800"/>
+                <a:spcPts val="600"/>
               </a:spcAft>
-              <a:buSzPct val="100000"/>
-              <a:buChar char="•"/>
             </a:pPr>
             <a:r>
               <a:rPr lang="en-US" sz="1500" dirty="0">
                 <a:solidFill>
                   <a:srgbClr val="3D3A36"/>
                 </a:solidFill>
-                <a:latin typeface="Calibri" pitchFamily="34" charset="0"/>
-                <a:ea typeface="Calibri" pitchFamily="34" charset="-122"/>
-                <a:cs typeface="Calibri" pitchFamily="34" charset="-120"/>
-              </a:rPr>
-              <a:t>STIRRING: moves fresh solvent to the solute surface.</a:t>
+                <a:latin typeface="Arial" pitchFamily="34" charset="0"/>
+                <a:ea typeface="Arial" pitchFamily="34" charset="-122"/>
+                <a:cs typeface="Arial" pitchFamily="34" charset="-120"/>
+              </a:rPr>
+              <a:t>Stirring: helps the solute spread through the solvent.</a:t>
             </a:r>
             <a:endParaRPr lang="en-US" sz="1500" dirty="0"/>
           </a:p>
           <a:p>
-            <a:pPr marL="342900" indent="-342900">
+            <a:pPr>
+              <a:lnSpc>
+                <a:spcPct val="150000"/>
+              </a:lnSpc>
               <a:spcAft>
-                <a:spcPts val="800"/>
+                <a:spcPts val="600"/>
               </a:spcAft>
-              <a:buSzPct val="100000"/>
-              <a:buChar char="•"/>
             </a:pPr>
             <a:r>
               <a:rPr lang="en-US" sz="1500" dirty="0">
                 <a:solidFill>
                   <a:srgbClr val="3D3A36"/>
                 </a:solidFill>
-                <a:latin typeface="Calibri" pitchFamily="34" charset="0"/>
-                <a:ea typeface="Calibri" pitchFamily="34" charset="-122"/>
-                <a:cs typeface="Calibri" pitchFamily="34" charset="-120"/>
-              </a:rPr>
-              <a:t>PARTICLE SIZE: smaller pieces dissolve faster (more surface area).</a:t>
+                <a:latin typeface="Arial" pitchFamily="34" charset="0"/>
+                <a:ea typeface="Arial" pitchFamily="34" charset="-122"/>
+                <a:cs typeface="Arial" pitchFamily="34" charset="-120"/>
+              </a:rPr>
+              <a:t>Particle size: smaller pieces dissolve faster (more surface area).</a:t>
             </a:r>
             <a:endParaRPr lang="en-US" sz="1500" dirty="0"/>
           </a:p>
           <a:p>
-            <a:pPr marL="342900" indent="-342900">
+            <a:pPr>
+              <a:lnSpc>
+                <a:spcPct val="150000"/>
+              </a:lnSpc>
               <a:spcAft>
-                <a:spcPts val="800"/>
+                <a:spcPts val="600"/>
               </a:spcAft>
-              <a:buSzPct val="100000"/>
-              <a:buChar char="•"/>
             </a:pPr>
             <a:r>
               <a:rPr lang="en-US" sz="1500" dirty="0">
                 <a:solidFill>
                   <a:srgbClr val="3D3A36"/>
                 </a:solidFill>
-                <a:latin typeface="Calibri" pitchFamily="34" charset="0"/>
-                <a:ea typeface="Calibri" pitchFamily="34" charset="-122"/>
-                <a:cs typeface="Calibri" pitchFamily="34" charset="-120"/>
-              </a:rPr>
-              <a:t>These factors DON'T change HOW MUCH dissolves — only how FAST.</a:t>
+                <a:latin typeface="Arial" pitchFamily="34" charset="0"/>
+                <a:ea typeface="Arial" pitchFamily="34" charset="-122"/>
+                <a:cs typeface="Arial" pitchFamily="34" charset="-120"/>
+              </a:rPr>
+              <a:t>Amount of solvent: more water = more can dissolve.</a:t>
             </a:r>
             <a:endParaRPr lang="en-US" sz="1500" dirty="0"/>
           </a:p>
           <a:p>
-            <a:pPr marL="342900" indent="-342900">
+            <a:pPr>
+              <a:lnSpc>
+                <a:spcPct val="150000"/>
+              </a:lnSpc>
               <a:spcAft>
-                <a:spcPts val="800"/>
+                <a:spcPts val="600"/>
               </a:spcAft>
-              <a:buSzPct val="100000"/>
-              <a:buChar char="•"/>
             </a:pPr>
             <a:r>
               <a:rPr lang="en-US" sz="1500" dirty="0">
                 <a:solidFill>
                   <a:srgbClr val="3D3A36"/>
                 </a:solidFill>
-                <a:latin typeface="Calibri" pitchFamily="34" charset="0"/>
-                <a:ea typeface="Calibri" pitchFamily="34" charset="-122"/>
-                <a:cs typeface="Calibri" pitchFamily="34" charset="-120"/>
-              </a:rPr>
-              <a:t>To dissolve MORE, you need a higher temperature.</a:t>
+                <a:latin typeface="Arial" pitchFamily="34" charset="0"/>
+                <a:ea typeface="Arial" pitchFamily="34" charset="-122"/>
+                <a:cs typeface="Arial" pitchFamily="34" charset="-120"/>
+              </a:rPr>
+              <a:t>Saturated solution: when no more solute can dissolve at that temperature.</a:t>
             </a:r>
             <a:endParaRPr lang="en-US" sz="1500" dirty="0"/>
           </a:p>
@@ -3903,47 +3343,7 @@
         <p:spPr>
           <a:xfrm>
             <a:off x="0" y="0"/>
-            <a:ext cx="9144000" cy="822960"/>
-          </a:xfrm>
-          <a:prstGeom prst="rect">
-            <a:avLst/>
-          </a:prstGeom>
-          <a:solidFill>
-            <a:srgbClr val="FFFFFF"/>
-          </a:solidFill>
-          <a:ln/>
-        </p:spPr>
-      </p:sp>
-      <p:sp>
-        <p:nvSpPr>
-          <p:cNvPr id="3" name="Shape 1"/>
-          <p:cNvSpPr/>
-          <p:nvPr/>
-        </p:nvSpPr>
-        <p:spPr>
-          <a:xfrm>
-            <a:off x="0" y="804672"/>
-            <a:ext cx="9144000" cy="27432"/>
-          </a:xfrm>
-          <a:prstGeom prst="rect">
-            <a:avLst/>
-          </a:prstGeom>
-          <a:solidFill>
-            <a:srgbClr val="E5E2DC"/>
-          </a:solidFill>
-          <a:ln/>
-        </p:spPr>
-      </p:sp>
-      <p:sp>
-        <p:nvSpPr>
-          <p:cNvPr id="4" name="Shape 2"/>
-          <p:cNvSpPr/>
-          <p:nvPr/>
-        </p:nvSpPr>
-        <p:spPr>
-          <a:xfrm>
-            <a:off x="548640" y="201168"/>
-            <a:ext cx="54864" cy="420624"/>
+            <a:ext cx="73152" cy="5148072"/>
           </a:xfrm>
           <a:prstGeom prst="rect">
             <a:avLst/>
@@ -3956,14 +3356,14 @@
       </p:sp>
       <p:sp>
         <p:nvSpPr>
-          <p:cNvPr id="5" name="Text 3"/>
-          <p:cNvSpPr/>
-          <p:nvPr/>
-        </p:nvSpPr>
-        <p:spPr>
-          <a:xfrm>
-            <a:off x="777240" y="137160"/>
-            <a:ext cx="7772400" cy="548640"/>
+          <p:cNvPr id="3" name="Text 1"/>
+          <p:cNvSpPr/>
+          <p:nvPr/>
+        </p:nvSpPr>
+        <p:spPr>
+          <a:xfrm>
+            <a:off x="548640" y="274320"/>
+            <a:ext cx="9144000" cy="640080"/>
           </a:xfrm>
           <a:prstGeom prst="rect">
             <a:avLst/>
@@ -3972,14 +3372,14 @@
           <a:ln/>
         </p:spPr>
         <p:txBody>
-          <a:bodyPr wrap="square" lIns="0" tIns="0" rIns="0" bIns="0" rtlCol="0" anchor="ctr"/>
+          <a:bodyPr wrap="square" rtlCol="0" anchor="ctr"/>
           <a:lstStyle/>
           <a:p>
             <a:pPr indent="0" marL="0">
               <a:buNone/>
             </a:pPr>
             <a:r>
-              <a:rPr lang="en-US" sz="2000" b="1" dirty="0">
+              <a:rPr lang="en-US" sz="2400" b="1" dirty="0">
                 <a:solidFill>
                   <a:srgbClr val="1B2A4A"/>
                 </a:solidFill>
@@ -3989,40 +3389,40 @@
               </a:rPr>
               <a:t>Check Your Understanding</a:t>
             </a:r>
-            <a:endParaRPr lang="en-US" sz="2000" dirty="0"/>
-          </a:p>
-        </p:txBody>
-      </p:sp>
-      <p:sp>
-        <p:nvSpPr>
-          <p:cNvPr id="6" name="Shape 4"/>
-          <p:cNvSpPr/>
-          <p:nvPr/>
-        </p:nvSpPr>
-        <p:spPr>
-          <a:xfrm>
-            <a:off x="731520" y="1051560"/>
-            <a:ext cx="7680960" cy="438912"/>
+            <a:endParaRPr lang="en-US" sz="2400" dirty="0"/>
+          </a:p>
+        </p:txBody>
+      </p:sp>
+      <p:sp>
+        <p:nvSpPr>
+          <p:cNvPr id="4" name="Shape 2"/>
+          <p:cNvSpPr/>
+          <p:nvPr/>
+        </p:nvSpPr>
+        <p:spPr>
+          <a:xfrm>
+            <a:off x="548640" y="960120"/>
+            <a:ext cx="2286000" cy="36576"/>
           </a:xfrm>
           <a:prstGeom prst="rect">
             <a:avLst/>
           </a:prstGeom>
           <a:solidFill>
-            <a:srgbClr val="FFFFFF"/>
+            <a:srgbClr val="2A9D8F"/>
           </a:solidFill>
           <a:ln/>
         </p:spPr>
       </p:sp>
       <p:sp>
         <p:nvSpPr>
-          <p:cNvPr id="7" name="Text 5"/>
-          <p:cNvSpPr/>
-          <p:nvPr/>
-        </p:nvSpPr>
-        <p:spPr>
-          <a:xfrm>
-            <a:off x="868680" y="1051560"/>
-            <a:ext cx="320040" cy="438912"/>
+          <p:cNvPr id="5" name="Text 3"/>
+          <p:cNvSpPr/>
+          <p:nvPr/>
+        </p:nvSpPr>
+        <p:spPr>
+          <a:xfrm>
+            <a:off x="548640" y="1188720"/>
+            <a:ext cx="365760" cy="457200"/>
           </a:xfrm>
           <a:prstGeom prst="rect">
             <a:avLst/>
@@ -4038,12 +3438,57 @@
               <a:buNone/>
             </a:pPr>
             <a:r>
+              <a:rPr lang="en-US" sz="1600" dirty="0">
+                <a:solidFill>
+                  <a:srgbClr val="2A9D8F"/>
+                </a:solidFill>
+                <a:latin typeface="Arial" pitchFamily="34" charset="0"/>
+                <a:ea typeface="Arial" pitchFamily="34" charset="-122"/>
+                <a:cs typeface="Arial" pitchFamily="34" charset="-120"/>
+              </a:rPr>
+              <a:t>☐</a:t>
+            </a:r>
+            <a:endParaRPr lang="en-US" sz="1600" dirty="0"/>
+          </a:p>
+        </p:txBody>
+      </p:sp>
+      <p:sp>
+        <p:nvSpPr>
+          <p:cNvPr id="6" name="Text 4"/>
+          <p:cNvSpPr/>
+          <p:nvPr/>
+        </p:nvSpPr>
+        <p:spPr>
+          <a:xfrm>
+            <a:off x="1005840" y="1188720"/>
+            <a:ext cx="9601200" cy="457200"/>
+          </a:xfrm>
+          <a:prstGeom prst="rect">
+            <a:avLst/>
+          </a:prstGeom>
+          <a:noFill/>
+          <a:ln/>
+        </p:spPr>
+        <p:txBody>
+          <a:bodyPr wrap="square" rtlCol="0" anchor="ctr"/>
+          <a:lstStyle/>
+          <a:p>
+            <a:pPr indent="0" marL="0">
+              <a:lnSpc>
+                <a:spcPct val="130000"/>
+              </a:lnSpc>
+              <a:buNone/>
+            </a:pPr>
+            <a:r>
               <a:rPr lang="en-US" sz="1400" dirty="0">
                 <a:solidFill>
-                  <a:srgbClr val="2A9D8F"/>
-                </a:solidFill>
-              </a:rPr>
-              <a:t>☐</a:t>
+                  <a:srgbClr val="3D3A36"/>
+                </a:solidFill>
+                <a:latin typeface="Arial" pitchFamily="34" charset="0"/>
+                <a:ea typeface="Arial" pitchFamily="34" charset="-122"/>
+                <a:cs typeface="Arial" pitchFamily="34" charset="-120"/>
+              </a:rPr>
+              <a:t>I can define mixture, solution, solute, and solvent.</a:t>
             </a:r>
             <a:endParaRPr lang="en-US" sz="1400" dirty="0"/>
           </a:p>
@@ -4051,14 +3496,14 @@
       </p:sp>
       <p:sp>
         <p:nvSpPr>
-          <p:cNvPr id="8" name="Text 6"/>
-          <p:cNvSpPr/>
-          <p:nvPr/>
-        </p:nvSpPr>
-        <p:spPr>
-          <a:xfrm>
-            <a:off x="1234440" y="1051560"/>
-            <a:ext cx="6949440" cy="438912"/>
+          <p:cNvPr id="7" name="Text 5"/>
+          <p:cNvSpPr/>
+          <p:nvPr/>
+        </p:nvSpPr>
+        <p:spPr>
+          <a:xfrm>
+            <a:off x="548640" y="1783080"/>
+            <a:ext cx="365760" cy="457200"/>
           </a:xfrm>
           <a:prstGeom prst="rect">
             <a:avLst/>
@@ -4074,50 +3519,72 @@
               <a:buNone/>
             </a:pPr>
             <a:r>
-              <a:rPr lang="en-US" sz="1300" dirty="0">
+              <a:rPr lang="en-US" sz="1600" dirty="0">
+                <a:solidFill>
+                  <a:srgbClr val="2A9D8F"/>
+                </a:solidFill>
+                <a:latin typeface="Arial" pitchFamily="34" charset="0"/>
+                <a:ea typeface="Arial" pitchFamily="34" charset="-122"/>
+                <a:cs typeface="Arial" pitchFamily="34" charset="-120"/>
+              </a:rPr>
+              <a:t>☐</a:t>
+            </a:r>
+            <a:endParaRPr lang="en-US" sz="1600" dirty="0"/>
+          </a:p>
+        </p:txBody>
+      </p:sp>
+      <p:sp>
+        <p:nvSpPr>
+          <p:cNvPr id="8" name="Text 6"/>
+          <p:cNvSpPr/>
+          <p:nvPr/>
+        </p:nvSpPr>
+        <p:spPr>
+          <a:xfrm>
+            <a:off x="1005840" y="1783080"/>
+            <a:ext cx="9601200" cy="457200"/>
+          </a:xfrm>
+          <a:prstGeom prst="rect">
+            <a:avLst/>
+          </a:prstGeom>
+          <a:noFill/>
+          <a:ln/>
+        </p:spPr>
+        <p:txBody>
+          <a:bodyPr wrap="square" rtlCol="0" anchor="ctr"/>
+          <a:lstStyle/>
+          <a:p>
+            <a:pPr indent="0" marL="0">
+              <a:lnSpc>
+                <a:spcPct val="130000"/>
+              </a:lnSpc>
+              <a:buNone/>
+            </a:pPr>
+            <a:r>
+              <a:rPr lang="en-US" sz="1400" dirty="0">
                 <a:solidFill>
                   <a:srgbClr val="3D3A36"/>
                 </a:solidFill>
-                <a:latin typeface="Calibri" pitchFamily="34" charset="0"/>
-                <a:ea typeface="Calibri" pitchFamily="34" charset="-122"/>
-                <a:cs typeface="Calibri" pitchFamily="34" charset="-120"/>
-              </a:rPr>
-              <a:t>I know the difference between a pure substance and a mixture</a:t>
-            </a:r>
-            <a:endParaRPr lang="en-US" sz="1300" dirty="0"/>
-          </a:p>
-        </p:txBody>
-      </p:sp>
-      <p:sp>
-        <p:nvSpPr>
-          <p:cNvPr id="9" name="Shape 7"/>
-          <p:cNvSpPr/>
-          <p:nvPr/>
-        </p:nvSpPr>
-        <p:spPr>
-          <a:xfrm>
-            <a:off x="731520" y="1554480"/>
-            <a:ext cx="7680960" cy="438912"/>
-          </a:xfrm>
-          <a:prstGeom prst="rect">
-            <a:avLst/>
-          </a:prstGeom>
-          <a:solidFill>
-            <a:srgbClr val="F8F6F3"/>
-          </a:solidFill>
-          <a:ln/>
-        </p:spPr>
-      </p:sp>
-      <p:sp>
-        <p:nvSpPr>
-          <p:cNvPr id="10" name="Text 8"/>
-          <p:cNvSpPr/>
-          <p:nvPr/>
-        </p:nvSpPr>
-        <p:spPr>
-          <a:xfrm>
-            <a:off x="868680" y="1554480"/>
-            <a:ext cx="320040" cy="438912"/>
+                <a:latin typeface="Arial" pitchFamily="34" charset="0"/>
+                <a:ea typeface="Arial" pitchFamily="34" charset="-122"/>
+                <a:cs typeface="Arial" pitchFamily="34" charset="-120"/>
+              </a:rPr>
+              <a:t>I can give 3 examples of mixtures.</a:t>
+            </a:r>
+            <a:endParaRPr lang="en-US" sz="1400" dirty="0"/>
+          </a:p>
+        </p:txBody>
+      </p:sp>
+      <p:sp>
+        <p:nvSpPr>
+          <p:cNvPr id="9" name="Text 7"/>
+          <p:cNvSpPr/>
+          <p:nvPr/>
+        </p:nvSpPr>
+        <p:spPr>
+          <a:xfrm>
+            <a:off x="548640" y="2377440"/>
+            <a:ext cx="365760" cy="457200"/>
           </a:xfrm>
           <a:prstGeom prst="rect">
             <a:avLst/>
@@ -4133,12 +3600,57 @@
               <a:buNone/>
             </a:pPr>
             <a:r>
+              <a:rPr lang="en-US" sz="1600" dirty="0">
+                <a:solidFill>
+                  <a:srgbClr val="2A9D8F"/>
+                </a:solidFill>
+                <a:latin typeface="Arial" pitchFamily="34" charset="0"/>
+                <a:ea typeface="Arial" pitchFamily="34" charset="-122"/>
+                <a:cs typeface="Arial" pitchFamily="34" charset="-120"/>
+              </a:rPr>
+              <a:t>☐</a:t>
+            </a:r>
+            <a:endParaRPr lang="en-US" sz="1600" dirty="0"/>
+          </a:p>
+        </p:txBody>
+      </p:sp>
+      <p:sp>
+        <p:nvSpPr>
+          <p:cNvPr id="10" name="Text 8"/>
+          <p:cNvSpPr/>
+          <p:nvPr/>
+        </p:nvSpPr>
+        <p:spPr>
+          <a:xfrm>
+            <a:off x="1005840" y="2377440"/>
+            <a:ext cx="9601200" cy="457200"/>
+          </a:xfrm>
+          <a:prstGeom prst="rect">
+            <a:avLst/>
+          </a:prstGeom>
+          <a:noFill/>
+          <a:ln/>
+        </p:spPr>
+        <p:txBody>
+          <a:bodyPr wrap="square" rtlCol="0" anchor="ctr"/>
+          <a:lstStyle/>
+          <a:p>
+            <a:pPr indent="0" marL="0">
+              <a:lnSpc>
+                <a:spcPct val="130000"/>
+              </a:lnSpc>
+              <a:buNone/>
+            </a:pPr>
+            <a:r>
               <a:rPr lang="en-US" sz="1400" dirty="0">
                 <a:solidFill>
-                  <a:srgbClr val="2A9D8F"/>
-                </a:solidFill>
-              </a:rPr>
-              <a:t>☐</a:t>
+                  <a:srgbClr val="3D3A36"/>
+                </a:solidFill>
+                <a:latin typeface="Arial" pitchFamily="34" charset="0"/>
+                <a:ea typeface="Arial" pitchFamily="34" charset="-122"/>
+                <a:cs typeface="Arial" pitchFamily="34" charset="-120"/>
+              </a:rPr>
+              <a:t>I can explain the difference between soluble and insoluble.</a:t>
             </a:r>
             <a:endParaRPr lang="en-US" sz="1400" dirty="0"/>
           </a:p>
@@ -4152,8 +3664,8 @@
         </p:nvSpPr>
         <p:spPr>
           <a:xfrm>
-            <a:off x="1234440" y="1554480"/>
-            <a:ext cx="6949440" cy="438912"/>
+            <a:off x="548640" y="2971800"/>
+            <a:ext cx="365760" cy="457200"/>
           </a:xfrm>
           <a:prstGeom prst="rect">
             <a:avLst/>
@@ -4169,382 +3681,59 @@
               <a:buNone/>
             </a:pPr>
             <a:r>
-              <a:rPr lang="en-US" sz="1300" dirty="0">
+              <a:rPr lang="en-US" sz="1600" dirty="0">
+                <a:solidFill>
+                  <a:srgbClr val="2A9D8F"/>
+                </a:solidFill>
+                <a:latin typeface="Arial" pitchFamily="34" charset="0"/>
+                <a:ea typeface="Arial" pitchFamily="34" charset="-122"/>
+                <a:cs typeface="Arial" pitchFamily="34" charset="-120"/>
+              </a:rPr>
+              <a:t>☐</a:t>
+            </a:r>
+            <a:endParaRPr lang="en-US" sz="1600" dirty="0"/>
+          </a:p>
+        </p:txBody>
+      </p:sp>
+      <p:sp>
+        <p:nvSpPr>
+          <p:cNvPr id="12" name="Text 10"/>
+          <p:cNvSpPr/>
+          <p:nvPr/>
+        </p:nvSpPr>
+        <p:spPr>
+          <a:xfrm>
+            <a:off x="1005840" y="2971800"/>
+            <a:ext cx="9601200" cy="457200"/>
+          </a:xfrm>
+          <a:prstGeom prst="rect">
+            <a:avLst/>
+          </a:prstGeom>
+          <a:noFill/>
+          <a:ln/>
+        </p:spPr>
+        <p:txBody>
+          <a:bodyPr wrap="square" rtlCol="0" anchor="ctr"/>
+          <a:lstStyle/>
+          <a:p>
+            <a:pPr indent="0" marL="0">
+              <a:lnSpc>
+                <a:spcPct val="130000"/>
+              </a:lnSpc>
+              <a:buNone/>
+            </a:pPr>
+            <a:r>
+              <a:rPr lang="en-US" sz="1400" dirty="0">
                 <a:solidFill>
                   <a:srgbClr val="3D3A36"/>
                 </a:solidFill>
-                <a:latin typeface="Calibri" pitchFamily="34" charset="0"/>
-                <a:ea typeface="Calibri" pitchFamily="34" charset="-122"/>
-                <a:cs typeface="Calibri" pitchFamily="34" charset="-120"/>
-              </a:rPr>
-              <a:t>I can define solute, solvent, and solution</a:t>
-            </a:r>
-            <a:endParaRPr lang="en-US" sz="1300" dirty="0"/>
-          </a:p>
-        </p:txBody>
-      </p:sp>
-      <p:sp>
-        <p:nvSpPr>
-          <p:cNvPr id="12" name="Shape 10"/>
-          <p:cNvSpPr/>
-          <p:nvPr/>
-        </p:nvSpPr>
-        <p:spPr>
-          <a:xfrm>
-            <a:off x="731520" y="2057400"/>
-            <a:ext cx="7680960" cy="438912"/>
-          </a:xfrm>
-          <a:prstGeom prst="rect">
-            <a:avLst/>
-          </a:prstGeom>
-          <a:solidFill>
-            <a:srgbClr val="FFFFFF"/>
-          </a:solidFill>
-          <a:ln/>
-        </p:spPr>
-      </p:sp>
-      <p:sp>
-        <p:nvSpPr>
-          <p:cNvPr id="13" name="Text 11"/>
-          <p:cNvSpPr/>
-          <p:nvPr/>
-        </p:nvSpPr>
-        <p:spPr>
-          <a:xfrm>
-            <a:off x="868680" y="2057400"/>
-            <a:ext cx="320040" cy="438912"/>
-          </a:xfrm>
-          <a:prstGeom prst="rect">
-            <a:avLst/>
-          </a:prstGeom>
-          <a:noFill/>
-          <a:ln/>
-        </p:spPr>
-        <p:txBody>
-          <a:bodyPr wrap="square" rtlCol="0" anchor="ctr"/>
-          <a:lstStyle/>
-          <a:p>
-            <a:pPr indent="0" marL="0">
-              <a:buNone/>
-            </a:pPr>
-            <a:r>
-              <a:rPr lang="en-US" sz="1400" dirty="0">
-                <a:solidFill>
-                  <a:srgbClr val="2A9D8F"/>
-                </a:solidFill>
-              </a:rPr>
-              <a:t>☐</a:t>
+                <a:latin typeface="Arial" pitchFamily="34" charset="0"/>
+                <a:ea typeface="Arial" pitchFamily="34" charset="-122"/>
+                <a:cs typeface="Arial" pitchFamily="34" charset="-120"/>
+              </a:rPr>
+              <a:t>I can list 3 factors that speed up dissolving.</a:t>
             </a:r>
             <a:endParaRPr lang="en-US" sz="1400" dirty="0"/>
-          </a:p>
-        </p:txBody>
-      </p:sp>
-      <p:sp>
-        <p:nvSpPr>
-          <p:cNvPr id="14" name="Text 12"/>
-          <p:cNvSpPr/>
-          <p:nvPr/>
-        </p:nvSpPr>
-        <p:spPr>
-          <a:xfrm>
-            <a:off x="1234440" y="2057400"/>
-            <a:ext cx="6949440" cy="438912"/>
-          </a:xfrm>
-          <a:prstGeom prst="rect">
-            <a:avLst/>
-          </a:prstGeom>
-          <a:noFill/>
-          <a:ln/>
-        </p:spPr>
-        <p:txBody>
-          <a:bodyPr wrap="square" rtlCol="0" anchor="ctr"/>
-          <a:lstStyle/>
-          <a:p>
-            <a:pPr indent="0" marL="0">
-              <a:buNone/>
-            </a:pPr>
-            <a:r>
-              <a:rPr lang="en-US" sz="1300" dirty="0">
-                <a:solidFill>
-                  <a:srgbClr val="3D3A36"/>
-                </a:solidFill>
-                <a:latin typeface="Calibri" pitchFamily="34" charset="0"/>
-                <a:ea typeface="Calibri" pitchFamily="34" charset="-122"/>
-                <a:cs typeface="Calibri" pitchFamily="34" charset="-120"/>
-              </a:rPr>
-              <a:t>I can explain what happens when something dissolves</a:t>
-            </a:r>
-            <a:endParaRPr lang="en-US" sz="1300" dirty="0"/>
-          </a:p>
-        </p:txBody>
-      </p:sp>
-      <p:sp>
-        <p:nvSpPr>
-          <p:cNvPr id="15" name="Shape 13"/>
-          <p:cNvSpPr/>
-          <p:nvPr/>
-        </p:nvSpPr>
-        <p:spPr>
-          <a:xfrm>
-            <a:off x="731520" y="2560320"/>
-            <a:ext cx="7680960" cy="438912"/>
-          </a:xfrm>
-          <a:prstGeom prst="rect">
-            <a:avLst/>
-          </a:prstGeom>
-          <a:solidFill>
-            <a:srgbClr val="F8F6F3"/>
-          </a:solidFill>
-          <a:ln/>
-        </p:spPr>
-      </p:sp>
-      <p:sp>
-        <p:nvSpPr>
-          <p:cNvPr id="16" name="Text 14"/>
-          <p:cNvSpPr/>
-          <p:nvPr/>
-        </p:nvSpPr>
-        <p:spPr>
-          <a:xfrm>
-            <a:off x="868680" y="2560320"/>
-            <a:ext cx="320040" cy="438912"/>
-          </a:xfrm>
-          <a:prstGeom prst="rect">
-            <a:avLst/>
-          </a:prstGeom>
-          <a:noFill/>
-          <a:ln/>
-        </p:spPr>
-        <p:txBody>
-          <a:bodyPr wrap="square" rtlCol="0" anchor="ctr"/>
-          <a:lstStyle/>
-          <a:p>
-            <a:pPr indent="0" marL="0">
-              <a:buNone/>
-            </a:pPr>
-            <a:r>
-              <a:rPr lang="en-US" sz="1400" dirty="0">
-                <a:solidFill>
-                  <a:srgbClr val="2A9D8F"/>
-                </a:solidFill>
-              </a:rPr>
-              <a:t>☐</a:t>
-            </a:r>
-            <a:endParaRPr lang="en-US" sz="1400" dirty="0"/>
-          </a:p>
-        </p:txBody>
-      </p:sp>
-      <p:sp>
-        <p:nvSpPr>
-          <p:cNvPr id="17" name="Text 15"/>
-          <p:cNvSpPr/>
-          <p:nvPr/>
-        </p:nvSpPr>
-        <p:spPr>
-          <a:xfrm>
-            <a:off x="1234440" y="2560320"/>
-            <a:ext cx="6949440" cy="438912"/>
-          </a:xfrm>
-          <a:prstGeom prst="rect">
-            <a:avLst/>
-          </a:prstGeom>
-          <a:noFill/>
-          <a:ln/>
-        </p:spPr>
-        <p:txBody>
-          <a:bodyPr wrap="square" rtlCol="0" anchor="ctr"/>
-          <a:lstStyle/>
-          <a:p>
-            <a:pPr indent="0" marL="0">
-              <a:buNone/>
-            </a:pPr>
-            <a:r>
-              <a:rPr lang="en-US" sz="1300" dirty="0">
-                <a:solidFill>
-                  <a:srgbClr val="3D3A36"/>
-                </a:solidFill>
-                <a:latin typeface="Calibri" pitchFamily="34" charset="0"/>
-                <a:ea typeface="Calibri" pitchFamily="34" charset="-122"/>
-                <a:cs typeface="Calibri" pitchFamily="34" charset="-120"/>
-              </a:rPr>
-              <a:t>I know what a saturated solution is</a:t>
-            </a:r>
-            <a:endParaRPr lang="en-US" sz="1300" dirty="0"/>
-          </a:p>
-        </p:txBody>
-      </p:sp>
-      <p:sp>
-        <p:nvSpPr>
-          <p:cNvPr id="18" name="Shape 16"/>
-          <p:cNvSpPr/>
-          <p:nvPr/>
-        </p:nvSpPr>
-        <p:spPr>
-          <a:xfrm>
-            <a:off x="731520" y="3063240"/>
-            <a:ext cx="7680960" cy="438912"/>
-          </a:xfrm>
-          <a:prstGeom prst="rect">
-            <a:avLst/>
-          </a:prstGeom>
-          <a:solidFill>
-            <a:srgbClr val="FFFFFF"/>
-          </a:solidFill>
-          <a:ln/>
-        </p:spPr>
-      </p:sp>
-      <p:sp>
-        <p:nvSpPr>
-          <p:cNvPr id="19" name="Text 17"/>
-          <p:cNvSpPr/>
-          <p:nvPr/>
-        </p:nvSpPr>
-        <p:spPr>
-          <a:xfrm>
-            <a:off x="868680" y="3063240"/>
-            <a:ext cx="320040" cy="438912"/>
-          </a:xfrm>
-          <a:prstGeom prst="rect">
-            <a:avLst/>
-          </a:prstGeom>
-          <a:noFill/>
-          <a:ln/>
-        </p:spPr>
-        <p:txBody>
-          <a:bodyPr wrap="square" rtlCol="0" anchor="ctr"/>
-          <a:lstStyle/>
-          <a:p>
-            <a:pPr indent="0" marL="0">
-              <a:buNone/>
-            </a:pPr>
-            <a:r>
-              <a:rPr lang="en-US" sz="1400" dirty="0">
-                <a:solidFill>
-                  <a:srgbClr val="2A9D8F"/>
-                </a:solidFill>
-              </a:rPr>
-              <a:t>☐</a:t>
-            </a:r>
-            <a:endParaRPr lang="en-US" sz="1400" dirty="0"/>
-          </a:p>
-        </p:txBody>
-      </p:sp>
-      <p:sp>
-        <p:nvSpPr>
-          <p:cNvPr id="20" name="Text 18"/>
-          <p:cNvSpPr/>
-          <p:nvPr/>
-        </p:nvSpPr>
-        <p:spPr>
-          <a:xfrm>
-            <a:off x="1234440" y="3063240"/>
-            <a:ext cx="6949440" cy="438912"/>
-          </a:xfrm>
-          <a:prstGeom prst="rect">
-            <a:avLst/>
-          </a:prstGeom>
-          <a:noFill/>
-          <a:ln/>
-        </p:spPr>
-        <p:txBody>
-          <a:bodyPr wrap="square" rtlCol="0" anchor="ctr"/>
-          <a:lstStyle/>
-          <a:p>
-            <a:pPr indent="0" marL="0">
-              <a:buNone/>
-            </a:pPr>
-            <a:r>
-              <a:rPr lang="en-US" sz="1300" dirty="0">
-                <a:solidFill>
-                  <a:srgbClr val="3D3A36"/>
-                </a:solidFill>
-                <a:latin typeface="Calibri" pitchFamily="34" charset="0"/>
-                <a:ea typeface="Calibri" pitchFamily="34" charset="-122"/>
-                <a:cs typeface="Calibri" pitchFamily="34" charset="-120"/>
-              </a:rPr>
-              <a:t>I can describe factors that affect dissolving speed</a:t>
-            </a:r>
-            <a:endParaRPr lang="en-US" sz="1300" dirty="0"/>
-          </a:p>
-        </p:txBody>
-      </p:sp>
-      <p:sp>
-        <p:nvSpPr>
-          <p:cNvPr id="21" name="Shape 19"/>
-          <p:cNvSpPr/>
-          <p:nvPr/>
-        </p:nvSpPr>
-        <p:spPr>
-          <a:xfrm>
-            <a:off x="731520" y="3749040"/>
-            <a:ext cx="7680960" cy="594360"/>
-          </a:xfrm>
-          <a:prstGeom prst="rect">
-            <a:avLst/>
-          </a:prstGeom>
-          <a:solidFill>
-            <a:srgbClr val="E8F5F3"/>
-          </a:solidFill>
-          <a:ln/>
-          <a:effectLst>
-            <a:outerShdw sx="100000" sy="100000" kx="0" ky="0" algn="bl" rotWithShape="0" blurRad="50800" dist="25400" dir="8100000">
-              <a:srgbClr val="000000">
-                <a:alpha val="10000"/>
-              </a:srgbClr>
-            </a:outerShdw>
-          </a:effectLst>
-        </p:spPr>
-      </p:sp>
-      <p:sp>
-        <p:nvSpPr>
-          <p:cNvPr id="22" name="Text 20"/>
-          <p:cNvSpPr/>
-          <p:nvPr/>
-        </p:nvSpPr>
-        <p:spPr>
-          <a:xfrm>
-            <a:off x="914400" y="3749040"/>
-            <a:ext cx="7315200" cy="594360"/>
-          </a:xfrm>
-          <a:prstGeom prst="rect">
-            <a:avLst/>
-          </a:prstGeom>
-          <a:noFill/>
-          <a:ln/>
-        </p:spPr>
-        <p:txBody>
-          <a:bodyPr wrap="square" rtlCol="0" anchor="ctr"/>
-          <a:lstStyle/>
-          <a:p>
-            <a:pPr indent="0" marL="0">
-              <a:buNone/>
-            </a:pPr>
-            <a:r>
-              <a:rPr lang="en-US" sz="1200" b="1" dirty="0">
-                <a:solidFill>
-                  <a:srgbClr val="2A9D8F"/>
-                </a:solidFill>
-                <a:latin typeface="Calibri" pitchFamily="34" charset="0"/>
-                <a:ea typeface="Calibri" pitchFamily="34" charset="-122"/>
-                <a:cs typeface="Calibri" pitchFamily="34" charset="-120"/>
-              </a:rPr>
-              <a:t>Key Idea: </a:t>
-            </a:r>
-            <a:pPr indent="0" marL="0">
-              <a:buNone/>
-            </a:pPr>
-            <a:r>
-              <a:rPr lang="en-US" sz="1200" i="1" dirty="0">
-                <a:solidFill>
-                  <a:srgbClr val="3D3A36"/>
-                </a:solidFill>
-                <a:latin typeface="Calibri" pitchFamily="34" charset="0"/>
-                <a:ea typeface="Calibri" pitchFamily="34" charset="-122"/>
-                <a:cs typeface="Calibri" pitchFamily="34" charset="-120"/>
-              </a:rPr>
-              <a:t>In a solution, the solute is still there — it has just spread evenly through the solvent.</a:t>
-            </a:r>
-            <a:endParaRPr lang="en-US" sz="1200" dirty="0"/>
           </a:p>
         </p:txBody>
       </p:sp>
@@ -4559,6 +3748,13 @@
 <file path=ppt/slides/slide7.xml><?xml version="1.0" encoding="utf-8"?>
 <p:sld xmlns:a="http://schemas.openxmlformats.org/drawingml/2006/main" xmlns:r="http://schemas.openxmlformats.org/officeDocument/2006/relationships" xmlns:p="http://schemas.openxmlformats.org/presentationml/2006/main">
   <p:cSld name="Slide 7">
+    <p:bg>
+      <p:bgPr>
+        <a:solidFill>
+          <a:srgbClr val="111D35"/>
+        </a:solidFill>
+      </p:bgPr>
+    </p:bg>
     <p:spTree>
       <p:nvGrpSpPr>
         <p:cNvPr id="1" name=""/>
@@ -4575,76 +3771,14 @@
       </p:grpSpPr>
       <p:sp>
         <p:nvSpPr>
-          <p:cNvPr id="2" name="Shape 0"/>
-          <p:cNvSpPr/>
-          <p:nvPr/>
-        </p:nvSpPr>
-        <p:spPr>
-          <a:xfrm>
-            <a:off x="0" y="0"/>
-            <a:ext cx="9144000" cy="5143500"/>
-          </a:xfrm>
-          <a:prstGeom prst="rect">
-            <a:avLst/>
-          </a:prstGeom>
-          <a:solidFill>
-            <a:srgbClr val="1B2A4A"/>
-          </a:solidFill>
-          <a:ln/>
-        </p:spPr>
-      </p:sp>
-      <p:sp>
-        <p:nvSpPr>
-          <p:cNvPr id="3" name="Shape 1"/>
-          <p:cNvSpPr/>
-          <p:nvPr/>
-        </p:nvSpPr>
-        <p:spPr>
-          <a:xfrm>
-            <a:off x="0" y="4777740"/>
-            <a:ext cx="9144000" cy="365760"/>
-          </a:xfrm>
-          <a:prstGeom prst="rect">
-            <a:avLst/>
-          </a:prstGeom>
-          <a:solidFill>
-            <a:srgbClr val="2A9D8F"/>
-          </a:solidFill>
-          <a:ln/>
-        </p:spPr>
-      </p:sp>
-      <p:sp>
-        <p:nvSpPr>
-          <p:cNvPr id="4" name="Shape 2"/>
-          <p:cNvSpPr/>
-          <p:nvPr/>
-        </p:nvSpPr>
-        <p:spPr>
-          <a:xfrm>
-            <a:off x="-914400" y="-914400"/>
-            <a:ext cx="3657600" cy="3657600"/>
-          </a:xfrm>
-          <a:prstGeom prst="ellipse">
-            <a:avLst/>
-          </a:prstGeom>
-          <a:solidFill>
-            <a:srgbClr val="2A9D8F">
-              <a:alpha val="10000"/>
-            </a:srgbClr>
-          </a:solidFill>
-          <a:ln/>
-        </p:spPr>
-      </p:sp>
-      <p:sp>
-        <p:nvSpPr>
-          <p:cNvPr id="5" name="Text 3"/>
-          <p:cNvSpPr/>
-          <p:nvPr/>
-        </p:nvSpPr>
-        <p:spPr>
-          <a:xfrm>
-            <a:off x="731520" y="1463040"/>
-            <a:ext cx="7680960" cy="822960"/>
+          <p:cNvPr id="2" name="Text 0"/>
+          <p:cNvSpPr/>
+          <p:nvPr/>
+        </p:nvSpPr>
+        <p:spPr>
+          <a:xfrm>
+            <a:off x="731520" y="1371600"/>
+            <a:ext cx="9144000" cy="914400"/>
           </a:xfrm>
           <a:prstGeom prst="rect">
             <a:avLst/>
@@ -4656,11 +3790,11 @@
           <a:bodyPr wrap="square" rtlCol="0" anchor="ctr"/>
           <a:lstStyle/>
           <a:p>
-            <a:pPr algn="ctr" indent="0" marL="0">
+            <a:pPr indent="0" marL="0">
               <a:buNone/>
             </a:pPr>
             <a:r>
-              <a:rPr lang="en-US" sz="3400" b="1" dirty="0">
+              <a:rPr lang="en-US" sz="3200" b="1" dirty="0">
                 <a:solidFill>
                   <a:srgbClr val="FFFFFF"/>
                 </a:solidFill>
@@ -4670,20 +3804,20 @@
               </a:rPr>
               <a:t>Review &amp; Practise</a:t>
             </a:r>
-            <a:endParaRPr lang="en-US" sz="3400" dirty="0"/>
-          </a:p>
-        </p:txBody>
-      </p:sp>
-      <p:sp>
-        <p:nvSpPr>
-          <p:cNvPr id="6" name="Text 4"/>
-          <p:cNvSpPr/>
-          <p:nvPr/>
-        </p:nvSpPr>
-        <p:spPr>
-          <a:xfrm>
-            <a:off x="731520" y="2468880"/>
-            <a:ext cx="7680960" cy="457200"/>
+            <a:endParaRPr lang="en-US" sz="3200" dirty="0"/>
+          </a:p>
+        </p:txBody>
+      </p:sp>
+      <p:sp>
+        <p:nvSpPr>
+          <p:cNvPr id="3" name="Text 1"/>
+          <p:cNvSpPr/>
+          <p:nvPr/>
+        </p:nvSpPr>
+        <p:spPr>
+          <a:xfrm>
+            <a:off x="731520" y="2377440"/>
+            <a:ext cx="7315200" cy="548640"/>
           </a:xfrm>
           <a:prstGeom prst="rect">
             <a:avLst/>
@@ -4695,60 +3829,62 @@
           <a:bodyPr wrap="square" rtlCol="0" anchor="ctr"/>
           <a:lstStyle/>
           <a:p>
-            <a:pPr algn="ctr" indent="0" marL="0">
+            <a:pPr indent="0" marL="0">
               <a:buNone/>
             </a:pPr>
             <a:r>
-              <a:rPr lang="en-US" sz="1800" dirty="0">
-                <a:solidFill>
-                  <a:srgbClr val="2A9D8F"/>
-                </a:solidFill>
-                <a:latin typeface="Calibri" pitchFamily="34" charset="0"/>
-                <a:ea typeface="Calibri" pitchFamily="34" charset="-122"/>
-                <a:cs typeface="Calibri" pitchFamily="34" charset="-120"/>
+              <a:rPr lang="en-US" sz="1500" dirty="0">
+                <a:solidFill>
+                  <a:srgbClr val="FFFFFF">
+                    <a:alpha val="60000"/>
+                  </a:srgbClr>
+                </a:solidFill>
+                <a:latin typeface="Arial" pitchFamily="34" charset="0"/>
+                <a:ea typeface="Arial" pitchFamily="34" charset="-122"/>
+                <a:cs typeface="Arial" pitchFamily="34" charset="-120"/>
+              </a:rPr>
+              <a:t>Use the Self-Quiz, Review Games, and Practice Builder to test yourself.</a:t>
+            </a:r>
+            <a:endParaRPr lang="en-US" sz="1500" dirty="0"/>
+          </a:p>
+        </p:txBody>
+      </p:sp>
+      <p:sp>
+        <p:nvSpPr>
+          <p:cNvPr id="4" name="Text 2"/>
+          <p:cNvSpPr/>
+          <p:nvPr/>
+        </p:nvSpPr>
+        <p:spPr>
+          <a:xfrm>
+            <a:off x="731520" y="3291840"/>
+            <a:ext cx="3657600" cy="457200"/>
+          </a:xfrm>
+          <a:prstGeom prst="rect">
+            <a:avLst/>
+          </a:prstGeom>
+          <a:noFill/>
+          <a:ln/>
+        </p:spPr>
+        <p:txBody>
+          <a:bodyPr wrap="square" rtlCol="0" anchor="ctr"/>
+          <a:lstStyle/>
+          <a:p>
+            <a:pPr indent="0" marL="0">
+              <a:buNone/>
+            </a:pPr>
+            <a:r>
+              <a:rPr lang="en-US" sz="1800" b="1" dirty="0">
+                <a:solidFill>
+                  <a:srgbClr val="E9C46A"/>
+                </a:solidFill>
+                <a:latin typeface="Georgia" pitchFamily="34" charset="0"/>
+                <a:ea typeface="Georgia" pitchFamily="34" charset="-122"/>
+                <a:cs typeface="Georgia" pitchFamily="34" charset="-120"/>
               </a:rPr>
               <a:t>mrzocchi.com</a:t>
             </a:r>
             <a:endParaRPr lang="en-US" sz="1800" dirty="0"/>
-          </a:p>
-        </p:txBody>
-      </p:sp>
-      <p:sp>
-        <p:nvSpPr>
-          <p:cNvPr id="7" name="Text 5"/>
-          <p:cNvSpPr/>
-          <p:nvPr/>
-        </p:nvSpPr>
-        <p:spPr>
-          <a:xfrm>
-            <a:off x="731520" y="3108960"/>
-            <a:ext cx="7680960" cy="457200"/>
-          </a:xfrm>
-          <a:prstGeom prst="rect">
-            <a:avLst/>
-          </a:prstGeom>
-          <a:noFill/>
-          <a:ln/>
-        </p:spPr>
-        <p:txBody>
-          <a:bodyPr wrap="square" rtlCol="0" anchor="ctr"/>
-          <a:lstStyle/>
-          <a:p>
-            <a:pPr algn="ctr" indent="0" marL="0">
-              <a:buNone/>
-            </a:pPr>
-            <a:r>
-              <a:rPr lang="en-US" sz="1300" dirty="0">
-                <a:solidFill>
-                  <a:srgbClr val="9B9690"/>
-                </a:solidFill>
-                <a:latin typeface="Calibri" pitchFamily="34" charset="0"/>
-                <a:ea typeface="Calibri" pitchFamily="34" charset="-122"/>
-                <a:cs typeface="Calibri" pitchFamily="34" charset="-120"/>
-              </a:rPr>
-              <a:t>Use the Self-Quiz, Review Games, and Practice Builder to test yourself.</a:t>
-            </a:r>
-            <a:endParaRPr lang="en-US" sz="1300" dirty="0"/>
           </a:p>
         </p:txBody>
       </p:sp>
